--- a/문대진_포트폴리오용.pptx
+++ b/문대진_포트폴리오용.pptx
@@ -2,7 +2,7 @@
 <file path=ppt/presentation.xml><?xml version="1.0" encoding="utf-8"?>
 <p:presentation xmlns:a="http://schemas.openxmlformats.org/drawingml/2006/main" xmlns:r="http://schemas.openxmlformats.org/officeDocument/2006/relationships" xmlns:p="http://schemas.openxmlformats.org/presentationml/2006/main" saveSubsetFonts="1">
   <p:sldMasterIdLst>
-    <p:sldMasterId id="2147483672" r:id="rId1"/>
+    <p:sldMasterId id="2147483708" r:id="rId1"/>
   </p:sldMasterIdLst>
   <p:handoutMasterIdLst>
     <p:handoutMasterId r:id="rId3"/>
@@ -10,7 +10,7 @@
   <p:sldIdLst>
     <p:sldId id="256" r:id="rId2"/>
   </p:sldIdLst>
-  <p:sldSz cx="6858000" cy="9906000" type="A4"/>
+  <p:sldSz cx="14257338" cy="8020050"/>
   <p:notesSz cx="6858000" cy="9144000"/>
   <p:defaultTextStyle>
     <a:defPPr>
@@ -212,7 +212,7 @@
           <a:p>
             <a:fld id="{14BE6AFD-91E3-45AD-A05A-572BFF058F8E}" type="datetimeFigureOut">
               <a:rPr lang="ko-KR" altLang="en-US" smtClean="0"/>
-              <a:t>2025-02-10</a:t>
+              <a:t>2025-05-06</a:t>
             </a:fld>
             <a:endParaRPr lang="ko-KR" altLang="en-US"/>
           </a:p>
@@ -336,15 +336,15 @@
         </p:nvSpPr>
         <p:spPr>
           <a:xfrm>
-            <a:off x="514350" y="1621191"/>
-            <a:ext cx="5829300" cy="3448756"/>
+            <a:off x="1782167" y="1312541"/>
+            <a:ext cx="10693004" cy="2792166"/>
           </a:xfrm>
         </p:spPr>
         <p:txBody>
           <a:bodyPr anchor="b"/>
           <a:lstStyle>
             <a:lvl1pPr algn="ctr">
-              <a:defRPr sz="4500"/>
+              <a:defRPr sz="7016"/>
             </a:lvl1pPr>
           </a:lstStyle>
           <a:p>
@@ -368,8 +368,8 @@
         </p:nvSpPr>
         <p:spPr>
           <a:xfrm>
-            <a:off x="857250" y="5202944"/>
-            <a:ext cx="5143500" cy="2391656"/>
+            <a:off x="1782167" y="4212383"/>
+            <a:ext cx="10693004" cy="1936322"/>
           </a:xfrm>
         </p:spPr>
         <p:txBody>
@@ -377,39 +377,39 @@
           <a:lstStyle>
             <a:lvl1pPr marL="0" indent="0" algn="ctr">
               <a:buNone/>
-              <a:defRPr sz="1800"/>
+              <a:defRPr sz="2807"/>
             </a:lvl1pPr>
-            <a:lvl2pPr marL="342900" indent="0" algn="ctr">
-              <a:buNone/>
-              <a:defRPr sz="1500"/>
+            <a:lvl2pPr marL="534650" indent="0" algn="ctr">
+              <a:buNone/>
+              <a:defRPr sz="2339"/>
             </a:lvl2pPr>
-            <a:lvl3pPr marL="685800" indent="0" algn="ctr">
-              <a:buNone/>
-              <a:defRPr sz="1350"/>
+            <a:lvl3pPr marL="1069299" indent="0" algn="ctr">
+              <a:buNone/>
+              <a:defRPr sz="2105"/>
             </a:lvl3pPr>
-            <a:lvl4pPr marL="1028700" indent="0" algn="ctr">
-              <a:buNone/>
-              <a:defRPr sz="1200"/>
+            <a:lvl4pPr marL="1603949" indent="0" algn="ctr">
+              <a:buNone/>
+              <a:defRPr sz="1871"/>
             </a:lvl4pPr>
-            <a:lvl5pPr marL="1371600" indent="0" algn="ctr">
-              <a:buNone/>
-              <a:defRPr sz="1200"/>
+            <a:lvl5pPr marL="2138599" indent="0" algn="ctr">
+              <a:buNone/>
+              <a:defRPr sz="1871"/>
             </a:lvl5pPr>
-            <a:lvl6pPr marL="1714500" indent="0" algn="ctr">
-              <a:buNone/>
-              <a:defRPr sz="1200"/>
+            <a:lvl6pPr marL="2673248" indent="0" algn="ctr">
+              <a:buNone/>
+              <a:defRPr sz="1871"/>
             </a:lvl6pPr>
-            <a:lvl7pPr marL="2057400" indent="0" algn="ctr">
-              <a:buNone/>
-              <a:defRPr sz="1200"/>
+            <a:lvl7pPr marL="3207898" indent="0" algn="ctr">
+              <a:buNone/>
+              <a:defRPr sz="1871"/>
             </a:lvl7pPr>
-            <a:lvl8pPr marL="2400300" indent="0" algn="ctr">
-              <a:buNone/>
-              <a:defRPr sz="1200"/>
+            <a:lvl8pPr marL="3742548" indent="0" algn="ctr">
+              <a:buNone/>
+              <a:defRPr sz="1871"/>
             </a:lvl8pPr>
-            <a:lvl9pPr marL="2743200" indent="0" algn="ctr">
-              <a:buNone/>
-              <a:defRPr sz="1200"/>
+            <a:lvl9pPr marL="4277197" indent="0" algn="ctr">
+              <a:buNone/>
+              <a:defRPr sz="1871"/>
             </a:lvl9pPr>
           </a:lstStyle>
           <a:p>
@@ -438,7 +438,7 @@
           <a:p>
             <a:fld id="{C6A72A79-3CD5-45FF-B4A2-CB727F17E6E3}" type="datetimeFigureOut">
               <a:rPr lang="ko-KR" altLang="en-US" smtClean="0"/>
-              <a:t>2025-02-10</a:t>
+              <a:t>2025-05-06</a:t>
             </a:fld>
             <a:endParaRPr lang="ko-KR" altLang="en-US"/>
           </a:p>
@@ -489,7 +489,7 @@
     </p:spTree>
     <p:extLst>
       <p:ext uri="{BB962C8B-B14F-4D97-AF65-F5344CB8AC3E}">
-        <p14:creationId xmlns:p14="http://schemas.microsoft.com/office/powerpoint/2010/main" val="2408570010"/>
+        <p14:creationId xmlns:p14="http://schemas.microsoft.com/office/powerpoint/2010/main" val="208511290"/>
       </p:ext>
     </p:extLst>
   </p:cSld>
@@ -608,7 +608,7 @@
           <a:p>
             <a:fld id="{C6A72A79-3CD5-45FF-B4A2-CB727F17E6E3}" type="datetimeFigureOut">
               <a:rPr lang="ko-KR" altLang="en-US" smtClean="0"/>
-              <a:t>2025-02-10</a:t>
+              <a:t>2025-05-06</a:t>
             </a:fld>
             <a:endParaRPr lang="ko-KR" altLang="en-US"/>
           </a:p>
@@ -659,7 +659,7 @@
     </p:spTree>
     <p:extLst>
       <p:ext uri="{BB962C8B-B14F-4D97-AF65-F5344CB8AC3E}">
-        <p14:creationId xmlns:p14="http://schemas.microsoft.com/office/powerpoint/2010/main" val="3847997377"/>
+        <p14:creationId xmlns:p14="http://schemas.microsoft.com/office/powerpoint/2010/main" val="1854817915"/>
       </p:ext>
     </p:extLst>
   </p:cSld>
@@ -698,8 +698,8 @@
         </p:nvSpPr>
         <p:spPr>
           <a:xfrm>
-            <a:off x="4907757" y="527403"/>
-            <a:ext cx="1478756" cy="8394877"/>
+            <a:off x="10202907" y="426993"/>
+            <a:ext cx="3074239" cy="6796622"/>
           </a:xfrm>
         </p:spPr>
         <p:txBody>
@@ -726,8 +726,8 @@
         </p:nvSpPr>
         <p:spPr>
           <a:xfrm>
-            <a:off x="471488" y="527403"/>
-            <a:ext cx="4350544" cy="8394877"/>
+            <a:off x="980192" y="426993"/>
+            <a:ext cx="9044499" cy="6796622"/>
           </a:xfrm>
         </p:spPr>
         <p:txBody>
@@ -788,7 +788,7 @@
           <a:p>
             <a:fld id="{C6A72A79-3CD5-45FF-B4A2-CB727F17E6E3}" type="datetimeFigureOut">
               <a:rPr lang="ko-KR" altLang="en-US" smtClean="0"/>
-              <a:t>2025-02-10</a:t>
+              <a:t>2025-05-06</a:t>
             </a:fld>
             <a:endParaRPr lang="ko-KR" altLang="en-US"/>
           </a:p>
@@ -839,7 +839,7 @@
     </p:spTree>
     <p:extLst>
       <p:ext uri="{BB962C8B-B14F-4D97-AF65-F5344CB8AC3E}">
-        <p14:creationId xmlns:p14="http://schemas.microsoft.com/office/powerpoint/2010/main" val="2264555726"/>
+        <p14:creationId xmlns:p14="http://schemas.microsoft.com/office/powerpoint/2010/main" val="1187032470"/>
       </p:ext>
     </p:extLst>
   </p:cSld>
@@ -958,7 +958,7 @@
           <a:p>
             <a:fld id="{C6A72A79-3CD5-45FF-B4A2-CB727F17E6E3}" type="datetimeFigureOut">
               <a:rPr lang="ko-KR" altLang="en-US" smtClean="0"/>
-              <a:t>2025-02-10</a:t>
+              <a:t>2025-05-06</a:t>
             </a:fld>
             <a:endParaRPr lang="ko-KR" altLang="en-US"/>
           </a:p>
@@ -1009,7 +1009,7 @@
     </p:spTree>
     <p:extLst>
       <p:ext uri="{BB962C8B-B14F-4D97-AF65-F5344CB8AC3E}">
-        <p14:creationId xmlns:p14="http://schemas.microsoft.com/office/powerpoint/2010/main" val="1718034951"/>
+        <p14:creationId xmlns:p14="http://schemas.microsoft.com/office/powerpoint/2010/main" val="376916082"/>
       </p:ext>
     </p:extLst>
   </p:cSld>
@@ -1048,15 +1048,15 @@
         </p:nvSpPr>
         <p:spPr>
           <a:xfrm>
-            <a:off x="467916" y="2469624"/>
-            <a:ext cx="5915025" cy="4120620"/>
+            <a:off x="972766" y="1999444"/>
+            <a:ext cx="12296954" cy="3336117"/>
           </a:xfrm>
         </p:spPr>
         <p:txBody>
           <a:bodyPr anchor="b"/>
           <a:lstStyle>
             <a:lvl1pPr>
-              <a:defRPr sz="4500"/>
+              <a:defRPr sz="7016"/>
             </a:lvl1pPr>
           </a:lstStyle>
           <a:p>
@@ -1080,8 +1080,8 @@
         </p:nvSpPr>
         <p:spPr>
           <a:xfrm>
-            <a:off x="467916" y="6629226"/>
-            <a:ext cx="5915025" cy="2166937"/>
+            <a:off x="972766" y="5367123"/>
+            <a:ext cx="12296954" cy="1754385"/>
           </a:xfrm>
         </p:spPr>
         <p:txBody>
@@ -1089,15 +1089,17 @@
           <a:lstStyle>
             <a:lvl1pPr marL="0" indent="0">
               <a:buNone/>
-              <a:defRPr sz="1800">
+              <a:defRPr sz="2807">
                 <a:solidFill>
-                  <a:schemeClr val="tx1"/>
+                  <a:schemeClr val="tx1">
+                    <a:tint val="75000"/>
+                  </a:schemeClr>
                 </a:solidFill>
               </a:defRPr>
             </a:lvl1pPr>
-            <a:lvl2pPr marL="342900" indent="0">
-              <a:buNone/>
-              <a:defRPr sz="1500">
+            <a:lvl2pPr marL="534650" indent="0">
+              <a:buNone/>
+              <a:defRPr sz="2339">
                 <a:solidFill>
                   <a:schemeClr val="tx1">
                     <a:tint val="75000"/>
@@ -1105,9 +1107,9 @@
                 </a:solidFill>
               </a:defRPr>
             </a:lvl2pPr>
-            <a:lvl3pPr marL="685800" indent="0">
-              <a:buNone/>
-              <a:defRPr sz="1350">
+            <a:lvl3pPr marL="1069299" indent="0">
+              <a:buNone/>
+              <a:defRPr sz="2105">
                 <a:solidFill>
                   <a:schemeClr val="tx1">
                     <a:tint val="75000"/>
@@ -1115,9 +1117,9 @@
                 </a:solidFill>
               </a:defRPr>
             </a:lvl3pPr>
-            <a:lvl4pPr marL="1028700" indent="0">
-              <a:buNone/>
-              <a:defRPr sz="1200">
+            <a:lvl4pPr marL="1603949" indent="0">
+              <a:buNone/>
+              <a:defRPr sz="1871">
                 <a:solidFill>
                   <a:schemeClr val="tx1">
                     <a:tint val="75000"/>
@@ -1125,9 +1127,9 @@
                 </a:solidFill>
               </a:defRPr>
             </a:lvl4pPr>
-            <a:lvl5pPr marL="1371600" indent="0">
-              <a:buNone/>
-              <a:defRPr sz="1200">
+            <a:lvl5pPr marL="2138599" indent="0">
+              <a:buNone/>
+              <a:defRPr sz="1871">
                 <a:solidFill>
                   <a:schemeClr val="tx1">
                     <a:tint val="75000"/>
@@ -1135,9 +1137,9 @@
                 </a:solidFill>
               </a:defRPr>
             </a:lvl5pPr>
-            <a:lvl6pPr marL="1714500" indent="0">
-              <a:buNone/>
-              <a:defRPr sz="1200">
+            <a:lvl6pPr marL="2673248" indent="0">
+              <a:buNone/>
+              <a:defRPr sz="1871">
                 <a:solidFill>
                   <a:schemeClr val="tx1">
                     <a:tint val="75000"/>
@@ -1145,9 +1147,9 @@
                 </a:solidFill>
               </a:defRPr>
             </a:lvl6pPr>
-            <a:lvl7pPr marL="2057400" indent="0">
-              <a:buNone/>
-              <a:defRPr sz="1200">
+            <a:lvl7pPr marL="3207898" indent="0">
+              <a:buNone/>
+              <a:defRPr sz="1871">
                 <a:solidFill>
                   <a:schemeClr val="tx1">
                     <a:tint val="75000"/>
@@ -1155,9 +1157,9 @@
                 </a:solidFill>
               </a:defRPr>
             </a:lvl7pPr>
-            <a:lvl8pPr marL="2400300" indent="0">
-              <a:buNone/>
-              <a:defRPr sz="1200">
+            <a:lvl8pPr marL="3742548" indent="0">
+              <a:buNone/>
+              <a:defRPr sz="1871">
                 <a:solidFill>
                   <a:schemeClr val="tx1">
                     <a:tint val="75000"/>
@@ -1165,9 +1167,9 @@
                 </a:solidFill>
               </a:defRPr>
             </a:lvl8pPr>
-            <a:lvl9pPr marL="2743200" indent="0">
-              <a:buNone/>
-              <a:defRPr sz="1200">
+            <a:lvl9pPr marL="4277197" indent="0">
+              <a:buNone/>
+              <a:defRPr sz="1871">
                 <a:solidFill>
                   <a:schemeClr val="tx1">
                     <a:tint val="75000"/>
@@ -1202,7 +1204,7 @@
           <a:p>
             <a:fld id="{C6A72A79-3CD5-45FF-B4A2-CB727F17E6E3}" type="datetimeFigureOut">
               <a:rPr lang="ko-KR" altLang="en-US" smtClean="0"/>
-              <a:t>2025-02-10</a:t>
+              <a:t>2025-05-06</a:t>
             </a:fld>
             <a:endParaRPr lang="ko-KR" altLang="en-US"/>
           </a:p>
@@ -1253,7 +1255,7 @@
     </p:spTree>
     <p:extLst>
       <p:ext uri="{BB962C8B-B14F-4D97-AF65-F5344CB8AC3E}">
-        <p14:creationId xmlns:p14="http://schemas.microsoft.com/office/powerpoint/2010/main" val="1023986878"/>
+        <p14:creationId xmlns:p14="http://schemas.microsoft.com/office/powerpoint/2010/main" val="4199171653"/>
       </p:ext>
     </p:extLst>
   </p:cSld>
@@ -1315,8 +1317,8 @@
         </p:nvSpPr>
         <p:spPr>
           <a:xfrm>
-            <a:off x="471488" y="2637014"/>
-            <a:ext cx="2914650" cy="6285266"/>
+            <a:off x="980192" y="2134967"/>
+            <a:ext cx="6059369" cy="5088648"/>
           </a:xfrm>
         </p:spPr>
         <p:txBody>
@@ -1372,8 +1374,8 @@
         </p:nvSpPr>
         <p:spPr>
           <a:xfrm>
-            <a:off x="3471863" y="2637014"/>
-            <a:ext cx="2914650" cy="6285266"/>
+            <a:off x="7217777" y="2134967"/>
+            <a:ext cx="6059369" cy="5088648"/>
           </a:xfrm>
         </p:spPr>
         <p:txBody>
@@ -1434,7 +1436,7 @@
           <a:p>
             <a:fld id="{C6A72A79-3CD5-45FF-B4A2-CB727F17E6E3}" type="datetimeFigureOut">
               <a:rPr lang="ko-KR" altLang="en-US" smtClean="0"/>
-              <a:t>2025-02-10</a:t>
+              <a:t>2025-05-06</a:t>
             </a:fld>
             <a:endParaRPr lang="ko-KR" altLang="en-US"/>
           </a:p>
@@ -1485,7 +1487,7 @@
     </p:spTree>
     <p:extLst>
       <p:ext uri="{BB962C8B-B14F-4D97-AF65-F5344CB8AC3E}">
-        <p14:creationId xmlns:p14="http://schemas.microsoft.com/office/powerpoint/2010/main" val="1874573898"/>
+        <p14:creationId xmlns:p14="http://schemas.microsoft.com/office/powerpoint/2010/main" val="4101821616"/>
       </p:ext>
     </p:extLst>
   </p:cSld>
@@ -1524,8 +1526,8 @@
         </p:nvSpPr>
         <p:spPr>
           <a:xfrm>
-            <a:off x="472381" y="527405"/>
-            <a:ext cx="5915025" cy="1914702"/>
+            <a:off x="982049" y="426994"/>
+            <a:ext cx="12296954" cy="1550172"/>
           </a:xfrm>
         </p:spPr>
         <p:txBody>
@@ -1552,8 +1554,8 @@
         </p:nvSpPr>
         <p:spPr>
           <a:xfrm>
-            <a:off x="472381" y="2428347"/>
-            <a:ext cx="2901255" cy="1190095"/>
+            <a:off x="982049" y="1966027"/>
+            <a:ext cx="6031522" cy="963519"/>
           </a:xfrm>
         </p:spPr>
         <p:txBody>
@@ -1561,39 +1563,39 @@
           <a:lstStyle>
             <a:lvl1pPr marL="0" indent="0">
               <a:buNone/>
-              <a:defRPr sz="1800" b="1"/>
+              <a:defRPr sz="2807" b="1"/>
             </a:lvl1pPr>
-            <a:lvl2pPr marL="342900" indent="0">
-              <a:buNone/>
-              <a:defRPr sz="1500" b="1"/>
+            <a:lvl2pPr marL="534650" indent="0">
+              <a:buNone/>
+              <a:defRPr sz="2339" b="1"/>
             </a:lvl2pPr>
-            <a:lvl3pPr marL="685800" indent="0">
-              <a:buNone/>
-              <a:defRPr sz="1350" b="1"/>
+            <a:lvl3pPr marL="1069299" indent="0">
+              <a:buNone/>
+              <a:defRPr sz="2105" b="1"/>
             </a:lvl3pPr>
-            <a:lvl4pPr marL="1028700" indent="0">
-              <a:buNone/>
-              <a:defRPr sz="1200" b="1"/>
+            <a:lvl4pPr marL="1603949" indent="0">
+              <a:buNone/>
+              <a:defRPr sz="1871" b="1"/>
             </a:lvl4pPr>
-            <a:lvl5pPr marL="1371600" indent="0">
-              <a:buNone/>
-              <a:defRPr sz="1200" b="1"/>
+            <a:lvl5pPr marL="2138599" indent="0">
+              <a:buNone/>
+              <a:defRPr sz="1871" b="1"/>
             </a:lvl5pPr>
-            <a:lvl6pPr marL="1714500" indent="0">
-              <a:buNone/>
-              <a:defRPr sz="1200" b="1"/>
+            <a:lvl6pPr marL="2673248" indent="0">
+              <a:buNone/>
+              <a:defRPr sz="1871" b="1"/>
             </a:lvl6pPr>
-            <a:lvl7pPr marL="2057400" indent="0">
-              <a:buNone/>
-              <a:defRPr sz="1200" b="1"/>
+            <a:lvl7pPr marL="3207898" indent="0">
+              <a:buNone/>
+              <a:defRPr sz="1871" b="1"/>
             </a:lvl7pPr>
-            <a:lvl8pPr marL="2400300" indent="0">
-              <a:buNone/>
-              <a:defRPr sz="1200" b="1"/>
+            <a:lvl8pPr marL="3742548" indent="0">
+              <a:buNone/>
+              <a:defRPr sz="1871" b="1"/>
             </a:lvl8pPr>
-            <a:lvl9pPr marL="2743200" indent="0">
-              <a:buNone/>
-              <a:defRPr sz="1200" b="1"/>
+            <a:lvl9pPr marL="4277197" indent="0">
+              <a:buNone/>
+              <a:defRPr sz="1871" b="1"/>
             </a:lvl9pPr>
           </a:lstStyle>
           <a:p>
@@ -1617,8 +1619,8 @@
         </p:nvSpPr>
         <p:spPr>
           <a:xfrm>
-            <a:off x="472381" y="3618442"/>
-            <a:ext cx="2901255" cy="5322183"/>
+            <a:off x="982049" y="2929546"/>
+            <a:ext cx="6031522" cy="4308921"/>
           </a:xfrm>
         </p:spPr>
         <p:txBody>
@@ -1674,8 +1676,8 @@
         </p:nvSpPr>
         <p:spPr>
           <a:xfrm>
-            <a:off x="3471863" y="2428347"/>
-            <a:ext cx="2915543" cy="1190095"/>
+            <a:off x="7217777" y="1966027"/>
+            <a:ext cx="6061226" cy="963519"/>
           </a:xfrm>
         </p:spPr>
         <p:txBody>
@@ -1683,39 +1685,39 @@
           <a:lstStyle>
             <a:lvl1pPr marL="0" indent="0">
               <a:buNone/>
-              <a:defRPr sz="1800" b="1"/>
+              <a:defRPr sz="2807" b="1"/>
             </a:lvl1pPr>
-            <a:lvl2pPr marL="342900" indent="0">
-              <a:buNone/>
-              <a:defRPr sz="1500" b="1"/>
+            <a:lvl2pPr marL="534650" indent="0">
+              <a:buNone/>
+              <a:defRPr sz="2339" b="1"/>
             </a:lvl2pPr>
-            <a:lvl3pPr marL="685800" indent="0">
-              <a:buNone/>
-              <a:defRPr sz="1350" b="1"/>
+            <a:lvl3pPr marL="1069299" indent="0">
+              <a:buNone/>
+              <a:defRPr sz="2105" b="1"/>
             </a:lvl3pPr>
-            <a:lvl4pPr marL="1028700" indent="0">
-              <a:buNone/>
-              <a:defRPr sz="1200" b="1"/>
+            <a:lvl4pPr marL="1603949" indent="0">
+              <a:buNone/>
+              <a:defRPr sz="1871" b="1"/>
             </a:lvl4pPr>
-            <a:lvl5pPr marL="1371600" indent="0">
-              <a:buNone/>
-              <a:defRPr sz="1200" b="1"/>
+            <a:lvl5pPr marL="2138599" indent="0">
+              <a:buNone/>
+              <a:defRPr sz="1871" b="1"/>
             </a:lvl5pPr>
-            <a:lvl6pPr marL="1714500" indent="0">
-              <a:buNone/>
-              <a:defRPr sz="1200" b="1"/>
+            <a:lvl6pPr marL="2673248" indent="0">
+              <a:buNone/>
+              <a:defRPr sz="1871" b="1"/>
             </a:lvl6pPr>
-            <a:lvl7pPr marL="2057400" indent="0">
-              <a:buNone/>
-              <a:defRPr sz="1200" b="1"/>
+            <a:lvl7pPr marL="3207898" indent="0">
+              <a:buNone/>
+              <a:defRPr sz="1871" b="1"/>
             </a:lvl7pPr>
-            <a:lvl8pPr marL="2400300" indent="0">
-              <a:buNone/>
-              <a:defRPr sz="1200" b="1"/>
+            <a:lvl8pPr marL="3742548" indent="0">
+              <a:buNone/>
+              <a:defRPr sz="1871" b="1"/>
             </a:lvl8pPr>
-            <a:lvl9pPr marL="2743200" indent="0">
-              <a:buNone/>
-              <a:defRPr sz="1200" b="1"/>
+            <a:lvl9pPr marL="4277197" indent="0">
+              <a:buNone/>
+              <a:defRPr sz="1871" b="1"/>
             </a:lvl9pPr>
           </a:lstStyle>
           <a:p>
@@ -1739,8 +1741,8 @@
         </p:nvSpPr>
         <p:spPr>
           <a:xfrm>
-            <a:off x="3471863" y="3618442"/>
-            <a:ext cx="2915543" cy="5322183"/>
+            <a:off x="7217777" y="2929546"/>
+            <a:ext cx="6061226" cy="4308921"/>
           </a:xfrm>
         </p:spPr>
         <p:txBody>
@@ -1801,7 +1803,7 @@
           <a:p>
             <a:fld id="{C6A72A79-3CD5-45FF-B4A2-CB727F17E6E3}" type="datetimeFigureOut">
               <a:rPr lang="ko-KR" altLang="en-US" smtClean="0"/>
-              <a:t>2025-02-10</a:t>
+              <a:t>2025-05-06</a:t>
             </a:fld>
             <a:endParaRPr lang="ko-KR" altLang="en-US"/>
           </a:p>
@@ -1852,7 +1854,7 @@
     </p:spTree>
     <p:extLst>
       <p:ext uri="{BB962C8B-B14F-4D97-AF65-F5344CB8AC3E}">
-        <p14:creationId xmlns:p14="http://schemas.microsoft.com/office/powerpoint/2010/main" val="3199203496"/>
+        <p14:creationId xmlns:p14="http://schemas.microsoft.com/office/powerpoint/2010/main" val="1512053404"/>
       </p:ext>
     </p:extLst>
   </p:cSld>
@@ -1919,7 +1921,7 @@
           <a:p>
             <a:fld id="{C6A72A79-3CD5-45FF-B4A2-CB727F17E6E3}" type="datetimeFigureOut">
               <a:rPr lang="ko-KR" altLang="en-US" smtClean="0"/>
-              <a:t>2025-02-10</a:t>
+              <a:t>2025-05-06</a:t>
             </a:fld>
             <a:endParaRPr lang="ko-KR" altLang="en-US"/>
           </a:p>
@@ -1970,7 +1972,7 @@
     </p:spTree>
     <p:extLst>
       <p:ext uri="{BB962C8B-B14F-4D97-AF65-F5344CB8AC3E}">
-        <p14:creationId xmlns:p14="http://schemas.microsoft.com/office/powerpoint/2010/main" val="646986713"/>
+        <p14:creationId xmlns:p14="http://schemas.microsoft.com/office/powerpoint/2010/main" val="3430027811"/>
       </p:ext>
     </p:extLst>
   </p:cSld>
@@ -2014,7 +2016,7 @@
           <a:p>
             <a:fld id="{C6A72A79-3CD5-45FF-B4A2-CB727F17E6E3}" type="datetimeFigureOut">
               <a:rPr lang="ko-KR" altLang="en-US" smtClean="0"/>
-              <a:t>2025-02-10</a:t>
+              <a:t>2025-05-06</a:t>
             </a:fld>
             <a:endParaRPr lang="ko-KR" altLang="en-US"/>
           </a:p>
@@ -2065,7 +2067,7 @@
     </p:spTree>
     <p:extLst>
       <p:ext uri="{BB962C8B-B14F-4D97-AF65-F5344CB8AC3E}">
-        <p14:creationId xmlns:p14="http://schemas.microsoft.com/office/powerpoint/2010/main" val="3857556576"/>
+        <p14:creationId xmlns:p14="http://schemas.microsoft.com/office/powerpoint/2010/main" val="64228879"/>
       </p:ext>
     </p:extLst>
   </p:cSld>
@@ -2104,15 +2106,15 @@
         </p:nvSpPr>
         <p:spPr>
           <a:xfrm>
-            <a:off x="472381" y="660400"/>
-            <a:ext cx="2211884" cy="2311400"/>
+            <a:off x="982050" y="534670"/>
+            <a:ext cx="4598362" cy="1871345"/>
           </a:xfrm>
         </p:spPr>
         <p:txBody>
           <a:bodyPr anchor="b"/>
           <a:lstStyle>
             <a:lvl1pPr>
-              <a:defRPr sz="2400"/>
+              <a:defRPr sz="3742"/>
             </a:lvl1pPr>
           </a:lstStyle>
           <a:p>
@@ -2136,39 +2138,39 @@
         </p:nvSpPr>
         <p:spPr>
           <a:xfrm>
-            <a:off x="2915543" y="1426283"/>
-            <a:ext cx="3471863" cy="7039681"/>
+            <a:off x="6061226" y="1154739"/>
+            <a:ext cx="7217777" cy="5699434"/>
           </a:xfrm>
         </p:spPr>
         <p:txBody>
           <a:bodyPr/>
           <a:lstStyle>
             <a:lvl1pPr>
-              <a:defRPr sz="2400"/>
+              <a:defRPr sz="3742"/>
             </a:lvl1pPr>
             <a:lvl2pPr>
-              <a:defRPr sz="2100"/>
+              <a:defRPr sz="3274"/>
             </a:lvl2pPr>
             <a:lvl3pPr>
-              <a:defRPr sz="1800"/>
+              <a:defRPr sz="2807"/>
             </a:lvl3pPr>
             <a:lvl4pPr>
-              <a:defRPr sz="1500"/>
+              <a:defRPr sz="2339"/>
             </a:lvl4pPr>
             <a:lvl5pPr>
-              <a:defRPr sz="1500"/>
+              <a:defRPr sz="2339"/>
             </a:lvl5pPr>
             <a:lvl6pPr>
-              <a:defRPr sz="1500"/>
+              <a:defRPr sz="2339"/>
             </a:lvl6pPr>
             <a:lvl7pPr>
-              <a:defRPr sz="1500"/>
+              <a:defRPr sz="2339"/>
             </a:lvl7pPr>
             <a:lvl8pPr>
-              <a:defRPr sz="1500"/>
+              <a:defRPr sz="2339"/>
             </a:lvl8pPr>
             <a:lvl9pPr>
-              <a:defRPr sz="1500"/>
+              <a:defRPr sz="2339"/>
             </a:lvl9pPr>
           </a:lstStyle>
           <a:p>
@@ -2221,8 +2223,8 @@
         </p:nvSpPr>
         <p:spPr>
           <a:xfrm>
-            <a:off x="472381" y="2971800"/>
-            <a:ext cx="2211884" cy="5505627"/>
+            <a:off x="982050" y="2406015"/>
+            <a:ext cx="4598362" cy="4457440"/>
           </a:xfrm>
         </p:spPr>
         <p:txBody>
@@ -2230,39 +2232,39 @@
           <a:lstStyle>
             <a:lvl1pPr marL="0" indent="0">
               <a:buNone/>
-              <a:defRPr sz="1200"/>
+              <a:defRPr sz="1871"/>
             </a:lvl1pPr>
-            <a:lvl2pPr marL="342900" indent="0">
-              <a:buNone/>
-              <a:defRPr sz="1050"/>
+            <a:lvl2pPr marL="534650" indent="0">
+              <a:buNone/>
+              <a:defRPr sz="1637"/>
             </a:lvl2pPr>
-            <a:lvl3pPr marL="685800" indent="0">
-              <a:buNone/>
-              <a:defRPr sz="900"/>
+            <a:lvl3pPr marL="1069299" indent="0">
+              <a:buNone/>
+              <a:defRPr sz="1403"/>
             </a:lvl3pPr>
-            <a:lvl4pPr marL="1028700" indent="0">
-              <a:buNone/>
-              <a:defRPr sz="750"/>
+            <a:lvl4pPr marL="1603949" indent="0">
+              <a:buNone/>
+              <a:defRPr sz="1169"/>
             </a:lvl4pPr>
-            <a:lvl5pPr marL="1371600" indent="0">
-              <a:buNone/>
-              <a:defRPr sz="750"/>
+            <a:lvl5pPr marL="2138599" indent="0">
+              <a:buNone/>
+              <a:defRPr sz="1169"/>
             </a:lvl5pPr>
-            <a:lvl6pPr marL="1714500" indent="0">
-              <a:buNone/>
-              <a:defRPr sz="750"/>
+            <a:lvl6pPr marL="2673248" indent="0">
+              <a:buNone/>
+              <a:defRPr sz="1169"/>
             </a:lvl6pPr>
-            <a:lvl7pPr marL="2057400" indent="0">
-              <a:buNone/>
-              <a:defRPr sz="750"/>
+            <a:lvl7pPr marL="3207898" indent="0">
+              <a:buNone/>
+              <a:defRPr sz="1169"/>
             </a:lvl7pPr>
-            <a:lvl8pPr marL="2400300" indent="0">
-              <a:buNone/>
-              <a:defRPr sz="750"/>
+            <a:lvl8pPr marL="3742548" indent="0">
+              <a:buNone/>
+              <a:defRPr sz="1169"/>
             </a:lvl8pPr>
-            <a:lvl9pPr marL="2743200" indent="0">
-              <a:buNone/>
-              <a:defRPr sz="750"/>
+            <a:lvl9pPr marL="4277197" indent="0">
+              <a:buNone/>
+              <a:defRPr sz="1169"/>
             </a:lvl9pPr>
           </a:lstStyle>
           <a:p>
@@ -2291,7 +2293,7 @@
           <a:p>
             <a:fld id="{C6A72A79-3CD5-45FF-B4A2-CB727F17E6E3}" type="datetimeFigureOut">
               <a:rPr lang="ko-KR" altLang="en-US" smtClean="0"/>
-              <a:t>2025-02-10</a:t>
+              <a:t>2025-05-06</a:t>
             </a:fld>
             <a:endParaRPr lang="ko-KR" altLang="en-US"/>
           </a:p>
@@ -2342,7 +2344,7 @@
     </p:spTree>
     <p:extLst>
       <p:ext uri="{BB962C8B-B14F-4D97-AF65-F5344CB8AC3E}">
-        <p14:creationId xmlns:p14="http://schemas.microsoft.com/office/powerpoint/2010/main" val="4178897312"/>
+        <p14:creationId xmlns:p14="http://schemas.microsoft.com/office/powerpoint/2010/main" val="4134331846"/>
       </p:ext>
     </p:extLst>
   </p:cSld>
@@ -2381,15 +2383,15 @@
         </p:nvSpPr>
         <p:spPr>
           <a:xfrm>
-            <a:off x="472381" y="660400"/>
-            <a:ext cx="2211884" cy="2311400"/>
+            <a:off x="982050" y="534670"/>
+            <a:ext cx="4598362" cy="1871345"/>
           </a:xfrm>
         </p:spPr>
         <p:txBody>
           <a:bodyPr anchor="b"/>
           <a:lstStyle>
             <a:lvl1pPr>
-              <a:defRPr sz="2400"/>
+              <a:defRPr sz="3742"/>
             </a:lvl1pPr>
           </a:lstStyle>
           <a:p>
@@ -2413,8 +2415,8 @@
         </p:nvSpPr>
         <p:spPr>
           <a:xfrm>
-            <a:off x="2915543" y="1426283"/>
-            <a:ext cx="3471863" cy="7039681"/>
+            <a:off x="6061226" y="1154739"/>
+            <a:ext cx="7217777" cy="5699434"/>
           </a:xfrm>
         </p:spPr>
         <p:txBody>
@@ -2422,39 +2424,39 @@
           <a:lstStyle>
             <a:lvl1pPr marL="0" indent="0">
               <a:buNone/>
-              <a:defRPr sz="2400"/>
+              <a:defRPr sz="3742"/>
             </a:lvl1pPr>
-            <a:lvl2pPr marL="342900" indent="0">
-              <a:buNone/>
-              <a:defRPr sz="2100"/>
+            <a:lvl2pPr marL="534650" indent="0">
+              <a:buNone/>
+              <a:defRPr sz="3274"/>
             </a:lvl2pPr>
-            <a:lvl3pPr marL="685800" indent="0">
-              <a:buNone/>
-              <a:defRPr sz="1800"/>
+            <a:lvl3pPr marL="1069299" indent="0">
+              <a:buNone/>
+              <a:defRPr sz="2807"/>
             </a:lvl3pPr>
-            <a:lvl4pPr marL="1028700" indent="0">
-              <a:buNone/>
-              <a:defRPr sz="1500"/>
+            <a:lvl4pPr marL="1603949" indent="0">
+              <a:buNone/>
+              <a:defRPr sz="2339"/>
             </a:lvl4pPr>
-            <a:lvl5pPr marL="1371600" indent="0">
-              <a:buNone/>
-              <a:defRPr sz="1500"/>
+            <a:lvl5pPr marL="2138599" indent="0">
+              <a:buNone/>
+              <a:defRPr sz="2339"/>
             </a:lvl5pPr>
-            <a:lvl6pPr marL="1714500" indent="0">
-              <a:buNone/>
-              <a:defRPr sz="1500"/>
+            <a:lvl6pPr marL="2673248" indent="0">
+              <a:buNone/>
+              <a:defRPr sz="2339"/>
             </a:lvl6pPr>
-            <a:lvl7pPr marL="2057400" indent="0">
-              <a:buNone/>
-              <a:defRPr sz="1500"/>
+            <a:lvl7pPr marL="3207898" indent="0">
+              <a:buNone/>
+              <a:defRPr sz="2339"/>
             </a:lvl7pPr>
-            <a:lvl8pPr marL="2400300" indent="0">
-              <a:buNone/>
-              <a:defRPr sz="1500"/>
+            <a:lvl8pPr marL="3742548" indent="0">
+              <a:buNone/>
+              <a:defRPr sz="2339"/>
             </a:lvl8pPr>
-            <a:lvl9pPr marL="2743200" indent="0">
-              <a:buNone/>
-              <a:defRPr sz="1500"/>
+            <a:lvl9pPr marL="4277197" indent="0">
+              <a:buNone/>
+              <a:defRPr sz="2339"/>
             </a:lvl9pPr>
           </a:lstStyle>
           <a:p>
@@ -2478,8 +2480,8 @@
         </p:nvSpPr>
         <p:spPr>
           <a:xfrm>
-            <a:off x="472381" y="2971800"/>
-            <a:ext cx="2211884" cy="5505627"/>
+            <a:off x="982050" y="2406015"/>
+            <a:ext cx="4598362" cy="4457440"/>
           </a:xfrm>
         </p:spPr>
         <p:txBody>
@@ -2487,39 +2489,39 @@
           <a:lstStyle>
             <a:lvl1pPr marL="0" indent="0">
               <a:buNone/>
-              <a:defRPr sz="1200"/>
+              <a:defRPr sz="1871"/>
             </a:lvl1pPr>
-            <a:lvl2pPr marL="342900" indent="0">
-              <a:buNone/>
-              <a:defRPr sz="1050"/>
+            <a:lvl2pPr marL="534650" indent="0">
+              <a:buNone/>
+              <a:defRPr sz="1637"/>
             </a:lvl2pPr>
-            <a:lvl3pPr marL="685800" indent="0">
-              <a:buNone/>
-              <a:defRPr sz="900"/>
+            <a:lvl3pPr marL="1069299" indent="0">
+              <a:buNone/>
+              <a:defRPr sz="1403"/>
             </a:lvl3pPr>
-            <a:lvl4pPr marL="1028700" indent="0">
-              <a:buNone/>
-              <a:defRPr sz="750"/>
+            <a:lvl4pPr marL="1603949" indent="0">
+              <a:buNone/>
+              <a:defRPr sz="1169"/>
             </a:lvl4pPr>
-            <a:lvl5pPr marL="1371600" indent="0">
-              <a:buNone/>
-              <a:defRPr sz="750"/>
+            <a:lvl5pPr marL="2138599" indent="0">
+              <a:buNone/>
+              <a:defRPr sz="1169"/>
             </a:lvl5pPr>
-            <a:lvl6pPr marL="1714500" indent="0">
-              <a:buNone/>
-              <a:defRPr sz="750"/>
+            <a:lvl6pPr marL="2673248" indent="0">
+              <a:buNone/>
+              <a:defRPr sz="1169"/>
             </a:lvl6pPr>
-            <a:lvl7pPr marL="2057400" indent="0">
-              <a:buNone/>
-              <a:defRPr sz="750"/>
+            <a:lvl7pPr marL="3207898" indent="0">
+              <a:buNone/>
+              <a:defRPr sz="1169"/>
             </a:lvl7pPr>
-            <a:lvl8pPr marL="2400300" indent="0">
-              <a:buNone/>
-              <a:defRPr sz="750"/>
+            <a:lvl8pPr marL="3742548" indent="0">
+              <a:buNone/>
+              <a:defRPr sz="1169"/>
             </a:lvl8pPr>
-            <a:lvl9pPr marL="2743200" indent="0">
-              <a:buNone/>
-              <a:defRPr sz="750"/>
+            <a:lvl9pPr marL="4277197" indent="0">
+              <a:buNone/>
+              <a:defRPr sz="1169"/>
             </a:lvl9pPr>
           </a:lstStyle>
           <a:p>
@@ -2548,7 +2550,7 @@
           <a:p>
             <a:fld id="{C6A72A79-3CD5-45FF-B4A2-CB727F17E6E3}" type="datetimeFigureOut">
               <a:rPr lang="ko-KR" altLang="en-US" smtClean="0"/>
-              <a:t>2025-02-10</a:t>
+              <a:t>2025-05-06</a:t>
             </a:fld>
             <a:endParaRPr lang="ko-KR" altLang="en-US"/>
           </a:p>
@@ -2599,7 +2601,7 @@
     </p:spTree>
     <p:extLst>
       <p:ext uri="{BB962C8B-B14F-4D97-AF65-F5344CB8AC3E}">
-        <p14:creationId xmlns:p14="http://schemas.microsoft.com/office/powerpoint/2010/main" val="5549636"/>
+        <p14:creationId xmlns:p14="http://schemas.microsoft.com/office/powerpoint/2010/main" val="234604546"/>
       </p:ext>
     </p:extLst>
   </p:cSld>
@@ -2643,8 +2645,8 @@
         </p:nvSpPr>
         <p:spPr>
           <a:xfrm>
-            <a:off x="471488" y="527405"/>
-            <a:ext cx="5915025" cy="1914702"/>
+            <a:off x="980192" y="426994"/>
+            <a:ext cx="12296954" cy="1550172"/>
           </a:xfrm>
           <a:prstGeom prst="rect">
             <a:avLst/>
@@ -2676,8 +2678,8 @@
         </p:nvSpPr>
         <p:spPr>
           <a:xfrm>
-            <a:off x="471488" y="2637014"/>
-            <a:ext cx="5915025" cy="6285266"/>
+            <a:off x="980192" y="2134967"/>
+            <a:ext cx="12296954" cy="5088648"/>
           </a:xfrm>
           <a:prstGeom prst="rect">
             <a:avLst/>
@@ -2738,8 +2740,8 @@
         </p:nvSpPr>
         <p:spPr>
           <a:xfrm>
-            <a:off x="471488" y="9181397"/>
-            <a:ext cx="1543050" cy="527403"/>
+            <a:off x="980192" y="7433399"/>
+            <a:ext cx="3207901" cy="426993"/>
           </a:xfrm>
           <a:prstGeom prst="rect">
             <a:avLst/>
@@ -2749,7 +2751,7 @@
           <a:bodyPr vert="horz" lIns="91440" tIns="45720" rIns="91440" bIns="45720" rtlCol="0" anchor="ctr"/>
           <a:lstStyle>
             <a:lvl1pPr algn="l">
-              <a:defRPr sz="900">
+              <a:defRPr sz="1403">
                 <a:solidFill>
                   <a:schemeClr val="tx1">
                     <a:tint val="75000"/>
@@ -2761,7 +2763,7 @@
           <a:p>
             <a:fld id="{C6A72A79-3CD5-45FF-B4A2-CB727F17E6E3}" type="datetimeFigureOut">
               <a:rPr lang="ko-KR" altLang="en-US" smtClean="0"/>
-              <a:t>2025-02-10</a:t>
+              <a:t>2025-05-06</a:t>
             </a:fld>
             <a:endParaRPr lang="ko-KR" altLang="en-US"/>
           </a:p>
@@ -2779,8 +2781,8 @@
         </p:nvSpPr>
         <p:spPr>
           <a:xfrm>
-            <a:off x="2271713" y="9181397"/>
-            <a:ext cx="2314575" cy="527403"/>
+            <a:off x="4722743" y="7433399"/>
+            <a:ext cx="4811852" cy="426993"/>
           </a:xfrm>
           <a:prstGeom prst="rect">
             <a:avLst/>
@@ -2790,7 +2792,7 @@
           <a:bodyPr vert="horz" lIns="91440" tIns="45720" rIns="91440" bIns="45720" rtlCol="0" anchor="ctr"/>
           <a:lstStyle>
             <a:lvl1pPr algn="ctr">
-              <a:defRPr sz="900">
+              <a:defRPr sz="1403">
                 <a:solidFill>
                   <a:schemeClr val="tx1">
                     <a:tint val="75000"/>
@@ -2816,8 +2818,8 @@
         </p:nvSpPr>
         <p:spPr>
           <a:xfrm>
-            <a:off x="4843463" y="9181397"/>
-            <a:ext cx="1543050" cy="527403"/>
+            <a:off x="10069245" y="7433399"/>
+            <a:ext cx="3207901" cy="426993"/>
           </a:xfrm>
           <a:prstGeom prst="rect">
             <a:avLst/>
@@ -2827,7 +2829,7 @@
           <a:bodyPr vert="horz" lIns="91440" tIns="45720" rIns="91440" bIns="45720" rtlCol="0" anchor="ctr"/>
           <a:lstStyle>
             <a:lvl1pPr algn="r">
-              <a:defRPr sz="900">
+              <a:defRPr sz="1403">
                 <a:solidFill>
                   <a:schemeClr val="tx1">
                     <a:tint val="75000"/>
@@ -2848,27 +2850,27 @@
     </p:spTree>
     <p:extLst>
       <p:ext uri="{BB962C8B-B14F-4D97-AF65-F5344CB8AC3E}">
-        <p14:creationId xmlns:p14="http://schemas.microsoft.com/office/powerpoint/2010/main" val="1143824281"/>
+        <p14:creationId xmlns:p14="http://schemas.microsoft.com/office/powerpoint/2010/main" val="2852910625"/>
       </p:ext>
     </p:extLst>
   </p:cSld>
   <p:clrMap bg1="lt1" tx1="dk1" bg2="lt2" tx2="dk2" accent1="accent1" accent2="accent2" accent3="accent3" accent4="accent4" accent5="accent5" accent6="accent6" hlink="hlink" folHlink="folHlink"/>
   <p:sldLayoutIdLst>
-    <p:sldLayoutId id="2147483673" r:id="rId1"/>
-    <p:sldLayoutId id="2147483674" r:id="rId2"/>
-    <p:sldLayoutId id="2147483675" r:id="rId3"/>
-    <p:sldLayoutId id="2147483676" r:id="rId4"/>
-    <p:sldLayoutId id="2147483677" r:id="rId5"/>
-    <p:sldLayoutId id="2147483678" r:id="rId6"/>
-    <p:sldLayoutId id="2147483679" r:id="rId7"/>
-    <p:sldLayoutId id="2147483680" r:id="rId8"/>
-    <p:sldLayoutId id="2147483681" r:id="rId9"/>
-    <p:sldLayoutId id="2147483682" r:id="rId10"/>
-    <p:sldLayoutId id="2147483683" r:id="rId11"/>
+    <p:sldLayoutId id="2147483709" r:id="rId1"/>
+    <p:sldLayoutId id="2147483710" r:id="rId2"/>
+    <p:sldLayoutId id="2147483711" r:id="rId3"/>
+    <p:sldLayoutId id="2147483712" r:id="rId4"/>
+    <p:sldLayoutId id="2147483713" r:id="rId5"/>
+    <p:sldLayoutId id="2147483714" r:id="rId6"/>
+    <p:sldLayoutId id="2147483715" r:id="rId7"/>
+    <p:sldLayoutId id="2147483716" r:id="rId8"/>
+    <p:sldLayoutId id="2147483717" r:id="rId9"/>
+    <p:sldLayoutId id="2147483718" r:id="rId10"/>
+    <p:sldLayoutId id="2147483719" r:id="rId11"/>
   </p:sldLayoutIdLst>
   <p:txStyles>
     <p:titleStyle>
-      <a:lvl1pPr algn="l" defTabSz="685800" rtl="0" eaLnBrk="1" latinLnBrk="1" hangingPunct="1">
+      <a:lvl1pPr algn="l" defTabSz="1069299" rtl="0" eaLnBrk="1" latinLnBrk="1" hangingPunct="1">
         <a:lnSpc>
           <a:spcPct val="90000"/>
         </a:lnSpc>
@@ -2876,7 +2878,7 @@
           <a:spcPct val="0"/>
         </a:spcBef>
         <a:buNone/>
-        <a:defRPr sz="3300" kern="1200">
+        <a:defRPr sz="5145" kern="1200">
           <a:solidFill>
             <a:schemeClr val="tx1"/>
           </a:solidFill>
@@ -2887,16 +2889,16 @@
       </a:lvl1pPr>
     </p:titleStyle>
     <p:bodyStyle>
-      <a:lvl1pPr marL="171450" indent="-171450" algn="l" defTabSz="685800" rtl="0" eaLnBrk="1" latinLnBrk="1" hangingPunct="1">
+      <a:lvl1pPr marL="267325" indent="-267325" algn="l" defTabSz="1069299" rtl="0" eaLnBrk="1" latinLnBrk="1" hangingPunct="1">
         <a:lnSpc>
           <a:spcPct val="90000"/>
         </a:lnSpc>
         <a:spcBef>
-          <a:spcPts val="750"/>
+          <a:spcPts val="1169"/>
         </a:spcBef>
         <a:buFont typeface="Arial" panose="020B0604020202020204" pitchFamily="34" charset="0"/>
         <a:buChar char="•"/>
-        <a:defRPr sz="2100" kern="1200">
+        <a:defRPr sz="3274" kern="1200">
           <a:solidFill>
             <a:schemeClr val="tx1"/>
           </a:solidFill>
@@ -2905,16 +2907,16 @@
           <a:cs typeface="+mn-cs"/>
         </a:defRPr>
       </a:lvl1pPr>
-      <a:lvl2pPr marL="514350" indent="-171450" algn="l" defTabSz="685800" rtl="0" eaLnBrk="1" latinLnBrk="1" hangingPunct="1">
+      <a:lvl2pPr marL="801975" indent="-267325" algn="l" defTabSz="1069299" rtl="0" eaLnBrk="1" latinLnBrk="1" hangingPunct="1">
         <a:lnSpc>
           <a:spcPct val="90000"/>
         </a:lnSpc>
         <a:spcBef>
-          <a:spcPts val="375"/>
+          <a:spcPts val="585"/>
         </a:spcBef>
         <a:buFont typeface="Arial" panose="020B0604020202020204" pitchFamily="34" charset="0"/>
         <a:buChar char="•"/>
-        <a:defRPr sz="1800" kern="1200">
+        <a:defRPr sz="2807" kern="1200">
           <a:solidFill>
             <a:schemeClr val="tx1"/>
           </a:solidFill>
@@ -2923,16 +2925,16 @@
           <a:cs typeface="+mn-cs"/>
         </a:defRPr>
       </a:lvl2pPr>
-      <a:lvl3pPr marL="857250" indent="-171450" algn="l" defTabSz="685800" rtl="0" eaLnBrk="1" latinLnBrk="1" hangingPunct="1">
+      <a:lvl3pPr marL="1336624" indent="-267325" algn="l" defTabSz="1069299" rtl="0" eaLnBrk="1" latinLnBrk="1" hangingPunct="1">
         <a:lnSpc>
           <a:spcPct val="90000"/>
         </a:lnSpc>
         <a:spcBef>
-          <a:spcPts val="375"/>
+          <a:spcPts val="585"/>
         </a:spcBef>
         <a:buFont typeface="Arial" panose="020B0604020202020204" pitchFamily="34" charset="0"/>
         <a:buChar char="•"/>
-        <a:defRPr sz="1500" kern="1200">
+        <a:defRPr sz="2339" kern="1200">
           <a:solidFill>
             <a:schemeClr val="tx1"/>
           </a:solidFill>
@@ -2941,16 +2943,16 @@
           <a:cs typeface="+mn-cs"/>
         </a:defRPr>
       </a:lvl3pPr>
-      <a:lvl4pPr marL="1200150" indent="-171450" algn="l" defTabSz="685800" rtl="0" eaLnBrk="1" latinLnBrk="1" hangingPunct="1">
+      <a:lvl4pPr marL="1871274" indent="-267325" algn="l" defTabSz="1069299" rtl="0" eaLnBrk="1" latinLnBrk="1" hangingPunct="1">
         <a:lnSpc>
           <a:spcPct val="90000"/>
         </a:lnSpc>
         <a:spcBef>
-          <a:spcPts val="375"/>
+          <a:spcPts val="585"/>
         </a:spcBef>
         <a:buFont typeface="Arial" panose="020B0604020202020204" pitchFamily="34" charset="0"/>
         <a:buChar char="•"/>
-        <a:defRPr sz="1350" kern="1200">
+        <a:defRPr sz="2105" kern="1200">
           <a:solidFill>
             <a:schemeClr val="tx1"/>
           </a:solidFill>
@@ -2959,16 +2961,16 @@
           <a:cs typeface="+mn-cs"/>
         </a:defRPr>
       </a:lvl4pPr>
-      <a:lvl5pPr marL="1543050" indent="-171450" algn="l" defTabSz="685800" rtl="0" eaLnBrk="1" latinLnBrk="1" hangingPunct="1">
+      <a:lvl5pPr marL="2405924" indent="-267325" algn="l" defTabSz="1069299" rtl="0" eaLnBrk="1" latinLnBrk="1" hangingPunct="1">
         <a:lnSpc>
           <a:spcPct val="90000"/>
         </a:lnSpc>
         <a:spcBef>
-          <a:spcPts val="375"/>
+          <a:spcPts val="585"/>
         </a:spcBef>
         <a:buFont typeface="Arial" panose="020B0604020202020204" pitchFamily="34" charset="0"/>
         <a:buChar char="•"/>
-        <a:defRPr sz="1350" kern="1200">
+        <a:defRPr sz="2105" kern="1200">
           <a:solidFill>
             <a:schemeClr val="tx1"/>
           </a:solidFill>
@@ -2977,16 +2979,16 @@
           <a:cs typeface="+mn-cs"/>
         </a:defRPr>
       </a:lvl5pPr>
-      <a:lvl6pPr marL="1885950" indent="-171450" algn="l" defTabSz="685800" rtl="0" eaLnBrk="1" latinLnBrk="1" hangingPunct="1">
+      <a:lvl6pPr marL="2940573" indent="-267325" algn="l" defTabSz="1069299" rtl="0" eaLnBrk="1" latinLnBrk="1" hangingPunct="1">
         <a:lnSpc>
           <a:spcPct val="90000"/>
         </a:lnSpc>
         <a:spcBef>
-          <a:spcPts val="375"/>
+          <a:spcPts val="585"/>
         </a:spcBef>
         <a:buFont typeface="Arial" panose="020B0604020202020204" pitchFamily="34" charset="0"/>
         <a:buChar char="•"/>
-        <a:defRPr sz="1350" kern="1200">
+        <a:defRPr sz="2105" kern="1200">
           <a:solidFill>
             <a:schemeClr val="tx1"/>
           </a:solidFill>
@@ -2995,16 +2997,16 @@
           <a:cs typeface="+mn-cs"/>
         </a:defRPr>
       </a:lvl6pPr>
-      <a:lvl7pPr marL="2228850" indent="-171450" algn="l" defTabSz="685800" rtl="0" eaLnBrk="1" latinLnBrk="1" hangingPunct="1">
+      <a:lvl7pPr marL="3475223" indent="-267325" algn="l" defTabSz="1069299" rtl="0" eaLnBrk="1" latinLnBrk="1" hangingPunct="1">
         <a:lnSpc>
           <a:spcPct val="90000"/>
         </a:lnSpc>
         <a:spcBef>
-          <a:spcPts val="375"/>
+          <a:spcPts val="585"/>
         </a:spcBef>
         <a:buFont typeface="Arial" panose="020B0604020202020204" pitchFamily="34" charset="0"/>
         <a:buChar char="•"/>
-        <a:defRPr sz="1350" kern="1200">
+        <a:defRPr sz="2105" kern="1200">
           <a:solidFill>
             <a:schemeClr val="tx1"/>
           </a:solidFill>
@@ -3013,16 +3015,16 @@
           <a:cs typeface="+mn-cs"/>
         </a:defRPr>
       </a:lvl7pPr>
-      <a:lvl8pPr marL="2571750" indent="-171450" algn="l" defTabSz="685800" rtl="0" eaLnBrk="1" latinLnBrk="1" hangingPunct="1">
+      <a:lvl8pPr marL="4009873" indent="-267325" algn="l" defTabSz="1069299" rtl="0" eaLnBrk="1" latinLnBrk="1" hangingPunct="1">
         <a:lnSpc>
           <a:spcPct val="90000"/>
         </a:lnSpc>
         <a:spcBef>
-          <a:spcPts val="375"/>
+          <a:spcPts val="585"/>
         </a:spcBef>
         <a:buFont typeface="Arial" panose="020B0604020202020204" pitchFamily="34" charset="0"/>
         <a:buChar char="•"/>
-        <a:defRPr sz="1350" kern="1200">
+        <a:defRPr sz="2105" kern="1200">
           <a:solidFill>
             <a:schemeClr val="tx1"/>
           </a:solidFill>
@@ -3031,16 +3033,16 @@
           <a:cs typeface="+mn-cs"/>
         </a:defRPr>
       </a:lvl8pPr>
-      <a:lvl9pPr marL="2914650" indent="-171450" algn="l" defTabSz="685800" rtl="0" eaLnBrk="1" latinLnBrk="1" hangingPunct="1">
+      <a:lvl9pPr marL="4544522" indent="-267325" algn="l" defTabSz="1069299" rtl="0" eaLnBrk="1" latinLnBrk="1" hangingPunct="1">
         <a:lnSpc>
           <a:spcPct val="90000"/>
         </a:lnSpc>
         <a:spcBef>
-          <a:spcPts val="375"/>
+          <a:spcPts val="585"/>
         </a:spcBef>
         <a:buFont typeface="Arial" panose="020B0604020202020204" pitchFamily="34" charset="0"/>
         <a:buChar char="•"/>
-        <a:defRPr sz="1350" kern="1200">
+        <a:defRPr sz="2105" kern="1200">
           <a:solidFill>
             <a:schemeClr val="tx1"/>
           </a:solidFill>
@@ -3054,8 +3056,8 @@
       <a:defPPr>
         <a:defRPr lang="en-US"/>
       </a:defPPr>
-      <a:lvl1pPr marL="0" algn="l" defTabSz="685800" rtl="0" eaLnBrk="1" latinLnBrk="1" hangingPunct="1">
-        <a:defRPr sz="1350" kern="1200">
+      <a:lvl1pPr marL="0" algn="l" defTabSz="1069299" rtl="0" eaLnBrk="1" latinLnBrk="1" hangingPunct="1">
+        <a:defRPr sz="2105" kern="1200">
           <a:solidFill>
             <a:schemeClr val="tx1"/>
           </a:solidFill>
@@ -3064,8 +3066,8 @@
           <a:cs typeface="+mn-cs"/>
         </a:defRPr>
       </a:lvl1pPr>
-      <a:lvl2pPr marL="342900" algn="l" defTabSz="685800" rtl="0" eaLnBrk="1" latinLnBrk="1" hangingPunct="1">
-        <a:defRPr sz="1350" kern="1200">
+      <a:lvl2pPr marL="534650" algn="l" defTabSz="1069299" rtl="0" eaLnBrk="1" latinLnBrk="1" hangingPunct="1">
+        <a:defRPr sz="2105" kern="1200">
           <a:solidFill>
             <a:schemeClr val="tx1"/>
           </a:solidFill>
@@ -3074,8 +3076,8 @@
           <a:cs typeface="+mn-cs"/>
         </a:defRPr>
       </a:lvl2pPr>
-      <a:lvl3pPr marL="685800" algn="l" defTabSz="685800" rtl="0" eaLnBrk="1" latinLnBrk="1" hangingPunct="1">
-        <a:defRPr sz="1350" kern="1200">
+      <a:lvl3pPr marL="1069299" algn="l" defTabSz="1069299" rtl="0" eaLnBrk="1" latinLnBrk="1" hangingPunct="1">
+        <a:defRPr sz="2105" kern="1200">
           <a:solidFill>
             <a:schemeClr val="tx1"/>
           </a:solidFill>
@@ -3084,8 +3086,8 @@
           <a:cs typeface="+mn-cs"/>
         </a:defRPr>
       </a:lvl3pPr>
-      <a:lvl4pPr marL="1028700" algn="l" defTabSz="685800" rtl="0" eaLnBrk="1" latinLnBrk="1" hangingPunct="1">
-        <a:defRPr sz="1350" kern="1200">
+      <a:lvl4pPr marL="1603949" algn="l" defTabSz="1069299" rtl="0" eaLnBrk="1" latinLnBrk="1" hangingPunct="1">
+        <a:defRPr sz="2105" kern="1200">
           <a:solidFill>
             <a:schemeClr val="tx1"/>
           </a:solidFill>
@@ -3094,8 +3096,8 @@
           <a:cs typeface="+mn-cs"/>
         </a:defRPr>
       </a:lvl4pPr>
-      <a:lvl5pPr marL="1371600" algn="l" defTabSz="685800" rtl="0" eaLnBrk="1" latinLnBrk="1" hangingPunct="1">
-        <a:defRPr sz="1350" kern="1200">
+      <a:lvl5pPr marL="2138599" algn="l" defTabSz="1069299" rtl="0" eaLnBrk="1" latinLnBrk="1" hangingPunct="1">
+        <a:defRPr sz="2105" kern="1200">
           <a:solidFill>
             <a:schemeClr val="tx1"/>
           </a:solidFill>
@@ -3104,8 +3106,8 @@
           <a:cs typeface="+mn-cs"/>
         </a:defRPr>
       </a:lvl5pPr>
-      <a:lvl6pPr marL="1714500" algn="l" defTabSz="685800" rtl="0" eaLnBrk="1" latinLnBrk="1" hangingPunct="1">
-        <a:defRPr sz="1350" kern="1200">
+      <a:lvl6pPr marL="2673248" algn="l" defTabSz="1069299" rtl="0" eaLnBrk="1" latinLnBrk="1" hangingPunct="1">
+        <a:defRPr sz="2105" kern="1200">
           <a:solidFill>
             <a:schemeClr val="tx1"/>
           </a:solidFill>
@@ -3114,8 +3116,8 @@
           <a:cs typeface="+mn-cs"/>
         </a:defRPr>
       </a:lvl6pPr>
-      <a:lvl7pPr marL="2057400" algn="l" defTabSz="685800" rtl="0" eaLnBrk="1" latinLnBrk="1" hangingPunct="1">
-        <a:defRPr sz="1350" kern="1200">
+      <a:lvl7pPr marL="3207898" algn="l" defTabSz="1069299" rtl="0" eaLnBrk="1" latinLnBrk="1" hangingPunct="1">
+        <a:defRPr sz="2105" kern="1200">
           <a:solidFill>
             <a:schemeClr val="tx1"/>
           </a:solidFill>
@@ -3124,8 +3126,8 @@
           <a:cs typeface="+mn-cs"/>
         </a:defRPr>
       </a:lvl7pPr>
-      <a:lvl8pPr marL="2400300" algn="l" defTabSz="685800" rtl="0" eaLnBrk="1" latinLnBrk="1" hangingPunct="1">
-        <a:defRPr sz="1350" kern="1200">
+      <a:lvl8pPr marL="3742548" algn="l" defTabSz="1069299" rtl="0" eaLnBrk="1" latinLnBrk="1" hangingPunct="1">
+        <a:defRPr sz="2105" kern="1200">
           <a:solidFill>
             <a:schemeClr val="tx1"/>
           </a:solidFill>
@@ -3134,8 +3136,8 @@
           <a:cs typeface="+mn-cs"/>
         </a:defRPr>
       </a:lvl8pPr>
-      <a:lvl9pPr marL="2743200" algn="l" defTabSz="685800" rtl="0" eaLnBrk="1" latinLnBrk="1" hangingPunct="1">
-        <a:defRPr sz="1350" kern="1200">
+      <a:lvl9pPr marL="4277197" algn="l" defTabSz="1069299" rtl="0" eaLnBrk="1" latinLnBrk="1" hangingPunct="1">
+        <a:defRPr sz="2105" kern="1200">
           <a:solidFill>
             <a:schemeClr val="tx1"/>
           </a:solidFill>
@@ -3168,10 +3170,102 @@
       </p:grpSpPr>
       <p:sp>
         <p:nvSpPr>
-          <p:cNvPr id="6" name="TextBox 5">
+          <p:cNvPr id="16" name="직사각형 15">
             <a:extLst>
               <a:ext uri="{FF2B5EF4-FFF2-40B4-BE49-F238E27FC236}">
-                <a16:creationId xmlns:a16="http://schemas.microsoft.com/office/drawing/2014/main" id="{A93F459D-F0DE-B33B-7C32-2EA883D96882}"/>
+                <a16:creationId xmlns:a16="http://schemas.microsoft.com/office/drawing/2014/main" id="{83775BDF-20AD-D86C-3053-50526BEDF5B0}"/>
+              </a:ext>
+            </a:extLst>
+          </p:cNvPr>
+          <p:cNvSpPr/>
+          <p:nvPr/>
+        </p:nvSpPr>
+        <p:spPr>
+          <a:xfrm>
+            <a:off x="4971396" y="1556049"/>
+            <a:ext cx="8103473" cy="619592"/>
+          </a:xfrm>
+          <a:prstGeom prst="rect">
+            <a:avLst/>
+          </a:prstGeom>
+          <a:solidFill>
+            <a:srgbClr val="252525">
+              <a:alpha val="10000"/>
+            </a:srgbClr>
+          </a:solidFill>
+          <a:ln>
+            <a:noFill/>
+          </a:ln>
+        </p:spPr>
+        <p:style>
+          <a:lnRef idx="2">
+            <a:schemeClr val="accent1">
+              <a:shade val="15000"/>
+            </a:schemeClr>
+          </a:lnRef>
+          <a:fillRef idx="1">
+            <a:schemeClr val="accent1"/>
+          </a:fillRef>
+          <a:effectRef idx="0">
+            <a:schemeClr val="accent1"/>
+          </a:effectRef>
+          <a:fontRef idx="minor">
+            <a:schemeClr val="lt1"/>
+          </a:fontRef>
+        </p:style>
+        <p:txBody>
+          <a:bodyPr rtlCol="0" anchor="ctr"/>
+          <a:lstStyle/>
+          <a:p>
+            <a:pPr algn="ctr"/>
+            <a:endParaRPr lang="ko-KR" altLang="en-US"/>
+          </a:p>
+        </p:txBody>
+      </p:sp>
+      <p:pic>
+        <p:nvPicPr>
+          <p:cNvPr id="3" name="그림 2">
+            <a:extLst>
+              <a:ext uri="{FF2B5EF4-FFF2-40B4-BE49-F238E27FC236}">
+                <a16:creationId xmlns:a16="http://schemas.microsoft.com/office/drawing/2014/main" id="{FF5BAE1D-55F8-1197-A2DF-9FBBDF1C1C6D}"/>
+              </a:ext>
+            </a:extLst>
+          </p:cNvPr>
+          <p:cNvPicPr>
+            <a:picLocks noChangeAspect="1"/>
+          </p:cNvPicPr>
+          <p:nvPr/>
+        </p:nvPicPr>
+        <p:blipFill>
+          <a:blip r:embed="rId2">
+            <a:extLst>
+              <a:ext uri="{28A0092B-C50C-407E-A947-70E740481C1C}">
+                <a14:useLocalDpi xmlns:a14="http://schemas.microsoft.com/office/drawing/2010/main" val="0"/>
+              </a:ext>
+            </a:extLst>
+          </a:blip>
+          <a:stretch>
+            <a:fillRect/>
+          </a:stretch>
+        </p:blipFill>
+        <p:spPr>
+          <a:xfrm>
+            <a:off x="762000" y="1628775"/>
+            <a:ext cx="3578757" cy="4762500"/>
+          </a:xfrm>
+          <a:prstGeom prst="roundRect">
+            <a:avLst>
+              <a:gd name="adj" fmla="val 26317"/>
+            </a:avLst>
+          </a:prstGeom>
+        </p:spPr>
+      </p:pic>
+      <p:sp>
+        <p:nvSpPr>
+          <p:cNvPr id="7" name="TextBox 6">
+            <a:extLst>
+              <a:ext uri="{FF2B5EF4-FFF2-40B4-BE49-F238E27FC236}">
+                <a16:creationId xmlns:a16="http://schemas.microsoft.com/office/drawing/2014/main" id="{68D319E8-A721-72C4-BBB0-C22656583289}"/>
               </a:ext>
             </a:extLst>
           </p:cNvPr>
@@ -3180,8 +3274,8 @@
         </p:nvSpPr>
         <p:spPr>
           <a:xfrm>
-            <a:off x="720000" y="720000"/>
-            <a:ext cx="5511800" cy="710964"/>
+            <a:off x="478971" y="564922"/>
+            <a:ext cx="4144814" cy="707886"/>
           </a:xfrm>
           <a:prstGeom prst="rect">
             <a:avLst/>
@@ -3194,50 +3288,609 @@
           </a:bodyPr>
           <a:lstStyle/>
           <a:p>
+            <a:pPr algn="ctr"/>
+            <a:r>
+              <a:rPr lang="ko-KR" altLang="en-US" sz="4000" b="1" dirty="0"/>
+              <a:t>문대진 </a:t>
+            </a:r>
+            <a:r>
+              <a:rPr lang="en-US" altLang="ko-KR" sz="4000" b="1" dirty="0"/>
+              <a:t>Portfolio</a:t>
+            </a:r>
+            <a:endParaRPr lang="ko-KR" altLang="en-US" sz="4000" b="1" dirty="0"/>
+          </a:p>
+        </p:txBody>
+      </p:sp>
+      <p:sp>
+        <p:nvSpPr>
+          <p:cNvPr id="13" name="TextBox 12">
+            <a:extLst>
+              <a:ext uri="{FF2B5EF4-FFF2-40B4-BE49-F238E27FC236}">
+                <a16:creationId xmlns:a16="http://schemas.microsoft.com/office/drawing/2014/main" id="{9F4ACD85-82D5-168C-C714-69186C0D0439}"/>
+              </a:ext>
+            </a:extLst>
+          </p:cNvPr>
+          <p:cNvSpPr txBox="1"/>
+          <p:nvPr/>
+        </p:nvSpPr>
+        <p:spPr>
+          <a:xfrm>
+            <a:off x="4951571" y="1628775"/>
+            <a:ext cx="8301973" cy="461665"/>
+          </a:xfrm>
+          <a:prstGeom prst="rect">
+            <a:avLst/>
+          </a:prstGeom>
+          <a:noFill/>
+        </p:spPr>
+        <p:txBody>
+          <a:bodyPr wrap="square" rtlCol="0">
+            <a:spAutoFit/>
+          </a:bodyPr>
+          <a:lstStyle/>
+          <a:p>
+            <a:r>
+              <a:rPr lang="ko-KR" altLang="en-US" sz="2300" b="1" dirty="0"/>
+              <a:t>💡 </a:t>
+            </a:r>
+            <a:r>
+              <a:rPr lang="ko-KR" altLang="en-US" sz="2400" b="1" dirty="0">
+                <a:solidFill>
+                  <a:srgbClr val="57B5AF"/>
+                </a:solidFill>
+              </a:rPr>
+              <a:t>다양한 경험</a:t>
+            </a:r>
+            <a:r>
+              <a:rPr lang="ko-KR" altLang="en-US" sz="2400" b="1" dirty="0"/>
+              <a:t>을 통해 </a:t>
+            </a:r>
+            <a:r>
+              <a:rPr lang="ko-KR" altLang="en-US" sz="2400" b="1" dirty="0">
+                <a:solidFill>
+                  <a:srgbClr val="57B5AF"/>
+                </a:solidFill>
+              </a:rPr>
+              <a:t>사용자의 만족감을 고민</a:t>
+            </a:r>
+            <a:r>
+              <a:rPr lang="ko-KR" altLang="en-US" sz="2400" b="1" dirty="0"/>
+              <a:t>하는 </a:t>
+            </a:r>
+            <a:r>
+              <a:rPr lang="ko-KR" altLang="en-US" sz="2400" b="1" dirty="0" err="1"/>
+              <a:t>백엔드</a:t>
+            </a:r>
+            <a:r>
+              <a:rPr lang="ko-KR" altLang="en-US" sz="2400" b="1" dirty="0"/>
+              <a:t> 개발자</a:t>
+            </a:r>
+            <a:endParaRPr lang="ko-KR" altLang="en-US" sz="2300" b="1" dirty="0"/>
+          </a:p>
+        </p:txBody>
+      </p:sp>
+      <p:sp>
+        <p:nvSpPr>
+          <p:cNvPr id="15" name="TextBox 14">
+            <a:extLst>
+              <a:ext uri="{FF2B5EF4-FFF2-40B4-BE49-F238E27FC236}">
+                <a16:creationId xmlns:a16="http://schemas.microsoft.com/office/drawing/2014/main" id="{12451361-F773-C97A-D4C5-3DB0EF73BB00}"/>
+              </a:ext>
+            </a:extLst>
+          </p:cNvPr>
+          <p:cNvSpPr txBox="1"/>
+          <p:nvPr/>
+        </p:nvSpPr>
+        <p:spPr>
+          <a:xfrm>
+            <a:off x="4951571" y="2316866"/>
+            <a:ext cx="8301973" cy="430887"/>
+          </a:xfrm>
+          <a:prstGeom prst="rect">
+            <a:avLst/>
+          </a:prstGeom>
+          <a:noFill/>
+        </p:spPr>
+        <p:txBody>
+          <a:bodyPr wrap="square" rtlCol="0">
+            <a:spAutoFit/>
+          </a:bodyPr>
+          <a:lstStyle/>
+          <a:p>
+            <a:r>
+              <a:rPr lang="ko-KR" altLang="en-US" sz="2200" b="1" dirty="0"/>
+              <a:t>🚩 </a:t>
+            </a:r>
+            <a:r>
+              <a:rPr lang="en-US" altLang="ko-KR" sz="2200" b="1" dirty="0"/>
+              <a:t>Contact me</a:t>
+            </a:r>
+            <a:endParaRPr lang="ko-KR" altLang="en-US" sz="2200" b="1" dirty="0"/>
+          </a:p>
+        </p:txBody>
+      </p:sp>
+      <p:sp>
+        <p:nvSpPr>
+          <p:cNvPr id="19" name="TextBox 18">
+            <a:extLst>
+              <a:ext uri="{FF2B5EF4-FFF2-40B4-BE49-F238E27FC236}">
+                <a16:creationId xmlns:a16="http://schemas.microsoft.com/office/drawing/2014/main" id="{818D49BD-15C6-D122-3435-1E2FDD67B046}"/>
+              </a:ext>
+            </a:extLst>
+          </p:cNvPr>
+          <p:cNvSpPr txBox="1"/>
+          <p:nvPr/>
+        </p:nvSpPr>
+        <p:spPr>
+          <a:xfrm>
+            <a:off x="5108027" y="2747753"/>
+            <a:ext cx="511724" cy="1707070"/>
+          </a:xfrm>
+          <a:prstGeom prst="rect">
+            <a:avLst/>
+          </a:prstGeom>
+          <a:noFill/>
+        </p:spPr>
+        <p:txBody>
+          <a:bodyPr wrap="square" rtlCol="0">
+            <a:spAutoFit/>
+          </a:bodyPr>
+          <a:lstStyle/>
+          <a:p>
+            <a:pPr>
+              <a:lnSpc>
+                <a:spcPct val="150000"/>
+              </a:lnSpc>
+            </a:pPr>
+            <a:r>
+              <a:rPr lang="ko-KR" altLang="en-US" dirty="0"/>
+              <a:t>📧</a:t>
+            </a:r>
+            <a:endParaRPr lang="en-US" altLang="ko-KR" dirty="0"/>
+          </a:p>
+          <a:p>
+            <a:pPr>
+              <a:lnSpc>
+                <a:spcPct val="150000"/>
+              </a:lnSpc>
+            </a:pPr>
+            <a:r>
+              <a:rPr lang="ko-KR" altLang="en-US" dirty="0"/>
+              <a:t>📞</a:t>
+            </a:r>
+            <a:endParaRPr lang="en-US" altLang="ko-KR" dirty="0"/>
+          </a:p>
+          <a:p>
+            <a:pPr>
+              <a:lnSpc>
+                <a:spcPct val="150000"/>
+              </a:lnSpc>
+            </a:pPr>
             <a:r>
               <a:rPr lang="ko-KR" altLang="en-US" dirty="0">
-                <a:latin typeface="+mj-lt"/>
+                <a:effectLst/>
+                <a:latin typeface="Apple Color Emoji"/>
               </a:rPr>
-              <a:t>사용자의 만족감을 중요시하며</a:t>
-            </a:r>
+              <a:t>👾</a:t>
+            </a:r>
+            <a:endParaRPr lang="en-US" altLang="ko-KR" dirty="0"/>
+          </a:p>
+          <a:p>
+            <a:pPr>
+              <a:lnSpc>
+                <a:spcPct val="150000"/>
+              </a:lnSpc>
+            </a:pPr>
+            <a:r>
+              <a:rPr lang="ko-KR" altLang="en-US" dirty="0"/>
+              <a:t>🔗</a:t>
+            </a:r>
+            <a:endParaRPr lang="en-US" altLang="ko-KR" dirty="0"/>
+          </a:p>
+        </p:txBody>
+      </p:sp>
+      <p:sp>
+        <p:nvSpPr>
+          <p:cNvPr id="20" name="TextBox 19">
+            <a:extLst>
+              <a:ext uri="{FF2B5EF4-FFF2-40B4-BE49-F238E27FC236}">
+                <a16:creationId xmlns:a16="http://schemas.microsoft.com/office/drawing/2014/main" id="{0F994823-E5DF-BDF0-ECD9-6CA0614FBEBF}"/>
+              </a:ext>
+            </a:extLst>
+          </p:cNvPr>
+          <p:cNvSpPr txBox="1"/>
+          <p:nvPr/>
+        </p:nvSpPr>
+        <p:spPr>
+          <a:xfrm>
+            <a:off x="5696334" y="2747753"/>
+            <a:ext cx="5139559" cy="1708160"/>
+          </a:xfrm>
+          <a:prstGeom prst="rect">
+            <a:avLst/>
+          </a:prstGeom>
+          <a:noFill/>
+        </p:spPr>
+        <p:txBody>
+          <a:bodyPr wrap="square" rtlCol="0">
+            <a:spAutoFit/>
+          </a:bodyPr>
+          <a:lstStyle/>
+          <a:p>
+            <a:pPr>
+              <a:lnSpc>
+                <a:spcPct val="150000"/>
+              </a:lnSpc>
+            </a:pPr>
+            <a:r>
+              <a:rPr lang="en-US" altLang="ko-KR" dirty="0"/>
+              <a:t>eowls1358@gmail.com</a:t>
+            </a:r>
+          </a:p>
+          <a:p>
+            <a:pPr>
+              <a:lnSpc>
+                <a:spcPct val="150000"/>
+              </a:lnSpc>
+            </a:pPr>
+            <a:r>
+              <a:rPr lang="en-US" altLang="ko-KR" dirty="0"/>
+              <a:t>010-5555-6666</a:t>
+            </a:r>
+          </a:p>
+          <a:p>
+            <a:pPr>
+              <a:lnSpc>
+                <a:spcPct val="150000"/>
+              </a:lnSpc>
+            </a:pPr>
+            <a:r>
+              <a:rPr lang="en-US" altLang="ko-KR" dirty="0"/>
+              <a:t>https://github.com/daejin94</a:t>
+            </a:r>
+          </a:p>
+          <a:p>
+            <a:pPr>
+              <a:lnSpc>
+                <a:spcPct val="150000"/>
+              </a:lnSpc>
+            </a:pPr>
+            <a:r>
+              <a:rPr lang="en-US" altLang="ko-KR" dirty="0"/>
+              <a:t>https://velog.io/@q1w2e3r4/posts</a:t>
+            </a:r>
+          </a:p>
+        </p:txBody>
+      </p:sp>
+      <p:sp>
+        <p:nvSpPr>
+          <p:cNvPr id="21" name="TextBox 20">
+            <a:extLst>
+              <a:ext uri="{FF2B5EF4-FFF2-40B4-BE49-F238E27FC236}">
+                <a16:creationId xmlns:a16="http://schemas.microsoft.com/office/drawing/2014/main" id="{7352077E-9821-BCE7-288E-E57B3F0728D7}"/>
+              </a:ext>
+            </a:extLst>
+          </p:cNvPr>
+          <p:cNvSpPr txBox="1"/>
+          <p:nvPr/>
+        </p:nvSpPr>
+        <p:spPr>
+          <a:xfrm>
+            <a:off x="4951571" y="4670266"/>
+            <a:ext cx="8301973" cy="430887"/>
+          </a:xfrm>
+          <a:prstGeom prst="rect">
+            <a:avLst/>
+          </a:prstGeom>
+          <a:noFill/>
+        </p:spPr>
+        <p:txBody>
+          <a:bodyPr wrap="square" rtlCol="0">
+            <a:spAutoFit/>
+          </a:bodyPr>
+          <a:lstStyle/>
+          <a:p>
+            <a:r>
+              <a:rPr lang="ko-KR" altLang="en-US" sz="2200" b="1" dirty="0"/>
+              <a:t>🏫 </a:t>
+            </a:r>
+            <a:r>
+              <a:rPr lang="en-US" altLang="ko-KR" sz="2200" b="1" dirty="0"/>
+              <a:t>Education</a:t>
+            </a:r>
+            <a:endParaRPr lang="ko-KR" altLang="en-US" sz="2200" b="1" dirty="0"/>
+          </a:p>
+        </p:txBody>
+      </p:sp>
+      <p:sp>
+        <p:nvSpPr>
+          <p:cNvPr id="22" name="TextBox 21">
+            <a:extLst>
+              <a:ext uri="{FF2B5EF4-FFF2-40B4-BE49-F238E27FC236}">
+                <a16:creationId xmlns:a16="http://schemas.microsoft.com/office/drawing/2014/main" id="{55E28F81-E8CB-ED0E-2726-E95F919BD11E}"/>
+              </a:ext>
+            </a:extLst>
+          </p:cNvPr>
+          <p:cNvSpPr txBox="1"/>
+          <p:nvPr/>
+        </p:nvSpPr>
+        <p:spPr>
+          <a:xfrm>
+            <a:off x="849981" y="6476154"/>
+            <a:ext cx="3402794" cy="461665"/>
+          </a:xfrm>
+          <a:prstGeom prst="rect">
+            <a:avLst/>
+          </a:prstGeom>
+          <a:noFill/>
+        </p:spPr>
+        <p:txBody>
+          <a:bodyPr wrap="square" rtlCol="0">
+            <a:spAutoFit/>
+          </a:bodyPr>
+          <a:lstStyle/>
+          <a:p>
+            <a:pPr algn="ctr"/>
+            <a:r>
+              <a:rPr lang="en-US" altLang="ko-KR" sz="2400" b="1" dirty="0"/>
+              <a:t>Backend Developer</a:t>
+            </a:r>
+            <a:endParaRPr lang="ko-KR" altLang="en-US" sz="2400" b="1" dirty="0"/>
+          </a:p>
+        </p:txBody>
+      </p:sp>
+      <p:sp>
+        <p:nvSpPr>
+          <p:cNvPr id="23" name="TextBox 22">
+            <a:extLst>
+              <a:ext uri="{FF2B5EF4-FFF2-40B4-BE49-F238E27FC236}">
+                <a16:creationId xmlns:a16="http://schemas.microsoft.com/office/drawing/2014/main" id="{E3B52106-A335-583C-2506-EAB31E345892}"/>
+              </a:ext>
+            </a:extLst>
+          </p:cNvPr>
+          <p:cNvSpPr txBox="1"/>
+          <p:nvPr/>
+        </p:nvSpPr>
+        <p:spPr>
+          <a:xfrm>
+            <a:off x="5031444" y="5170712"/>
+            <a:ext cx="664890" cy="1292662"/>
+          </a:xfrm>
+          <a:prstGeom prst="rect">
+            <a:avLst/>
+          </a:prstGeom>
+          <a:noFill/>
+        </p:spPr>
+        <p:txBody>
+          <a:bodyPr wrap="square" rtlCol="0">
+            <a:spAutoFit/>
+          </a:bodyPr>
+          <a:lstStyle/>
+          <a:p>
+            <a:pPr algn="r">
+              <a:lnSpc>
+                <a:spcPct val="150000"/>
+              </a:lnSpc>
+            </a:pPr>
+            <a:r>
+              <a:rPr lang="en-US" altLang="ko-KR" b="1" dirty="0"/>
+              <a:t>1</a:t>
+            </a:r>
+            <a:r>
+              <a:rPr lang="ko-KR" altLang="en-US" b="1" dirty="0"/>
+              <a:t>년</a:t>
+            </a:r>
+            <a:endParaRPr lang="en-US" altLang="ko-KR" b="1" dirty="0"/>
+          </a:p>
+          <a:p>
+            <a:pPr algn="r">
+              <a:lnSpc>
+                <a:spcPct val="150000"/>
+              </a:lnSpc>
+            </a:pPr>
             <a:r>
               <a:rPr lang="en-US" altLang="ko-KR" dirty="0">
-                <a:latin typeface="+mj-lt"/>
+                <a:solidFill>
+                  <a:schemeClr val="bg1">
+                    <a:lumMod val="65000"/>
+                  </a:schemeClr>
+                </a:solidFill>
               </a:rPr>
-              <a:t>, </a:t>
+              <a:t>3</a:t>
             </a:r>
             <a:r>
               <a:rPr lang="ko-KR" altLang="en-US" dirty="0">
-                <a:latin typeface="+mj-lt"/>
+                <a:solidFill>
+                  <a:schemeClr val="bg1">
+                    <a:lumMod val="65000"/>
+                  </a:schemeClr>
+                </a:solidFill>
               </a:rPr>
-              <a:t>항상 낮은 자세로 배우는</a:t>
+              <a:t>년</a:t>
             </a:r>
             <a:endParaRPr lang="en-US" altLang="ko-KR" dirty="0">
-              <a:latin typeface="+mj-lt"/>
+              <a:solidFill>
+                <a:schemeClr val="bg1">
+                  <a:lumMod val="65000"/>
+                </a:schemeClr>
+              </a:solidFill>
             </a:endParaRPr>
           </a:p>
           <a:p>
-            <a:r>
-              <a:rPr lang="ko-KR" altLang="en-US" dirty="0" err="1">
-                <a:latin typeface="+mj-lt"/>
+            <a:pPr algn="r">
+              <a:lnSpc>
+                <a:spcPct val="150000"/>
+              </a:lnSpc>
+            </a:pPr>
+            <a:r>
+              <a:rPr lang="en-US" altLang="ko-KR" dirty="0">
+                <a:solidFill>
+                  <a:schemeClr val="bg1">
+                    <a:lumMod val="65000"/>
+                  </a:schemeClr>
+                </a:solidFill>
               </a:rPr>
-              <a:t>백엔드</a:t>
+              <a:t>3</a:t>
             </a:r>
             <a:r>
               <a:rPr lang="ko-KR" altLang="en-US" dirty="0">
-                <a:latin typeface="+mj-lt"/>
+                <a:solidFill>
+                  <a:schemeClr val="bg1">
+                    <a:lumMod val="65000"/>
+                  </a:schemeClr>
+                </a:solidFill>
               </a:rPr>
-              <a:t> 개발자 문대진 입니다</a:t>
+              <a:t>년</a:t>
+            </a:r>
+            <a:endParaRPr lang="en-US" altLang="ko-KR" dirty="0">
+              <a:solidFill>
+                <a:schemeClr val="bg1">
+                  <a:lumMod val="65000"/>
+                </a:schemeClr>
+              </a:solidFill>
+            </a:endParaRPr>
+          </a:p>
+        </p:txBody>
+      </p:sp>
+      <p:sp>
+        <p:nvSpPr>
+          <p:cNvPr id="24" name="TextBox 23">
+            <a:extLst>
+              <a:ext uri="{FF2B5EF4-FFF2-40B4-BE49-F238E27FC236}">
+                <a16:creationId xmlns:a16="http://schemas.microsoft.com/office/drawing/2014/main" id="{6CA8DBE5-C52C-F8C1-D354-DA1273133B88}"/>
+              </a:ext>
+            </a:extLst>
+          </p:cNvPr>
+          <p:cNvSpPr txBox="1"/>
+          <p:nvPr/>
+        </p:nvSpPr>
+        <p:spPr>
+          <a:xfrm>
+            <a:off x="5696334" y="5170712"/>
+            <a:ext cx="6965566" cy="1292662"/>
+          </a:xfrm>
+          <a:prstGeom prst="rect">
+            <a:avLst/>
+          </a:prstGeom>
+          <a:noFill/>
+        </p:spPr>
+        <p:txBody>
+          <a:bodyPr wrap="square" rtlCol="0">
+            <a:spAutoFit/>
+          </a:bodyPr>
+          <a:lstStyle/>
+          <a:p>
+            <a:pPr>
+              <a:lnSpc>
+                <a:spcPct val="150000"/>
+              </a:lnSpc>
+            </a:pPr>
+            <a:r>
+              <a:rPr lang="ko-KR" altLang="en-US" b="1" dirty="0"/>
+              <a:t>신구대학교 </a:t>
+            </a:r>
+            <a:r>
+              <a:rPr lang="en-US" altLang="ko-KR" b="1" dirty="0"/>
+              <a:t>IT </a:t>
+            </a:r>
+            <a:r>
+              <a:rPr lang="ko-KR" altLang="en-US" b="1" dirty="0"/>
+              <a:t>미디어 학과 전공 심화 과정 </a:t>
+            </a:r>
+            <a:r>
+              <a:rPr lang="en-US" altLang="ko-KR" b="1" dirty="0"/>
+              <a:t>(</a:t>
+            </a:r>
+            <a:r>
+              <a:rPr lang="ko-KR" altLang="en-US" b="1" dirty="0"/>
+              <a:t>야간</a:t>
+            </a:r>
+            <a:r>
+              <a:rPr lang="en-US" altLang="ko-KR" b="1" dirty="0"/>
+              <a:t>)</a:t>
+            </a:r>
+            <a:r>
+              <a:rPr lang="ko-KR" altLang="en-US" b="1" dirty="0"/>
+              <a:t> 졸업 </a:t>
+            </a:r>
+            <a:r>
+              <a:rPr lang="en-US" altLang="ko-KR" b="1" dirty="0"/>
+              <a:t>(21.03 ~ (22.02)</a:t>
+            </a:r>
+          </a:p>
+          <a:p>
+            <a:pPr>
+              <a:lnSpc>
+                <a:spcPct val="150000"/>
+              </a:lnSpc>
+            </a:pPr>
+            <a:r>
+              <a:rPr lang="ko-KR" altLang="en-US" dirty="0">
+                <a:solidFill>
+                  <a:schemeClr val="bg1">
+                    <a:lumMod val="65000"/>
+                  </a:schemeClr>
+                </a:solidFill>
+              </a:rPr>
+              <a:t>신구대학교 </a:t>
             </a:r>
             <a:r>
               <a:rPr lang="en-US" altLang="ko-KR" dirty="0">
-                <a:latin typeface="+mj-lt"/>
+                <a:solidFill>
+                  <a:schemeClr val="bg1">
+                    <a:lumMod val="65000"/>
+                  </a:schemeClr>
+                </a:solidFill>
               </a:rPr>
-              <a:t>.</a:t>
-            </a:r>
-            <a:endParaRPr lang="ko-KR" altLang="en-US" dirty="0">
-              <a:latin typeface="+mj-lt"/>
-            </a:endParaRPr>
+              <a:t>IT </a:t>
+            </a:r>
+            <a:r>
+              <a:rPr lang="ko-KR" altLang="en-US" dirty="0">
+                <a:solidFill>
+                  <a:schemeClr val="bg1">
+                    <a:lumMod val="65000"/>
+                  </a:schemeClr>
+                </a:solidFill>
+              </a:rPr>
+              <a:t>미디어 학과 졸업 </a:t>
+            </a:r>
+            <a:r>
+              <a:rPr lang="en-US" altLang="ko-KR" dirty="0">
+                <a:solidFill>
+                  <a:schemeClr val="bg1">
+                    <a:lumMod val="65000"/>
+                  </a:schemeClr>
+                </a:solidFill>
+              </a:rPr>
+              <a:t>(13.03 ~ 19.02)</a:t>
+            </a:r>
+          </a:p>
+          <a:p>
+            <a:pPr>
+              <a:lnSpc>
+                <a:spcPct val="150000"/>
+              </a:lnSpc>
+            </a:pPr>
+            <a:r>
+              <a:rPr lang="ko-KR" altLang="en-US" dirty="0">
+                <a:solidFill>
+                  <a:schemeClr val="bg1">
+                    <a:lumMod val="65000"/>
+                  </a:schemeClr>
+                </a:solidFill>
+              </a:rPr>
+              <a:t>경기 광주 중앙 고등학교 산업 기계과 졸업 </a:t>
+            </a:r>
+            <a:r>
+              <a:rPr lang="en-US" altLang="ko-KR" dirty="0">
+                <a:solidFill>
+                  <a:schemeClr val="bg1">
+                    <a:lumMod val="65000"/>
+                  </a:schemeClr>
+                </a:solidFill>
+              </a:rPr>
+              <a:t>(10.03 ~ 13.02)</a:t>
+            </a:r>
           </a:p>
         </p:txBody>
       </p:sp>

--- a/문대진_포트폴리오용.pptx
+++ b/문대진_포트폴리오용.pptx
@@ -4,11 +4,17 @@
   <p:sldMasterIdLst>
     <p:sldMasterId id="2147483708" r:id="rId1"/>
   </p:sldMasterIdLst>
+  <p:notesMasterIdLst>
+    <p:notesMasterId r:id="rId6"/>
+  </p:notesMasterIdLst>
   <p:handoutMasterIdLst>
-    <p:handoutMasterId r:id="rId3"/>
+    <p:handoutMasterId r:id="rId7"/>
   </p:handoutMasterIdLst>
   <p:sldIdLst>
     <p:sldId id="256" r:id="rId2"/>
+    <p:sldId id="257" r:id="rId3"/>
+    <p:sldId id="258" r:id="rId4"/>
+    <p:sldId id="259" r:id="rId5"/>
   </p:sldIdLst>
   <p:sldSz cx="14257338" cy="8020050"/>
   <p:notesSz cx="6858000" cy="9144000"/>
@@ -305,6 +311,439 @@
   </p:cSld>
   <p:clrMap bg1="lt1" tx1="dk1" bg2="lt2" tx2="dk2" accent1="accent1" accent2="accent2" accent3="accent3" accent4="accent4" accent5="accent5" accent6="accent6" hlink="hlink" folHlink="folHlink"/>
 </p:handoutMaster>
+</file>
+
+<file path=ppt/notesMasters/notesMaster1.xml><?xml version="1.0" encoding="utf-8"?>
+<p:notesMaster xmlns:a="http://schemas.openxmlformats.org/drawingml/2006/main" xmlns:r="http://schemas.openxmlformats.org/officeDocument/2006/relationships" xmlns:p="http://schemas.openxmlformats.org/presentationml/2006/main">
+  <p:cSld>
+    <p:bg>
+      <p:bgRef idx="1001">
+        <a:schemeClr val="bg1"/>
+      </p:bgRef>
+    </p:bg>
+    <p:spTree>
+      <p:nvGrpSpPr>
+        <p:cNvPr id="1" name=""/>
+        <p:cNvGrpSpPr/>
+        <p:nvPr/>
+      </p:nvGrpSpPr>
+      <p:grpSpPr>
+        <a:xfrm>
+          <a:off x="0" y="0"/>
+          <a:ext cx="0" cy="0"/>
+          <a:chOff x="0" y="0"/>
+          <a:chExt cx="0" cy="0"/>
+        </a:xfrm>
+      </p:grpSpPr>
+      <p:sp>
+        <p:nvSpPr>
+          <p:cNvPr id="2" name="머리글 개체 틀 1"/>
+          <p:cNvSpPr>
+            <a:spLocks noGrp="1"/>
+          </p:cNvSpPr>
+          <p:nvPr>
+            <p:ph type="hdr" sz="quarter"/>
+          </p:nvPr>
+        </p:nvSpPr>
+        <p:spPr>
+          <a:xfrm>
+            <a:off x="0" y="0"/>
+            <a:ext cx="2971800" cy="458788"/>
+          </a:xfrm>
+          <a:prstGeom prst="rect">
+            <a:avLst/>
+          </a:prstGeom>
+        </p:spPr>
+        <p:txBody>
+          <a:bodyPr vert="horz" lIns="91440" tIns="45720" rIns="91440" bIns="45720" rtlCol="0"/>
+          <a:lstStyle>
+            <a:lvl1pPr algn="l">
+              <a:defRPr sz="1200"/>
+            </a:lvl1pPr>
+          </a:lstStyle>
+          <a:p>
+            <a:endParaRPr lang="ko-KR" altLang="en-US"/>
+          </a:p>
+        </p:txBody>
+      </p:sp>
+      <p:sp>
+        <p:nvSpPr>
+          <p:cNvPr id="3" name="날짜 개체 틀 2"/>
+          <p:cNvSpPr>
+            <a:spLocks noGrp="1"/>
+          </p:cNvSpPr>
+          <p:nvPr>
+            <p:ph type="dt" idx="1"/>
+          </p:nvPr>
+        </p:nvSpPr>
+        <p:spPr>
+          <a:xfrm>
+            <a:off x="3884613" y="0"/>
+            <a:ext cx="2971800" cy="458788"/>
+          </a:xfrm>
+          <a:prstGeom prst="rect">
+            <a:avLst/>
+          </a:prstGeom>
+        </p:spPr>
+        <p:txBody>
+          <a:bodyPr vert="horz" lIns="91440" tIns="45720" rIns="91440" bIns="45720" rtlCol="0"/>
+          <a:lstStyle>
+            <a:lvl1pPr algn="r">
+              <a:defRPr sz="1200"/>
+            </a:lvl1pPr>
+          </a:lstStyle>
+          <a:p>
+            <a:fld id="{B10E417E-C2EC-425C-B420-CF724443A5AE}" type="datetimeFigureOut">
+              <a:rPr lang="ko-KR" altLang="en-US" smtClean="0"/>
+              <a:t>2025-05-06</a:t>
+            </a:fld>
+            <a:endParaRPr lang="ko-KR" altLang="en-US"/>
+          </a:p>
+        </p:txBody>
+      </p:sp>
+      <p:sp>
+        <p:nvSpPr>
+          <p:cNvPr id="4" name="슬라이드 이미지 개체 틀 3"/>
+          <p:cNvSpPr>
+            <a:spLocks noGrp="1" noRot="1" noChangeAspect="1"/>
+          </p:cNvSpPr>
+          <p:nvPr>
+            <p:ph type="sldImg" idx="2"/>
+          </p:nvPr>
+        </p:nvSpPr>
+        <p:spPr>
+          <a:xfrm>
+            <a:off x="685800" y="1143000"/>
+            <a:ext cx="5486400" cy="3086100"/>
+          </a:xfrm>
+          <a:prstGeom prst="rect">
+            <a:avLst/>
+          </a:prstGeom>
+          <a:noFill/>
+          <a:ln w="12700">
+            <a:solidFill>
+              <a:prstClr val="black"/>
+            </a:solidFill>
+          </a:ln>
+        </p:spPr>
+        <p:txBody>
+          <a:bodyPr vert="horz" lIns="91440" tIns="45720" rIns="91440" bIns="45720" rtlCol="0" anchor="ctr"/>
+          <a:lstStyle/>
+          <a:p>
+            <a:endParaRPr lang="ko-KR" altLang="en-US"/>
+          </a:p>
+        </p:txBody>
+      </p:sp>
+      <p:sp>
+        <p:nvSpPr>
+          <p:cNvPr id="5" name="슬라이드 노트 개체 틀 4"/>
+          <p:cNvSpPr>
+            <a:spLocks noGrp="1"/>
+          </p:cNvSpPr>
+          <p:nvPr>
+            <p:ph type="body" sz="quarter" idx="3"/>
+          </p:nvPr>
+        </p:nvSpPr>
+        <p:spPr>
+          <a:xfrm>
+            <a:off x="685800" y="4400550"/>
+            <a:ext cx="5486400" cy="3600450"/>
+          </a:xfrm>
+          <a:prstGeom prst="rect">
+            <a:avLst/>
+          </a:prstGeom>
+        </p:spPr>
+        <p:txBody>
+          <a:bodyPr vert="horz" lIns="91440" tIns="45720" rIns="91440" bIns="45720" rtlCol="0"/>
+          <a:lstStyle/>
+          <a:p>
+            <a:pPr lvl="0"/>
+            <a:r>
+              <a:rPr lang="ko-KR" altLang="en-US"/>
+              <a:t>마스터 텍스트 스타일을 편집하려면 클릭</a:t>
+            </a:r>
+          </a:p>
+          <a:p>
+            <a:pPr lvl="1"/>
+            <a:r>
+              <a:rPr lang="ko-KR" altLang="en-US"/>
+              <a:t>두 번째 수준</a:t>
+            </a:r>
+          </a:p>
+          <a:p>
+            <a:pPr lvl="2"/>
+            <a:r>
+              <a:rPr lang="ko-KR" altLang="en-US"/>
+              <a:t>세 번째 수준</a:t>
+            </a:r>
+          </a:p>
+          <a:p>
+            <a:pPr lvl="3"/>
+            <a:r>
+              <a:rPr lang="ko-KR" altLang="en-US"/>
+              <a:t>네 번째 수준</a:t>
+            </a:r>
+          </a:p>
+          <a:p>
+            <a:pPr lvl="4"/>
+            <a:r>
+              <a:rPr lang="ko-KR" altLang="en-US"/>
+              <a:t>다섯 번째 수준</a:t>
+            </a:r>
+          </a:p>
+        </p:txBody>
+      </p:sp>
+      <p:sp>
+        <p:nvSpPr>
+          <p:cNvPr id="6" name="바닥글 개체 틀 5"/>
+          <p:cNvSpPr>
+            <a:spLocks noGrp="1"/>
+          </p:cNvSpPr>
+          <p:nvPr>
+            <p:ph type="ftr" sz="quarter" idx="4"/>
+          </p:nvPr>
+        </p:nvSpPr>
+        <p:spPr>
+          <a:xfrm>
+            <a:off x="0" y="8685213"/>
+            <a:ext cx="2971800" cy="458787"/>
+          </a:xfrm>
+          <a:prstGeom prst="rect">
+            <a:avLst/>
+          </a:prstGeom>
+        </p:spPr>
+        <p:txBody>
+          <a:bodyPr vert="horz" lIns="91440" tIns="45720" rIns="91440" bIns="45720" rtlCol="0" anchor="b"/>
+          <a:lstStyle>
+            <a:lvl1pPr algn="l">
+              <a:defRPr sz="1200"/>
+            </a:lvl1pPr>
+          </a:lstStyle>
+          <a:p>
+            <a:endParaRPr lang="ko-KR" altLang="en-US"/>
+          </a:p>
+        </p:txBody>
+      </p:sp>
+      <p:sp>
+        <p:nvSpPr>
+          <p:cNvPr id="7" name="슬라이드 번호 개체 틀 6"/>
+          <p:cNvSpPr>
+            <a:spLocks noGrp="1"/>
+          </p:cNvSpPr>
+          <p:nvPr>
+            <p:ph type="sldNum" sz="quarter" idx="5"/>
+          </p:nvPr>
+        </p:nvSpPr>
+        <p:spPr>
+          <a:xfrm>
+            <a:off x="3884613" y="8685213"/>
+            <a:ext cx="2971800" cy="458787"/>
+          </a:xfrm>
+          <a:prstGeom prst="rect">
+            <a:avLst/>
+          </a:prstGeom>
+        </p:spPr>
+        <p:txBody>
+          <a:bodyPr vert="horz" lIns="91440" tIns="45720" rIns="91440" bIns="45720" rtlCol="0" anchor="b"/>
+          <a:lstStyle>
+            <a:lvl1pPr algn="r">
+              <a:defRPr sz="1200"/>
+            </a:lvl1pPr>
+          </a:lstStyle>
+          <a:p>
+            <a:fld id="{1A436961-299C-49BC-BC33-AA2CF7FEB5F1}" type="slidenum">
+              <a:rPr lang="ko-KR" altLang="en-US" smtClean="0"/>
+              <a:t>‹#›</a:t>
+            </a:fld>
+            <a:endParaRPr lang="ko-KR" altLang="en-US"/>
+          </a:p>
+        </p:txBody>
+      </p:sp>
+    </p:spTree>
+    <p:extLst>
+      <p:ext uri="{BB962C8B-B14F-4D97-AF65-F5344CB8AC3E}">
+        <p14:creationId xmlns:p14="http://schemas.microsoft.com/office/powerpoint/2010/main" val="2407246460"/>
+      </p:ext>
+    </p:extLst>
+  </p:cSld>
+  <p:clrMap bg1="lt1" tx1="dk1" bg2="lt2" tx2="dk2" accent1="accent1" accent2="accent2" accent3="accent3" accent4="accent4" accent5="accent5" accent6="accent6" hlink="hlink" folHlink="folHlink"/>
+  <p:notesStyle>
+    <a:lvl1pPr marL="0" algn="l" defTabSz="914400" rtl="0" eaLnBrk="1" latinLnBrk="1" hangingPunct="1">
+      <a:defRPr sz="1200" kern="1200">
+        <a:solidFill>
+          <a:schemeClr val="tx1"/>
+        </a:solidFill>
+        <a:latin typeface="+mn-lt"/>
+        <a:ea typeface="+mn-ea"/>
+        <a:cs typeface="+mn-cs"/>
+      </a:defRPr>
+    </a:lvl1pPr>
+    <a:lvl2pPr marL="457200" algn="l" defTabSz="914400" rtl="0" eaLnBrk="1" latinLnBrk="1" hangingPunct="1">
+      <a:defRPr sz="1200" kern="1200">
+        <a:solidFill>
+          <a:schemeClr val="tx1"/>
+        </a:solidFill>
+        <a:latin typeface="+mn-lt"/>
+        <a:ea typeface="+mn-ea"/>
+        <a:cs typeface="+mn-cs"/>
+      </a:defRPr>
+    </a:lvl2pPr>
+    <a:lvl3pPr marL="914400" algn="l" defTabSz="914400" rtl="0" eaLnBrk="1" latinLnBrk="1" hangingPunct="1">
+      <a:defRPr sz="1200" kern="1200">
+        <a:solidFill>
+          <a:schemeClr val="tx1"/>
+        </a:solidFill>
+        <a:latin typeface="+mn-lt"/>
+        <a:ea typeface="+mn-ea"/>
+        <a:cs typeface="+mn-cs"/>
+      </a:defRPr>
+    </a:lvl3pPr>
+    <a:lvl4pPr marL="1371600" algn="l" defTabSz="914400" rtl="0" eaLnBrk="1" latinLnBrk="1" hangingPunct="1">
+      <a:defRPr sz="1200" kern="1200">
+        <a:solidFill>
+          <a:schemeClr val="tx1"/>
+        </a:solidFill>
+        <a:latin typeface="+mn-lt"/>
+        <a:ea typeface="+mn-ea"/>
+        <a:cs typeface="+mn-cs"/>
+      </a:defRPr>
+    </a:lvl4pPr>
+    <a:lvl5pPr marL="1828800" algn="l" defTabSz="914400" rtl="0" eaLnBrk="1" latinLnBrk="1" hangingPunct="1">
+      <a:defRPr sz="1200" kern="1200">
+        <a:solidFill>
+          <a:schemeClr val="tx1"/>
+        </a:solidFill>
+        <a:latin typeface="+mn-lt"/>
+        <a:ea typeface="+mn-ea"/>
+        <a:cs typeface="+mn-cs"/>
+      </a:defRPr>
+    </a:lvl5pPr>
+    <a:lvl6pPr marL="2286000" algn="l" defTabSz="914400" rtl="0" eaLnBrk="1" latinLnBrk="1" hangingPunct="1">
+      <a:defRPr sz="1200" kern="1200">
+        <a:solidFill>
+          <a:schemeClr val="tx1"/>
+        </a:solidFill>
+        <a:latin typeface="+mn-lt"/>
+        <a:ea typeface="+mn-ea"/>
+        <a:cs typeface="+mn-cs"/>
+      </a:defRPr>
+    </a:lvl6pPr>
+    <a:lvl7pPr marL="2743200" algn="l" defTabSz="914400" rtl="0" eaLnBrk="1" latinLnBrk="1" hangingPunct="1">
+      <a:defRPr sz="1200" kern="1200">
+        <a:solidFill>
+          <a:schemeClr val="tx1"/>
+        </a:solidFill>
+        <a:latin typeface="+mn-lt"/>
+        <a:ea typeface="+mn-ea"/>
+        <a:cs typeface="+mn-cs"/>
+      </a:defRPr>
+    </a:lvl7pPr>
+    <a:lvl8pPr marL="3200400" algn="l" defTabSz="914400" rtl="0" eaLnBrk="1" latinLnBrk="1" hangingPunct="1">
+      <a:defRPr sz="1200" kern="1200">
+        <a:solidFill>
+          <a:schemeClr val="tx1"/>
+        </a:solidFill>
+        <a:latin typeface="+mn-lt"/>
+        <a:ea typeface="+mn-ea"/>
+        <a:cs typeface="+mn-cs"/>
+      </a:defRPr>
+    </a:lvl8pPr>
+    <a:lvl9pPr marL="3657600" algn="l" defTabSz="914400" rtl="0" eaLnBrk="1" latinLnBrk="1" hangingPunct="1">
+      <a:defRPr sz="1200" kern="1200">
+        <a:solidFill>
+          <a:schemeClr val="tx1"/>
+        </a:solidFill>
+        <a:latin typeface="+mn-lt"/>
+        <a:ea typeface="+mn-ea"/>
+        <a:cs typeface="+mn-cs"/>
+      </a:defRPr>
+    </a:lvl9pPr>
+  </p:notesStyle>
+</p:notesMaster>
+</file>
+
+<file path=ppt/notesSlides/notesSlide1.xml><?xml version="1.0" encoding="utf-8"?>
+<p:notes xmlns:a="http://schemas.openxmlformats.org/drawingml/2006/main" xmlns:r="http://schemas.openxmlformats.org/officeDocument/2006/relationships" xmlns:p="http://schemas.openxmlformats.org/presentationml/2006/main">
+  <p:cSld>
+    <p:spTree>
+      <p:nvGrpSpPr>
+        <p:cNvPr id="1" name=""/>
+        <p:cNvGrpSpPr/>
+        <p:nvPr/>
+      </p:nvGrpSpPr>
+      <p:grpSpPr>
+        <a:xfrm>
+          <a:off x="0" y="0"/>
+          <a:ext cx="0" cy="0"/>
+          <a:chOff x="0" y="0"/>
+          <a:chExt cx="0" cy="0"/>
+        </a:xfrm>
+      </p:grpSpPr>
+      <p:sp>
+        <p:nvSpPr>
+          <p:cNvPr id="2" name="슬라이드 이미지 개체 틀 1"/>
+          <p:cNvSpPr>
+            <a:spLocks noGrp="1" noRot="1" noChangeAspect="1"/>
+          </p:cNvSpPr>
+          <p:nvPr>
+            <p:ph type="sldImg"/>
+          </p:nvPr>
+        </p:nvSpPr>
+        <p:spPr/>
+      </p:sp>
+      <p:sp>
+        <p:nvSpPr>
+          <p:cNvPr id="3" name="슬라이드 노트 개체 틀 2"/>
+          <p:cNvSpPr>
+            <a:spLocks noGrp="1"/>
+          </p:cNvSpPr>
+          <p:nvPr>
+            <p:ph type="body" idx="1"/>
+          </p:nvPr>
+        </p:nvSpPr>
+        <p:spPr/>
+        <p:txBody>
+          <a:bodyPr/>
+          <a:lstStyle/>
+          <a:p>
+            <a:endParaRPr lang="ko-KR" altLang="en-US" dirty="0"/>
+          </a:p>
+        </p:txBody>
+      </p:sp>
+      <p:sp>
+        <p:nvSpPr>
+          <p:cNvPr id="4" name="슬라이드 번호 개체 틀 3"/>
+          <p:cNvSpPr>
+            <a:spLocks noGrp="1"/>
+          </p:cNvSpPr>
+          <p:nvPr>
+            <p:ph type="sldNum" sz="quarter" idx="5"/>
+          </p:nvPr>
+        </p:nvSpPr>
+        <p:spPr/>
+        <p:txBody>
+          <a:bodyPr/>
+          <a:lstStyle/>
+          <a:p>
+            <a:fld id="{1A436961-299C-49BC-BC33-AA2CF7FEB5F1}" type="slidenum">
+              <a:rPr lang="ko-KR" altLang="en-US" smtClean="0"/>
+              <a:t>2</a:t>
+            </a:fld>
+            <a:endParaRPr lang="ko-KR" altLang="en-US"/>
+          </a:p>
+        </p:txBody>
+      </p:sp>
+    </p:spTree>
+    <p:extLst>
+      <p:ext uri="{BB962C8B-B14F-4D97-AF65-F5344CB8AC3E}">
+        <p14:creationId xmlns:p14="http://schemas.microsoft.com/office/powerpoint/2010/main" val="2936400639"/>
+      </p:ext>
+    </p:extLst>
+  </p:cSld>
+  <p:clrMapOvr>
+    <a:masterClrMapping/>
+  </p:clrMapOvr>
+</p:notes>
 </file>
 
 <file path=ppt/slideLayouts/slideLayout1.xml><?xml version="1.0" encoding="utf-8"?>
@@ -3274,8 +3713,8 @@
         </p:nvSpPr>
         <p:spPr>
           <a:xfrm>
-            <a:off x="478971" y="564922"/>
-            <a:ext cx="4144814" cy="707886"/>
+            <a:off x="621792" y="564922"/>
+            <a:ext cx="3859172" cy="707886"/>
           </a:xfrm>
           <a:prstGeom prst="rect">
             <a:avLst/>
@@ -3290,14 +3729,26 @@
           <a:p>
             <a:pPr algn="ctr"/>
             <a:r>
-              <a:rPr lang="ko-KR" altLang="en-US" sz="4000" b="1" dirty="0"/>
+              <a:rPr lang="ko-KR" altLang="en-US" sz="4000" b="1" dirty="0">
+                <a:solidFill>
+                  <a:srgbClr val="57B5AF"/>
+                </a:solidFill>
+              </a:rPr>
               <a:t>문대진 </a:t>
             </a:r>
             <a:r>
-              <a:rPr lang="en-US" altLang="ko-KR" sz="4000" b="1" dirty="0"/>
+              <a:rPr lang="en-US" altLang="ko-KR" sz="4000" b="1" dirty="0">
+                <a:solidFill>
+                  <a:srgbClr val="57B5AF"/>
+                </a:solidFill>
+              </a:rPr>
               <a:t>Portfolio</a:t>
             </a:r>
-            <a:endParaRPr lang="ko-KR" altLang="en-US" sz="4000" b="1" dirty="0"/>
+            <a:endParaRPr lang="ko-KR" altLang="en-US" sz="4000" b="1" dirty="0">
+              <a:solidFill>
+                <a:srgbClr val="57B5AF"/>
+              </a:solidFill>
+            </a:endParaRPr>
           </a:p>
         </p:txBody>
       </p:sp>
@@ -3898,6 +4349,2522 @@
     <p:extLst>
       <p:ext uri="{BB962C8B-B14F-4D97-AF65-F5344CB8AC3E}">
         <p14:creationId xmlns:p14="http://schemas.microsoft.com/office/powerpoint/2010/main" val="2629253248"/>
+      </p:ext>
+    </p:extLst>
+  </p:cSld>
+  <p:clrMapOvr>
+    <a:masterClrMapping/>
+  </p:clrMapOvr>
+</p:sld>
+</file>
+
+<file path=ppt/slides/slide2.xml><?xml version="1.0" encoding="utf-8"?>
+<p:sld xmlns:a="http://schemas.openxmlformats.org/drawingml/2006/main" xmlns:r="http://schemas.openxmlformats.org/officeDocument/2006/relationships" xmlns:p="http://schemas.openxmlformats.org/presentationml/2006/main">
+  <p:cSld>
+    <p:spTree>
+      <p:nvGrpSpPr>
+        <p:cNvPr id="1" name=""/>
+        <p:cNvGrpSpPr/>
+        <p:nvPr/>
+      </p:nvGrpSpPr>
+      <p:grpSpPr>
+        <a:xfrm>
+          <a:off x="0" y="0"/>
+          <a:ext cx="0" cy="0"/>
+          <a:chOff x="0" y="0"/>
+          <a:chExt cx="0" cy="0"/>
+        </a:xfrm>
+      </p:grpSpPr>
+      <p:sp>
+        <p:nvSpPr>
+          <p:cNvPr id="25" name="직사각형 24">
+            <a:extLst>
+              <a:ext uri="{FF2B5EF4-FFF2-40B4-BE49-F238E27FC236}">
+                <a16:creationId xmlns:a16="http://schemas.microsoft.com/office/drawing/2014/main" id="{2D5FA05E-D3FF-35D2-A2BE-4886A17F0585}"/>
+              </a:ext>
+            </a:extLst>
+          </p:cNvPr>
+          <p:cNvSpPr/>
+          <p:nvPr/>
+        </p:nvSpPr>
+        <p:spPr>
+          <a:xfrm>
+            <a:off x="1140380" y="1443631"/>
+            <a:ext cx="7413845" cy="619592"/>
+          </a:xfrm>
+          <a:prstGeom prst="rect">
+            <a:avLst/>
+          </a:prstGeom>
+          <a:solidFill>
+            <a:srgbClr val="252525">
+              <a:alpha val="10000"/>
+            </a:srgbClr>
+          </a:solidFill>
+          <a:ln>
+            <a:noFill/>
+          </a:ln>
+        </p:spPr>
+        <p:style>
+          <a:lnRef idx="2">
+            <a:schemeClr val="accent1">
+              <a:shade val="15000"/>
+            </a:schemeClr>
+          </a:lnRef>
+          <a:fillRef idx="1">
+            <a:schemeClr val="accent1"/>
+          </a:fillRef>
+          <a:effectRef idx="0">
+            <a:schemeClr val="accent1"/>
+          </a:effectRef>
+          <a:fontRef idx="minor">
+            <a:schemeClr val="lt1"/>
+          </a:fontRef>
+        </p:style>
+        <p:txBody>
+          <a:bodyPr rtlCol="0" anchor="ctr"/>
+          <a:lstStyle/>
+          <a:p>
+            <a:pPr algn="ctr"/>
+            <a:endParaRPr lang="ko-KR" altLang="en-US"/>
+          </a:p>
+        </p:txBody>
+      </p:sp>
+      <p:grpSp>
+        <p:nvGrpSpPr>
+          <p:cNvPr id="22" name="그룹 21">
+            <a:extLst>
+              <a:ext uri="{FF2B5EF4-FFF2-40B4-BE49-F238E27FC236}">
+                <a16:creationId xmlns:a16="http://schemas.microsoft.com/office/drawing/2014/main" id="{B5CAD46A-5D4B-B6A5-52D7-E1DDC3031ED0}"/>
+              </a:ext>
+            </a:extLst>
+          </p:cNvPr>
+          <p:cNvGrpSpPr/>
+          <p:nvPr/>
+        </p:nvGrpSpPr>
+        <p:grpSpPr>
+          <a:xfrm>
+            <a:off x="11153488" y="2234046"/>
+            <a:ext cx="2173026" cy="1143120"/>
+            <a:chOff x="11153488" y="2234046"/>
+            <a:chExt cx="2173026" cy="1143120"/>
+          </a:xfrm>
+        </p:grpSpPr>
+        <p:pic>
+          <p:nvPicPr>
+            <p:cNvPr id="21" name="그림 20">
+              <a:extLst>
+                <a:ext uri="{FF2B5EF4-FFF2-40B4-BE49-F238E27FC236}">
+                  <a16:creationId xmlns:a16="http://schemas.microsoft.com/office/drawing/2014/main" id="{A01ED0A2-259A-616C-5459-B0F021F5DFA1}"/>
+                </a:ext>
+              </a:extLst>
+            </p:cNvPr>
+            <p:cNvPicPr>
+              <a:picLocks noChangeAspect="1"/>
+            </p:cNvPicPr>
+            <p:nvPr/>
+          </p:nvPicPr>
+          <p:blipFill>
+            <a:blip r:embed="rId3"/>
+            <a:srcRect b="17335"/>
+            <a:stretch/>
+          </p:blipFill>
+          <p:spPr>
+            <a:xfrm>
+              <a:off x="11153488" y="2234046"/>
+              <a:ext cx="2173026" cy="1143120"/>
+            </a:xfrm>
+            <a:prstGeom prst="rect">
+              <a:avLst/>
+            </a:prstGeom>
+            <a:ln>
+              <a:solidFill>
+                <a:srgbClr val="3A75B0"/>
+              </a:solidFill>
+            </a:ln>
+          </p:spPr>
+        </p:pic>
+        <p:pic>
+          <p:nvPicPr>
+            <p:cNvPr id="19" name="그래픽 18">
+              <a:extLst>
+                <a:ext uri="{FF2B5EF4-FFF2-40B4-BE49-F238E27FC236}">
+                  <a16:creationId xmlns:a16="http://schemas.microsoft.com/office/drawing/2014/main" id="{1186462B-CBD1-872C-AC77-F1A076D19E84}"/>
+                </a:ext>
+              </a:extLst>
+            </p:cNvPr>
+            <p:cNvPicPr>
+              <a:picLocks noChangeAspect="1"/>
+            </p:cNvPicPr>
+            <p:nvPr/>
+          </p:nvPicPr>
+          <p:blipFill>
+            <a:blip r:embed="rId4">
+              <a:extLst>
+                <a:ext uri="{96DAC541-7B7A-43D3-8B79-37D633B846F1}">
+                  <asvg:svgBlip xmlns:asvg="http://schemas.microsoft.com/office/drawing/2016/SVG/main" r:embed="rId5"/>
+                </a:ext>
+              </a:extLst>
+            </a:blip>
+            <a:stretch>
+              <a:fillRect/>
+            </a:stretch>
+          </p:blipFill>
+          <p:spPr>
+            <a:xfrm>
+              <a:off x="11153488" y="2265657"/>
+              <a:ext cx="2173026" cy="1086513"/>
+            </a:xfrm>
+            <a:prstGeom prst="rect">
+              <a:avLst/>
+            </a:prstGeom>
+          </p:spPr>
+        </p:pic>
+      </p:grpSp>
+      <p:sp>
+        <p:nvSpPr>
+          <p:cNvPr id="4" name="TextBox 3">
+            <a:extLst>
+              <a:ext uri="{FF2B5EF4-FFF2-40B4-BE49-F238E27FC236}">
+                <a16:creationId xmlns:a16="http://schemas.microsoft.com/office/drawing/2014/main" id="{DD49EA6C-B69A-A383-FD01-ED66D1D9E368}"/>
+              </a:ext>
+            </a:extLst>
+          </p:cNvPr>
+          <p:cNvSpPr txBox="1"/>
+          <p:nvPr/>
+        </p:nvSpPr>
+        <p:spPr>
+          <a:xfrm>
+            <a:off x="621792" y="564922"/>
+            <a:ext cx="12088368" cy="707886"/>
+          </a:xfrm>
+          <a:prstGeom prst="rect">
+            <a:avLst/>
+          </a:prstGeom>
+          <a:noFill/>
+        </p:spPr>
+        <p:txBody>
+          <a:bodyPr wrap="square" rtlCol="0">
+            <a:spAutoFit/>
+          </a:bodyPr>
+          <a:lstStyle/>
+          <a:p>
+            <a:r>
+              <a:rPr lang="en-US" altLang="ko-KR" sz="4000" b="1" dirty="0">
+                <a:solidFill>
+                  <a:srgbClr val="57B5AF"/>
+                </a:solidFill>
+              </a:rPr>
+              <a:t>Skills / Language &amp; Frameworks</a:t>
+            </a:r>
+            <a:endParaRPr lang="ko-KR" altLang="en-US" sz="4000" b="1" dirty="0">
+              <a:solidFill>
+                <a:srgbClr val="57B5AF"/>
+              </a:solidFill>
+            </a:endParaRPr>
+          </a:p>
+        </p:txBody>
+      </p:sp>
+      <p:sp>
+        <p:nvSpPr>
+          <p:cNvPr id="5" name="TextBox 4">
+            <a:extLst>
+              <a:ext uri="{FF2B5EF4-FFF2-40B4-BE49-F238E27FC236}">
+                <a16:creationId xmlns:a16="http://schemas.microsoft.com/office/drawing/2014/main" id="{3CCC38F1-843C-B3D0-4355-58F1DE1FE629}"/>
+              </a:ext>
+            </a:extLst>
+          </p:cNvPr>
+          <p:cNvSpPr txBox="1"/>
+          <p:nvPr/>
+        </p:nvSpPr>
+        <p:spPr>
+          <a:xfrm>
+            <a:off x="1120555" y="2234046"/>
+            <a:ext cx="10235045" cy="5078313"/>
+          </a:xfrm>
+          <a:prstGeom prst="rect">
+            <a:avLst/>
+          </a:prstGeom>
+          <a:noFill/>
+        </p:spPr>
+        <p:txBody>
+          <a:bodyPr wrap="square" rtlCol="0">
+            <a:spAutoFit/>
+          </a:bodyPr>
+          <a:lstStyle/>
+          <a:p>
+            <a:pPr marL="285750" indent="-285750">
+              <a:buFont typeface="Arial" panose="020B0604020202020204" pitchFamily="34" charset="0"/>
+              <a:buChar char="•"/>
+            </a:pPr>
+            <a:r>
+              <a:rPr lang="en-US" altLang="ko-KR" b="1" dirty="0"/>
+              <a:t>Java</a:t>
+            </a:r>
+            <a:r>
+              <a:rPr lang="en-US" altLang="ko-KR" dirty="0"/>
+              <a:t>: 3</a:t>
+            </a:r>
+            <a:r>
+              <a:rPr lang="ko-KR" altLang="en-US" dirty="0"/>
+              <a:t>년 차 안드로이드 개발 경험 및 최근 </a:t>
+            </a:r>
+            <a:r>
+              <a:rPr lang="en-US" altLang="ko-KR" dirty="0"/>
+              <a:t>Spring Boot </a:t>
+            </a:r>
+            <a:r>
+              <a:rPr lang="ko-KR" altLang="en-US" dirty="0"/>
+              <a:t>로의 전환 이후 프로젝트 </a:t>
+            </a:r>
+            <a:r>
+              <a:rPr lang="en-US" altLang="ko-KR" dirty="0"/>
+              <a:t>2</a:t>
+            </a:r>
+            <a:r>
+              <a:rPr lang="ko-KR" altLang="en-US" dirty="0"/>
+              <a:t>개 참여 </a:t>
+            </a:r>
+          </a:p>
+          <a:p>
+            <a:pPr marL="742950" lvl="1" indent="-285750">
+              <a:buFont typeface="Arial" panose="020B0604020202020204" pitchFamily="34" charset="0"/>
+              <a:buChar char="•"/>
+            </a:pPr>
+            <a:r>
+              <a:rPr lang="ko-KR" altLang="en-US" dirty="0"/>
+              <a:t>인터페이스</a:t>
+            </a:r>
+            <a:r>
+              <a:rPr lang="en-US" altLang="ko-KR" dirty="0"/>
+              <a:t>, </a:t>
+            </a:r>
+            <a:r>
+              <a:rPr lang="ko-KR" altLang="en-US" dirty="0"/>
+              <a:t>추상 클래스 조합 및 </a:t>
+            </a:r>
+            <a:r>
+              <a:rPr lang="en-US" altLang="ko-KR" dirty="0"/>
+              <a:t>SOLID </a:t>
+            </a:r>
+            <a:r>
+              <a:rPr lang="ko-KR" altLang="en-US" dirty="0"/>
+              <a:t>원칙과 디자인 패턴을 통한 객체 지향 및 함수형 프로그래밍</a:t>
+            </a:r>
+          </a:p>
+          <a:p>
+            <a:pPr marL="742950" lvl="1" indent="-285750">
+              <a:buFont typeface="Arial" panose="020B0604020202020204" pitchFamily="34" charset="0"/>
+              <a:buChar char="•"/>
+            </a:pPr>
+            <a:r>
+              <a:rPr lang="en-US" altLang="ko-KR" dirty="0"/>
+              <a:t>Stream</a:t>
+            </a:r>
+            <a:r>
+              <a:rPr lang="ko-KR" altLang="en-US" dirty="0"/>
+              <a:t>을 사용한 배열 및 리스트 처리</a:t>
+            </a:r>
+            <a:r>
+              <a:rPr lang="en-US" altLang="ko-KR" dirty="0"/>
+              <a:t>, Optional</a:t>
+            </a:r>
+            <a:r>
+              <a:rPr lang="ko-KR" altLang="en-US" dirty="0"/>
+              <a:t>을 이용한 </a:t>
+            </a:r>
+            <a:r>
+              <a:rPr lang="en-US" altLang="ko-KR" dirty="0"/>
+              <a:t>Null Guarding </a:t>
+            </a:r>
+            <a:r>
+              <a:rPr lang="ko-KR" altLang="en-US" dirty="0"/>
+              <a:t>코딩</a:t>
+            </a:r>
+            <a:endParaRPr lang="en-US" altLang="ko-KR" dirty="0"/>
+          </a:p>
+          <a:p>
+            <a:pPr marL="742950" lvl="1" indent="-285750">
+              <a:buFont typeface="Arial" panose="020B0604020202020204" pitchFamily="34" charset="0"/>
+              <a:buChar char="•"/>
+            </a:pPr>
+            <a:endParaRPr lang="ko-KR" altLang="en-US" dirty="0"/>
+          </a:p>
+          <a:p>
+            <a:pPr marL="285750" indent="-285750">
+              <a:buFont typeface="Arial" panose="020B0604020202020204" pitchFamily="34" charset="0"/>
+              <a:buChar char="•"/>
+            </a:pPr>
+            <a:r>
+              <a:rPr lang="en-US" altLang="ko-KR" b="1" dirty="0"/>
+              <a:t>Spring Boot</a:t>
+            </a:r>
+            <a:r>
+              <a:rPr lang="en-US" altLang="ko-KR" dirty="0"/>
+              <a:t>: JPA </a:t>
+            </a:r>
+            <a:r>
+              <a:rPr lang="ko-KR" altLang="en-US" dirty="0"/>
+              <a:t>사용한 </a:t>
+            </a:r>
+            <a:r>
+              <a:rPr lang="en-US" altLang="ko-KR" dirty="0"/>
+              <a:t>DB CRUD </a:t>
+            </a:r>
+            <a:r>
+              <a:rPr lang="ko-KR" altLang="en-US" dirty="0"/>
+              <a:t>및 관리</a:t>
+            </a:r>
+            <a:r>
+              <a:rPr lang="en-US" altLang="ko-KR" dirty="0"/>
+              <a:t>, MVC </a:t>
+            </a:r>
+            <a:r>
+              <a:rPr lang="ko-KR" altLang="en-US" dirty="0"/>
+              <a:t>패턴 및 </a:t>
+            </a:r>
+            <a:r>
+              <a:rPr lang="en-US" altLang="ko-KR" dirty="0"/>
+              <a:t>3-Layer Architecture </a:t>
+            </a:r>
+            <a:r>
+              <a:rPr lang="ko-KR" altLang="en-US" dirty="0"/>
+              <a:t>감안한 </a:t>
+            </a:r>
+            <a:r>
+              <a:rPr lang="en-US" altLang="ko-KR" dirty="0"/>
+              <a:t>API </a:t>
+            </a:r>
+            <a:r>
+              <a:rPr lang="ko-KR" altLang="en-US" dirty="0"/>
+              <a:t>설계 </a:t>
+            </a:r>
+          </a:p>
+          <a:p>
+            <a:pPr marL="685800" lvl="1" indent="-228600">
+              <a:buFont typeface="Arial" panose="020B0604020202020204" pitchFamily="34" charset="0"/>
+              <a:buChar char="•"/>
+            </a:pPr>
+            <a:r>
+              <a:rPr lang="en-US" altLang="ko-KR" dirty="0" err="1"/>
+              <a:t>QueryMethod</a:t>
+            </a:r>
+            <a:r>
+              <a:rPr lang="en-US" altLang="ko-KR" dirty="0"/>
+              <a:t> </a:t>
+            </a:r>
+            <a:r>
+              <a:rPr lang="ko-KR" altLang="en-US" dirty="0"/>
+              <a:t>및 </a:t>
+            </a:r>
+            <a:r>
+              <a:rPr lang="en-US" altLang="ko-KR" dirty="0"/>
+              <a:t>Native Query</a:t>
+            </a:r>
+            <a:r>
+              <a:rPr lang="ko-KR" altLang="en-US" dirty="0"/>
+              <a:t>를 통한 </a:t>
+            </a:r>
+            <a:r>
+              <a:rPr lang="en-US" altLang="ko-KR" dirty="0"/>
+              <a:t>DB CRUD. Projection </a:t>
+            </a:r>
+            <a:r>
+              <a:rPr lang="ko-KR" altLang="en-US" dirty="0"/>
+              <a:t>사용을 통한 쿼리 최적화 진행</a:t>
+            </a:r>
+            <a:r>
+              <a:rPr lang="en-US" altLang="ko-KR" dirty="0"/>
+              <a:t>.</a:t>
+            </a:r>
+          </a:p>
+          <a:p>
+            <a:pPr marL="685800" lvl="1" indent="-228600">
+              <a:buFont typeface="Arial" panose="020B0604020202020204" pitchFamily="34" charset="0"/>
+              <a:buChar char="•"/>
+            </a:pPr>
+            <a:r>
+              <a:rPr lang="en-US" altLang="ko-KR" dirty="0" err="1"/>
+              <a:t>ResponseEntity</a:t>
+            </a:r>
+            <a:r>
+              <a:rPr lang="en-US" altLang="ko-KR" dirty="0"/>
+              <a:t> </a:t>
+            </a:r>
+            <a:r>
+              <a:rPr lang="ko-KR" altLang="en-US" dirty="0"/>
+              <a:t>커스텀을 통한 응답 메시지 최적화</a:t>
+            </a:r>
+            <a:r>
+              <a:rPr lang="en-US" altLang="ko-KR" dirty="0"/>
+              <a:t>. Facade </a:t>
+            </a:r>
+            <a:r>
+              <a:rPr lang="ko-KR" altLang="en-US" dirty="0"/>
+              <a:t>패턴을 통한 </a:t>
+            </a:r>
+            <a:r>
+              <a:rPr lang="en-US" altLang="ko-KR" dirty="0"/>
+              <a:t>3-Layer </a:t>
+            </a:r>
+            <a:r>
+              <a:rPr lang="ko-KR" altLang="en-US" dirty="0"/>
+              <a:t>확장 설계</a:t>
+            </a:r>
+            <a:endParaRPr lang="en-US" altLang="ko-KR" dirty="0"/>
+          </a:p>
+          <a:p>
+            <a:pPr marL="685800" lvl="1" indent="-228600">
+              <a:buFont typeface="Arial" panose="020B0604020202020204" pitchFamily="34" charset="0"/>
+              <a:buChar char="•"/>
+            </a:pPr>
+            <a:endParaRPr lang="ko-KR" altLang="en-US" dirty="0"/>
+          </a:p>
+          <a:p>
+            <a:pPr marL="285750" indent="-285750">
+              <a:buFont typeface="Arial" panose="020B0604020202020204" pitchFamily="34" charset="0"/>
+              <a:buChar char="•"/>
+            </a:pPr>
+            <a:r>
+              <a:rPr lang="en-US" altLang="ko-KR" b="1" dirty="0" err="1"/>
+              <a:t>Andorid</a:t>
+            </a:r>
+            <a:r>
+              <a:rPr lang="en-US" altLang="ko-KR" dirty="0"/>
+              <a:t>: Life Cycle </a:t>
+            </a:r>
+            <a:r>
+              <a:rPr lang="ko-KR" altLang="en-US" dirty="0"/>
+              <a:t>고려한 앱 개발 및 </a:t>
+            </a:r>
+            <a:r>
+              <a:rPr lang="en-US" altLang="ko-KR" dirty="0"/>
+              <a:t>Glide, KNOX </a:t>
+            </a:r>
+            <a:r>
+              <a:rPr lang="ko-KR" altLang="en-US" dirty="0"/>
+              <a:t>같은 라이브러리를 통한 개발 및 유지 보수 </a:t>
+            </a:r>
+          </a:p>
+          <a:p>
+            <a:pPr marL="685800" lvl="1" indent="-228600">
+              <a:buFont typeface="Arial" panose="020B0604020202020204" pitchFamily="34" charset="0"/>
+              <a:buChar char="•"/>
+            </a:pPr>
+            <a:r>
+              <a:rPr lang="en-US" altLang="ko-KR" dirty="0" err="1"/>
+              <a:t>PlayStore</a:t>
+            </a:r>
+            <a:r>
+              <a:rPr lang="en-US" altLang="ko-KR" dirty="0"/>
+              <a:t> </a:t>
+            </a:r>
+            <a:r>
+              <a:rPr lang="ko-KR" altLang="en-US" dirty="0"/>
+              <a:t>업데이트 및 의견 제출을 통한 앱 민감 권한 사용 유지</a:t>
+            </a:r>
+          </a:p>
+          <a:p>
+            <a:pPr marL="685800" lvl="1" indent="-228600">
+              <a:buFont typeface="Arial" panose="020B0604020202020204" pitchFamily="34" charset="0"/>
+              <a:buChar char="•"/>
+            </a:pPr>
+            <a:r>
+              <a:rPr lang="en-US" altLang="ko-KR" dirty="0"/>
+              <a:t>KNOX(Samsung), </a:t>
+            </a:r>
+            <a:r>
+              <a:rPr lang="ko-KR" altLang="en-US" dirty="0"/>
+              <a:t>백신 </a:t>
+            </a:r>
+            <a:r>
+              <a:rPr lang="en-US" altLang="ko-KR" dirty="0"/>
+              <a:t>MSDK(</a:t>
+            </a:r>
+            <a:r>
+              <a:rPr lang="ko-KR" altLang="en-US" dirty="0" err="1"/>
+              <a:t>안랩</a:t>
+            </a:r>
+            <a:r>
+              <a:rPr lang="en-US" altLang="ko-KR" dirty="0"/>
+              <a:t>)</a:t>
+            </a:r>
+            <a:r>
+              <a:rPr lang="ko-KR" altLang="en-US" dirty="0"/>
+              <a:t>을 통한 외부 회사의 라이브러리 사용 및 협업 경험</a:t>
+            </a:r>
+            <a:endParaRPr lang="en-US" altLang="ko-KR" dirty="0"/>
+          </a:p>
+          <a:p>
+            <a:pPr marL="685800" lvl="1" indent="-228600">
+              <a:buFont typeface="Arial" panose="020B0604020202020204" pitchFamily="34" charset="0"/>
+              <a:buChar char="•"/>
+            </a:pPr>
+            <a:endParaRPr lang="en-US" altLang="ko-KR" dirty="0"/>
+          </a:p>
+          <a:p>
+            <a:pPr marL="228600" indent="-228600">
+              <a:buFont typeface="Arial" panose="020B0604020202020204" pitchFamily="34" charset="0"/>
+              <a:buChar char="•"/>
+            </a:pPr>
+            <a:r>
+              <a:rPr lang="en-US" altLang="ko-KR" b="1" dirty="0"/>
+              <a:t>C# - ASP.NET</a:t>
+            </a:r>
+            <a:r>
+              <a:rPr lang="en-US" altLang="ko-KR" dirty="0"/>
+              <a:t>: 10</a:t>
+            </a:r>
+            <a:r>
+              <a:rPr lang="ko-KR" altLang="en-US" dirty="0"/>
+              <a:t>개월 간의 서버 이전 프로젝트 및 </a:t>
+            </a:r>
+            <a:r>
+              <a:rPr lang="en-US" altLang="ko-KR" dirty="0"/>
+              <a:t>1</a:t>
+            </a:r>
+            <a:r>
+              <a:rPr lang="ko-KR" altLang="en-US" dirty="0"/>
+              <a:t>년 간의 </a:t>
+            </a:r>
+            <a:r>
+              <a:rPr lang="en-US" altLang="ko-KR" dirty="0"/>
+              <a:t>ASP, ASP.NET</a:t>
+            </a:r>
+            <a:r>
+              <a:rPr lang="ko-KR" altLang="en-US" dirty="0"/>
+              <a:t> 서비스 유지 보수 경험 </a:t>
+            </a:r>
+          </a:p>
+          <a:p>
+            <a:pPr marL="742950" lvl="1" indent="-285750">
+              <a:buFont typeface="Arial" panose="020B0604020202020204" pitchFamily="34" charset="0"/>
+              <a:buChar char="•"/>
+            </a:pPr>
+            <a:r>
+              <a:rPr lang="en-US" altLang="ko-KR" dirty="0"/>
+              <a:t>DBMS </a:t>
+            </a:r>
+            <a:r>
+              <a:rPr lang="ko-KR" altLang="en-US" dirty="0"/>
+              <a:t>변경 이슈로 </a:t>
+            </a:r>
+            <a:r>
+              <a:rPr lang="en-US" altLang="ko-KR" dirty="0" err="1"/>
+              <a:t>SqlHelper</a:t>
+            </a:r>
+            <a:r>
+              <a:rPr lang="en-US" altLang="ko-KR" dirty="0"/>
+              <a:t> </a:t>
+            </a:r>
+            <a:r>
+              <a:rPr lang="ko-KR" altLang="en-US" dirty="0"/>
+              <a:t>라이브러리를 사용한 로직을 </a:t>
+            </a:r>
+            <a:r>
+              <a:rPr lang="en-US" altLang="ko-KR" dirty="0"/>
+              <a:t>ODBC </a:t>
+            </a:r>
+            <a:r>
+              <a:rPr lang="ko-KR" altLang="en-US" dirty="0"/>
+              <a:t>드라이버 라이브러리로 교체</a:t>
+            </a:r>
+            <a:r>
+              <a:rPr lang="en-US" altLang="ko-KR" dirty="0"/>
+              <a:t>. </a:t>
+            </a:r>
+          </a:p>
+          <a:p>
+            <a:pPr marL="1143000" lvl="2" indent="-228600">
+              <a:buFont typeface="Arial" panose="020B0604020202020204" pitchFamily="34" charset="0"/>
+              <a:buChar char="•"/>
+            </a:pPr>
+            <a:r>
+              <a:rPr lang="ko-KR" altLang="en-US" dirty="0"/>
+              <a:t>비즈니스 로직에 영향을 주지 않고 </a:t>
+            </a:r>
+            <a:r>
+              <a:rPr lang="en-US" altLang="ko-KR" dirty="0"/>
+              <a:t>RDBMS </a:t>
+            </a:r>
+            <a:r>
+              <a:rPr lang="ko-KR" altLang="en-US" dirty="0"/>
+              <a:t>변경이 가능하도록 </a:t>
+            </a:r>
+            <a:r>
+              <a:rPr lang="en-US" altLang="ko-KR" dirty="0"/>
+              <a:t>2~300</a:t>
+            </a:r>
+            <a:r>
+              <a:rPr lang="ko-KR" altLang="en-US" dirty="0"/>
+              <a:t>라인만으로 적용</a:t>
+            </a:r>
+          </a:p>
+          <a:p>
+            <a:pPr marL="1143000" lvl="2" indent="-228600">
+              <a:buFont typeface="Arial" panose="020B0604020202020204" pitchFamily="34" charset="0"/>
+              <a:buChar char="•"/>
+            </a:pPr>
+            <a:r>
+              <a:rPr lang="en-US" altLang="ko-KR" dirty="0"/>
+              <a:t>4000</a:t>
+            </a:r>
+            <a:r>
+              <a:rPr lang="ko-KR" altLang="en-US" dirty="0"/>
+              <a:t>줄 가량의 </a:t>
+            </a:r>
+            <a:r>
+              <a:rPr lang="en-US" altLang="ko-KR" dirty="0"/>
+              <a:t>ASP.NET</a:t>
+            </a:r>
+            <a:r>
+              <a:rPr lang="ko-KR" altLang="en-US" dirty="0"/>
+              <a:t> 코드 분석과 </a:t>
+            </a:r>
+            <a:r>
+              <a:rPr lang="en-US" altLang="ko-KR" dirty="0"/>
+              <a:t>AWS </a:t>
+            </a:r>
+            <a:r>
+              <a:rPr lang="ko-KR" altLang="en-US" dirty="0"/>
+              <a:t>동작 원리 이해로 </a:t>
+            </a:r>
+            <a:r>
+              <a:rPr lang="en-US" altLang="ko-KR" dirty="0"/>
+              <a:t>Spring Boot </a:t>
+            </a:r>
+            <a:r>
+              <a:rPr lang="ko-KR" altLang="en-US" dirty="0"/>
+              <a:t>전환 시 도움</a:t>
+            </a:r>
+            <a:endParaRPr lang="en-US" altLang="ko-KR" dirty="0"/>
+          </a:p>
+          <a:p>
+            <a:pPr lvl="2"/>
+            <a:endParaRPr lang="ko-KR" altLang="en-US" dirty="0"/>
+          </a:p>
+          <a:p>
+            <a:pPr marL="285750" indent="-285750">
+              <a:buFont typeface="Arial" panose="020B0604020202020204" pitchFamily="34" charset="0"/>
+              <a:buChar char="•"/>
+            </a:pPr>
+            <a:r>
+              <a:rPr lang="ko-KR" altLang="en-US" dirty="0"/>
+              <a:t>기타 </a:t>
+            </a:r>
+            <a:r>
+              <a:rPr lang="en-US" altLang="ko-KR" dirty="0"/>
+              <a:t>: JavaScript - React, asp, Kotlin</a:t>
+            </a:r>
+          </a:p>
+        </p:txBody>
+      </p:sp>
+      <p:sp>
+        <p:nvSpPr>
+          <p:cNvPr id="7" name="TextBox 6">
+            <a:extLst>
+              <a:ext uri="{FF2B5EF4-FFF2-40B4-BE49-F238E27FC236}">
+                <a16:creationId xmlns:a16="http://schemas.microsoft.com/office/drawing/2014/main" id="{E3BBCED1-B18E-E1AA-30D2-59C7FF3EA7D4}"/>
+              </a:ext>
+            </a:extLst>
+          </p:cNvPr>
+          <p:cNvSpPr txBox="1"/>
+          <p:nvPr/>
+        </p:nvSpPr>
+        <p:spPr>
+          <a:xfrm>
+            <a:off x="1120556" y="1516357"/>
+            <a:ext cx="6760702" cy="461665"/>
+          </a:xfrm>
+          <a:prstGeom prst="rect">
+            <a:avLst/>
+          </a:prstGeom>
+          <a:noFill/>
+        </p:spPr>
+        <p:txBody>
+          <a:bodyPr wrap="square" rtlCol="0">
+            <a:spAutoFit/>
+          </a:bodyPr>
+          <a:lstStyle/>
+          <a:p>
+            <a:r>
+              <a:rPr lang="ko-KR" altLang="en-US" sz="2400" b="1" dirty="0">
+                <a:effectLst/>
+                <a:latin typeface="Apple Color Emoji"/>
+              </a:rPr>
+              <a:t>🛠️ </a:t>
+            </a:r>
+            <a:r>
+              <a:rPr lang="en-US" altLang="ko-KR" sz="2400" b="1" dirty="0">
+                <a:effectLst/>
+              </a:rPr>
+              <a:t>Java</a:t>
+            </a:r>
+            <a:r>
+              <a:rPr lang="en-US" altLang="ko-KR" sz="2400" dirty="0">
+                <a:effectLst/>
+              </a:rPr>
+              <a:t> - Android, Spring Boot | </a:t>
+            </a:r>
+            <a:r>
+              <a:rPr lang="en-US" altLang="ko-KR" sz="2400" b="1" dirty="0">
+                <a:effectLst/>
+              </a:rPr>
+              <a:t>C#</a:t>
+            </a:r>
+            <a:r>
+              <a:rPr lang="en-US" altLang="ko-KR" sz="2400" dirty="0">
+                <a:effectLst/>
+              </a:rPr>
+              <a:t> - ASP.NET</a:t>
+            </a:r>
+            <a:endParaRPr lang="ko-KR" altLang="en-US" sz="2300" b="1" dirty="0"/>
+          </a:p>
+        </p:txBody>
+      </p:sp>
+      <p:pic>
+        <p:nvPicPr>
+          <p:cNvPr id="9" name="그래픽 8">
+            <a:extLst>
+              <a:ext uri="{FF2B5EF4-FFF2-40B4-BE49-F238E27FC236}">
+                <a16:creationId xmlns:a16="http://schemas.microsoft.com/office/drawing/2014/main" id="{B5083F2C-C6E6-CF1C-1C8C-FFFC73370F30}"/>
+              </a:ext>
+            </a:extLst>
+          </p:cNvPr>
+          <p:cNvPicPr>
+            <a:picLocks noChangeAspect="1"/>
+          </p:cNvPicPr>
+          <p:nvPr/>
+        </p:nvPicPr>
+        <p:blipFill>
+          <a:blip r:embed="rId6">
+            <a:extLst>
+              <a:ext uri="{96DAC541-7B7A-43D3-8B79-37D633B846F1}">
+                <asvg:svgBlip xmlns:asvg="http://schemas.microsoft.com/office/drawing/2016/SVG/main" r:embed="rId7"/>
+              </a:ext>
+            </a:extLst>
+          </a:blip>
+          <a:stretch>
+            <a:fillRect/>
+          </a:stretch>
+        </p:blipFill>
+        <p:spPr>
+          <a:xfrm>
+            <a:off x="12155465" y="3126129"/>
+            <a:ext cx="1504950" cy="1352550"/>
+          </a:xfrm>
+          <a:prstGeom prst="rect">
+            <a:avLst/>
+          </a:prstGeom>
+        </p:spPr>
+      </p:pic>
+      <p:pic>
+        <p:nvPicPr>
+          <p:cNvPr id="15" name="그래픽 14">
+            <a:extLst>
+              <a:ext uri="{FF2B5EF4-FFF2-40B4-BE49-F238E27FC236}">
+                <a16:creationId xmlns:a16="http://schemas.microsoft.com/office/drawing/2014/main" id="{CDC77DD3-0C3C-213D-C1C6-46B5F139D804}"/>
+              </a:ext>
+            </a:extLst>
+          </p:cNvPr>
+          <p:cNvPicPr>
+            <a:picLocks noChangeAspect="1"/>
+          </p:cNvPicPr>
+          <p:nvPr/>
+        </p:nvPicPr>
+        <p:blipFill>
+          <a:blip r:embed="rId8">
+            <a:extLst>
+              <a:ext uri="{96DAC541-7B7A-43D3-8B79-37D633B846F1}">
+                <asvg:svgBlip xmlns:asvg="http://schemas.microsoft.com/office/drawing/2016/SVG/main" r:embed="rId9"/>
+              </a:ext>
+            </a:extLst>
+          </a:blip>
+          <a:stretch>
+            <a:fillRect/>
+          </a:stretch>
+        </p:blipFill>
+        <p:spPr>
+          <a:xfrm>
+            <a:off x="11062462" y="4088729"/>
+            <a:ext cx="1504950" cy="1504950"/>
+          </a:xfrm>
+          <a:prstGeom prst="rect">
+            <a:avLst/>
+          </a:prstGeom>
+        </p:spPr>
+      </p:pic>
+      <p:pic>
+        <p:nvPicPr>
+          <p:cNvPr id="17" name="그림 16">
+            <a:extLst>
+              <a:ext uri="{FF2B5EF4-FFF2-40B4-BE49-F238E27FC236}">
+                <a16:creationId xmlns:a16="http://schemas.microsoft.com/office/drawing/2014/main" id="{D43A674D-C9DB-6C08-3ECB-0DF445E66AD7}"/>
+              </a:ext>
+            </a:extLst>
+          </p:cNvPr>
+          <p:cNvPicPr>
+            <a:picLocks noChangeAspect="1"/>
+          </p:cNvPicPr>
+          <p:nvPr/>
+        </p:nvPicPr>
+        <p:blipFill>
+          <a:blip r:embed="rId10">
+            <a:extLst>
+              <a:ext uri="{28A0092B-C50C-407E-A947-70E740481C1C}">
+                <a14:useLocalDpi xmlns:a14="http://schemas.microsoft.com/office/drawing/2010/main" val="0"/>
+              </a:ext>
+            </a:extLst>
+          </a:blip>
+          <a:stretch>
+            <a:fillRect/>
+          </a:stretch>
+        </p:blipFill>
+        <p:spPr>
+          <a:xfrm>
+            <a:off x="12240001" y="5172407"/>
+            <a:ext cx="1219200" cy="1219200"/>
+          </a:xfrm>
+          <a:prstGeom prst="rect">
+            <a:avLst/>
+          </a:prstGeom>
+        </p:spPr>
+      </p:pic>
+      <p:sp>
+        <p:nvSpPr>
+          <p:cNvPr id="23" name="직사각형 22">
+            <a:extLst>
+              <a:ext uri="{FF2B5EF4-FFF2-40B4-BE49-F238E27FC236}">
+                <a16:creationId xmlns:a16="http://schemas.microsoft.com/office/drawing/2014/main" id="{3C77E932-E4EB-91B8-E9BB-F207B0A00758}"/>
+              </a:ext>
+            </a:extLst>
+          </p:cNvPr>
+          <p:cNvSpPr/>
+          <p:nvPr/>
+        </p:nvSpPr>
+        <p:spPr>
+          <a:xfrm>
+            <a:off x="10941269" y="1978022"/>
+            <a:ext cx="2816772" cy="4780130"/>
+          </a:xfrm>
+          <a:prstGeom prst="rect">
+            <a:avLst/>
+          </a:prstGeom>
+          <a:solidFill>
+            <a:schemeClr val="bg1">
+              <a:alpha val="51000"/>
+            </a:schemeClr>
+          </a:solidFill>
+          <a:ln>
+            <a:noFill/>
+          </a:ln>
+        </p:spPr>
+        <p:style>
+          <a:lnRef idx="2">
+            <a:schemeClr val="accent1">
+              <a:shade val="15000"/>
+            </a:schemeClr>
+          </a:lnRef>
+          <a:fillRef idx="1">
+            <a:schemeClr val="accent1"/>
+          </a:fillRef>
+          <a:effectRef idx="0">
+            <a:schemeClr val="accent1"/>
+          </a:effectRef>
+          <a:fontRef idx="minor">
+            <a:schemeClr val="lt1"/>
+          </a:fontRef>
+        </p:style>
+        <p:txBody>
+          <a:bodyPr rtlCol="0" anchor="ctr"/>
+          <a:lstStyle/>
+          <a:p>
+            <a:pPr algn="ctr"/>
+            <a:endParaRPr lang="ko-KR" altLang="en-US"/>
+          </a:p>
+        </p:txBody>
+      </p:sp>
+    </p:spTree>
+    <p:extLst>
+      <p:ext uri="{BB962C8B-B14F-4D97-AF65-F5344CB8AC3E}">
+        <p14:creationId xmlns:p14="http://schemas.microsoft.com/office/powerpoint/2010/main" val="2292229346"/>
+      </p:ext>
+    </p:extLst>
+  </p:cSld>
+  <p:clrMapOvr>
+    <a:masterClrMapping/>
+  </p:clrMapOvr>
+</p:sld>
+</file>
+
+<file path=ppt/slides/slide3.xml><?xml version="1.0" encoding="utf-8"?>
+<p:sld xmlns:a="http://schemas.openxmlformats.org/drawingml/2006/main" xmlns:r="http://schemas.openxmlformats.org/officeDocument/2006/relationships" xmlns:p="http://schemas.openxmlformats.org/presentationml/2006/main">
+  <p:cSld>
+    <p:spTree>
+      <p:nvGrpSpPr>
+        <p:cNvPr id="1" name="">
+          <a:extLst>
+            <a:ext uri="{FF2B5EF4-FFF2-40B4-BE49-F238E27FC236}">
+              <a16:creationId xmlns:a16="http://schemas.microsoft.com/office/drawing/2014/main" id="{911275E3-0551-870C-47D3-4BD2B4E3B10E}"/>
+            </a:ext>
+          </a:extLst>
+        </p:cNvPr>
+        <p:cNvGrpSpPr/>
+        <p:nvPr/>
+      </p:nvGrpSpPr>
+      <p:grpSpPr>
+        <a:xfrm>
+          <a:off x="0" y="0"/>
+          <a:ext cx="0" cy="0"/>
+          <a:chOff x="0" y="0"/>
+          <a:chExt cx="0" cy="0"/>
+        </a:xfrm>
+      </p:grpSpPr>
+      <p:sp>
+        <p:nvSpPr>
+          <p:cNvPr id="6" name="직사각형 5">
+            <a:extLst>
+              <a:ext uri="{FF2B5EF4-FFF2-40B4-BE49-F238E27FC236}">
+                <a16:creationId xmlns:a16="http://schemas.microsoft.com/office/drawing/2014/main" id="{A3828BAD-E2CF-3575-6ED4-C7EDE3DFB0F1}"/>
+              </a:ext>
+            </a:extLst>
+          </p:cNvPr>
+          <p:cNvSpPr/>
+          <p:nvPr/>
+        </p:nvSpPr>
+        <p:spPr>
+          <a:xfrm>
+            <a:off x="1140380" y="1443631"/>
+            <a:ext cx="7413845" cy="619592"/>
+          </a:xfrm>
+          <a:prstGeom prst="rect">
+            <a:avLst/>
+          </a:prstGeom>
+          <a:solidFill>
+            <a:srgbClr val="252525">
+              <a:alpha val="10000"/>
+            </a:srgbClr>
+          </a:solidFill>
+          <a:ln>
+            <a:noFill/>
+          </a:ln>
+        </p:spPr>
+        <p:style>
+          <a:lnRef idx="2">
+            <a:schemeClr val="accent1">
+              <a:shade val="15000"/>
+            </a:schemeClr>
+          </a:lnRef>
+          <a:fillRef idx="1">
+            <a:schemeClr val="accent1"/>
+          </a:fillRef>
+          <a:effectRef idx="0">
+            <a:schemeClr val="accent1"/>
+          </a:effectRef>
+          <a:fontRef idx="minor">
+            <a:schemeClr val="lt1"/>
+          </a:fontRef>
+        </p:style>
+        <p:txBody>
+          <a:bodyPr rtlCol="0" anchor="ctr"/>
+          <a:lstStyle/>
+          <a:p>
+            <a:pPr algn="ctr"/>
+            <a:endParaRPr lang="ko-KR" altLang="en-US"/>
+          </a:p>
+        </p:txBody>
+      </p:sp>
+      <p:grpSp>
+        <p:nvGrpSpPr>
+          <p:cNvPr id="22" name="그룹 21">
+            <a:extLst>
+              <a:ext uri="{FF2B5EF4-FFF2-40B4-BE49-F238E27FC236}">
+                <a16:creationId xmlns:a16="http://schemas.microsoft.com/office/drawing/2014/main" id="{4BB0D444-C711-DEBB-E738-212A97E9950A}"/>
+              </a:ext>
+            </a:extLst>
+          </p:cNvPr>
+          <p:cNvGrpSpPr/>
+          <p:nvPr/>
+        </p:nvGrpSpPr>
+        <p:grpSpPr>
+          <a:xfrm>
+            <a:off x="11153488" y="2234046"/>
+            <a:ext cx="2173026" cy="1143120"/>
+            <a:chOff x="11153488" y="2234046"/>
+            <a:chExt cx="2173026" cy="1143120"/>
+          </a:xfrm>
+        </p:grpSpPr>
+        <p:pic>
+          <p:nvPicPr>
+            <p:cNvPr id="21" name="그림 20">
+              <a:extLst>
+                <a:ext uri="{FF2B5EF4-FFF2-40B4-BE49-F238E27FC236}">
+                  <a16:creationId xmlns:a16="http://schemas.microsoft.com/office/drawing/2014/main" id="{0AB387F6-E520-0891-8075-77283101906F}"/>
+                </a:ext>
+              </a:extLst>
+            </p:cNvPr>
+            <p:cNvPicPr>
+              <a:picLocks noChangeAspect="1"/>
+            </p:cNvPicPr>
+            <p:nvPr/>
+          </p:nvPicPr>
+          <p:blipFill>
+            <a:blip r:embed="rId2"/>
+            <a:srcRect b="17335"/>
+            <a:stretch/>
+          </p:blipFill>
+          <p:spPr>
+            <a:xfrm>
+              <a:off x="11153488" y="2234046"/>
+              <a:ext cx="2173026" cy="1143120"/>
+            </a:xfrm>
+            <a:prstGeom prst="rect">
+              <a:avLst/>
+            </a:prstGeom>
+            <a:ln>
+              <a:solidFill>
+                <a:srgbClr val="3A75B0"/>
+              </a:solidFill>
+            </a:ln>
+          </p:spPr>
+        </p:pic>
+        <p:pic>
+          <p:nvPicPr>
+            <p:cNvPr id="19" name="그래픽 18">
+              <a:extLst>
+                <a:ext uri="{FF2B5EF4-FFF2-40B4-BE49-F238E27FC236}">
+                  <a16:creationId xmlns:a16="http://schemas.microsoft.com/office/drawing/2014/main" id="{E8786870-3F00-B977-41DB-A32ACBFF8351}"/>
+                </a:ext>
+              </a:extLst>
+            </p:cNvPr>
+            <p:cNvPicPr>
+              <a:picLocks noChangeAspect="1"/>
+            </p:cNvPicPr>
+            <p:nvPr/>
+          </p:nvPicPr>
+          <p:blipFill>
+            <a:blip r:embed="rId3">
+              <a:extLst>
+                <a:ext uri="{96DAC541-7B7A-43D3-8B79-37D633B846F1}">
+                  <asvg:svgBlip xmlns:asvg="http://schemas.microsoft.com/office/drawing/2016/SVG/main" r:embed="rId4"/>
+                </a:ext>
+              </a:extLst>
+            </a:blip>
+            <a:stretch>
+              <a:fillRect/>
+            </a:stretch>
+          </p:blipFill>
+          <p:spPr>
+            <a:xfrm>
+              <a:off x="11153488" y="2265657"/>
+              <a:ext cx="2173026" cy="1086513"/>
+            </a:xfrm>
+            <a:prstGeom prst="rect">
+              <a:avLst/>
+            </a:prstGeom>
+          </p:spPr>
+        </p:pic>
+      </p:grpSp>
+      <p:sp>
+        <p:nvSpPr>
+          <p:cNvPr id="4" name="TextBox 3">
+            <a:extLst>
+              <a:ext uri="{FF2B5EF4-FFF2-40B4-BE49-F238E27FC236}">
+                <a16:creationId xmlns:a16="http://schemas.microsoft.com/office/drawing/2014/main" id="{FB5C8863-8DDA-E9B2-148D-45F40B90E01C}"/>
+              </a:ext>
+            </a:extLst>
+          </p:cNvPr>
+          <p:cNvSpPr txBox="1"/>
+          <p:nvPr/>
+        </p:nvSpPr>
+        <p:spPr>
+          <a:xfrm>
+            <a:off x="621792" y="564922"/>
+            <a:ext cx="12088368" cy="707886"/>
+          </a:xfrm>
+          <a:prstGeom prst="rect">
+            <a:avLst/>
+          </a:prstGeom>
+          <a:noFill/>
+        </p:spPr>
+        <p:txBody>
+          <a:bodyPr wrap="square" rtlCol="0">
+            <a:spAutoFit/>
+          </a:bodyPr>
+          <a:lstStyle/>
+          <a:p>
+            <a:r>
+              <a:rPr lang="en-US" altLang="ko-KR" sz="4000" b="1" dirty="0">
+                <a:solidFill>
+                  <a:srgbClr val="57B5AF"/>
+                </a:solidFill>
+              </a:rPr>
+              <a:t>Skills / </a:t>
+            </a:r>
+            <a:r>
+              <a:rPr lang="en-US" altLang="ko-KR" sz="4000" b="1" dirty="0">
+                <a:solidFill>
+                  <a:srgbClr val="57B5AF"/>
+                </a:solidFill>
+                <a:effectLst/>
+              </a:rPr>
+              <a:t>Infrastructure</a:t>
+            </a:r>
+            <a:endParaRPr lang="ko-KR" altLang="en-US" sz="4000" b="1" dirty="0">
+              <a:solidFill>
+                <a:srgbClr val="57B5AF"/>
+              </a:solidFill>
+            </a:endParaRPr>
+          </a:p>
+        </p:txBody>
+      </p:sp>
+      <p:sp>
+        <p:nvSpPr>
+          <p:cNvPr id="5" name="TextBox 4">
+            <a:extLst>
+              <a:ext uri="{FF2B5EF4-FFF2-40B4-BE49-F238E27FC236}">
+                <a16:creationId xmlns:a16="http://schemas.microsoft.com/office/drawing/2014/main" id="{2495678D-B775-6B22-0395-6537D1588E9C}"/>
+              </a:ext>
+            </a:extLst>
+          </p:cNvPr>
+          <p:cNvSpPr txBox="1"/>
+          <p:nvPr/>
+        </p:nvSpPr>
+        <p:spPr>
+          <a:xfrm>
+            <a:off x="1120555" y="2234046"/>
+            <a:ext cx="10235045" cy="4247317"/>
+          </a:xfrm>
+          <a:prstGeom prst="rect">
+            <a:avLst/>
+          </a:prstGeom>
+          <a:noFill/>
+        </p:spPr>
+        <p:txBody>
+          <a:bodyPr wrap="square" rtlCol="0">
+            <a:spAutoFit/>
+          </a:bodyPr>
+          <a:lstStyle/>
+          <a:p>
+            <a:pPr marL="285750" indent="-285750">
+              <a:buFont typeface="Arial" panose="020B0604020202020204" pitchFamily="34" charset="0"/>
+              <a:buChar char="•"/>
+            </a:pPr>
+            <a:r>
+              <a:rPr lang="en-US" altLang="ko-KR" b="1" dirty="0">
+                <a:effectLst/>
+              </a:rPr>
+              <a:t>Window Server (On-Premise, Cloud)</a:t>
+            </a:r>
+            <a:r>
+              <a:rPr lang="en-US" altLang="ko-KR" dirty="0"/>
+              <a:t>: Window Server </a:t>
+            </a:r>
+            <a:r>
+              <a:rPr lang="ko-KR" altLang="en-US" dirty="0"/>
+              <a:t>및 </a:t>
+            </a:r>
+            <a:r>
+              <a:rPr lang="en-US" altLang="ko-KR" dirty="0"/>
+              <a:t>IIS </a:t>
+            </a:r>
+            <a:r>
+              <a:rPr lang="ko-KR" altLang="en-US" dirty="0"/>
+              <a:t>운용 경험</a:t>
+            </a:r>
+            <a:r>
+              <a:rPr lang="en-US" altLang="ko-KR" dirty="0"/>
+              <a:t>.</a:t>
+            </a:r>
+            <a:br>
+              <a:rPr lang="en-US" altLang="ko-KR" dirty="0"/>
+            </a:br>
+            <a:r>
+              <a:rPr lang="ko-KR" altLang="en-US" dirty="0"/>
+              <a:t>서버 관리 및 보안 패치 적용을 통한 서버 유지 보수 업무 진행</a:t>
+            </a:r>
+            <a:r>
+              <a:rPr lang="en-US" altLang="ko-KR" dirty="0"/>
+              <a:t>. </a:t>
+            </a:r>
+            <a:br>
+              <a:rPr lang="en-US" altLang="ko-KR" dirty="0"/>
+            </a:br>
+            <a:r>
+              <a:rPr lang="ko-KR" altLang="en-US" dirty="0"/>
+              <a:t>구버전의 </a:t>
+            </a:r>
+            <a:r>
+              <a:rPr lang="en-US" altLang="ko-KR" b="1" dirty="0">
+                <a:effectLst/>
+              </a:rPr>
+              <a:t>Window Server (2002 R2)</a:t>
+            </a:r>
+            <a:r>
+              <a:rPr lang="ko-KR" altLang="en-US" dirty="0"/>
+              <a:t> 에서 </a:t>
+            </a:r>
+            <a:r>
+              <a:rPr lang="ko-KR" altLang="en-US" b="1" dirty="0">
+                <a:effectLst/>
+              </a:rPr>
+              <a:t>최근 버전의 </a:t>
+            </a:r>
+            <a:r>
+              <a:rPr lang="en-US" altLang="ko-KR" b="1" dirty="0">
+                <a:effectLst/>
+              </a:rPr>
+              <a:t>Window Server(2016)</a:t>
+            </a:r>
+            <a:r>
+              <a:rPr lang="ko-KR" altLang="en-US" dirty="0">
+                <a:effectLst/>
+              </a:rPr>
+              <a:t>으</a:t>
+            </a:r>
+            <a:r>
+              <a:rPr lang="ko-KR" altLang="en-US" dirty="0"/>
+              <a:t>로</a:t>
+            </a:r>
+            <a:br>
+              <a:rPr lang="en-US" altLang="ko-KR" dirty="0"/>
+            </a:br>
+            <a:r>
+              <a:rPr lang="ko-KR" altLang="en-US" b="1" dirty="0"/>
+              <a:t>이전 작업 프로젝트</a:t>
+            </a:r>
+            <a:r>
+              <a:rPr lang="ko-KR" altLang="en-US" dirty="0"/>
+              <a:t> 경험</a:t>
+            </a:r>
+            <a:endParaRPr lang="en-US" altLang="ko-KR" dirty="0"/>
+          </a:p>
+          <a:p>
+            <a:pPr marL="285750" indent="-285750">
+              <a:buFont typeface="Arial" panose="020B0604020202020204" pitchFamily="34" charset="0"/>
+              <a:buChar char="•"/>
+            </a:pPr>
+            <a:endParaRPr lang="en-US" altLang="ko-KR" dirty="0"/>
+          </a:p>
+          <a:p>
+            <a:pPr marL="285750" indent="-285750">
+              <a:buFont typeface="Arial" panose="020B0604020202020204" pitchFamily="34" charset="0"/>
+              <a:buChar char="•"/>
+            </a:pPr>
+            <a:endParaRPr lang="en-US" altLang="ko-KR" dirty="0"/>
+          </a:p>
+          <a:p>
+            <a:pPr marL="285750" indent="-285750">
+              <a:buFont typeface="Arial" panose="020B0604020202020204" pitchFamily="34" charset="0"/>
+              <a:buChar char="•"/>
+            </a:pPr>
+            <a:r>
+              <a:rPr lang="en-US" altLang="ko-KR" b="1" dirty="0">
+                <a:effectLst/>
+              </a:rPr>
+              <a:t>Linux (Cloud)</a:t>
+            </a:r>
+            <a:r>
+              <a:rPr lang="en-US" altLang="ko-KR" dirty="0"/>
+              <a:t>: </a:t>
+            </a:r>
+            <a:r>
+              <a:rPr lang="ko-KR" altLang="en-US" dirty="0"/>
+              <a:t>리눅스의 기본 명령어 사용 및 리눅스 기본 트리 구조 및 파일 시스템에 대한 이해</a:t>
+            </a:r>
+            <a:r>
+              <a:rPr lang="en-US" altLang="ko-KR" dirty="0"/>
+              <a:t>.</a:t>
+            </a:r>
+            <a:br>
+              <a:rPr lang="en-US" altLang="ko-KR" dirty="0"/>
+            </a:br>
+            <a:r>
+              <a:rPr lang="en-US" altLang="ko-KR" b="1" dirty="0" err="1"/>
+              <a:t>NginX</a:t>
+            </a:r>
+            <a:r>
+              <a:rPr lang="ko-KR" altLang="en-US" b="1" dirty="0"/>
+              <a:t>를 통한 </a:t>
+            </a:r>
+            <a:r>
+              <a:rPr lang="en-US" altLang="ko-KR" b="1" dirty="0"/>
+              <a:t>Frontend Web Server </a:t>
+            </a:r>
+            <a:r>
+              <a:rPr lang="ko-KR" altLang="en-US" b="1" dirty="0"/>
+              <a:t>구동</a:t>
+            </a:r>
+            <a:r>
+              <a:rPr lang="ko-KR" altLang="en-US" dirty="0"/>
+              <a:t> 가능</a:t>
+            </a:r>
+            <a:r>
+              <a:rPr lang="en-US" altLang="ko-KR" dirty="0"/>
+              <a:t>.</a:t>
+            </a:r>
+          </a:p>
+          <a:p>
+            <a:pPr marL="285750" indent="-285750">
+              <a:buFont typeface="Arial" panose="020B0604020202020204" pitchFamily="34" charset="0"/>
+              <a:buChar char="•"/>
+            </a:pPr>
+            <a:endParaRPr lang="en-US" altLang="ko-KR" b="1" dirty="0"/>
+          </a:p>
+          <a:p>
+            <a:pPr marL="285750" indent="-285750">
+              <a:buFont typeface="Arial" panose="020B0604020202020204" pitchFamily="34" charset="0"/>
+              <a:buChar char="•"/>
+            </a:pPr>
+            <a:endParaRPr lang="en-US" altLang="ko-KR" b="1" dirty="0"/>
+          </a:p>
+          <a:p>
+            <a:pPr marL="285750" indent="-285750">
+              <a:buFont typeface="Arial" panose="020B0604020202020204" pitchFamily="34" charset="0"/>
+              <a:buChar char="•"/>
+            </a:pPr>
+            <a:r>
+              <a:rPr lang="en-US" altLang="ko-KR" b="1" dirty="0"/>
+              <a:t>AWS(Cloud)</a:t>
+            </a:r>
+            <a:r>
+              <a:rPr lang="en-US" altLang="ko-KR" dirty="0"/>
+              <a:t>: VPC</a:t>
+            </a:r>
+            <a:r>
+              <a:rPr lang="ko-KR" altLang="en-US" dirty="0"/>
+              <a:t>를 시작으로 전반적인 서버 설계</a:t>
+            </a:r>
+            <a:r>
+              <a:rPr lang="en-US" altLang="ko-KR" dirty="0"/>
+              <a:t>.</a:t>
+            </a:r>
+            <a:br>
+              <a:rPr lang="en-US" altLang="ko-KR" dirty="0"/>
+            </a:br>
+            <a:r>
+              <a:rPr lang="ko-KR" altLang="en-US" dirty="0"/>
+              <a:t>라우팅 테이블과 인터넷 게이트웨이를 이용한 </a:t>
+            </a:r>
+            <a:r>
+              <a:rPr lang="en-US" altLang="ko-KR" dirty="0"/>
+              <a:t>EC2 </a:t>
+            </a:r>
+            <a:r>
+              <a:rPr lang="ko-KR" altLang="en-US" dirty="0"/>
+              <a:t>인스턴스의 외부 통신</a:t>
+            </a:r>
+            <a:r>
+              <a:rPr lang="en-US" altLang="ko-KR" dirty="0"/>
+              <a:t> </a:t>
+            </a:r>
+            <a:r>
+              <a:rPr lang="ko-KR" altLang="en-US" dirty="0"/>
+              <a:t>구조 설계</a:t>
+            </a:r>
+            <a:r>
+              <a:rPr lang="en-US" altLang="ko-KR" dirty="0"/>
+              <a:t>.</a:t>
+            </a:r>
+            <a:br>
+              <a:rPr lang="en-US" altLang="ko-KR" dirty="0"/>
+            </a:br>
+            <a:r>
+              <a:rPr lang="en-US" altLang="ko-KR" b="1" dirty="0"/>
+              <a:t>ACM, ALB</a:t>
+            </a:r>
+            <a:r>
+              <a:rPr lang="ko-KR" altLang="en-US" dirty="0"/>
+              <a:t>를 사용한 </a:t>
+            </a:r>
+            <a:r>
+              <a:rPr lang="en-US" altLang="ko-KR" b="1" dirty="0"/>
+              <a:t>https</a:t>
+            </a:r>
+            <a:r>
+              <a:rPr lang="en-US" altLang="ko-KR" dirty="0"/>
+              <a:t> </a:t>
+            </a:r>
+            <a:r>
+              <a:rPr lang="ko-KR" altLang="en-US" dirty="0"/>
+              <a:t>적용</a:t>
+            </a:r>
+            <a:br>
+              <a:rPr lang="en-US" altLang="ko-KR" dirty="0"/>
+            </a:br>
+            <a:r>
+              <a:rPr lang="en-US" altLang="ko-KR" b="1" dirty="0"/>
+              <a:t>Cloud Watch</a:t>
+            </a:r>
+            <a:r>
+              <a:rPr lang="ko-KR" altLang="en-US" dirty="0"/>
+              <a:t> 기반 서버 로그 수집 및 모니터링 환경 구성</a:t>
+            </a:r>
+            <a:br>
+              <a:rPr lang="en-US" altLang="ko-KR" dirty="0"/>
+            </a:br>
+            <a:r>
+              <a:rPr lang="en-US" altLang="ko-KR" dirty="0"/>
+              <a:t>RDS </a:t>
+            </a:r>
+            <a:r>
+              <a:rPr lang="ko-KR" altLang="en-US" dirty="0"/>
+              <a:t>보안을 위한 </a:t>
+            </a:r>
+            <a:r>
+              <a:rPr lang="en-US" altLang="ko-KR" b="1" dirty="0"/>
+              <a:t>private subnet </a:t>
+            </a:r>
+            <a:r>
+              <a:rPr lang="ko-KR" altLang="en-US" dirty="0"/>
+              <a:t>및</a:t>
+            </a:r>
+            <a:r>
+              <a:rPr lang="ko-KR" altLang="en-US" b="1" dirty="0"/>
+              <a:t> </a:t>
+            </a:r>
+            <a:r>
+              <a:rPr lang="en-US" altLang="ko-KR" b="1" dirty="0"/>
+              <a:t>Bastion </a:t>
+            </a:r>
+            <a:r>
+              <a:rPr lang="ko-KR" altLang="en-US" b="1" dirty="0"/>
+              <a:t>호스트 </a:t>
+            </a:r>
+            <a:r>
+              <a:rPr lang="ko-KR" altLang="en-US" dirty="0"/>
+              <a:t>구성</a:t>
+            </a:r>
+            <a:endParaRPr lang="en-US" altLang="ko-KR" dirty="0"/>
+          </a:p>
+        </p:txBody>
+      </p:sp>
+      <p:sp>
+        <p:nvSpPr>
+          <p:cNvPr id="7" name="TextBox 6">
+            <a:extLst>
+              <a:ext uri="{FF2B5EF4-FFF2-40B4-BE49-F238E27FC236}">
+                <a16:creationId xmlns:a16="http://schemas.microsoft.com/office/drawing/2014/main" id="{6A76D3D8-E01F-CB70-7737-4ACA3C0A3965}"/>
+              </a:ext>
+            </a:extLst>
+          </p:cNvPr>
+          <p:cNvSpPr txBox="1"/>
+          <p:nvPr/>
+        </p:nvSpPr>
+        <p:spPr>
+          <a:xfrm>
+            <a:off x="1120555" y="1516357"/>
+            <a:ext cx="7413845" cy="461665"/>
+          </a:xfrm>
+          <a:prstGeom prst="rect">
+            <a:avLst/>
+          </a:prstGeom>
+          <a:noFill/>
+        </p:spPr>
+        <p:txBody>
+          <a:bodyPr wrap="square" rtlCol="0">
+            <a:spAutoFit/>
+          </a:bodyPr>
+          <a:lstStyle/>
+          <a:p>
+            <a:r>
+              <a:rPr lang="ko-KR" altLang="en-US" sz="2400" b="1" dirty="0">
+                <a:effectLst/>
+                <a:latin typeface="Apple Color Emoji"/>
+              </a:rPr>
+              <a:t>🛠️ </a:t>
+            </a:r>
+            <a:r>
+              <a:rPr lang="en-US" altLang="ko-KR" sz="2400" b="1" dirty="0"/>
+              <a:t>On-Premise</a:t>
+            </a:r>
+            <a:r>
+              <a:rPr lang="en-US" altLang="ko-KR" sz="2400" dirty="0"/>
+              <a:t>(Window Server, Linux), </a:t>
+            </a:r>
+            <a:r>
+              <a:rPr lang="en-US" altLang="ko-KR" sz="2400" b="1" dirty="0"/>
+              <a:t>Cloud</a:t>
+            </a:r>
+            <a:r>
+              <a:rPr lang="en-US" altLang="ko-KR" sz="2400" dirty="0"/>
+              <a:t>(AWS)</a:t>
+            </a:r>
+            <a:endParaRPr lang="ko-KR" altLang="en-US" sz="2300" b="1" dirty="0"/>
+          </a:p>
+        </p:txBody>
+      </p:sp>
+      <p:pic>
+        <p:nvPicPr>
+          <p:cNvPr id="9" name="그래픽 8">
+            <a:extLst>
+              <a:ext uri="{FF2B5EF4-FFF2-40B4-BE49-F238E27FC236}">
+                <a16:creationId xmlns:a16="http://schemas.microsoft.com/office/drawing/2014/main" id="{BA903D5A-445A-A020-A487-EA94B039C30D}"/>
+              </a:ext>
+            </a:extLst>
+          </p:cNvPr>
+          <p:cNvPicPr>
+            <a:picLocks noChangeAspect="1"/>
+          </p:cNvPicPr>
+          <p:nvPr/>
+        </p:nvPicPr>
+        <p:blipFill>
+          <a:blip r:embed="rId5">
+            <a:extLst>
+              <a:ext uri="{96DAC541-7B7A-43D3-8B79-37D633B846F1}">
+                <asvg:svgBlip xmlns:asvg="http://schemas.microsoft.com/office/drawing/2016/SVG/main" r:embed="rId6"/>
+              </a:ext>
+            </a:extLst>
+          </a:blip>
+          <a:stretch>
+            <a:fillRect/>
+          </a:stretch>
+        </p:blipFill>
+        <p:spPr>
+          <a:xfrm>
+            <a:off x="12155465" y="3126129"/>
+            <a:ext cx="1504950" cy="1352550"/>
+          </a:xfrm>
+          <a:prstGeom prst="rect">
+            <a:avLst/>
+          </a:prstGeom>
+        </p:spPr>
+      </p:pic>
+      <p:pic>
+        <p:nvPicPr>
+          <p:cNvPr id="15" name="그래픽 14">
+            <a:extLst>
+              <a:ext uri="{FF2B5EF4-FFF2-40B4-BE49-F238E27FC236}">
+                <a16:creationId xmlns:a16="http://schemas.microsoft.com/office/drawing/2014/main" id="{8DE821AF-FB9B-B8EC-1DB2-65B55CD43087}"/>
+              </a:ext>
+            </a:extLst>
+          </p:cNvPr>
+          <p:cNvPicPr>
+            <a:picLocks noChangeAspect="1"/>
+          </p:cNvPicPr>
+          <p:nvPr/>
+        </p:nvPicPr>
+        <p:blipFill>
+          <a:blip r:embed="rId7">
+            <a:extLst>
+              <a:ext uri="{96DAC541-7B7A-43D3-8B79-37D633B846F1}">
+                <asvg:svgBlip xmlns:asvg="http://schemas.microsoft.com/office/drawing/2016/SVG/main" r:embed="rId8"/>
+              </a:ext>
+            </a:extLst>
+          </a:blip>
+          <a:stretch>
+            <a:fillRect/>
+          </a:stretch>
+        </p:blipFill>
+        <p:spPr>
+          <a:xfrm>
+            <a:off x="11062462" y="4088729"/>
+            <a:ext cx="1504950" cy="1504950"/>
+          </a:xfrm>
+          <a:prstGeom prst="rect">
+            <a:avLst/>
+          </a:prstGeom>
+        </p:spPr>
+      </p:pic>
+      <p:pic>
+        <p:nvPicPr>
+          <p:cNvPr id="17" name="그림 16">
+            <a:extLst>
+              <a:ext uri="{FF2B5EF4-FFF2-40B4-BE49-F238E27FC236}">
+                <a16:creationId xmlns:a16="http://schemas.microsoft.com/office/drawing/2014/main" id="{885EAE2F-710E-5F01-C759-C702E48990FA}"/>
+              </a:ext>
+            </a:extLst>
+          </p:cNvPr>
+          <p:cNvPicPr>
+            <a:picLocks noChangeAspect="1"/>
+          </p:cNvPicPr>
+          <p:nvPr/>
+        </p:nvPicPr>
+        <p:blipFill>
+          <a:blip r:embed="rId9">
+            <a:extLst>
+              <a:ext uri="{28A0092B-C50C-407E-A947-70E740481C1C}">
+                <a14:useLocalDpi xmlns:a14="http://schemas.microsoft.com/office/drawing/2010/main" val="0"/>
+              </a:ext>
+            </a:extLst>
+          </a:blip>
+          <a:stretch>
+            <a:fillRect/>
+          </a:stretch>
+        </p:blipFill>
+        <p:spPr>
+          <a:xfrm>
+            <a:off x="12240001" y="5172407"/>
+            <a:ext cx="1219200" cy="1219200"/>
+          </a:xfrm>
+          <a:prstGeom prst="rect">
+            <a:avLst/>
+          </a:prstGeom>
+        </p:spPr>
+      </p:pic>
+      <p:sp>
+        <p:nvSpPr>
+          <p:cNvPr id="23" name="직사각형 22">
+            <a:extLst>
+              <a:ext uri="{FF2B5EF4-FFF2-40B4-BE49-F238E27FC236}">
+                <a16:creationId xmlns:a16="http://schemas.microsoft.com/office/drawing/2014/main" id="{65B1D6D8-5D6F-08D8-3C27-F3D4C1EB62E9}"/>
+              </a:ext>
+            </a:extLst>
+          </p:cNvPr>
+          <p:cNvSpPr/>
+          <p:nvPr/>
+        </p:nvSpPr>
+        <p:spPr>
+          <a:xfrm>
+            <a:off x="10941269" y="1978022"/>
+            <a:ext cx="2816772" cy="4780130"/>
+          </a:xfrm>
+          <a:prstGeom prst="rect">
+            <a:avLst/>
+          </a:prstGeom>
+          <a:solidFill>
+            <a:schemeClr val="bg1">
+              <a:alpha val="51000"/>
+            </a:schemeClr>
+          </a:solidFill>
+          <a:ln>
+            <a:noFill/>
+          </a:ln>
+        </p:spPr>
+        <p:style>
+          <a:lnRef idx="2">
+            <a:schemeClr val="accent1">
+              <a:shade val="15000"/>
+            </a:schemeClr>
+          </a:lnRef>
+          <a:fillRef idx="1">
+            <a:schemeClr val="accent1"/>
+          </a:fillRef>
+          <a:effectRef idx="0">
+            <a:schemeClr val="accent1"/>
+          </a:effectRef>
+          <a:fontRef idx="minor">
+            <a:schemeClr val="lt1"/>
+          </a:fontRef>
+        </p:style>
+        <p:txBody>
+          <a:bodyPr rtlCol="0" anchor="ctr"/>
+          <a:lstStyle/>
+          <a:p>
+            <a:pPr algn="ctr"/>
+            <a:endParaRPr lang="ko-KR" altLang="en-US"/>
+          </a:p>
+        </p:txBody>
+      </p:sp>
+    </p:spTree>
+    <p:extLst>
+      <p:ext uri="{BB962C8B-B14F-4D97-AF65-F5344CB8AC3E}">
+        <p14:creationId xmlns:p14="http://schemas.microsoft.com/office/powerpoint/2010/main" val="132003051"/>
+      </p:ext>
+    </p:extLst>
+  </p:cSld>
+  <p:clrMapOvr>
+    <a:masterClrMapping/>
+  </p:clrMapOvr>
+</p:sld>
+</file>
+
+<file path=ppt/slides/slide4.xml><?xml version="1.0" encoding="utf-8"?>
+<p:sld xmlns:a="http://schemas.openxmlformats.org/drawingml/2006/main" xmlns:r="http://schemas.openxmlformats.org/officeDocument/2006/relationships" xmlns:p="http://schemas.openxmlformats.org/presentationml/2006/main">
+  <p:cSld>
+    <p:spTree>
+      <p:nvGrpSpPr>
+        <p:cNvPr id="1" name="">
+          <a:extLst>
+            <a:ext uri="{FF2B5EF4-FFF2-40B4-BE49-F238E27FC236}">
+              <a16:creationId xmlns:a16="http://schemas.microsoft.com/office/drawing/2014/main" id="{547986A6-E972-B946-50CC-0AF042CE6199}"/>
+            </a:ext>
+          </a:extLst>
+        </p:cNvPr>
+        <p:cNvGrpSpPr/>
+        <p:nvPr/>
+      </p:nvGrpSpPr>
+      <p:grpSpPr>
+        <a:xfrm>
+          <a:off x="0" y="0"/>
+          <a:ext cx="0" cy="0"/>
+          <a:chOff x="0" y="0"/>
+          <a:chExt cx="0" cy="0"/>
+        </a:xfrm>
+      </p:grpSpPr>
+      <p:sp>
+        <p:nvSpPr>
+          <p:cNvPr id="3" name="직사각형 2">
+            <a:extLst>
+              <a:ext uri="{FF2B5EF4-FFF2-40B4-BE49-F238E27FC236}">
+                <a16:creationId xmlns:a16="http://schemas.microsoft.com/office/drawing/2014/main" id="{074EF644-1277-F9C3-87E4-2D173A424397}"/>
+              </a:ext>
+            </a:extLst>
+          </p:cNvPr>
+          <p:cNvSpPr/>
+          <p:nvPr/>
+        </p:nvSpPr>
+        <p:spPr>
+          <a:xfrm>
+            <a:off x="1140380" y="1443631"/>
+            <a:ext cx="7413845" cy="619592"/>
+          </a:xfrm>
+          <a:prstGeom prst="rect">
+            <a:avLst/>
+          </a:prstGeom>
+          <a:solidFill>
+            <a:srgbClr val="252525">
+              <a:alpha val="10000"/>
+            </a:srgbClr>
+          </a:solidFill>
+          <a:ln>
+            <a:noFill/>
+          </a:ln>
+        </p:spPr>
+        <p:style>
+          <a:lnRef idx="2">
+            <a:schemeClr val="accent1">
+              <a:shade val="15000"/>
+            </a:schemeClr>
+          </a:lnRef>
+          <a:fillRef idx="1">
+            <a:schemeClr val="accent1"/>
+          </a:fillRef>
+          <a:effectRef idx="0">
+            <a:schemeClr val="accent1"/>
+          </a:effectRef>
+          <a:fontRef idx="minor">
+            <a:schemeClr val="lt1"/>
+          </a:fontRef>
+        </p:style>
+        <p:txBody>
+          <a:bodyPr rtlCol="0" anchor="ctr"/>
+          <a:lstStyle/>
+          <a:p>
+            <a:pPr algn="ctr"/>
+            <a:endParaRPr lang="ko-KR" altLang="en-US"/>
+          </a:p>
+        </p:txBody>
+      </p:sp>
+      <p:grpSp>
+        <p:nvGrpSpPr>
+          <p:cNvPr id="22" name="그룹 21">
+            <a:extLst>
+              <a:ext uri="{FF2B5EF4-FFF2-40B4-BE49-F238E27FC236}">
+                <a16:creationId xmlns:a16="http://schemas.microsoft.com/office/drawing/2014/main" id="{C399AFEC-4B42-CE11-74AC-A559613914C7}"/>
+              </a:ext>
+            </a:extLst>
+          </p:cNvPr>
+          <p:cNvGrpSpPr/>
+          <p:nvPr/>
+        </p:nvGrpSpPr>
+        <p:grpSpPr>
+          <a:xfrm>
+            <a:off x="11153488" y="2234046"/>
+            <a:ext cx="2173026" cy="1143120"/>
+            <a:chOff x="11153488" y="2234046"/>
+            <a:chExt cx="2173026" cy="1143120"/>
+          </a:xfrm>
+        </p:grpSpPr>
+        <p:pic>
+          <p:nvPicPr>
+            <p:cNvPr id="21" name="그림 20">
+              <a:extLst>
+                <a:ext uri="{FF2B5EF4-FFF2-40B4-BE49-F238E27FC236}">
+                  <a16:creationId xmlns:a16="http://schemas.microsoft.com/office/drawing/2014/main" id="{14CEA7FE-1B8C-6FB9-ABEB-8E9D53E39323}"/>
+                </a:ext>
+              </a:extLst>
+            </p:cNvPr>
+            <p:cNvPicPr>
+              <a:picLocks noChangeAspect="1"/>
+            </p:cNvPicPr>
+            <p:nvPr/>
+          </p:nvPicPr>
+          <p:blipFill>
+            <a:blip r:embed="rId2"/>
+            <a:srcRect b="17335"/>
+            <a:stretch/>
+          </p:blipFill>
+          <p:spPr>
+            <a:xfrm>
+              <a:off x="11153488" y="2234046"/>
+              <a:ext cx="2173026" cy="1143120"/>
+            </a:xfrm>
+            <a:prstGeom prst="rect">
+              <a:avLst/>
+            </a:prstGeom>
+            <a:ln>
+              <a:solidFill>
+                <a:srgbClr val="3A75B0"/>
+              </a:solidFill>
+            </a:ln>
+          </p:spPr>
+        </p:pic>
+        <p:pic>
+          <p:nvPicPr>
+            <p:cNvPr id="19" name="그래픽 18">
+              <a:extLst>
+                <a:ext uri="{FF2B5EF4-FFF2-40B4-BE49-F238E27FC236}">
+                  <a16:creationId xmlns:a16="http://schemas.microsoft.com/office/drawing/2014/main" id="{7BD50618-B8C6-97E7-BAA7-750FCB04298A}"/>
+                </a:ext>
+              </a:extLst>
+            </p:cNvPr>
+            <p:cNvPicPr>
+              <a:picLocks noChangeAspect="1"/>
+            </p:cNvPicPr>
+            <p:nvPr/>
+          </p:nvPicPr>
+          <p:blipFill>
+            <a:blip r:embed="rId3">
+              <a:extLst>
+                <a:ext uri="{96DAC541-7B7A-43D3-8B79-37D633B846F1}">
+                  <asvg:svgBlip xmlns:asvg="http://schemas.microsoft.com/office/drawing/2016/SVG/main" r:embed="rId4"/>
+                </a:ext>
+              </a:extLst>
+            </a:blip>
+            <a:stretch>
+              <a:fillRect/>
+            </a:stretch>
+          </p:blipFill>
+          <p:spPr>
+            <a:xfrm>
+              <a:off x="11153488" y="2265657"/>
+              <a:ext cx="2173026" cy="1086513"/>
+            </a:xfrm>
+            <a:prstGeom prst="rect">
+              <a:avLst/>
+            </a:prstGeom>
+          </p:spPr>
+        </p:pic>
+      </p:grpSp>
+      <p:sp>
+        <p:nvSpPr>
+          <p:cNvPr id="4" name="TextBox 3">
+            <a:extLst>
+              <a:ext uri="{FF2B5EF4-FFF2-40B4-BE49-F238E27FC236}">
+                <a16:creationId xmlns:a16="http://schemas.microsoft.com/office/drawing/2014/main" id="{56D3A03B-6F32-978D-C14E-D5779354EE97}"/>
+              </a:ext>
+            </a:extLst>
+          </p:cNvPr>
+          <p:cNvSpPr txBox="1"/>
+          <p:nvPr/>
+        </p:nvSpPr>
+        <p:spPr>
+          <a:xfrm>
+            <a:off x="621792" y="564922"/>
+            <a:ext cx="12088368" cy="707886"/>
+          </a:xfrm>
+          <a:prstGeom prst="rect">
+            <a:avLst/>
+          </a:prstGeom>
+          <a:noFill/>
+        </p:spPr>
+        <p:txBody>
+          <a:bodyPr wrap="square" rtlCol="0">
+            <a:spAutoFit/>
+          </a:bodyPr>
+          <a:lstStyle/>
+          <a:p>
+            <a:r>
+              <a:rPr lang="en-US" altLang="ko-KR" sz="4000" b="1" dirty="0">
+                <a:solidFill>
+                  <a:srgbClr val="57B5AF"/>
+                </a:solidFill>
+              </a:rPr>
+              <a:t>Skills / Databases </a:t>
+            </a:r>
+            <a:r>
+              <a:rPr lang="ko-KR" altLang="en-US" sz="4000" b="1" dirty="0">
+                <a:solidFill>
+                  <a:srgbClr val="57B5AF"/>
+                </a:solidFill>
+              </a:rPr>
+              <a:t>및 기타</a:t>
+            </a:r>
+          </a:p>
+        </p:txBody>
+      </p:sp>
+      <p:sp>
+        <p:nvSpPr>
+          <p:cNvPr id="5" name="TextBox 4">
+            <a:extLst>
+              <a:ext uri="{FF2B5EF4-FFF2-40B4-BE49-F238E27FC236}">
+                <a16:creationId xmlns:a16="http://schemas.microsoft.com/office/drawing/2014/main" id="{11DA4CFC-465C-15F4-496E-A66E61F9D8A9}"/>
+              </a:ext>
+            </a:extLst>
+          </p:cNvPr>
+          <p:cNvSpPr txBox="1"/>
+          <p:nvPr/>
+        </p:nvSpPr>
+        <p:spPr>
+          <a:xfrm>
+            <a:off x="1120555" y="2234046"/>
+            <a:ext cx="10235045" cy="4524315"/>
+          </a:xfrm>
+          <a:prstGeom prst="rect">
+            <a:avLst/>
+          </a:prstGeom>
+          <a:noFill/>
+        </p:spPr>
+        <p:txBody>
+          <a:bodyPr wrap="square" rtlCol="0">
+            <a:spAutoFit/>
+          </a:bodyPr>
+          <a:lstStyle/>
+          <a:p>
+            <a:pPr marL="285750" indent="-285750">
+              <a:buFont typeface="Arial" panose="020B0604020202020204" pitchFamily="34" charset="0"/>
+              <a:buChar char="•"/>
+            </a:pPr>
+            <a:r>
+              <a:rPr lang="en-US" altLang="ko-KR" b="1" dirty="0"/>
+              <a:t>Oracle</a:t>
+            </a:r>
+            <a:r>
+              <a:rPr lang="en-US" altLang="ko-KR" dirty="0"/>
+              <a:t>: SQL </a:t>
+            </a:r>
+            <a:r>
+              <a:rPr lang="ko-KR" altLang="en-US" dirty="0"/>
+              <a:t>작성 및 </a:t>
+            </a:r>
+            <a:r>
+              <a:rPr lang="en-US" altLang="ko-KR" dirty="0"/>
+              <a:t>PL/SQL</a:t>
+            </a:r>
+            <a:r>
+              <a:rPr lang="ko-KR" altLang="en-US" dirty="0"/>
+              <a:t>을 통한 </a:t>
+            </a:r>
+            <a:r>
+              <a:rPr lang="en-US" altLang="ko-KR" dirty="0"/>
+              <a:t>Procedure </a:t>
+            </a:r>
+            <a:r>
+              <a:rPr lang="ko-KR" altLang="en-US" dirty="0"/>
+              <a:t>작성 및 유지 보수</a:t>
+            </a:r>
+            <a:r>
+              <a:rPr lang="en-US" altLang="ko-KR" dirty="0"/>
+              <a:t>.</a:t>
+            </a:r>
+            <a:br>
+              <a:rPr lang="en-US" altLang="ko-KR" dirty="0"/>
+            </a:br>
+            <a:r>
+              <a:rPr lang="ko-KR" altLang="en-US" dirty="0"/>
+              <a:t>유저 별 권한 부여 및 테이블 스페이스 할당을 통한 데이터베이스 생성 및 이용 가능</a:t>
+            </a:r>
+            <a:r>
+              <a:rPr lang="en-US" altLang="ko-KR" dirty="0"/>
+              <a:t>. </a:t>
+            </a:r>
+            <a:br>
+              <a:rPr lang="en-US" altLang="ko-KR" dirty="0"/>
+            </a:br>
+            <a:r>
+              <a:rPr lang="en-US" altLang="ko-KR" dirty="0"/>
+              <a:t>Trigger </a:t>
+            </a:r>
+            <a:r>
+              <a:rPr lang="ko-KR" altLang="en-US" dirty="0"/>
+              <a:t>및 </a:t>
+            </a:r>
+            <a:r>
+              <a:rPr lang="en-US" altLang="ko-KR" dirty="0"/>
+              <a:t>Scheduler </a:t>
+            </a:r>
+            <a:r>
+              <a:rPr lang="ko-KR" altLang="en-US" dirty="0"/>
+              <a:t>같은 </a:t>
+            </a:r>
+            <a:r>
+              <a:rPr lang="en-US" altLang="ko-KR" dirty="0"/>
+              <a:t>DBMS </a:t>
+            </a:r>
+            <a:r>
+              <a:rPr lang="ko-KR" altLang="en-US" dirty="0"/>
+              <a:t>기능 이용을 통한 다양한 비즈니스 로직 구상</a:t>
+            </a:r>
+            <a:r>
+              <a:rPr lang="en-US" altLang="ko-KR" dirty="0"/>
+              <a:t>. </a:t>
+            </a:r>
+            <a:br>
+              <a:rPr lang="en-US" altLang="ko-KR" dirty="0"/>
+            </a:br>
+            <a:r>
+              <a:rPr lang="en-US" altLang="ko-KR" dirty="0"/>
+              <a:t>SQL Server</a:t>
+            </a:r>
+            <a:r>
+              <a:rPr lang="ko-KR" altLang="en-US" dirty="0"/>
+              <a:t>에서 </a:t>
+            </a:r>
+            <a:r>
+              <a:rPr lang="en-US" altLang="ko-KR" dirty="0"/>
+              <a:t>Oracle</a:t>
+            </a:r>
+            <a:r>
+              <a:rPr lang="ko-KR" altLang="en-US" dirty="0"/>
+              <a:t>로의 서버 이전 경험</a:t>
+            </a:r>
+            <a:r>
+              <a:rPr lang="en-US" altLang="ko-KR" dirty="0"/>
+              <a:t>.</a:t>
+            </a:r>
+          </a:p>
+          <a:p>
+            <a:pPr marL="285750" indent="-285750">
+              <a:buFont typeface="Arial" panose="020B0604020202020204" pitchFamily="34" charset="0"/>
+              <a:buChar char="•"/>
+            </a:pPr>
+            <a:endParaRPr lang="en-US" altLang="ko-KR" b="1" dirty="0"/>
+          </a:p>
+          <a:p>
+            <a:pPr marL="285750" indent="-285750">
+              <a:buFont typeface="Arial" panose="020B0604020202020204" pitchFamily="34" charset="0"/>
+              <a:buChar char="•"/>
+            </a:pPr>
+            <a:endParaRPr lang="en-US" altLang="ko-KR" b="1" dirty="0"/>
+          </a:p>
+          <a:p>
+            <a:pPr marL="285750" indent="-285750">
+              <a:buFont typeface="Arial" panose="020B0604020202020204" pitchFamily="34" charset="0"/>
+              <a:buChar char="•"/>
+            </a:pPr>
+            <a:r>
+              <a:rPr lang="en-US" altLang="ko-KR" b="1" dirty="0"/>
+              <a:t>SQL Server</a:t>
+            </a:r>
+            <a:r>
+              <a:rPr lang="en-US" altLang="ko-KR" dirty="0"/>
+              <a:t>: SQL </a:t>
+            </a:r>
+            <a:r>
+              <a:rPr lang="ko-KR" altLang="en-US" dirty="0"/>
+              <a:t>작성 및 </a:t>
+            </a:r>
+            <a:r>
+              <a:rPr lang="en-US" altLang="ko-KR" dirty="0"/>
+              <a:t>T-SQL</a:t>
+            </a:r>
+            <a:r>
+              <a:rPr lang="ko-KR" altLang="en-US" dirty="0"/>
+              <a:t>을 통한 </a:t>
+            </a:r>
+            <a:r>
+              <a:rPr lang="en-US" altLang="ko-KR" dirty="0"/>
+              <a:t>Procedure </a:t>
+            </a:r>
+            <a:r>
+              <a:rPr lang="ko-KR" altLang="en-US" dirty="0"/>
+              <a:t>흐름 파악 및 유지 보수</a:t>
+            </a:r>
+            <a:r>
+              <a:rPr lang="en-US" altLang="ko-KR" dirty="0"/>
+              <a:t>.</a:t>
+            </a:r>
+            <a:br>
+              <a:rPr lang="en-US" altLang="ko-KR" dirty="0"/>
+            </a:br>
+            <a:r>
+              <a:rPr lang="ko-KR" altLang="en-US" dirty="0"/>
+              <a:t>데이터 파일 및 로그 파일 관리 및 </a:t>
+            </a:r>
+            <a:r>
+              <a:rPr lang="en-US" altLang="ko-KR" dirty="0"/>
+              <a:t>Scheduler</a:t>
+            </a:r>
+            <a:r>
+              <a:rPr lang="ko-KR" altLang="en-US" dirty="0"/>
+              <a:t>를 통한 주기적인 </a:t>
+            </a:r>
+            <a:r>
+              <a:rPr lang="en-US" altLang="ko-KR" dirty="0"/>
+              <a:t>DB </a:t>
+            </a:r>
+            <a:r>
+              <a:rPr lang="ko-KR" altLang="en-US" dirty="0"/>
+              <a:t>백업</a:t>
+            </a:r>
+            <a:r>
+              <a:rPr lang="en-US" altLang="ko-KR" dirty="0"/>
+              <a:t>.</a:t>
+            </a:r>
+          </a:p>
+          <a:p>
+            <a:pPr marL="285750" indent="-285750">
+              <a:buFont typeface="Arial" panose="020B0604020202020204" pitchFamily="34" charset="0"/>
+              <a:buChar char="•"/>
+            </a:pPr>
+            <a:endParaRPr lang="en-US" altLang="ko-KR" b="1" dirty="0"/>
+          </a:p>
+          <a:p>
+            <a:pPr marL="285750" indent="-285750">
+              <a:buFont typeface="Arial" panose="020B0604020202020204" pitchFamily="34" charset="0"/>
+              <a:buChar char="•"/>
+            </a:pPr>
+            <a:endParaRPr lang="en-US" altLang="ko-KR" b="1" dirty="0"/>
+          </a:p>
+          <a:p>
+            <a:pPr marL="285750" indent="-285750">
+              <a:buFont typeface="Arial" panose="020B0604020202020204" pitchFamily="34" charset="0"/>
+              <a:buChar char="•"/>
+            </a:pPr>
+            <a:r>
+              <a:rPr lang="en-US" altLang="ko-KR" b="1" dirty="0"/>
+              <a:t>MySQL</a:t>
+            </a:r>
+            <a:r>
+              <a:rPr lang="en-US" altLang="ko-KR" dirty="0"/>
+              <a:t>: AWS RDS</a:t>
+            </a:r>
+            <a:r>
+              <a:rPr lang="ko-KR" altLang="en-US" dirty="0"/>
+              <a:t>를 통한 </a:t>
+            </a:r>
+            <a:r>
+              <a:rPr lang="en-US" altLang="ko-KR" dirty="0"/>
+              <a:t>MySQL </a:t>
+            </a:r>
+            <a:r>
+              <a:rPr lang="ko-KR" altLang="en-US" dirty="0"/>
+              <a:t>접근</a:t>
+            </a:r>
+            <a:r>
+              <a:rPr lang="en-US" altLang="ko-KR" dirty="0"/>
+              <a:t>.</a:t>
+            </a:r>
+            <a:br>
+              <a:rPr lang="en-US" altLang="ko-KR" dirty="0"/>
+            </a:br>
+            <a:r>
+              <a:rPr lang="ko-KR" altLang="en-US" dirty="0" err="1"/>
+              <a:t>쿼리문</a:t>
+            </a:r>
+            <a:r>
+              <a:rPr lang="ko-KR" altLang="en-US" dirty="0"/>
+              <a:t> 작성을 통한 </a:t>
+            </a:r>
+            <a:r>
+              <a:rPr lang="en-US" altLang="ko-KR" dirty="0"/>
+              <a:t>CRUD </a:t>
+            </a:r>
+            <a:r>
+              <a:rPr lang="ko-KR" altLang="en-US" dirty="0"/>
+              <a:t>및 인덱싱과 </a:t>
+            </a:r>
+            <a:r>
+              <a:rPr lang="ko-KR" altLang="en-US" dirty="0" err="1"/>
+              <a:t>쿼리문</a:t>
+            </a:r>
+            <a:r>
+              <a:rPr lang="ko-KR" altLang="en-US" dirty="0"/>
+              <a:t> 최적화를 통한 응답시간 감소 경험</a:t>
+            </a:r>
+            <a:r>
+              <a:rPr lang="en-US" altLang="ko-KR" dirty="0"/>
+              <a:t>.</a:t>
+            </a:r>
+          </a:p>
+          <a:p>
+            <a:pPr marL="285750" indent="-285750">
+              <a:buFont typeface="Arial" panose="020B0604020202020204" pitchFamily="34" charset="0"/>
+              <a:buChar char="•"/>
+            </a:pPr>
+            <a:endParaRPr lang="en-US" altLang="ko-KR" dirty="0"/>
+          </a:p>
+          <a:p>
+            <a:pPr marL="285750" indent="-285750">
+              <a:buFont typeface="Arial" panose="020B0604020202020204" pitchFamily="34" charset="0"/>
+              <a:buChar char="•"/>
+            </a:pPr>
+            <a:endParaRPr lang="en-US" altLang="ko-KR" dirty="0"/>
+          </a:p>
+          <a:p>
+            <a:pPr marL="285750" indent="-285750">
+              <a:buFont typeface="Arial" panose="020B0604020202020204" pitchFamily="34" charset="0"/>
+              <a:buChar char="•"/>
+            </a:pPr>
+            <a:r>
+              <a:rPr lang="ko-KR" altLang="en-US" b="1" dirty="0"/>
+              <a:t>기타</a:t>
+            </a:r>
+            <a:r>
+              <a:rPr lang="en-US" altLang="ko-KR" dirty="0"/>
+              <a:t>: Docker </a:t>
+            </a:r>
+            <a:r>
+              <a:rPr lang="ko-KR" altLang="en-US" dirty="0"/>
+              <a:t>및 </a:t>
+            </a:r>
+            <a:r>
+              <a:rPr lang="en-US" altLang="ko-KR" dirty="0" err="1"/>
+              <a:t>Github</a:t>
+            </a:r>
+            <a:r>
+              <a:rPr lang="en-US" altLang="ko-KR" dirty="0"/>
+              <a:t> Actions </a:t>
+            </a:r>
+            <a:r>
+              <a:rPr lang="ko-KR" altLang="en-US" dirty="0"/>
+              <a:t>을 활용한 </a:t>
+            </a:r>
+            <a:r>
+              <a:rPr lang="en-US" altLang="ko-KR" dirty="0"/>
+              <a:t>CI/CD </a:t>
+            </a:r>
+            <a:r>
+              <a:rPr lang="ko-KR" altLang="en-US" dirty="0"/>
+              <a:t>파이프라인 자동화</a:t>
+            </a:r>
+            <a:r>
+              <a:rPr lang="en-US" altLang="ko-KR" dirty="0"/>
+              <a:t>.</a:t>
+            </a:r>
+            <a:br>
+              <a:rPr lang="en-US" altLang="ko-KR" dirty="0"/>
+            </a:br>
+            <a:r>
+              <a:rPr lang="en-US" altLang="ko-KR" dirty="0"/>
+              <a:t>Git </a:t>
+            </a:r>
+            <a:r>
+              <a:rPr lang="ko-KR" altLang="en-US" dirty="0"/>
+              <a:t>및 </a:t>
+            </a:r>
+            <a:r>
+              <a:rPr lang="en-US" altLang="ko-KR" dirty="0" err="1"/>
+              <a:t>Github</a:t>
+            </a:r>
+            <a:r>
+              <a:rPr lang="en-US" altLang="ko-KR" dirty="0"/>
+              <a:t> </a:t>
+            </a:r>
+            <a:r>
+              <a:rPr lang="ko-KR" altLang="en-US" dirty="0"/>
+              <a:t>를 사용한 코드 산출물 버전 관리</a:t>
+            </a:r>
+            <a:r>
+              <a:rPr lang="en-US" altLang="ko-KR" dirty="0"/>
+              <a:t>.</a:t>
+            </a:r>
+          </a:p>
+        </p:txBody>
+      </p:sp>
+      <p:sp>
+        <p:nvSpPr>
+          <p:cNvPr id="7" name="TextBox 6">
+            <a:extLst>
+              <a:ext uri="{FF2B5EF4-FFF2-40B4-BE49-F238E27FC236}">
+                <a16:creationId xmlns:a16="http://schemas.microsoft.com/office/drawing/2014/main" id="{8DCC3845-16C1-F0A7-8178-9CEC9807ADB4}"/>
+              </a:ext>
+            </a:extLst>
+          </p:cNvPr>
+          <p:cNvSpPr txBox="1"/>
+          <p:nvPr/>
+        </p:nvSpPr>
+        <p:spPr>
+          <a:xfrm>
+            <a:off x="1120555" y="1516357"/>
+            <a:ext cx="7196131" cy="461665"/>
+          </a:xfrm>
+          <a:prstGeom prst="rect">
+            <a:avLst/>
+          </a:prstGeom>
+          <a:noFill/>
+        </p:spPr>
+        <p:txBody>
+          <a:bodyPr wrap="square" rtlCol="0">
+            <a:spAutoFit/>
+          </a:bodyPr>
+          <a:lstStyle/>
+          <a:p>
+            <a:r>
+              <a:rPr lang="ko-KR" altLang="en-US" sz="2400" b="1" dirty="0">
+                <a:effectLst/>
+                <a:latin typeface="Apple Color Emoji"/>
+              </a:rPr>
+              <a:t>🛠️ </a:t>
+            </a:r>
+            <a:r>
+              <a:rPr lang="en-US" altLang="ko-KR" sz="2400" b="1" dirty="0"/>
+              <a:t>Oracle, SQL Server, MySQL / Docker, </a:t>
+            </a:r>
+            <a:r>
+              <a:rPr lang="en-US" altLang="ko-KR" sz="2400" b="1" dirty="0" err="1"/>
+              <a:t>Github</a:t>
+            </a:r>
+            <a:endParaRPr lang="ko-KR" altLang="en-US" sz="2300" b="1" dirty="0"/>
+          </a:p>
+        </p:txBody>
+      </p:sp>
+      <p:pic>
+        <p:nvPicPr>
+          <p:cNvPr id="9" name="그래픽 8">
+            <a:extLst>
+              <a:ext uri="{FF2B5EF4-FFF2-40B4-BE49-F238E27FC236}">
+                <a16:creationId xmlns:a16="http://schemas.microsoft.com/office/drawing/2014/main" id="{B69B50FF-F99A-0EA4-527D-E60227D6FEF4}"/>
+              </a:ext>
+            </a:extLst>
+          </p:cNvPr>
+          <p:cNvPicPr>
+            <a:picLocks noChangeAspect="1"/>
+          </p:cNvPicPr>
+          <p:nvPr/>
+        </p:nvPicPr>
+        <p:blipFill>
+          <a:blip r:embed="rId5">
+            <a:extLst>
+              <a:ext uri="{96DAC541-7B7A-43D3-8B79-37D633B846F1}">
+                <asvg:svgBlip xmlns:asvg="http://schemas.microsoft.com/office/drawing/2016/SVG/main" r:embed="rId6"/>
+              </a:ext>
+            </a:extLst>
+          </a:blip>
+          <a:stretch>
+            <a:fillRect/>
+          </a:stretch>
+        </p:blipFill>
+        <p:spPr>
+          <a:xfrm>
+            <a:off x="12155465" y="3126129"/>
+            <a:ext cx="1504950" cy="1352550"/>
+          </a:xfrm>
+          <a:prstGeom prst="rect">
+            <a:avLst/>
+          </a:prstGeom>
+        </p:spPr>
+      </p:pic>
+      <p:pic>
+        <p:nvPicPr>
+          <p:cNvPr id="15" name="그래픽 14">
+            <a:extLst>
+              <a:ext uri="{FF2B5EF4-FFF2-40B4-BE49-F238E27FC236}">
+                <a16:creationId xmlns:a16="http://schemas.microsoft.com/office/drawing/2014/main" id="{705CFF36-9176-7781-4251-C3F180699636}"/>
+              </a:ext>
+            </a:extLst>
+          </p:cNvPr>
+          <p:cNvPicPr>
+            <a:picLocks noChangeAspect="1"/>
+          </p:cNvPicPr>
+          <p:nvPr/>
+        </p:nvPicPr>
+        <p:blipFill>
+          <a:blip r:embed="rId7">
+            <a:extLst>
+              <a:ext uri="{96DAC541-7B7A-43D3-8B79-37D633B846F1}">
+                <asvg:svgBlip xmlns:asvg="http://schemas.microsoft.com/office/drawing/2016/SVG/main" r:embed="rId8"/>
+              </a:ext>
+            </a:extLst>
+          </a:blip>
+          <a:stretch>
+            <a:fillRect/>
+          </a:stretch>
+        </p:blipFill>
+        <p:spPr>
+          <a:xfrm>
+            <a:off x="11062462" y="4088729"/>
+            <a:ext cx="1504950" cy="1504950"/>
+          </a:xfrm>
+          <a:prstGeom prst="rect">
+            <a:avLst/>
+          </a:prstGeom>
+        </p:spPr>
+      </p:pic>
+      <p:pic>
+        <p:nvPicPr>
+          <p:cNvPr id="17" name="그림 16">
+            <a:extLst>
+              <a:ext uri="{FF2B5EF4-FFF2-40B4-BE49-F238E27FC236}">
+                <a16:creationId xmlns:a16="http://schemas.microsoft.com/office/drawing/2014/main" id="{7C906498-96E9-F608-D99A-3A38332C5C0A}"/>
+              </a:ext>
+            </a:extLst>
+          </p:cNvPr>
+          <p:cNvPicPr>
+            <a:picLocks noChangeAspect="1"/>
+          </p:cNvPicPr>
+          <p:nvPr/>
+        </p:nvPicPr>
+        <p:blipFill>
+          <a:blip r:embed="rId9">
+            <a:extLst>
+              <a:ext uri="{28A0092B-C50C-407E-A947-70E740481C1C}">
+                <a14:useLocalDpi xmlns:a14="http://schemas.microsoft.com/office/drawing/2010/main" val="0"/>
+              </a:ext>
+            </a:extLst>
+          </a:blip>
+          <a:stretch>
+            <a:fillRect/>
+          </a:stretch>
+        </p:blipFill>
+        <p:spPr>
+          <a:xfrm>
+            <a:off x="12240001" y="5172407"/>
+            <a:ext cx="1219200" cy="1219200"/>
+          </a:xfrm>
+          <a:prstGeom prst="rect">
+            <a:avLst/>
+          </a:prstGeom>
+        </p:spPr>
+      </p:pic>
+      <p:sp>
+        <p:nvSpPr>
+          <p:cNvPr id="23" name="직사각형 22">
+            <a:extLst>
+              <a:ext uri="{FF2B5EF4-FFF2-40B4-BE49-F238E27FC236}">
+                <a16:creationId xmlns:a16="http://schemas.microsoft.com/office/drawing/2014/main" id="{3D37EC2E-C2B3-EE75-9E00-8FB00E3542A8}"/>
+              </a:ext>
+            </a:extLst>
+          </p:cNvPr>
+          <p:cNvSpPr/>
+          <p:nvPr/>
+        </p:nvSpPr>
+        <p:spPr>
+          <a:xfrm>
+            <a:off x="10941269" y="1978022"/>
+            <a:ext cx="2816772" cy="4780130"/>
+          </a:xfrm>
+          <a:prstGeom prst="rect">
+            <a:avLst/>
+          </a:prstGeom>
+          <a:solidFill>
+            <a:schemeClr val="bg1">
+              <a:alpha val="51000"/>
+            </a:schemeClr>
+          </a:solidFill>
+          <a:ln>
+            <a:noFill/>
+          </a:ln>
+        </p:spPr>
+        <p:style>
+          <a:lnRef idx="2">
+            <a:schemeClr val="accent1">
+              <a:shade val="15000"/>
+            </a:schemeClr>
+          </a:lnRef>
+          <a:fillRef idx="1">
+            <a:schemeClr val="accent1"/>
+          </a:fillRef>
+          <a:effectRef idx="0">
+            <a:schemeClr val="accent1"/>
+          </a:effectRef>
+          <a:fontRef idx="minor">
+            <a:schemeClr val="lt1"/>
+          </a:fontRef>
+        </p:style>
+        <p:txBody>
+          <a:bodyPr rtlCol="0" anchor="ctr"/>
+          <a:lstStyle/>
+          <a:p>
+            <a:pPr algn="ctr"/>
+            <a:endParaRPr lang="ko-KR" altLang="en-US"/>
+          </a:p>
+        </p:txBody>
+      </p:sp>
+    </p:spTree>
+    <p:extLst>
+      <p:ext uri="{BB962C8B-B14F-4D97-AF65-F5344CB8AC3E}">
+        <p14:creationId xmlns:p14="http://schemas.microsoft.com/office/powerpoint/2010/main" val="1997067262"/>
       </p:ext>
     </p:extLst>
   </p:cSld>
@@ -4401,4 +7368,299 @@
     </a:ext>
   </a:extLst>
 </a:theme>
+</file>
+
+<file path=ppt/theme/theme3.xml><?xml version="1.0" encoding="utf-8"?>
+<a:theme xmlns:a="http://schemas.openxmlformats.org/drawingml/2006/main" name="Office 테마">
+  <a:themeElements>
+    <a:clrScheme name="Office">
+      <a:dk1>
+        <a:sysClr val="windowText" lastClr="000000"/>
+      </a:dk1>
+      <a:lt1>
+        <a:sysClr val="window" lastClr="FFFFFF"/>
+      </a:lt1>
+      <a:dk2>
+        <a:srgbClr val="44546A"/>
+      </a:dk2>
+      <a:lt2>
+        <a:srgbClr val="E7E6E6"/>
+      </a:lt2>
+      <a:accent1>
+        <a:srgbClr val="4472C4"/>
+      </a:accent1>
+      <a:accent2>
+        <a:srgbClr val="ED7D31"/>
+      </a:accent2>
+      <a:accent3>
+        <a:srgbClr val="A5A5A5"/>
+      </a:accent3>
+      <a:accent4>
+        <a:srgbClr val="FFC000"/>
+      </a:accent4>
+      <a:accent5>
+        <a:srgbClr val="5B9BD5"/>
+      </a:accent5>
+      <a:accent6>
+        <a:srgbClr val="70AD47"/>
+      </a:accent6>
+      <a:hlink>
+        <a:srgbClr val="0563C1"/>
+      </a:hlink>
+      <a:folHlink>
+        <a:srgbClr val="954F72"/>
+      </a:folHlink>
+    </a:clrScheme>
+    <a:fontScheme name="Office">
+      <a:majorFont>
+        <a:latin typeface="맑은 고딕" panose="020F0302020204030204"/>
+        <a:ea typeface=""/>
+        <a:cs typeface=""/>
+        <a:font script="Jpan" typeface="游ゴシック Light"/>
+        <a:font script="Hang" typeface="맑은 고딕"/>
+        <a:font script="Hans" typeface="等线 Light"/>
+        <a:font script="Hant" typeface="新細明體"/>
+        <a:font script="Arab" typeface="Times New Roman"/>
+        <a:font script="Hebr" typeface="Times New Roman"/>
+        <a:font script="Thai" typeface="Angsana New"/>
+        <a:font script="Ethi" typeface="Nyala"/>
+        <a:font script="Beng" typeface="Vrinda"/>
+        <a:font script="Gujr" typeface="Shruti"/>
+        <a:font script="Khmr" typeface="MoolBoran"/>
+        <a:font script="Knda" typeface="Tunga"/>
+        <a:font script="Guru" typeface="Raavi"/>
+        <a:font script="Cans" typeface="Euphemia"/>
+        <a:font script="Cher" typeface="Plantagenet Cherokee"/>
+        <a:font script="Yiii" typeface="Microsoft Yi Baiti"/>
+        <a:font script="Tibt" typeface="Microsoft Himalaya"/>
+        <a:font script="Thaa" typeface="MV Boli"/>
+        <a:font script="Deva" typeface="Mangal"/>
+        <a:font script="Telu" typeface="Gautami"/>
+        <a:font script="Taml" typeface="Latha"/>
+        <a:font script="Syrc" typeface="Estrangelo Edessa"/>
+        <a:font script="Orya" typeface="Kalinga"/>
+        <a:font script="Mlym" typeface="Kartika"/>
+        <a:font script="Laoo" typeface="DokChampa"/>
+        <a:font script="Sinh" typeface="Iskoola Pota"/>
+        <a:font script="Mong" typeface="Mongolian Baiti"/>
+        <a:font script="Viet" typeface="Times New Roman"/>
+        <a:font script="Uigh" typeface="Microsoft Uighur"/>
+        <a:font script="Geor" typeface="Sylfaen"/>
+        <a:font script="Armn" typeface="Arial"/>
+        <a:font script="Bugi" typeface="Leelawadee UI"/>
+        <a:font script="Bopo" typeface="Microsoft JhengHei"/>
+        <a:font script="Java" typeface="Javanese Text"/>
+        <a:font script="Lisu" typeface="Segoe UI"/>
+        <a:font script="Mymr" typeface="Myanmar Text"/>
+        <a:font script="Nkoo" typeface="Ebrima"/>
+        <a:font script="Olck" typeface="Nirmala UI"/>
+        <a:font script="Osma" typeface="Ebrima"/>
+        <a:font script="Phag" typeface="Phagspa"/>
+        <a:font script="Syrn" typeface="Estrangelo Edessa"/>
+        <a:font script="Syrj" typeface="Estrangelo Edessa"/>
+        <a:font script="Syre" typeface="Estrangelo Edessa"/>
+        <a:font script="Sora" typeface="Nirmala UI"/>
+        <a:font script="Tale" typeface="Microsoft Tai Le"/>
+        <a:font script="Talu" typeface="Microsoft New Tai Lue"/>
+        <a:font script="Tfng" typeface="Ebrima"/>
+      </a:majorFont>
+      <a:minorFont>
+        <a:latin typeface="맑은 고딕" panose="020F0502020204030204"/>
+        <a:ea typeface=""/>
+        <a:cs typeface=""/>
+        <a:font script="Jpan" typeface="游ゴシック"/>
+        <a:font script="Hang" typeface="맑은 고딕"/>
+        <a:font script="Hans" typeface="等线"/>
+        <a:font script="Hant" typeface="新細明體"/>
+        <a:font script="Arab" typeface="Arial"/>
+        <a:font script="Hebr" typeface="Arial"/>
+        <a:font script="Thai" typeface="Cordia New"/>
+        <a:font script="Ethi" typeface="Nyala"/>
+        <a:font script="Beng" typeface="Vrinda"/>
+        <a:font script="Gujr" typeface="Shruti"/>
+        <a:font script="Khmr" typeface="DaunPenh"/>
+        <a:font script="Knda" typeface="Tunga"/>
+        <a:font script="Guru" typeface="Raavi"/>
+        <a:font script="Cans" typeface="Euphemia"/>
+        <a:font script="Cher" typeface="Plantagenet Cherokee"/>
+        <a:font script="Yiii" typeface="Microsoft Yi Baiti"/>
+        <a:font script="Tibt" typeface="Microsoft Himalaya"/>
+        <a:font script="Thaa" typeface="MV Boli"/>
+        <a:font script="Deva" typeface="Mangal"/>
+        <a:font script="Telu" typeface="Gautami"/>
+        <a:font script="Taml" typeface="Latha"/>
+        <a:font script="Syrc" typeface="Estrangelo Edessa"/>
+        <a:font script="Orya" typeface="Kalinga"/>
+        <a:font script="Mlym" typeface="Kartika"/>
+        <a:font script="Laoo" typeface="DokChampa"/>
+        <a:font script="Sinh" typeface="Iskoola Pota"/>
+        <a:font script="Mong" typeface="Mongolian Baiti"/>
+        <a:font script="Viet" typeface="Arial"/>
+        <a:font script="Uigh" typeface="Microsoft Uighur"/>
+        <a:font script="Geor" typeface="Sylfaen"/>
+        <a:font script="Armn" typeface="Arial"/>
+        <a:font script="Bugi" typeface="Leelawadee UI"/>
+        <a:font script="Bopo" typeface="Microsoft JhengHei"/>
+        <a:font script="Java" typeface="Javanese Text"/>
+        <a:font script="Lisu" typeface="Segoe UI"/>
+        <a:font script="Mymr" typeface="Myanmar Text"/>
+        <a:font script="Nkoo" typeface="Ebrima"/>
+        <a:font script="Olck" typeface="Nirmala UI"/>
+        <a:font script="Osma" typeface="Ebrima"/>
+        <a:font script="Phag" typeface="Phagspa"/>
+        <a:font script="Syrn" typeface="Estrangelo Edessa"/>
+        <a:font script="Syrj" typeface="Estrangelo Edessa"/>
+        <a:font script="Syre" typeface="Estrangelo Edessa"/>
+        <a:font script="Sora" typeface="Nirmala UI"/>
+        <a:font script="Tale" typeface="Microsoft Tai Le"/>
+        <a:font script="Talu" typeface="Microsoft New Tai Lue"/>
+        <a:font script="Tfng" typeface="Ebrima"/>
+      </a:minorFont>
+    </a:fontScheme>
+    <a:fmtScheme name="Office">
+      <a:fillStyleLst>
+        <a:solidFill>
+          <a:schemeClr val="phClr"/>
+        </a:solidFill>
+        <a:gradFill rotWithShape="1">
+          <a:gsLst>
+            <a:gs pos="0">
+              <a:schemeClr val="phClr">
+                <a:lumMod val="110000"/>
+                <a:satMod val="105000"/>
+                <a:tint val="67000"/>
+              </a:schemeClr>
+            </a:gs>
+            <a:gs pos="50000">
+              <a:schemeClr val="phClr">
+                <a:lumMod val="105000"/>
+                <a:satMod val="103000"/>
+                <a:tint val="73000"/>
+              </a:schemeClr>
+            </a:gs>
+            <a:gs pos="100000">
+              <a:schemeClr val="phClr">
+                <a:lumMod val="105000"/>
+                <a:satMod val="109000"/>
+                <a:tint val="81000"/>
+              </a:schemeClr>
+            </a:gs>
+          </a:gsLst>
+          <a:lin ang="5400000" scaled="0"/>
+        </a:gradFill>
+        <a:gradFill rotWithShape="1">
+          <a:gsLst>
+            <a:gs pos="0">
+              <a:schemeClr val="phClr">
+                <a:satMod val="103000"/>
+                <a:lumMod val="102000"/>
+                <a:tint val="94000"/>
+              </a:schemeClr>
+            </a:gs>
+            <a:gs pos="50000">
+              <a:schemeClr val="phClr">
+                <a:satMod val="110000"/>
+                <a:lumMod val="100000"/>
+                <a:shade val="100000"/>
+              </a:schemeClr>
+            </a:gs>
+            <a:gs pos="100000">
+              <a:schemeClr val="phClr">
+                <a:lumMod val="99000"/>
+                <a:satMod val="120000"/>
+                <a:shade val="78000"/>
+              </a:schemeClr>
+            </a:gs>
+          </a:gsLst>
+          <a:lin ang="5400000" scaled="0"/>
+        </a:gradFill>
+      </a:fillStyleLst>
+      <a:lnStyleLst>
+        <a:ln w="6350" cap="flat" cmpd="sng" algn="ctr">
+          <a:solidFill>
+            <a:schemeClr val="phClr"/>
+          </a:solidFill>
+          <a:prstDash val="solid"/>
+          <a:miter lim="800000"/>
+        </a:ln>
+        <a:ln w="12700" cap="flat" cmpd="sng" algn="ctr">
+          <a:solidFill>
+            <a:schemeClr val="phClr"/>
+          </a:solidFill>
+          <a:prstDash val="solid"/>
+          <a:miter lim="800000"/>
+        </a:ln>
+        <a:ln w="19050" cap="flat" cmpd="sng" algn="ctr">
+          <a:solidFill>
+            <a:schemeClr val="phClr"/>
+          </a:solidFill>
+          <a:prstDash val="solid"/>
+          <a:miter lim="800000"/>
+        </a:ln>
+      </a:lnStyleLst>
+      <a:effectStyleLst>
+        <a:effectStyle>
+          <a:effectLst/>
+        </a:effectStyle>
+        <a:effectStyle>
+          <a:effectLst/>
+        </a:effectStyle>
+        <a:effectStyle>
+          <a:effectLst>
+            <a:outerShdw blurRad="57150" dist="19050" dir="5400000" algn="ctr" rotWithShape="0">
+              <a:srgbClr val="000000">
+                <a:alpha val="63000"/>
+              </a:srgbClr>
+            </a:outerShdw>
+          </a:effectLst>
+        </a:effectStyle>
+      </a:effectStyleLst>
+      <a:bgFillStyleLst>
+        <a:solidFill>
+          <a:schemeClr val="phClr"/>
+        </a:solidFill>
+        <a:solidFill>
+          <a:schemeClr val="phClr">
+            <a:tint val="95000"/>
+            <a:satMod val="170000"/>
+          </a:schemeClr>
+        </a:solidFill>
+        <a:gradFill rotWithShape="1">
+          <a:gsLst>
+            <a:gs pos="0">
+              <a:schemeClr val="phClr">
+                <a:tint val="93000"/>
+                <a:satMod val="150000"/>
+                <a:shade val="98000"/>
+                <a:lumMod val="102000"/>
+              </a:schemeClr>
+            </a:gs>
+            <a:gs pos="50000">
+              <a:schemeClr val="phClr">
+                <a:tint val="98000"/>
+                <a:satMod val="130000"/>
+                <a:shade val="90000"/>
+                <a:lumMod val="103000"/>
+              </a:schemeClr>
+            </a:gs>
+            <a:gs pos="100000">
+              <a:schemeClr val="phClr">
+                <a:shade val="63000"/>
+                <a:satMod val="120000"/>
+              </a:schemeClr>
+            </a:gs>
+          </a:gsLst>
+          <a:lin ang="5400000" scaled="0"/>
+        </a:gradFill>
+      </a:bgFillStyleLst>
+    </a:fmtScheme>
+  </a:themeElements>
+  <a:objectDefaults/>
+  <a:extraClrSchemeLst/>
+  <a:extLst>
+    <a:ext uri="{05A4C25C-085E-4340-85A3-A5531E510DB2}">
+      <thm15:themeFamily xmlns:thm15="http://schemas.microsoft.com/office/thememl/2012/main" name="Office Theme" id="{62F939B6-93AF-4DB8-9C6B-D6C7DFDC589F}" vid="{4A3C46E8-61CC-4603-A589-7422A47A8E4A}"/>
+    </a:ext>
+  </a:extLst>
+</a:theme>
 </file>
--- a/문대진_포트폴리오용.pptx
+++ b/문대진_포트폴리오용.pptx
@@ -5,16 +5,22 @@
     <p:sldMasterId id="2147483708" r:id="rId1"/>
   </p:sldMasterIdLst>
   <p:notesMasterIdLst>
-    <p:notesMasterId r:id="rId6"/>
+    <p:notesMasterId r:id="rId12"/>
   </p:notesMasterIdLst>
   <p:handoutMasterIdLst>
-    <p:handoutMasterId r:id="rId7"/>
+    <p:handoutMasterId r:id="rId13"/>
   </p:handoutMasterIdLst>
   <p:sldIdLst>
     <p:sldId id="256" r:id="rId2"/>
     <p:sldId id="257" r:id="rId3"/>
     <p:sldId id="258" r:id="rId4"/>
     <p:sldId id="259" r:id="rId5"/>
+    <p:sldId id="260" r:id="rId6"/>
+    <p:sldId id="261" r:id="rId7"/>
+    <p:sldId id="262" r:id="rId8"/>
+    <p:sldId id="263" r:id="rId9"/>
+    <p:sldId id="264" r:id="rId10"/>
+    <p:sldId id="265" r:id="rId11"/>
   </p:sldIdLst>
   <p:sldSz cx="14257338" cy="8020050"/>
   <p:notesSz cx="6858000" cy="9144000"/>
@@ -3731,7 +3737,7 @@
             <a:r>
               <a:rPr lang="ko-KR" altLang="en-US" sz="4000" b="1" dirty="0">
                 <a:solidFill>
-                  <a:srgbClr val="57B5AF"/>
+                  <a:srgbClr val="468260"/>
                 </a:solidFill>
               </a:rPr>
               <a:t>문대진 </a:t>
@@ -3739,14 +3745,14 @@
             <a:r>
               <a:rPr lang="en-US" altLang="ko-KR" sz="4000" b="1" dirty="0">
                 <a:solidFill>
-                  <a:srgbClr val="57B5AF"/>
+                  <a:srgbClr val="468260"/>
                 </a:solidFill>
               </a:rPr>
               <a:t>Portfolio</a:t>
             </a:r>
             <a:endParaRPr lang="ko-KR" altLang="en-US" sz="4000" b="1" dirty="0">
               <a:solidFill>
-                <a:srgbClr val="57B5AF"/>
+                <a:srgbClr val="468260"/>
               </a:solidFill>
             </a:endParaRPr>
           </a:p>
@@ -3787,7 +3793,7 @@
             <a:r>
               <a:rPr lang="ko-KR" altLang="en-US" sz="2400" b="1" dirty="0">
                 <a:solidFill>
-                  <a:srgbClr val="57B5AF"/>
+                  <a:srgbClr val="468260"/>
                 </a:solidFill>
               </a:rPr>
               <a:t>다양한 경험</a:t>
@@ -3799,7 +3805,7 @@
             <a:r>
               <a:rPr lang="ko-KR" altLang="en-US" sz="2400" b="1" dirty="0">
                 <a:solidFill>
-                  <a:srgbClr val="57B5AF"/>
+                  <a:srgbClr val="468260"/>
                 </a:solidFill>
               </a:rPr>
               <a:t>사용자의 만족감을 고민</a:t>
@@ -3920,7 +3926,6 @@
             <a:r>
               <a:rPr lang="ko-KR" altLang="en-US" dirty="0">
                 <a:effectLst/>
-                <a:latin typeface="Apple Color Emoji"/>
               </a:rPr>
               <a:t>👾</a:t>
             </a:r>
@@ -4349,6 +4354,598 @@
     <p:extLst>
       <p:ext uri="{BB962C8B-B14F-4D97-AF65-F5344CB8AC3E}">
         <p14:creationId xmlns:p14="http://schemas.microsoft.com/office/powerpoint/2010/main" val="2629253248"/>
+      </p:ext>
+    </p:extLst>
+  </p:cSld>
+  <p:clrMapOvr>
+    <a:masterClrMapping/>
+  </p:clrMapOvr>
+</p:sld>
+</file>
+
+<file path=ppt/slides/slide10.xml><?xml version="1.0" encoding="utf-8"?>
+<p:sld xmlns:a="http://schemas.openxmlformats.org/drawingml/2006/main" xmlns:r="http://schemas.openxmlformats.org/officeDocument/2006/relationships" xmlns:p="http://schemas.openxmlformats.org/presentationml/2006/main">
+  <p:cSld>
+    <p:spTree>
+      <p:nvGrpSpPr>
+        <p:cNvPr id="1" name="">
+          <a:extLst>
+            <a:ext uri="{FF2B5EF4-FFF2-40B4-BE49-F238E27FC236}">
+              <a16:creationId xmlns:a16="http://schemas.microsoft.com/office/drawing/2014/main" id="{3225DB12-3830-F6FF-CD97-775087BE0000}"/>
+            </a:ext>
+          </a:extLst>
+        </p:cNvPr>
+        <p:cNvGrpSpPr/>
+        <p:nvPr/>
+      </p:nvGrpSpPr>
+      <p:grpSpPr>
+        <a:xfrm>
+          <a:off x="0" y="0"/>
+          <a:ext cx="0" cy="0"/>
+          <a:chOff x="0" y="0"/>
+          <a:chExt cx="0" cy="0"/>
+        </a:xfrm>
+      </p:grpSpPr>
+      <p:sp>
+        <p:nvSpPr>
+          <p:cNvPr id="4" name="TextBox 3">
+            <a:extLst>
+              <a:ext uri="{FF2B5EF4-FFF2-40B4-BE49-F238E27FC236}">
+                <a16:creationId xmlns:a16="http://schemas.microsoft.com/office/drawing/2014/main" id="{C33E4FD2-4CED-BA58-365F-05C3927E40C5}"/>
+              </a:ext>
+            </a:extLst>
+          </p:cNvPr>
+          <p:cNvSpPr txBox="1"/>
+          <p:nvPr/>
+        </p:nvSpPr>
+        <p:spPr>
+          <a:xfrm>
+            <a:off x="621792" y="564922"/>
+            <a:ext cx="6896608" cy="707886"/>
+          </a:xfrm>
+          <a:prstGeom prst="rect">
+            <a:avLst/>
+          </a:prstGeom>
+          <a:noFill/>
+        </p:spPr>
+        <p:txBody>
+          <a:bodyPr wrap="square" rtlCol="0">
+            <a:spAutoFit/>
+          </a:bodyPr>
+          <a:lstStyle/>
+          <a:p>
+            <a:r>
+              <a:rPr lang="en-US" altLang="ko-KR" sz="4000" b="1" dirty="0">
+                <a:solidFill>
+                  <a:srgbClr val="468260"/>
+                </a:solidFill>
+              </a:rPr>
+              <a:t>Projects / </a:t>
+            </a:r>
+            <a:r>
+              <a:rPr lang="ko-KR" altLang="en-US" sz="4000" b="1" dirty="0" err="1">
+                <a:solidFill>
+                  <a:srgbClr val="468260"/>
+                </a:solidFill>
+              </a:rPr>
+              <a:t>윈즈</a:t>
+            </a:r>
+            <a:r>
+              <a:rPr lang="ko-KR" altLang="en-US" sz="4000" b="1" dirty="0">
+                <a:solidFill>
+                  <a:srgbClr val="468260"/>
+                </a:solidFill>
+              </a:rPr>
+              <a:t> 시스템</a:t>
+            </a:r>
+          </a:p>
+        </p:txBody>
+      </p:sp>
+      <p:sp>
+        <p:nvSpPr>
+          <p:cNvPr id="5" name="TextBox 4">
+            <a:extLst>
+              <a:ext uri="{FF2B5EF4-FFF2-40B4-BE49-F238E27FC236}">
+                <a16:creationId xmlns:a16="http://schemas.microsoft.com/office/drawing/2014/main" id="{B7EC7464-7C15-E7AE-AAAD-6F2B68556ACD}"/>
+              </a:ext>
+            </a:extLst>
+          </p:cNvPr>
+          <p:cNvSpPr txBox="1"/>
+          <p:nvPr/>
+        </p:nvSpPr>
+        <p:spPr>
+          <a:xfrm>
+            <a:off x="1146968" y="1272808"/>
+            <a:ext cx="7019132" cy="461665"/>
+          </a:xfrm>
+          <a:prstGeom prst="rect">
+            <a:avLst/>
+          </a:prstGeom>
+          <a:noFill/>
+        </p:spPr>
+        <p:txBody>
+          <a:bodyPr wrap="square" rtlCol="0">
+            <a:spAutoFit/>
+          </a:bodyPr>
+          <a:lstStyle/>
+          <a:p>
+            <a:r>
+              <a:rPr lang="en-US" altLang="ko-KR" sz="2400" b="1" dirty="0"/>
+              <a:t>1. </a:t>
+            </a:r>
+            <a:r>
+              <a:rPr lang="ko-KR" altLang="en-US" sz="2400" b="1" dirty="0"/>
+              <a:t>안드로이드 </a:t>
+            </a:r>
+            <a:r>
+              <a:rPr lang="en-US" altLang="ko-KR" sz="2400" b="1" dirty="0"/>
+              <a:t>OS </a:t>
+            </a:r>
+            <a:r>
+              <a:rPr lang="ko-KR" altLang="en-US" sz="2400" b="1" dirty="0"/>
+              <a:t>업데이트에 따른 이슈 및 업데이트 대응</a:t>
+            </a:r>
+          </a:p>
+        </p:txBody>
+      </p:sp>
+      <p:sp>
+        <p:nvSpPr>
+          <p:cNvPr id="7" name="TextBox 6">
+            <a:extLst>
+              <a:ext uri="{FF2B5EF4-FFF2-40B4-BE49-F238E27FC236}">
+                <a16:creationId xmlns:a16="http://schemas.microsoft.com/office/drawing/2014/main" id="{71109F05-0D68-CFA6-0C88-31D145230F9C}"/>
+              </a:ext>
+            </a:extLst>
+          </p:cNvPr>
+          <p:cNvSpPr txBox="1"/>
+          <p:nvPr/>
+        </p:nvSpPr>
+        <p:spPr>
+          <a:xfrm>
+            <a:off x="1146968" y="1734473"/>
+            <a:ext cx="11235532" cy="1200329"/>
+          </a:xfrm>
+          <a:prstGeom prst="rect">
+            <a:avLst/>
+          </a:prstGeom>
+          <a:noFill/>
+        </p:spPr>
+        <p:txBody>
+          <a:bodyPr wrap="square" rtlCol="0">
+            <a:spAutoFit/>
+          </a:bodyPr>
+          <a:lstStyle/>
+          <a:p>
+            <a:pPr marL="0" marR="0" lvl="0" indent="0" algn="l" defTabSz="914400" rtl="0" eaLnBrk="0" fontAlgn="base" latinLnBrk="0" hangingPunct="0">
+              <a:lnSpc>
+                <a:spcPct val="100000"/>
+              </a:lnSpc>
+              <a:spcBef>
+                <a:spcPct val="0"/>
+              </a:spcBef>
+              <a:spcAft>
+                <a:spcPct val="0"/>
+              </a:spcAft>
+              <a:buClrTx/>
+              <a:buSzTx/>
+              <a:buFontTx/>
+              <a:buNone/>
+              <a:tabLst/>
+            </a:pPr>
+            <a:r>
+              <a:rPr lang="ko-KR" altLang="en-US" dirty="0"/>
+              <a:t>안드로이드 앱 </a:t>
+            </a:r>
+            <a:r>
+              <a:rPr lang="en-US" altLang="ko-KR" dirty="0"/>
+              <a:t>Google Play </a:t>
+            </a:r>
+            <a:r>
+              <a:rPr lang="ko-KR" altLang="en-US" dirty="0"/>
+              <a:t>신규 업로드 혹은 업데이트 시</a:t>
+            </a:r>
+            <a:r>
+              <a:rPr lang="en-US" altLang="ko-KR" dirty="0"/>
+              <a:t>, </a:t>
+            </a:r>
+            <a:r>
+              <a:rPr lang="ko-KR" altLang="en-US" dirty="0"/>
+              <a:t>구글에서 요청하는 앱 내부의 </a:t>
+            </a:r>
+            <a:r>
+              <a:rPr lang="en-US" altLang="ko-KR" dirty="0"/>
+              <a:t>Android </a:t>
+            </a:r>
+            <a:r>
+              <a:rPr lang="ko-KR" altLang="en-US" dirty="0"/>
+              <a:t>버전을 맞춰야 함</a:t>
+            </a:r>
+            <a:r>
+              <a:rPr lang="en-US" altLang="ko-KR" dirty="0"/>
+              <a:t>. (</a:t>
+            </a:r>
+            <a:r>
+              <a:rPr lang="ko-KR" altLang="en-US" dirty="0">
+                <a:effectLst/>
+                <a:hlinkClick r:id="rId2"/>
+              </a:rPr>
+              <a:t>링크</a:t>
+            </a:r>
+            <a:r>
+              <a:rPr lang="en-US" altLang="ko-KR" dirty="0"/>
+              <a:t>)</a:t>
+            </a:r>
+            <a:br>
+              <a:rPr lang="en-US" altLang="ko-KR" dirty="0"/>
+            </a:br>
+            <a:r>
+              <a:rPr lang="ko-KR" altLang="en-US" dirty="0"/>
+              <a:t>앱 업데이트 시 기존 라이브러리 사용 불가에 따른 코드 수정 및 신규 기능 추가에 대한 개발 필요</a:t>
+            </a:r>
+            <a:r>
+              <a:rPr lang="en-US" altLang="ko-KR" dirty="0"/>
+              <a:t>. </a:t>
+            </a:r>
+            <a:br>
+              <a:rPr lang="en-US" altLang="ko-KR" dirty="0"/>
+            </a:br>
+            <a:r>
+              <a:rPr lang="ko-KR" altLang="en-US" dirty="0"/>
+              <a:t>버전 업데이트 시</a:t>
+            </a:r>
+            <a:r>
+              <a:rPr lang="en-US" altLang="ko-KR" dirty="0"/>
+              <a:t>SDK </a:t>
+            </a:r>
+            <a:r>
+              <a:rPr lang="ko-KR" altLang="en-US" dirty="0"/>
+              <a:t>버전에 따른 라이브러리 이슈 사항 대응 필요</a:t>
+            </a:r>
+            <a:r>
+              <a:rPr lang="en-US" altLang="ko-KR" dirty="0"/>
+              <a:t>. </a:t>
+            </a:r>
+            <a:br>
+              <a:rPr lang="en-US" altLang="ko-KR" dirty="0"/>
+            </a:br>
+            <a:r>
+              <a:rPr lang="ko-KR" altLang="en-US" dirty="0"/>
+              <a:t>미 업데이트 시 앱 스토어 노출 불가 이슈 발생으로 매 년 변경되는 요구 사항에 맞춰 업데이트를 진행 해야 함</a:t>
+            </a:r>
+            <a:endParaRPr lang="en-US" altLang="ko-KR" dirty="0"/>
+          </a:p>
+        </p:txBody>
+      </p:sp>
+      <p:sp>
+        <p:nvSpPr>
+          <p:cNvPr id="2" name="직사각형 1">
+            <a:extLst>
+              <a:ext uri="{FF2B5EF4-FFF2-40B4-BE49-F238E27FC236}">
+                <a16:creationId xmlns:a16="http://schemas.microsoft.com/office/drawing/2014/main" id="{19A7620E-9F10-315F-2602-92BDFFC78BE6}"/>
+              </a:ext>
+            </a:extLst>
+          </p:cNvPr>
+          <p:cNvSpPr/>
+          <p:nvPr/>
+        </p:nvSpPr>
+        <p:spPr>
+          <a:xfrm>
+            <a:off x="1140380" y="3007528"/>
+            <a:ext cx="11242120" cy="388939"/>
+          </a:xfrm>
+          <a:prstGeom prst="rect">
+            <a:avLst/>
+          </a:prstGeom>
+          <a:solidFill>
+            <a:srgbClr val="252525">
+              <a:alpha val="10000"/>
+            </a:srgbClr>
+          </a:solidFill>
+          <a:ln>
+            <a:noFill/>
+          </a:ln>
+        </p:spPr>
+        <p:style>
+          <a:lnRef idx="2">
+            <a:schemeClr val="accent1">
+              <a:shade val="15000"/>
+            </a:schemeClr>
+          </a:lnRef>
+          <a:fillRef idx="1">
+            <a:schemeClr val="accent1"/>
+          </a:fillRef>
+          <a:effectRef idx="0">
+            <a:schemeClr val="accent1"/>
+          </a:effectRef>
+          <a:fontRef idx="minor">
+            <a:schemeClr val="lt1"/>
+          </a:fontRef>
+        </p:style>
+        <p:txBody>
+          <a:bodyPr rtlCol="0" anchor="ctr"/>
+          <a:lstStyle/>
+          <a:p>
+            <a:pPr algn="ctr"/>
+            <a:endParaRPr lang="ko-KR" altLang="en-US"/>
+          </a:p>
+        </p:txBody>
+      </p:sp>
+      <p:sp>
+        <p:nvSpPr>
+          <p:cNvPr id="3" name="TextBox 2">
+            <a:extLst>
+              <a:ext uri="{FF2B5EF4-FFF2-40B4-BE49-F238E27FC236}">
+                <a16:creationId xmlns:a16="http://schemas.microsoft.com/office/drawing/2014/main" id="{948D2131-0028-CBB1-13BD-368E26844660}"/>
+              </a:ext>
+            </a:extLst>
+          </p:cNvPr>
+          <p:cNvSpPr txBox="1"/>
+          <p:nvPr/>
+        </p:nvSpPr>
+        <p:spPr>
+          <a:xfrm>
+            <a:off x="1120555" y="3007528"/>
+            <a:ext cx="7413845" cy="369332"/>
+          </a:xfrm>
+          <a:prstGeom prst="rect">
+            <a:avLst/>
+          </a:prstGeom>
+          <a:noFill/>
+        </p:spPr>
+        <p:txBody>
+          <a:bodyPr wrap="square" rtlCol="0">
+            <a:spAutoFit/>
+          </a:bodyPr>
+          <a:lstStyle/>
+          <a:p>
+            <a:r>
+              <a:rPr lang="ko-KR" altLang="en-US" b="1" dirty="0">
+                <a:effectLst/>
+              </a:rPr>
+              <a:t>🛠️ </a:t>
+            </a:r>
+            <a:r>
+              <a:rPr lang="en-US" altLang="ko-KR" b="1" dirty="0">
+                <a:effectLst/>
+              </a:rPr>
+              <a:t>Android Studio, Java, Android</a:t>
+            </a:r>
+            <a:endParaRPr lang="ko-KR" altLang="en-US" b="1" dirty="0"/>
+          </a:p>
+        </p:txBody>
+      </p:sp>
+      <p:sp>
+        <p:nvSpPr>
+          <p:cNvPr id="9" name="TextBox 8">
+            <a:extLst>
+              <a:ext uri="{FF2B5EF4-FFF2-40B4-BE49-F238E27FC236}">
+                <a16:creationId xmlns:a16="http://schemas.microsoft.com/office/drawing/2014/main" id="{1269DE8F-1603-DF89-1710-02E4D57B2D6B}"/>
+              </a:ext>
+            </a:extLst>
+          </p:cNvPr>
+          <p:cNvSpPr txBox="1"/>
+          <p:nvPr/>
+        </p:nvSpPr>
+        <p:spPr>
+          <a:xfrm>
+            <a:off x="1146968" y="3469193"/>
+            <a:ext cx="11235532" cy="3046988"/>
+          </a:xfrm>
+          <a:prstGeom prst="rect">
+            <a:avLst/>
+          </a:prstGeom>
+          <a:noFill/>
+        </p:spPr>
+        <p:txBody>
+          <a:bodyPr wrap="square" rtlCol="0">
+            <a:spAutoFit/>
+          </a:bodyPr>
+          <a:lstStyle/>
+          <a:p>
+            <a:pPr marL="0" marR="0" lvl="0" indent="0" algn="l" defTabSz="914400" rtl="0" eaLnBrk="0" fontAlgn="base" latinLnBrk="0" hangingPunct="0">
+              <a:lnSpc>
+                <a:spcPct val="100000"/>
+              </a:lnSpc>
+              <a:spcBef>
+                <a:spcPct val="0"/>
+              </a:spcBef>
+              <a:spcAft>
+                <a:spcPct val="0"/>
+              </a:spcAft>
+              <a:buClrTx/>
+              <a:buSzTx/>
+              <a:buFontTx/>
+              <a:buNone/>
+              <a:tabLst/>
+            </a:pPr>
+            <a:r>
+              <a:rPr lang="ko-KR" altLang="en-US" sz="2200" b="1" dirty="0"/>
+              <a:t>성과</a:t>
+            </a:r>
+            <a:endParaRPr lang="en-US" altLang="ko-KR" sz="2200" b="1" dirty="0"/>
+          </a:p>
+          <a:p>
+            <a:pPr marL="285750" indent="-285750">
+              <a:buFont typeface="Arial" panose="020B0604020202020204" pitchFamily="34" charset="0"/>
+              <a:buChar char="•"/>
+            </a:pPr>
+            <a:r>
+              <a:rPr lang="ko-KR" altLang="en-US" dirty="0"/>
+              <a:t>지속적인 </a:t>
+            </a:r>
+            <a:r>
+              <a:rPr lang="en-US" altLang="ko-KR" dirty="0"/>
+              <a:t>OS </a:t>
+            </a:r>
+            <a:r>
+              <a:rPr lang="ko-KR" altLang="en-US" dirty="0"/>
+              <a:t>업데이트 대응을 통해 </a:t>
+            </a:r>
+            <a:r>
+              <a:rPr lang="en-US" altLang="ko-KR" dirty="0"/>
+              <a:t>Google Play</a:t>
+            </a:r>
+            <a:r>
+              <a:rPr lang="ko-KR" altLang="en-US" dirty="0"/>
+              <a:t>에서 앱 서비스 진행</a:t>
+            </a:r>
+            <a:r>
+              <a:rPr lang="en-US" altLang="ko-KR" dirty="0"/>
+              <a:t>. </a:t>
+            </a:r>
+            <a:r>
+              <a:rPr lang="ko-KR" altLang="en-US" dirty="0"/>
+              <a:t>이를 통해 사용자 이탈 방지</a:t>
+            </a:r>
+            <a:endParaRPr lang="en-US" altLang="ko-KR" dirty="0"/>
+          </a:p>
+          <a:p>
+            <a:pPr marL="285750" indent="-285750">
+              <a:buFont typeface="Arial" panose="020B0604020202020204" pitchFamily="34" charset="0"/>
+              <a:buChar char="•"/>
+            </a:pPr>
+            <a:r>
+              <a:rPr lang="ko-KR" altLang="en-US" dirty="0"/>
+              <a:t>구글의 모바일 정책 변경에 능동적으로 대응</a:t>
+            </a:r>
+            <a:r>
+              <a:rPr lang="en-US" altLang="ko-KR" dirty="0"/>
+              <a:t>. </a:t>
+            </a:r>
+            <a:r>
+              <a:rPr lang="ko-KR" altLang="en-US" dirty="0"/>
+              <a:t>이를 통해 서비스 운영 경험 및 앱 배포 역량 강화</a:t>
+            </a:r>
+          </a:p>
+          <a:p>
+            <a:pPr marR="0" lvl="0" algn="l" defTabSz="914400" rtl="0" eaLnBrk="0" fontAlgn="base" latinLnBrk="0" hangingPunct="0">
+              <a:lnSpc>
+                <a:spcPct val="100000"/>
+              </a:lnSpc>
+              <a:spcBef>
+                <a:spcPct val="0"/>
+              </a:spcBef>
+              <a:spcAft>
+                <a:spcPct val="0"/>
+              </a:spcAft>
+              <a:buClrTx/>
+              <a:buSzTx/>
+              <a:tabLst/>
+            </a:pPr>
+            <a:endParaRPr lang="en-US" altLang="ko-KR" dirty="0"/>
+          </a:p>
+          <a:p>
+            <a:pPr marR="0" lvl="0" algn="l" defTabSz="914400" rtl="0" eaLnBrk="0" fontAlgn="base" latinLnBrk="0" hangingPunct="0">
+              <a:lnSpc>
+                <a:spcPct val="100000"/>
+              </a:lnSpc>
+              <a:spcBef>
+                <a:spcPct val="0"/>
+              </a:spcBef>
+              <a:spcAft>
+                <a:spcPct val="0"/>
+              </a:spcAft>
+              <a:buClrTx/>
+              <a:buSzTx/>
+              <a:tabLst/>
+            </a:pPr>
+            <a:r>
+              <a:rPr lang="ko-KR" altLang="en-US" sz="2200" b="1" dirty="0"/>
+              <a:t>인사이트</a:t>
+            </a:r>
+            <a:endParaRPr lang="en-US" altLang="ko-KR" sz="2200" b="1" dirty="0"/>
+          </a:p>
+          <a:p>
+            <a:pPr marL="285750" indent="-285750">
+              <a:buFont typeface="Arial" panose="020B0604020202020204" pitchFamily="34" charset="0"/>
+              <a:buChar char="•"/>
+            </a:pPr>
+            <a:r>
+              <a:rPr lang="ko-KR" altLang="en-US" dirty="0"/>
+              <a:t>공식 문서를 통해 정보를 취득하는 방법과 역량을 기르고</a:t>
+            </a:r>
+            <a:r>
+              <a:rPr lang="en-US" altLang="ko-KR" dirty="0"/>
+              <a:t>, </a:t>
+            </a:r>
+            <a:r>
+              <a:rPr lang="ko-KR" altLang="en-US" dirty="0"/>
+              <a:t>이를 통해 문제에 대한 대응 및 해결 능력 함양</a:t>
+            </a:r>
+            <a:endParaRPr lang="en-US" altLang="ko-KR" dirty="0"/>
+          </a:p>
+          <a:p>
+            <a:pPr marL="285750" indent="-285750">
+              <a:buFont typeface="Arial" panose="020B0604020202020204" pitchFamily="34" charset="0"/>
+              <a:buChar char="•"/>
+            </a:pPr>
+            <a:r>
+              <a:rPr lang="ko-KR" altLang="en-US" dirty="0"/>
+              <a:t>자사 서비스 앱의 기능들에 대해 어떠한 </a:t>
+            </a:r>
+            <a:r>
+              <a:rPr lang="en-US" altLang="ko-KR" dirty="0"/>
+              <a:t>SDK API</a:t>
+            </a:r>
+            <a:r>
+              <a:rPr lang="ko-KR" altLang="en-US" dirty="0"/>
+              <a:t>를 사용하고</a:t>
+            </a:r>
+            <a:r>
+              <a:rPr lang="en-US" altLang="ko-KR" dirty="0"/>
+              <a:t>, </a:t>
+            </a:r>
+            <a:r>
+              <a:rPr lang="ko-KR" altLang="en-US" dirty="0"/>
+              <a:t>어떠한 로직으로 동작하는지 전반적인 프로세스 파악의 경험 및 추후 발생하는 이슈들에 대해 명확하고 빠른 처리가 가능한 역량 증대</a:t>
+            </a:r>
+          </a:p>
+          <a:p>
+            <a:pPr marR="0" lvl="0" algn="l" defTabSz="914400" rtl="0" eaLnBrk="0" fontAlgn="base" latinLnBrk="0" hangingPunct="0">
+              <a:lnSpc>
+                <a:spcPct val="100000"/>
+              </a:lnSpc>
+              <a:spcBef>
+                <a:spcPct val="0"/>
+              </a:spcBef>
+              <a:spcAft>
+                <a:spcPct val="0"/>
+              </a:spcAft>
+              <a:buClrTx/>
+              <a:buSzTx/>
+              <a:tabLst/>
+            </a:pPr>
+            <a:endParaRPr lang="en-US" altLang="ko-KR" dirty="0"/>
+          </a:p>
+          <a:p>
+            <a:pPr marR="0" lvl="0" algn="l" defTabSz="914400" rtl="0" eaLnBrk="0" fontAlgn="base" latinLnBrk="0" hangingPunct="0">
+              <a:lnSpc>
+                <a:spcPct val="100000"/>
+              </a:lnSpc>
+              <a:spcBef>
+                <a:spcPct val="0"/>
+              </a:spcBef>
+              <a:spcAft>
+                <a:spcPct val="0"/>
+              </a:spcAft>
+              <a:buClrTx/>
+              <a:buSzTx/>
+              <a:tabLst/>
+            </a:pPr>
+            <a:r>
+              <a:rPr lang="ko-KR" altLang="en-US" sz="2200" b="1" dirty="0">
+                <a:hlinkClick r:id="rId3"/>
+              </a:rPr>
+              <a:t>상세 보기</a:t>
+            </a:r>
+            <a:endParaRPr lang="en-US" altLang="ko-KR" sz="2200" b="1" dirty="0"/>
+          </a:p>
+        </p:txBody>
+      </p:sp>
+    </p:spTree>
+    <p:extLst>
+      <p:ext uri="{BB962C8B-B14F-4D97-AF65-F5344CB8AC3E}">
+        <p14:creationId xmlns:p14="http://schemas.microsoft.com/office/powerpoint/2010/main" val="685160049"/>
       </p:ext>
     </p:extLst>
   </p:cSld>
@@ -4551,14 +5148,14 @@
             <a:r>
               <a:rPr lang="en-US" altLang="ko-KR" sz="4000" b="1" dirty="0">
                 <a:solidFill>
-                  <a:srgbClr val="57B5AF"/>
+                  <a:srgbClr val="468260"/>
                 </a:solidFill>
               </a:rPr>
               <a:t>Skills / Language &amp; Frameworks</a:t>
             </a:r>
             <a:endParaRPr lang="ko-KR" altLang="en-US" sz="4000" b="1" dirty="0">
               <a:solidFill>
-                <a:srgbClr val="57B5AF"/>
+                <a:srgbClr val="468260"/>
               </a:solidFill>
             </a:endParaRPr>
           </a:p>
@@ -5073,7 +5670,7 @@
         <p:spPr>
           <a:xfrm>
             <a:off x="1120556" y="1516357"/>
-            <a:ext cx="6760702" cy="461665"/>
+            <a:ext cx="6893144" cy="461665"/>
           </a:xfrm>
           <a:prstGeom prst="rect">
             <a:avLst/>
@@ -5089,7 +5686,6 @@
             <a:r>
               <a:rPr lang="ko-KR" altLang="en-US" sz="2400" b="1" dirty="0">
                 <a:effectLst/>
-                <a:latin typeface="Apple Color Emoji"/>
               </a:rPr>
               <a:t>🛠️ </a:t>
             </a:r>
@@ -5495,7 +6091,7 @@
             <a:r>
               <a:rPr lang="en-US" altLang="ko-KR" sz="4000" b="1" dirty="0">
                 <a:solidFill>
-                  <a:srgbClr val="57B5AF"/>
+                  <a:srgbClr val="468260"/>
                 </a:solidFill>
               </a:rPr>
               <a:t>Skills / </a:t>
@@ -5503,7 +6099,7 @@
             <a:r>
               <a:rPr lang="en-US" altLang="ko-KR" sz="4000" b="1" dirty="0">
                 <a:solidFill>
-                  <a:srgbClr val="57B5AF"/>
+                  <a:srgbClr val="468260"/>
                 </a:solidFill>
                 <a:effectLst/>
               </a:rPr>
@@ -5511,7 +6107,7 @@
             </a:r>
             <a:endParaRPr lang="ko-KR" altLang="en-US" sz="4000" b="1" dirty="0">
               <a:solidFill>
-                <a:srgbClr val="57B5AF"/>
+                <a:srgbClr val="468260"/>
               </a:solidFill>
             </a:endParaRPr>
           </a:p>
@@ -5869,7 +6465,6 @@
             <a:r>
               <a:rPr lang="ko-KR" altLang="en-US" sz="2400" b="1" dirty="0">
                 <a:effectLst/>
-                <a:latin typeface="Apple Color Emoji"/>
               </a:rPr>
               <a:t>🛠️ </a:t>
             </a:r>
@@ -6267,7 +6862,7 @@
             <a:r>
               <a:rPr lang="en-US" altLang="ko-KR" sz="4000" b="1" dirty="0">
                 <a:solidFill>
-                  <a:srgbClr val="57B5AF"/>
+                  <a:srgbClr val="468260"/>
                 </a:solidFill>
               </a:rPr>
               <a:t>Skills / Databases </a:t>
@@ -6275,7 +6870,7 @@
             <a:r>
               <a:rPr lang="ko-KR" altLang="en-US" sz="4000" b="1" dirty="0">
                 <a:solidFill>
-                  <a:srgbClr val="57B5AF"/>
+                  <a:srgbClr val="468260"/>
                 </a:solidFill>
               </a:rPr>
               <a:t>및 기타</a:t>
@@ -6683,7 +7278,6 @@
             <a:r>
               <a:rPr lang="ko-KR" altLang="en-US" sz="2400" b="1" dirty="0">
                 <a:effectLst/>
-                <a:latin typeface="Apple Color Emoji"/>
               </a:rPr>
               <a:t>🛠️ </a:t>
             </a:r>
@@ -6865,6 +7459,4480 @@
     <p:extLst>
       <p:ext uri="{BB962C8B-B14F-4D97-AF65-F5344CB8AC3E}">
         <p14:creationId xmlns:p14="http://schemas.microsoft.com/office/powerpoint/2010/main" val="1997067262"/>
+      </p:ext>
+    </p:extLst>
+  </p:cSld>
+  <p:clrMapOvr>
+    <a:masterClrMapping/>
+  </p:clrMapOvr>
+</p:sld>
+</file>
+
+<file path=ppt/slides/slide5.xml><?xml version="1.0" encoding="utf-8"?>
+<p:sld xmlns:a="http://schemas.openxmlformats.org/drawingml/2006/main" xmlns:r="http://schemas.openxmlformats.org/officeDocument/2006/relationships" xmlns:p="http://schemas.openxmlformats.org/presentationml/2006/main">
+  <p:cSld>
+    <p:spTree>
+      <p:nvGrpSpPr>
+        <p:cNvPr id="1" name=""/>
+        <p:cNvGrpSpPr/>
+        <p:nvPr/>
+      </p:nvGrpSpPr>
+      <p:grpSpPr>
+        <a:xfrm>
+          <a:off x="0" y="0"/>
+          <a:ext cx="0" cy="0"/>
+          <a:chOff x="0" y="0"/>
+          <a:chExt cx="0" cy="0"/>
+        </a:xfrm>
+      </p:grpSpPr>
+      <p:sp>
+        <p:nvSpPr>
+          <p:cNvPr id="4" name="TextBox 3">
+            <a:extLst>
+              <a:ext uri="{FF2B5EF4-FFF2-40B4-BE49-F238E27FC236}">
+                <a16:creationId xmlns:a16="http://schemas.microsoft.com/office/drawing/2014/main" id="{8798B73C-61D9-6273-6C07-408C28AC1B32}"/>
+              </a:ext>
+            </a:extLst>
+          </p:cNvPr>
+          <p:cNvSpPr txBox="1"/>
+          <p:nvPr/>
+        </p:nvSpPr>
+        <p:spPr>
+          <a:xfrm>
+            <a:off x="621792" y="564922"/>
+            <a:ext cx="2819908" cy="707886"/>
+          </a:xfrm>
+          <a:prstGeom prst="rect">
+            <a:avLst/>
+          </a:prstGeom>
+          <a:noFill/>
+        </p:spPr>
+        <p:txBody>
+          <a:bodyPr wrap="square" rtlCol="0">
+            <a:spAutoFit/>
+          </a:bodyPr>
+          <a:lstStyle/>
+          <a:p>
+            <a:r>
+              <a:rPr lang="en-US" altLang="ko-KR" sz="4000" b="1" dirty="0">
+                <a:solidFill>
+                  <a:srgbClr val="468260"/>
+                </a:solidFill>
+              </a:rPr>
+              <a:t>Bootcamps</a:t>
+            </a:r>
+            <a:endParaRPr lang="ko-KR" altLang="en-US" sz="4000" b="1" dirty="0">
+              <a:solidFill>
+                <a:srgbClr val="468260"/>
+              </a:solidFill>
+            </a:endParaRPr>
+          </a:p>
+        </p:txBody>
+      </p:sp>
+      <p:sp>
+        <p:nvSpPr>
+          <p:cNvPr id="8" name="TextBox 7">
+            <a:extLst>
+              <a:ext uri="{FF2B5EF4-FFF2-40B4-BE49-F238E27FC236}">
+                <a16:creationId xmlns:a16="http://schemas.microsoft.com/office/drawing/2014/main" id="{A8043F11-0B83-6810-B1FE-ACB6E0D1008E}"/>
+              </a:ext>
+            </a:extLst>
+          </p:cNvPr>
+          <p:cNvSpPr txBox="1"/>
+          <p:nvPr/>
+        </p:nvSpPr>
+        <p:spPr>
+          <a:xfrm>
+            <a:off x="1146969" y="1272808"/>
+            <a:ext cx="5981700" cy="461665"/>
+          </a:xfrm>
+          <a:prstGeom prst="rect">
+            <a:avLst/>
+          </a:prstGeom>
+          <a:noFill/>
+        </p:spPr>
+        <p:txBody>
+          <a:bodyPr wrap="square" rtlCol="0">
+            <a:spAutoFit/>
+          </a:bodyPr>
+          <a:lstStyle/>
+          <a:p>
+            <a:r>
+              <a:rPr lang="en-US" altLang="ko-KR" sz="2400" b="1" dirty="0">
+                <a:effectLst/>
+              </a:rPr>
+              <a:t>SK Planet - T </a:t>
+            </a:r>
+            <a:r>
+              <a:rPr lang="ko-KR" altLang="en-US" sz="2400" b="1" dirty="0">
+                <a:effectLst/>
+              </a:rPr>
+              <a:t>아카데미 </a:t>
+            </a:r>
+            <a:r>
+              <a:rPr lang="en-US" altLang="ko-KR" sz="2400" b="1" dirty="0">
+                <a:effectLst/>
+              </a:rPr>
+              <a:t>ASAC </a:t>
+            </a:r>
+            <a:r>
+              <a:rPr lang="ko-KR" altLang="en-US" sz="2400" b="1" dirty="0">
+                <a:effectLst/>
+              </a:rPr>
+              <a:t>웹 </a:t>
+            </a:r>
+            <a:r>
+              <a:rPr lang="ko-KR" altLang="en-US" sz="2400" b="1" dirty="0" err="1">
+                <a:effectLst/>
+              </a:rPr>
+              <a:t>풀스택</a:t>
+            </a:r>
+            <a:r>
+              <a:rPr lang="ko-KR" altLang="en-US" sz="2400" b="1" dirty="0">
+                <a:effectLst/>
+              </a:rPr>
+              <a:t> </a:t>
+            </a:r>
+            <a:r>
+              <a:rPr lang="en-US" altLang="ko-KR" sz="2400" b="1" dirty="0">
+                <a:effectLst/>
+              </a:rPr>
+              <a:t>6</a:t>
+            </a:r>
+            <a:r>
+              <a:rPr lang="ko-KR" altLang="en-US" sz="2400" b="1" dirty="0">
+                <a:effectLst/>
+              </a:rPr>
+              <a:t>기 </a:t>
+            </a:r>
+            <a:endParaRPr lang="ko-KR" altLang="en-US" sz="2400" dirty="0"/>
+          </a:p>
+        </p:txBody>
+      </p:sp>
+      <p:sp>
+        <p:nvSpPr>
+          <p:cNvPr id="9" name="TextBox 8">
+            <a:extLst>
+              <a:ext uri="{FF2B5EF4-FFF2-40B4-BE49-F238E27FC236}">
+                <a16:creationId xmlns:a16="http://schemas.microsoft.com/office/drawing/2014/main" id="{AA454BFB-BEF8-F0B6-014B-2AD7CC2EB59E}"/>
+              </a:ext>
+            </a:extLst>
+          </p:cNvPr>
+          <p:cNvSpPr txBox="1"/>
+          <p:nvPr/>
+        </p:nvSpPr>
+        <p:spPr>
+          <a:xfrm>
+            <a:off x="1146968" y="1678246"/>
+            <a:ext cx="9559131" cy="369332"/>
+          </a:xfrm>
+          <a:prstGeom prst="rect">
+            <a:avLst/>
+          </a:prstGeom>
+          <a:noFill/>
+        </p:spPr>
+        <p:txBody>
+          <a:bodyPr wrap="square" rtlCol="0">
+            <a:spAutoFit/>
+          </a:bodyPr>
+          <a:lstStyle/>
+          <a:p>
+            <a:r>
+              <a:rPr lang="ko-KR" altLang="en-US" dirty="0">
+                <a:solidFill>
+                  <a:schemeClr val="bg1">
+                    <a:lumMod val="65000"/>
+                  </a:schemeClr>
+                </a:solidFill>
+                <a:effectLst/>
+              </a:rPr>
+              <a:t>🗓️</a:t>
+            </a:r>
+            <a:r>
+              <a:rPr lang="en-US" altLang="ko-KR" dirty="0">
+                <a:solidFill>
+                  <a:schemeClr val="bg1">
+                    <a:lumMod val="65000"/>
+                  </a:schemeClr>
+                </a:solidFill>
+                <a:effectLst/>
+              </a:rPr>
+              <a:t>2024.08 ~ 2025.02 (0.5</a:t>
+            </a:r>
+            <a:r>
+              <a:rPr lang="ko-KR" altLang="en-US" dirty="0">
+                <a:solidFill>
+                  <a:schemeClr val="bg1">
+                    <a:lumMod val="65000"/>
+                  </a:schemeClr>
+                </a:solidFill>
+                <a:effectLst/>
+              </a:rPr>
+              <a:t>년</a:t>
+            </a:r>
+            <a:r>
+              <a:rPr lang="en-US" altLang="ko-KR" dirty="0">
+                <a:solidFill>
+                  <a:schemeClr val="bg1">
+                    <a:lumMod val="65000"/>
+                  </a:schemeClr>
+                </a:solidFill>
+                <a:effectLst/>
+              </a:rPr>
+              <a:t>) | </a:t>
+            </a:r>
+            <a:r>
+              <a:rPr lang="ko-KR" altLang="en-US" dirty="0">
+                <a:solidFill>
+                  <a:srgbClr val="0563C1"/>
+                </a:solidFill>
+                <a:effectLst/>
+                <a:hlinkClick r:id="rId2">
+                  <a:extLst>
+                    <a:ext uri="{A12FA001-AC4F-418D-AE19-62706E023703}">
+                      <ahyp:hlinkClr xmlns:ahyp="http://schemas.microsoft.com/office/drawing/2018/hyperlinkcolor" val="tx"/>
+                    </a:ext>
+                  </a:extLst>
+                </a:hlinkClick>
+              </a:rPr>
+              <a:t>📄</a:t>
+            </a:r>
+            <a:r>
+              <a:rPr lang="ko-KR" altLang="en-US" dirty="0">
+                <a:solidFill>
+                  <a:schemeClr val="bg1">
+                    <a:lumMod val="65000"/>
+                  </a:schemeClr>
+                </a:solidFill>
+                <a:effectLst/>
+                <a:hlinkClick r:id="rId2">
+                  <a:extLst>
+                    <a:ext uri="{A12FA001-AC4F-418D-AE19-62706E023703}">
+                      <ahyp:hlinkClr xmlns:ahyp="http://schemas.microsoft.com/office/drawing/2018/hyperlinkcolor" val="tx"/>
+                    </a:ext>
+                  </a:extLst>
+                </a:hlinkClick>
+              </a:rPr>
+              <a:t> 소개서</a:t>
+            </a:r>
+            <a:r>
+              <a:rPr lang="ko-KR" altLang="en-US" dirty="0">
+                <a:solidFill>
+                  <a:schemeClr val="bg1">
+                    <a:lumMod val="65000"/>
+                  </a:schemeClr>
+                </a:solidFill>
+                <a:effectLst/>
+              </a:rPr>
+              <a:t> </a:t>
+            </a:r>
+            <a:r>
+              <a:rPr lang="en-US" altLang="ko-KR" dirty="0">
+                <a:solidFill>
+                  <a:schemeClr val="bg1">
+                    <a:lumMod val="65000"/>
+                  </a:schemeClr>
+                </a:solidFill>
+                <a:effectLst/>
+              </a:rPr>
+              <a:t>| </a:t>
+            </a:r>
+            <a:r>
+              <a:rPr lang="ko-KR" altLang="en-US" dirty="0">
+                <a:solidFill>
+                  <a:srgbClr val="0563C1"/>
+                </a:solidFill>
+                <a:effectLst/>
+                <a:hlinkClick r:id="rId3">
+                  <a:extLst>
+                    <a:ext uri="{A12FA001-AC4F-418D-AE19-62706E023703}">
+                      <ahyp:hlinkClr xmlns:ahyp="http://schemas.microsoft.com/office/drawing/2018/hyperlinkcolor" val="tx"/>
+                    </a:ext>
+                  </a:extLst>
+                </a:hlinkClick>
+              </a:rPr>
+              <a:t>📗</a:t>
+            </a:r>
+            <a:r>
+              <a:rPr lang="ko-KR" altLang="en-US" dirty="0">
+                <a:solidFill>
+                  <a:schemeClr val="bg1">
+                    <a:lumMod val="65000"/>
+                  </a:schemeClr>
+                </a:solidFill>
+                <a:effectLst/>
+                <a:hlinkClick r:id="rId3">
+                  <a:extLst>
+                    <a:ext uri="{A12FA001-AC4F-418D-AE19-62706E023703}">
+                      <ahyp:hlinkClr xmlns:ahyp="http://schemas.microsoft.com/office/drawing/2018/hyperlinkcolor" val="tx"/>
+                    </a:ext>
+                  </a:extLst>
+                </a:hlinkClick>
+              </a:rPr>
+              <a:t> 강의자료</a:t>
+            </a:r>
+            <a:r>
+              <a:rPr lang="ko-KR" altLang="en-US" dirty="0">
+                <a:solidFill>
+                  <a:schemeClr val="bg1">
+                    <a:lumMod val="65000"/>
+                  </a:schemeClr>
+                </a:solidFill>
+                <a:effectLst/>
+              </a:rPr>
+              <a:t> </a:t>
+            </a:r>
+            <a:r>
+              <a:rPr lang="en-US" altLang="ko-KR" dirty="0">
+                <a:solidFill>
+                  <a:schemeClr val="bg1">
+                    <a:lumMod val="65000"/>
+                  </a:schemeClr>
+                </a:solidFill>
+                <a:effectLst/>
+              </a:rPr>
+              <a:t>| </a:t>
+            </a:r>
+            <a:r>
+              <a:rPr lang="ko-KR" altLang="en-US" dirty="0">
+                <a:solidFill>
+                  <a:schemeClr val="bg1">
+                    <a:lumMod val="65000"/>
+                  </a:schemeClr>
+                </a:solidFill>
+                <a:effectLst/>
+                <a:hlinkClick r:id="rId4">
+                  <a:extLst>
+                    <a:ext uri="{A12FA001-AC4F-418D-AE19-62706E023703}">
+                      <ahyp:hlinkClr xmlns:ahyp="http://schemas.microsoft.com/office/drawing/2018/hyperlinkcolor" val="tx"/>
+                    </a:ext>
+                  </a:extLst>
+                </a:hlinkClick>
+              </a:rPr>
+              <a:t>🚀</a:t>
+            </a:r>
+            <a:r>
+              <a:rPr lang="ko-KR" altLang="en-US" dirty="0">
+                <a:solidFill>
+                  <a:schemeClr val="bg1">
+                    <a:lumMod val="65000"/>
+                  </a:schemeClr>
+                </a:solidFill>
+                <a:effectLst/>
+                <a:hlinkClick r:id="rId5">
+                  <a:extLst>
+                    <a:ext uri="{A12FA001-AC4F-418D-AE19-62706E023703}">
+                      <ahyp:hlinkClr xmlns:ahyp="http://schemas.microsoft.com/office/drawing/2018/hyperlinkcolor" val="tx"/>
+                    </a:ext>
+                  </a:extLst>
+                </a:hlinkClick>
+              </a:rPr>
+              <a:t>최종 프로젝트 자료</a:t>
+            </a:r>
+            <a:r>
+              <a:rPr lang="ko-KR" altLang="en-US" dirty="0">
+                <a:solidFill>
+                  <a:schemeClr val="bg1">
+                    <a:lumMod val="65000"/>
+                  </a:schemeClr>
+                </a:solidFill>
+                <a:effectLst/>
+              </a:rPr>
+              <a:t> </a:t>
+            </a:r>
+            <a:r>
+              <a:rPr lang="en-US" altLang="ko-KR" dirty="0">
+                <a:solidFill>
+                  <a:schemeClr val="bg1">
+                    <a:lumMod val="65000"/>
+                  </a:schemeClr>
+                </a:solidFill>
+                <a:effectLst/>
+              </a:rPr>
+              <a:t>| </a:t>
+            </a:r>
+            <a:r>
+              <a:rPr lang="ko-KR" altLang="en-US" dirty="0">
+                <a:solidFill>
+                  <a:srgbClr val="0563C1"/>
+                </a:solidFill>
+                <a:effectLst/>
+                <a:hlinkClick r:id="rId6">
+                  <a:extLst>
+                    <a:ext uri="{A12FA001-AC4F-418D-AE19-62706E023703}">
+                      <ahyp:hlinkClr xmlns:ahyp="http://schemas.microsoft.com/office/drawing/2018/hyperlinkcolor" val="tx"/>
+                    </a:ext>
+                  </a:extLst>
+                </a:hlinkClick>
+              </a:rPr>
+              <a:t>🧑🏻‍🏫</a:t>
+            </a:r>
+            <a:r>
+              <a:rPr lang="ko-KR" altLang="en-US" dirty="0">
+                <a:solidFill>
+                  <a:schemeClr val="bg1">
+                    <a:lumMod val="65000"/>
+                  </a:schemeClr>
+                </a:solidFill>
+                <a:effectLst/>
+                <a:hlinkClick r:id="rId6">
+                  <a:extLst>
+                    <a:ext uri="{A12FA001-AC4F-418D-AE19-62706E023703}">
+                      <ahyp:hlinkClr xmlns:ahyp="http://schemas.microsoft.com/office/drawing/2018/hyperlinkcolor" val="tx"/>
+                    </a:ext>
+                  </a:extLst>
+                </a:hlinkClick>
+              </a:rPr>
+              <a:t> 강사 이력서</a:t>
+            </a:r>
+            <a:endParaRPr lang="ko-KR" altLang="en-US" dirty="0">
+              <a:solidFill>
+                <a:schemeClr val="bg1">
+                  <a:lumMod val="65000"/>
+                </a:schemeClr>
+              </a:solidFill>
+            </a:endParaRPr>
+          </a:p>
+        </p:txBody>
+      </p:sp>
+      <p:sp>
+        <p:nvSpPr>
+          <p:cNvPr id="11" name="TextBox 10">
+            <a:extLst>
+              <a:ext uri="{FF2B5EF4-FFF2-40B4-BE49-F238E27FC236}">
+                <a16:creationId xmlns:a16="http://schemas.microsoft.com/office/drawing/2014/main" id="{CC00B819-EE4C-89F5-ABD7-1CB2289362FE}"/>
+              </a:ext>
+            </a:extLst>
+          </p:cNvPr>
+          <p:cNvSpPr txBox="1"/>
+          <p:nvPr/>
+        </p:nvSpPr>
+        <p:spPr>
+          <a:xfrm>
+            <a:off x="1146968" y="1996778"/>
+            <a:ext cx="11248232" cy="5201424"/>
+          </a:xfrm>
+          <a:prstGeom prst="rect">
+            <a:avLst/>
+          </a:prstGeom>
+          <a:noFill/>
+        </p:spPr>
+        <p:txBody>
+          <a:bodyPr wrap="square" rtlCol="0">
+            <a:spAutoFit/>
+          </a:bodyPr>
+          <a:lstStyle/>
+          <a:p>
+            <a:pPr marL="0" marR="0" lvl="0" indent="0" algn="l" defTabSz="914400" rtl="0" eaLnBrk="0" fontAlgn="base" latinLnBrk="0" hangingPunct="0">
+              <a:lnSpc>
+                <a:spcPct val="100000"/>
+              </a:lnSpc>
+              <a:spcBef>
+                <a:spcPct val="0"/>
+              </a:spcBef>
+              <a:spcAft>
+                <a:spcPct val="0"/>
+              </a:spcAft>
+              <a:buClrTx/>
+              <a:buSzTx/>
+              <a:buFontTx/>
+              <a:buNone/>
+              <a:tabLst/>
+            </a:pPr>
+            <a:r>
+              <a:rPr kumimoji="0" lang="ko-KR" altLang="ko-KR" sz="2200" b="1" i="0" u="none" strike="noStrike" cap="none" normalizeH="0" baseline="0" dirty="0" err="1">
+                <a:ln>
+                  <a:noFill/>
+                </a:ln>
+                <a:solidFill>
+                  <a:schemeClr val="tx1"/>
+                </a:solidFill>
+                <a:effectLst/>
+              </a:rPr>
+              <a:t>Android</a:t>
+            </a:r>
+            <a:r>
+              <a:rPr kumimoji="0" lang="en-US" altLang="ko-KR" sz="2200" b="1" i="0" u="none" strike="noStrike" cap="none" normalizeH="0" baseline="0" dirty="0">
+                <a:ln>
+                  <a:noFill/>
+                </a:ln>
+                <a:solidFill>
+                  <a:schemeClr val="tx1"/>
+                </a:solidFill>
+                <a:effectLst/>
+              </a:rPr>
+              <a:t> </a:t>
+            </a:r>
+            <a:r>
+              <a:rPr kumimoji="0" lang="ko-KR" altLang="ko-KR" sz="2200" b="1" i="0" u="none" strike="noStrike" cap="none" normalizeH="0" baseline="0" dirty="0">
+                <a:ln>
+                  <a:noFill/>
+                </a:ln>
+                <a:solidFill>
+                  <a:schemeClr val="tx1"/>
+                </a:solidFill>
+                <a:effectLst/>
+              </a:rPr>
+              <a:t>개발자에서 </a:t>
+            </a:r>
+            <a:r>
+              <a:rPr kumimoji="0" lang="ko-KR" altLang="ko-KR" sz="2200" b="1" i="0" u="none" strike="noStrike" cap="none" normalizeH="0" baseline="0" dirty="0" err="1">
+                <a:ln>
+                  <a:noFill/>
+                </a:ln>
+                <a:solidFill>
+                  <a:schemeClr val="tx1"/>
+                </a:solidFill>
+                <a:effectLst/>
+              </a:rPr>
+              <a:t>Spring</a:t>
+            </a:r>
+            <a:r>
+              <a:rPr kumimoji="0" lang="ko-KR" altLang="ko-KR" sz="2200" b="1" i="0" u="none" strike="noStrike" cap="none" normalizeH="0" baseline="0" dirty="0">
+                <a:ln>
+                  <a:noFill/>
+                </a:ln>
+                <a:solidFill>
+                  <a:schemeClr val="tx1"/>
+                </a:solidFill>
+                <a:effectLst/>
+              </a:rPr>
+              <a:t> </a:t>
+            </a:r>
+            <a:r>
+              <a:rPr kumimoji="0" lang="ko-KR" altLang="ko-KR" sz="2200" b="1" i="0" u="none" strike="noStrike" cap="none" normalizeH="0" baseline="0" dirty="0" err="1">
+                <a:ln>
+                  <a:noFill/>
+                </a:ln>
+                <a:solidFill>
+                  <a:schemeClr val="tx1"/>
+                </a:solidFill>
+                <a:effectLst/>
+              </a:rPr>
+              <a:t>Boot</a:t>
+            </a:r>
+            <a:r>
+              <a:rPr kumimoji="0" lang="ko-KR" altLang="ko-KR" sz="2200" b="1" i="0" u="none" strike="noStrike" cap="none" normalizeH="0" baseline="0" dirty="0">
+                <a:ln>
+                  <a:noFill/>
+                </a:ln>
+                <a:solidFill>
+                  <a:schemeClr val="tx1"/>
+                </a:solidFill>
+                <a:effectLst/>
+              </a:rPr>
+              <a:t> 웹 </a:t>
+            </a:r>
+            <a:r>
+              <a:rPr kumimoji="0" lang="ko-KR" altLang="ko-KR" sz="2200" b="1" i="0" u="none" strike="noStrike" cap="none" normalizeH="0" baseline="0" dirty="0" err="1">
+                <a:ln>
+                  <a:noFill/>
+                </a:ln>
+                <a:solidFill>
+                  <a:schemeClr val="tx1"/>
+                </a:solidFill>
+                <a:effectLst/>
+              </a:rPr>
+              <a:t>백엔드</a:t>
+            </a:r>
+            <a:r>
+              <a:rPr kumimoji="0" lang="ko-KR" altLang="ko-KR" sz="2200" b="1" i="0" u="none" strike="noStrike" cap="none" normalizeH="0" baseline="0" dirty="0">
+                <a:ln>
+                  <a:noFill/>
+                </a:ln>
+                <a:solidFill>
+                  <a:schemeClr val="tx1"/>
+                </a:solidFill>
+                <a:effectLst/>
+              </a:rPr>
+              <a:t> 개발자 전환을 위해 웹 기초 및</a:t>
+            </a:r>
+            <a:r>
+              <a:rPr lang="en-US" altLang="ko-KR" sz="2200" b="1" dirty="0"/>
+              <a:t> FE</a:t>
+            </a:r>
+            <a:r>
+              <a:rPr kumimoji="0" lang="ko-KR" altLang="ko-KR" sz="2200" b="1" i="0" u="none" strike="noStrike" cap="none" normalizeH="0" baseline="0" dirty="0">
+                <a:ln>
+                  <a:noFill/>
+                </a:ln>
+                <a:solidFill>
+                  <a:schemeClr val="tx1"/>
+                </a:solidFill>
+                <a:effectLst/>
+              </a:rPr>
+              <a:t>/</a:t>
+            </a:r>
+            <a:r>
+              <a:rPr kumimoji="0" lang="en-US" altLang="ko-KR" sz="2200" b="1" i="0" u="none" strike="noStrike" cap="none" normalizeH="0" baseline="0" dirty="0">
+                <a:ln>
+                  <a:noFill/>
+                </a:ln>
+                <a:solidFill>
+                  <a:schemeClr val="tx1"/>
+                </a:solidFill>
+                <a:effectLst/>
+              </a:rPr>
+              <a:t>BE</a:t>
+            </a:r>
+            <a:r>
+              <a:rPr kumimoji="0" lang="ko-KR" altLang="ko-KR" sz="2200" b="1" i="0" u="none" strike="noStrike" cap="none" normalizeH="0" baseline="0" dirty="0">
+                <a:ln>
+                  <a:noFill/>
+                </a:ln>
+                <a:solidFill>
+                  <a:schemeClr val="tx1"/>
+                </a:solidFill>
+                <a:effectLst/>
+              </a:rPr>
+              <a:t> </a:t>
+            </a:r>
+            <a:r>
+              <a:rPr kumimoji="0" lang="ko-KR" altLang="ko-KR" sz="2200" b="1" i="0" u="none" strike="noStrike" cap="none" normalizeH="0" baseline="0" dirty="0" err="1">
+                <a:ln>
+                  <a:noFill/>
+                </a:ln>
+                <a:solidFill>
+                  <a:schemeClr val="tx1"/>
+                </a:solidFill>
+                <a:effectLst/>
+              </a:rPr>
+              <a:t>풀스택</a:t>
+            </a:r>
+            <a:r>
+              <a:rPr kumimoji="0" lang="ko-KR" altLang="ko-KR" sz="2200" b="1" i="0" u="none" strike="noStrike" cap="none" normalizeH="0" baseline="0" dirty="0">
+                <a:ln>
+                  <a:noFill/>
+                </a:ln>
+                <a:solidFill>
+                  <a:schemeClr val="tx1"/>
+                </a:solidFill>
+                <a:effectLst/>
+              </a:rPr>
+              <a:t> 지식 함양</a:t>
+            </a:r>
+            <a:endParaRPr lang="en-US" altLang="ko-KR" sz="2200" dirty="0"/>
+          </a:p>
+          <a:p>
+            <a:pPr marL="0" marR="0" lvl="0" indent="0" algn="l" defTabSz="914400" rtl="0" eaLnBrk="0" fontAlgn="base" latinLnBrk="0" hangingPunct="0">
+              <a:lnSpc>
+                <a:spcPct val="100000"/>
+              </a:lnSpc>
+              <a:spcBef>
+                <a:spcPct val="0"/>
+              </a:spcBef>
+              <a:spcAft>
+                <a:spcPct val="0"/>
+              </a:spcAft>
+              <a:buClrTx/>
+              <a:buSzTx/>
+              <a:buFontTx/>
+              <a:buNone/>
+              <a:tabLst/>
+            </a:pPr>
+            <a:endParaRPr kumimoji="0" lang="en-US" altLang="ko-KR" sz="1800" b="0" i="0" u="none" strike="noStrike" cap="none" normalizeH="0" baseline="0" dirty="0">
+              <a:ln>
+                <a:noFill/>
+              </a:ln>
+              <a:solidFill>
+                <a:schemeClr val="tx1"/>
+              </a:solidFill>
+              <a:effectLst/>
+            </a:endParaRPr>
+          </a:p>
+          <a:p>
+            <a:pPr marL="285750" marR="0" lvl="0" indent="-285750" algn="l" defTabSz="914400" rtl="0" eaLnBrk="0" fontAlgn="base" latinLnBrk="0" hangingPunct="0">
+              <a:lnSpc>
+                <a:spcPct val="100000"/>
+              </a:lnSpc>
+              <a:spcBef>
+                <a:spcPct val="0"/>
+              </a:spcBef>
+              <a:spcAft>
+                <a:spcPct val="0"/>
+              </a:spcAft>
+              <a:buClrTx/>
+              <a:buSzTx/>
+              <a:buFont typeface="Arial" panose="020B0604020202020204" pitchFamily="34" charset="0"/>
+              <a:buChar char="•"/>
+              <a:tabLst/>
+            </a:pPr>
+            <a:r>
+              <a:rPr kumimoji="0" lang="ko-KR" altLang="ko-KR" sz="2000" b="1" i="0" u="none" strike="noStrike" cap="none" normalizeH="0" baseline="0" dirty="0">
+                <a:ln>
+                  <a:noFill/>
+                </a:ln>
+                <a:solidFill>
+                  <a:schemeClr val="tx1"/>
+                </a:solidFill>
+                <a:effectLst/>
+              </a:rPr>
+              <a:t>웹 기초 및 </a:t>
+            </a:r>
+            <a:r>
+              <a:rPr kumimoji="0" lang="ko-KR" altLang="ko-KR" sz="2000" b="1" i="0" u="none" strike="noStrike" cap="none" normalizeH="0" baseline="0" dirty="0" err="1">
+                <a:ln>
+                  <a:noFill/>
+                </a:ln>
+                <a:solidFill>
+                  <a:schemeClr val="tx1"/>
+                </a:solidFill>
+                <a:effectLst/>
+              </a:rPr>
+              <a:t>아키텍팅과</a:t>
+            </a:r>
+            <a:r>
+              <a:rPr kumimoji="0" lang="ko-KR" altLang="ko-KR" sz="2000" b="1" i="0" u="none" strike="noStrike" cap="none" normalizeH="0" baseline="0" dirty="0">
+                <a:ln>
+                  <a:noFill/>
+                </a:ln>
+                <a:solidFill>
+                  <a:schemeClr val="tx1"/>
+                </a:solidFill>
+                <a:effectLst/>
+              </a:rPr>
+              <a:t> CI/CD</a:t>
+            </a:r>
+            <a:r>
+              <a:rPr kumimoji="0" lang="ko-KR" altLang="ko-KR" sz="2000" b="0" i="0" u="none" strike="noStrike" cap="none" normalizeH="0" baseline="0" dirty="0">
+                <a:ln>
+                  <a:noFill/>
+                </a:ln>
+                <a:solidFill>
+                  <a:schemeClr val="tx1"/>
+                </a:solidFill>
+                <a:effectLst/>
+              </a:rPr>
+              <a:t> </a:t>
+            </a:r>
+          </a:p>
+          <a:p>
+            <a:pPr marL="742950" marR="0" lvl="1" indent="-285750" algn="l" defTabSz="914400" rtl="0" eaLnBrk="0" fontAlgn="base" latinLnBrk="0" hangingPunct="0">
+              <a:lnSpc>
+                <a:spcPct val="100000"/>
+              </a:lnSpc>
+              <a:spcBef>
+                <a:spcPct val="0"/>
+              </a:spcBef>
+              <a:spcAft>
+                <a:spcPct val="0"/>
+              </a:spcAft>
+              <a:buClrTx/>
+              <a:buSzTx/>
+              <a:buFont typeface="Arial" panose="020B0604020202020204" pitchFamily="34" charset="0"/>
+              <a:buChar char="•"/>
+              <a:tabLst/>
+            </a:pPr>
+            <a:r>
+              <a:rPr kumimoji="0" lang="ko-KR" altLang="ko-KR" sz="1800" b="0" i="0" u="none" strike="noStrike" cap="none" normalizeH="0" baseline="0" dirty="0">
+                <a:ln>
+                  <a:noFill/>
+                </a:ln>
+                <a:solidFill>
+                  <a:schemeClr val="tx1"/>
+                </a:solidFill>
+                <a:effectLst/>
+              </a:rPr>
+              <a:t>웹 브라우저와 웹 서버 및 AWS, </a:t>
+            </a:r>
+            <a:r>
+              <a:rPr kumimoji="0" lang="ko-KR" altLang="ko-KR" sz="1800" b="0" i="0" u="none" strike="noStrike" cap="none" normalizeH="0" baseline="0" dirty="0" err="1">
+                <a:ln>
+                  <a:noFill/>
+                </a:ln>
+                <a:solidFill>
+                  <a:schemeClr val="tx1"/>
+                </a:solidFill>
+                <a:effectLst/>
+              </a:rPr>
+              <a:t>DNS와</a:t>
+            </a:r>
+            <a:r>
+              <a:rPr kumimoji="0" lang="ko-KR" altLang="ko-KR" sz="1800" b="0" i="0" u="none" strike="noStrike" cap="none" normalizeH="0" baseline="0" dirty="0">
+                <a:ln>
+                  <a:noFill/>
+                </a:ln>
+                <a:solidFill>
+                  <a:schemeClr val="tx1"/>
+                </a:solidFill>
+                <a:effectLst/>
+              </a:rPr>
+              <a:t> SEO 및 웹 페이지 렌더링 패턴.</a:t>
+            </a:r>
+            <a:br>
+              <a:rPr lang="en-US" altLang="ko-KR" dirty="0"/>
+            </a:br>
+            <a:r>
+              <a:rPr kumimoji="0" lang="ko-KR" altLang="ko-KR" sz="1800" b="0" i="0" u="none" strike="noStrike" cap="none" normalizeH="0" baseline="0" dirty="0" err="1">
+                <a:ln>
+                  <a:noFill/>
+                </a:ln>
+                <a:solidFill>
+                  <a:schemeClr val="tx1"/>
+                </a:solidFill>
+                <a:effectLst/>
+              </a:rPr>
+              <a:t>Git의</a:t>
+            </a:r>
+            <a:r>
+              <a:rPr kumimoji="0" lang="ko-KR" altLang="ko-KR" sz="1800" b="0" i="0" u="none" strike="noStrike" cap="none" normalizeH="0" baseline="0" dirty="0">
+                <a:ln>
+                  <a:noFill/>
+                </a:ln>
+                <a:solidFill>
+                  <a:schemeClr val="tx1"/>
+                </a:solidFill>
+                <a:effectLst/>
+              </a:rPr>
+              <a:t> 동작 원리 및 사례 실습, </a:t>
+            </a:r>
+            <a:r>
+              <a:rPr kumimoji="0" lang="ko-KR" altLang="ko-KR" sz="1800" b="0" i="0" u="none" strike="noStrike" cap="none" normalizeH="0" baseline="0" dirty="0" err="1">
+                <a:ln>
+                  <a:noFill/>
+                </a:ln>
+                <a:solidFill>
+                  <a:schemeClr val="tx1"/>
+                </a:solidFill>
+                <a:effectLst/>
+              </a:rPr>
+              <a:t>Github</a:t>
+            </a:r>
+            <a:r>
+              <a:rPr kumimoji="0" lang="ko-KR" altLang="ko-KR" sz="1800" b="0" i="0" u="none" strike="noStrike" cap="none" normalizeH="0" baseline="0" dirty="0">
+                <a:ln>
+                  <a:noFill/>
+                </a:ln>
+                <a:solidFill>
+                  <a:schemeClr val="tx1"/>
+                </a:solidFill>
+                <a:effectLst/>
+              </a:rPr>
+              <a:t> </a:t>
+            </a:r>
+            <a:r>
+              <a:rPr kumimoji="0" lang="ko-KR" altLang="ko-KR" sz="1800" b="0" i="0" u="none" strike="noStrike" cap="none" normalizeH="0" baseline="0" dirty="0" err="1">
+                <a:ln>
+                  <a:noFill/>
+                </a:ln>
+                <a:solidFill>
+                  <a:schemeClr val="tx1"/>
+                </a:solidFill>
+                <a:effectLst/>
+              </a:rPr>
+              <a:t>Action을</a:t>
+            </a:r>
+            <a:r>
+              <a:rPr kumimoji="0" lang="ko-KR" altLang="ko-KR" sz="1800" b="0" i="0" u="none" strike="noStrike" cap="none" normalizeH="0" baseline="0" dirty="0">
+                <a:ln>
+                  <a:noFill/>
+                </a:ln>
+                <a:solidFill>
+                  <a:schemeClr val="tx1"/>
+                </a:solidFill>
+                <a:effectLst/>
+              </a:rPr>
+              <a:t> 통한 CI/CD 구축 </a:t>
+            </a:r>
+            <a:endParaRPr kumimoji="0" lang="en-US" altLang="ko-KR" sz="1800" b="0" i="0" u="none" strike="noStrike" cap="none" normalizeH="0" baseline="0" dirty="0">
+              <a:ln>
+                <a:noFill/>
+              </a:ln>
+              <a:solidFill>
+                <a:schemeClr val="tx1"/>
+              </a:solidFill>
+              <a:effectLst/>
+            </a:endParaRPr>
+          </a:p>
+          <a:p>
+            <a:pPr marL="742950" marR="0" lvl="1" indent="-285750" algn="l" defTabSz="914400" rtl="0" eaLnBrk="0" fontAlgn="base" latinLnBrk="0" hangingPunct="0">
+              <a:lnSpc>
+                <a:spcPct val="100000"/>
+              </a:lnSpc>
+              <a:spcBef>
+                <a:spcPct val="0"/>
+              </a:spcBef>
+              <a:spcAft>
+                <a:spcPct val="0"/>
+              </a:spcAft>
+              <a:buClrTx/>
+              <a:buSzTx/>
+              <a:buFont typeface="Arial" panose="020B0604020202020204" pitchFamily="34" charset="0"/>
+              <a:buChar char="•"/>
+              <a:tabLst/>
+            </a:pPr>
+            <a:endParaRPr kumimoji="0" lang="en-US" altLang="ko-KR" sz="1800" b="1" i="0" u="none" strike="noStrike" cap="none" normalizeH="0" baseline="0" dirty="0">
+              <a:ln>
+                <a:noFill/>
+              </a:ln>
+              <a:solidFill>
+                <a:schemeClr val="tx1"/>
+              </a:solidFill>
+              <a:effectLst/>
+            </a:endParaRPr>
+          </a:p>
+          <a:p>
+            <a:pPr marL="285750" marR="0" lvl="0" indent="-285750" algn="l" defTabSz="914400" rtl="0" eaLnBrk="0" fontAlgn="base" latinLnBrk="0" hangingPunct="0">
+              <a:lnSpc>
+                <a:spcPct val="100000"/>
+              </a:lnSpc>
+              <a:spcBef>
+                <a:spcPct val="0"/>
+              </a:spcBef>
+              <a:spcAft>
+                <a:spcPct val="0"/>
+              </a:spcAft>
+              <a:buClrTx/>
+              <a:buSzTx/>
+              <a:buFont typeface="Arial" panose="020B0604020202020204" pitchFamily="34" charset="0"/>
+              <a:buChar char="•"/>
+              <a:tabLst/>
+            </a:pPr>
+            <a:r>
+              <a:rPr kumimoji="0" lang="en-US" altLang="ko-KR" sz="2000" b="1" i="0" u="none" strike="noStrike" cap="none" normalizeH="0" baseline="0" dirty="0">
+                <a:ln>
+                  <a:noFill/>
+                </a:ln>
+                <a:solidFill>
+                  <a:schemeClr val="tx1"/>
+                </a:solidFill>
+                <a:effectLst/>
+              </a:rPr>
+              <a:t>Frontend</a:t>
+            </a:r>
+            <a:r>
+              <a:rPr kumimoji="0" lang="ko-KR" altLang="ko-KR" sz="2000" b="0" i="0" u="none" strike="noStrike" cap="none" normalizeH="0" baseline="0" dirty="0">
+                <a:ln>
+                  <a:noFill/>
+                </a:ln>
+                <a:solidFill>
+                  <a:schemeClr val="tx1"/>
+                </a:solidFill>
+                <a:effectLst/>
+              </a:rPr>
+              <a:t> </a:t>
+            </a:r>
+          </a:p>
+          <a:p>
+            <a:pPr marL="742950" marR="0" lvl="1" indent="-285750" algn="l" defTabSz="914400" rtl="0" eaLnBrk="0" fontAlgn="base" latinLnBrk="0" hangingPunct="0">
+              <a:lnSpc>
+                <a:spcPct val="100000"/>
+              </a:lnSpc>
+              <a:spcBef>
+                <a:spcPct val="0"/>
+              </a:spcBef>
+              <a:spcAft>
+                <a:spcPct val="0"/>
+              </a:spcAft>
+              <a:buClrTx/>
+              <a:buSzTx/>
+              <a:buFont typeface="Arial" panose="020B0604020202020204" pitchFamily="34" charset="0"/>
+              <a:buChar char="•"/>
+              <a:tabLst/>
+            </a:pPr>
+            <a:r>
+              <a:rPr kumimoji="0" lang="ko-KR" altLang="ko-KR" sz="1800" b="0" i="0" u="none" strike="noStrike" cap="none" normalizeH="0" baseline="0" dirty="0">
+                <a:ln>
+                  <a:noFill/>
+                </a:ln>
+                <a:solidFill>
+                  <a:schemeClr val="tx1"/>
+                </a:solidFill>
+                <a:effectLst/>
+              </a:rPr>
+              <a:t>JS ES6 문법 및 JS 엔진 동작 원리. </a:t>
+            </a:r>
+            <a:r>
+              <a:rPr kumimoji="0" lang="ko-KR" altLang="ko-KR" sz="1800" b="0" i="0" u="none" strike="noStrike" cap="none" normalizeH="0" baseline="0" dirty="0" err="1">
+                <a:ln>
+                  <a:noFill/>
+                </a:ln>
+                <a:solidFill>
+                  <a:schemeClr val="tx1"/>
+                </a:solidFill>
+                <a:effectLst/>
+              </a:rPr>
+              <a:t>React</a:t>
+            </a:r>
+            <a:r>
+              <a:rPr kumimoji="0" lang="ko-KR" altLang="ko-KR" sz="1800" b="0" i="0" u="none" strike="noStrike" cap="none" normalizeH="0" baseline="0" dirty="0">
+                <a:ln>
+                  <a:noFill/>
+                </a:ln>
+                <a:solidFill>
+                  <a:schemeClr val="tx1"/>
+                </a:solidFill>
+                <a:effectLst/>
+              </a:rPr>
+              <a:t> 동작 원리 및 타 프레임워크와의 차이.</a:t>
+            </a:r>
+            <a:br>
+              <a:rPr kumimoji="0" lang="en-US" altLang="ko-KR" sz="1800" b="0" i="0" u="none" strike="noStrike" cap="none" normalizeH="0" baseline="0" dirty="0">
+                <a:ln>
+                  <a:noFill/>
+                </a:ln>
+                <a:solidFill>
+                  <a:schemeClr val="tx1"/>
+                </a:solidFill>
+                <a:effectLst/>
+              </a:rPr>
+            </a:br>
+            <a:r>
+              <a:rPr kumimoji="0" lang="ko-KR" altLang="ko-KR" sz="1800" b="0" i="0" u="none" strike="noStrike" cap="none" normalizeH="0" baseline="0" dirty="0" err="1">
+                <a:ln>
+                  <a:noFill/>
+                </a:ln>
+                <a:solidFill>
+                  <a:schemeClr val="tx1"/>
+                </a:solidFill>
+                <a:effectLst/>
+              </a:rPr>
+              <a:t>React</a:t>
+            </a:r>
+            <a:r>
+              <a:rPr kumimoji="0" lang="ko-KR" altLang="ko-KR" sz="1800" b="0" i="0" u="none" strike="noStrike" cap="none" normalizeH="0" baseline="0" dirty="0">
+                <a:ln>
+                  <a:noFill/>
+                </a:ln>
+                <a:solidFill>
+                  <a:schemeClr val="tx1"/>
+                </a:solidFill>
+                <a:effectLst/>
+              </a:rPr>
+              <a:t> </a:t>
+            </a:r>
+            <a:r>
+              <a:rPr kumimoji="0" lang="ko-KR" altLang="ko-KR" sz="1800" b="0" i="0" u="none" strike="noStrike" cap="none" normalizeH="0" baseline="0" dirty="0" err="1">
+                <a:ln>
+                  <a:noFill/>
+                </a:ln>
+                <a:solidFill>
+                  <a:schemeClr val="tx1"/>
+                </a:solidFill>
+                <a:effectLst/>
+              </a:rPr>
+              <a:t>서드</a:t>
+            </a:r>
+            <a:r>
+              <a:rPr kumimoji="0" lang="ko-KR" altLang="ko-KR" sz="1800" b="0" i="0" u="none" strike="noStrike" cap="none" normalizeH="0" baseline="0" dirty="0">
+                <a:ln>
+                  <a:noFill/>
+                </a:ln>
+                <a:solidFill>
+                  <a:schemeClr val="tx1"/>
+                </a:solidFill>
+                <a:effectLst/>
+              </a:rPr>
+              <a:t> 파티 라이브러리 실습 및 Next.js 원리 이해, 실습 </a:t>
+            </a:r>
+            <a:endParaRPr kumimoji="0" lang="en-US" altLang="ko-KR" sz="1800" b="0" i="0" u="none" strike="noStrike" cap="none" normalizeH="0" baseline="0" dirty="0">
+              <a:ln>
+                <a:noFill/>
+              </a:ln>
+              <a:solidFill>
+                <a:schemeClr val="tx1"/>
+              </a:solidFill>
+              <a:effectLst/>
+            </a:endParaRPr>
+          </a:p>
+          <a:p>
+            <a:pPr marL="742950" marR="0" lvl="1" indent="-285750" algn="l" defTabSz="914400" rtl="0" eaLnBrk="0" fontAlgn="base" latinLnBrk="0" hangingPunct="0">
+              <a:lnSpc>
+                <a:spcPct val="100000"/>
+              </a:lnSpc>
+              <a:spcBef>
+                <a:spcPct val="0"/>
+              </a:spcBef>
+              <a:spcAft>
+                <a:spcPct val="0"/>
+              </a:spcAft>
+              <a:buClrTx/>
+              <a:buSzTx/>
+              <a:buFont typeface="Arial" panose="020B0604020202020204" pitchFamily="34" charset="0"/>
+              <a:buChar char="•"/>
+              <a:tabLst/>
+            </a:pPr>
+            <a:endParaRPr kumimoji="0" lang="ko-KR" altLang="ko-KR" sz="1800" b="0" i="0" u="none" strike="noStrike" cap="none" normalizeH="0" baseline="0" dirty="0">
+              <a:ln>
+                <a:noFill/>
+              </a:ln>
+              <a:solidFill>
+                <a:schemeClr val="tx1"/>
+              </a:solidFill>
+              <a:effectLst/>
+            </a:endParaRPr>
+          </a:p>
+          <a:p>
+            <a:pPr marL="285750" marR="0" lvl="0" indent="-285750" algn="l" defTabSz="914400" rtl="0" eaLnBrk="0" fontAlgn="base" latinLnBrk="0" hangingPunct="0">
+              <a:lnSpc>
+                <a:spcPct val="100000"/>
+              </a:lnSpc>
+              <a:spcBef>
+                <a:spcPct val="0"/>
+              </a:spcBef>
+              <a:spcAft>
+                <a:spcPct val="0"/>
+              </a:spcAft>
+              <a:buClrTx/>
+              <a:buSzTx/>
+              <a:buFont typeface="Arial" panose="020B0604020202020204" pitchFamily="34" charset="0"/>
+              <a:buChar char="•"/>
+              <a:tabLst/>
+            </a:pPr>
+            <a:r>
+              <a:rPr kumimoji="0" lang="en-US" altLang="ko-KR" sz="2000" b="1" i="0" u="none" strike="noStrike" cap="none" normalizeH="0" baseline="0" dirty="0">
+                <a:ln>
+                  <a:noFill/>
+                </a:ln>
+                <a:solidFill>
+                  <a:schemeClr val="tx1"/>
+                </a:solidFill>
+                <a:effectLst/>
+              </a:rPr>
+              <a:t>Backend</a:t>
+            </a:r>
+            <a:r>
+              <a:rPr kumimoji="0" lang="ko-KR" altLang="ko-KR" sz="2000" b="0" i="0" u="none" strike="noStrike" cap="none" normalizeH="0" baseline="0" dirty="0">
+                <a:ln>
+                  <a:noFill/>
+                </a:ln>
+                <a:solidFill>
+                  <a:schemeClr val="tx1"/>
+                </a:solidFill>
+                <a:effectLst/>
+              </a:rPr>
+              <a:t> </a:t>
+            </a:r>
+          </a:p>
+          <a:p>
+            <a:pPr marL="742950" marR="0" lvl="1" indent="-285750" algn="l" defTabSz="914400" rtl="0" eaLnBrk="0" fontAlgn="base" latinLnBrk="0" hangingPunct="0">
+              <a:lnSpc>
+                <a:spcPct val="100000"/>
+              </a:lnSpc>
+              <a:spcBef>
+                <a:spcPct val="0"/>
+              </a:spcBef>
+              <a:spcAft>
+                <a:spcPct val="0"/>
+              </a:spcAft>
+              <a:buClrTx/>
+              <a:buSzTx/>
+              <a:buFont typeface="Arial" panose="020B0604020202020204" pitchFamily="34" charset="0"/>
+              <a:buChar char="•"/>
+              <a:tabLst/>
+            </a:pPr>
+            <a:r>
+              <a:rPr kumimoji="0" lang="ko-KR" altLang="ko-KR" sz="1800" b="0" i="0" u="none" strike="noStrike" cap="none" normalizeH="0" baseline="0" dirty="0" err="1">
+                <a:ln>
+                  <a:noFill/>
+                </a:ln>
+                <a:solidFill>
+                  <a:schemeClr val="tx1"/>
+                </a:solidFill>
+                <a:effectLst/>
+              </a:rPr>
+              <a:t>Java</a:t>
+            </a:r>
+            <a:r>
+              <a:rPr kumimoji="0" lang="ko-KR" altLang="ko-KR" sz="1800" b="0" i="0" u="none" strike="noStrike" cap="none" normalizeH="0" baseline="0" dirty="0">
+                <a:ln>
+                  <a:noFill/>
+                </a:ln>
+                <a:solidFill>
+                  <a:schemeClr val="tx1"/>
+                </a:solidFill>
+                <a:effectLst/>
+              </a:rPr>
+              <a:t> 객체지향 프로그래밍 문법, 함수형 프로그래밍 확장 문법. </a:t>
+            </a:r>
+            <a:r>
+              <a:rPr kumimoji="0" lang="ko-KR" altLang="ko-KR" sz="1800" b="0" i="0" u="none" strike="noStrike" cap="none" normalizeH="0" baseline="0" dirty="0" err="1">
+                <a:ln>
+                  <a:noFill/>
+                </a:ln>
+                <a:solidFill>
+                  <a:schemeClr val="tx1"/>
+                </a:solidFill>
+                <a:effectLst/>
+              </a:rPr>
+              <a:t>Spring</a:t>
+            </a:r>
+            <a:r>
+              <a:rPr kumimoji="0" lang="ko-KR" altLang="ko-KR" sz="1800" b="0" i="0" u="none" strike="noStrike" cap="none" normalizeH="0" baseline="0" dirty="0">
+                <a:ln>
+                  <a:noFill/>
+                </a:ln>
+                <a:solidFill>
+                  <a:schemeClr val="tx1"/>
+                </a:solidFill>
+                <a:effectLst/>
+              </a:rPr>
+              <a:t> </a:t>
+            </a:r>
+            <a:r>
+              <a:rPr kumimoji="0" lang="ko-KR" altLang="ko-KR" sz="1800" b="0" i="0" u="none" strike="noStrike" cap="none" normalizeH="0" baseline="0" dirty="0" err="1">
+                <a:ln>
+                  <a:noFill/>
+                </a:ln>
+                <a:solidFill>
+                  <a:schemeClr val="tx1"/>
+                </a:solidFill>
+                <a:effectLst/>
+              </a:rPr>
+              <a:t>Boot</a:t>
+            </a:r>
+            <a:r>
+              <a:rPr kumimoji="0" lang="ko-KR" altLang="ko-KR" sz="1800" b="0" i="0" u="none" strike="noStrike" cap="none" normalizeH="0" baseline="0" dirty="0">
+                <a:ln>
+                  <a:noFill/>
+                </a:ln>
+                <a:solidFill>
+                  <a:schemeClr val="tx1"/>
+                </a:solidFill>
+                <a:effectLst/>
+              </a:rPr>
+              <a:t> 특장점과 연습. </a:t>
+            </a:r>
+          </a:p>
+          <a:p>
+            <a:pPr marL="742950" marR="0" lvl="1" indent="-285750" algn="l" defTabSz="914400" rtl="0" eaLnBrk="0" fontAlgn="base" latinLnBrk="0" hangingPunct="0">
+              <a:lnSpc>
+                <a:spcPct val="100000"/>
+              </a:lnSpc>
+              <a:spcBef>
+                <a:spcPct val="0"/>
+              </a:spcBef>
+              <a:spcAft>
+                <a:spcPct val="0"/>
+              </a:spcAft>
+              <a:buClrTx/>
+              <a:buSzTx/>
+              <a:buFont typeface="Arial" panose="020B0604020202020204" pitchFamily="34" charset="0"/>
+              <a:buChar char="•"/>
+              <a:tabLst/>
+            </a:pPr>
+            <a:r>
+              <a:rPr kumimoji="0" lang="ko-KR" altLang="ko-KR" sz="1800" b="0" i="0" u="none" strike="noStrike" cap="none" normalizeH="0" baseline="0" dirty="0">
+                <a:ln>
+                  <a:noFill/>
+                </a:ln>
+                <a:solidFill>
+                  <a:schemeClr val="tx1"/>
+                </a:solidFill>
+                <a:effectLst/>
+              </a:rPr>
+              <a:t>AWS VPC 구성 및 </a:t>
+            </a:r>
+            <a:r>
+              <a:rPr kumimoji="0" lang="ko-KR" altLang="ko-KR" sz="1800" b="0" i="0" u="none" strike="noStrike" cap="none" normalizeH="0" baseline="0" dirty="0" err="1">
+                <a:ln>
+                  <a:noFill/>
+                </a:ln>
+                <a:solidFill>
+                  <a:schemeClr val="tx1"/>
+                </a:solidFill>
+                <a:effectLst/>
+              </a:rPr>
+              <a:t>Bastion</a:t>
+            </a:r>
+            <a:r>
+              <a:rPr kumimoji="0" lang="ko-KR" altLang="ko-KR" sz="1800" b="0" i="0" u="none" strike="noStrike" cap="none" normalizeH="0" baseline="0" dirty="0">
+                <a:ln>
+                  <a:noFill/>
+                </a:ln>
+                <a:solidFill>
+                  <a:schemeClr val="tx1"/>
+                </a:solidFill>
+                <a:effectLst/>
+              </a:rPr>
+              <a:t> 과 NAT 통한 </a:t>
+            </a:r>
+            <a:r>
+              <a:rPr kumimoji="0" lang="ko-KR" altLang="ko-KR" sz="1800" b="0" i="0" u="none" strike="noStrike" cap="none" normalizeH="0" baseline="0" dirty="0" err="1">
+                <a:ln>
+                  <a:noFill/>
+                </a:ln>
+                <a:solidFill>
+                  <a:schemeClr val="tx1"/>
+                </a:solidFill>
+                <a:effectLst/>
+              </a:rPr>
+              <a:t>Private</a:t>
+            </a:r>
+            <a:r>
+              <a:rPr kumimoji="0" lang="ko-KR" altLang="ko-KR" sz="1800" b="0" i="0" u="none" strike="noStrike" cap="none" normalizeH="0" baseline="0" dirty="0">
+                <a:ln>
+                  <a:noFill/>
+                </a:ln>
+                <a:solidFill>
+                  <a:schemeClr val="tx1"/>
+                </a:solidFill>
+                <a:effectLst/>
+              </a:rPr>
+              <a:t> 네트워크 내 EC2 구성 </a:t>
+            </a:r>
+          </a:p>
+          <a:p>
+            <a:pPr marL="742950" marR="0" lvl="1" indent="-285750" algn="l" defTabSz="914400" rtl="0" eaLnBrk="0" fontAlgn="base" latinLnBrk="0" hangingPunct="0">
+              <a:lnSpc>
+                <a:spcPct val="100000"/>
+              </a:lnSpc>
+              <a:spcBef>
+                <a:spcPct val="0"/>
+              </a:spcBef>
+              <a:spcAft>
+                <a:spcPct val="0"/>
+              </a:spcAft>
+              <a:buClrTx/>
+              <a:buSzTx/>
+              <a:buFont typeface="Arial" panose="020B0604020202020204" pitchFamily="34" charset="0"/>
+              <a:buChar char="•"/>
+              <a:tabLst/>
+            </a:pPr>
+            <a:r>
+              <a:rPr kumimoji="0" lang="ko-KR" altLang="ko-KR" sz="1800" b="0" i="0" u="none" strike="noStrike" cap="none" normalizeH="0" baseline="0" dirty="0">
+                <a:ln>
+                  <a:noFill/>
+                </a:ln>
+                <a:solidFill>
+                  <a:schemeClr val="tx1"/>
+                </a:solidFill>
+                <a:effectLst/>
+              </a:rPr>
+              <a:t>데이터베이스와 ERD, 인덱스 및 트랜잭션.</a:t>
+            </a:r>
+            <a:endParaRPr kumimoji="0" lang="en-US" altLang="ko-KR" sz="1800" b="0" i="0" u="none" strike="noStrike" cap="none" normalizeH="0" baseline="0" dirty="0">
+              <a:ln>
+                <a:noFill/>
+              </a:ln>
+              <a:solidFill>
+                <a:schemeClr val="tx1"/>
+              </a:solidFill>
+              <a:effectLst/>
+            </a:endParaRPr>
+          </a:p>
+          <a:p>
+            <a:pPr marL="742950" marR="0" lvl="1" indent="-285750" algn="l" defTabSz="914400" rtl="0" eaLnBrk="0" fontAlgn="base" latinLnBrk="0" hangingPunct="0">
+              <a:lnSpc>
+                <a:spcPct val="100000"/>
+              </a:lnSpc>
+              <a:spcBef>
+                <a:spcPct val="0"/>
+              </a:spcBef>
+              <a:spcAft>
+                <a:spcPct val="0"/>
+              </a:spcAft>
+              <a:buClrTx/>
+              <a:buSzTx/>
+              <a:buFont typeface="Arial" panose="020B0604020202020204" pitchFamily="34" charset="0"/>
+              <a:buChar char="•"/>
+              <a:tabLst/>
+            </a:pPr>
+            <a:r>
+              <a:rPr kumimoji="0" lang="ko-KR" altLang="ko-KR" sz="1800" b="0" i="0" u="none" strike="noStrike" cap="none" normalizeH="0" baseline="0" dirty="0" err="1">
+                <a:ln>
+                  <a:noFill/>
+                </a:ln>
+                <a:solidFill>
+                  <a:schemeClr val="tx1"/>
+                </a:solidFill>
+                <a:effectLst/>
+              </a:rPr>
+              <a:t>Spring</a:t>
+            </a:r>
+            <a:r>
+              <a:rPr kumimoji="0" lang="ko-KR" altLang="ko-KR" sz="1800" b="0" i="0" u="none" strike="noStrike" cap="none" normalizeH="0" baseline="0" dirty="0">
+                <a:ln>
+                  <a:noFill/>
+                </a:ln>
+                <a:solidFill>
+                  <a:schemeClr val="tx1"/>
+                </a:solidFill>
+                <a:effectLst/>
+              </a:rPr>
+              <a:t> Data </a:t>
+            </a:r>
+            <a:r>
+              <a:rPr kumimoji="0" lang="ko-KR" altLang="ko-KR" sz="1800" b="0" i="0" u="none" strike="noStrike" cap="none" normalizeH="0" baseline="0" dirty="0" err="1">
+                <a:ln>
+                  <a:noFill/>
+                </a:ln>
+                <a:solidFill>
+                  <a:schemeClr val="tx1"/>
+                </a:solidFill>
+                <a:effectLst/>
+              </a:rPr>
+              <a:t>JPA를</a:t>
+            </a:r>
+            <a:r>
+              <a:rPr kumimoji="0" lang="ko-KR" altLang="ko-KR" sz="1800" b="0" i="0" u="none" strike="noStrike" cap="none" normalizeH="0" baseline="0" dirty="0">
+                <a:ln>
+                  <a:noFill/>
+                </a:ln>
+                <a:solidFill>
+                  <a:schemeClr val="tx1"/>
+                </a:solidFill>
+                <a:effectLst/>
+              </a:rPr>
+              <a:t> 통한 DB 관리. 연관관계 맵핑 관련</a:t>
+            </a:r>
+            <a:r>
+              <a:rPr kumimoji="0" lang="en-US" altLang="ko-KR" sz="1800" b="0" i="0" u="none" strike="noStrike" cap="none" normalizeH="0" baseline="0" dirty="0">
+                <a:ln>
+                  <a:noFill/>
+                </a:ln>
+                <a:solidFill>
+                  <a:schemeClr val="tx1"/>
+                </a:solidFill>
+                <a:effectLst/>
+              </a:rPr>
+              <a:t> </a:t>
+            </a:r>
+            <a:r>
+              <a:rPr kumimoji="0" lang="ko-KR" altLang="ko-KR" sz="1800" b="0" i="0" u="none" strike="noStrike" cap="none" normalizeH="0" baseline="0" dirty="0" err="1">
+                <a:ln>
+                  <a:noFill/>
+                </a:ln>
+                <a:solidFill>
+                  <a:schemeClr val="tx1"/>
+                </a:solidFill>
+                <a:effectLst/>
+              </a:rPr>
+              <a:t>어노테이션</a:t>
+            </a:r>
+            <a:r>
+              <a:rPr kumimoji="0" lang="ko-KR" altLang="ko-KR" sz="1800" b="0" i="0" u="none" strike="noStrike" cap="none" normalizeH="0" baseline="0" dirty="0">
+                <a:ln>
+                  <a:noFill/>
+                </a:ln>
+                <a:solidFill>
+                  <a:schemeClr val="tx1"/>
+                </a:solidFill>
+                <a:effectLst/>
+              </a:rPr>
+              <a:t> 실습 </a:t>
+            </a:r>
+          </a:p>
+          <a:p>
+            <a:pPr marL="742950" marR="0" lvl="1" indent="-285750" algn="l" defTabSz="914400" rtl="0" eaLnBrk="0" fontAlgn="base" latinLnBrk="0" hangingPunct="0">
+              <a:lnSpc>
+                <a:spcPct val="100000"/>
+              </a:lnSpc>
+              <a:spcBef>
+                <a:spcPct val="0"/>
+              </a:spcBef>
+              <a:spcAft>
+                <a:spcPct val="0"/>
+              </a:spcAft>
+              <a:buClrTx/>
+              <a:buSzTx/>
+              <a:buFont typeface="Arial" panose="020B0604020202020204" pitchFamily="34" charset="0"/>
+              <a:buChar char="•"/>
+              <a:tabLst/>
+            </a:pPr>
+            <a:r>
+              <a:rPr kumimoji="0" lang="ko-KR" altLang="ko-KR" sz="1800" b="0" i="0" u="none" strike="noStrike" cap="none" normalizeH="0" baseline="0" dirty="0" err="1">
+                <a:ln>
+                  <a:noFill/>
+                </a:ln>
+                <a:solidFill>
+                  <a:schemeClr val="tx1"/>
+                </a:solidFill>
+                <a:effectLst/>
+              </a:rPr>
+              <a:t>Spring</a:t>
+            </a:r>
+            <a:r>
+              <a:rPr kumimoji="0" lang="ko-KR" altLang="ko-KR" sz="1800" b="0" i="0" u="none" strike="noStrike" cap="none" normalizeH="0" baseline="0" dirty="0">
+                <a:ln>
+                  <a:noFill/>
+                </a:ln>
+                <a:solidFill>
+                  <a:schemeClr val="tx1"/>
+                </a:solidFill>
+                <a:effectLst/>
+              </a:rPr>
+              <a:t> </a:t>
+            </a:r>
+            <a:r>
+              <a:rPr kumimoji="0" lang="ko-KR" altLang="ko-KR" sz="1800" b="0" i="0" u="none" strike="noStrike" cap="none" normalizeH="0" baseline="0" dirty="0" err="1">
+                <a:ln>
+                  <a:noFill/>
+                </a:ln>
+                <a:solidFill>
+                  <a:schemeClr val="tx1"/>
+                </a:solidFill>
+                <a:effectLst/>
+              </a:rPr>
+              <a:t>Security</a:t>
+            </a:r>
+            <a:r>
+              <a:rPr kumimoji="0" lang="ko-KR" altLang="ko-KR" sz="1800" b="0" i="0" u="none" strike="noStrike" cap="none" normalizeH="0" baseline="0" dirty="0">
+                <a:ln>
+                  <a:noFill/>
+                </a:ln>
+                <a:solidFill>
+                  <a:schemeClr val="tx1"/>
+                </a:solidFill>
+                <a:effectLst/>
+              </a:rPr>
+              <a:t> 동작 원리. 인증과 인가 차이 및 SSO, </a:t>
+            </a:r>
+            <a:r>
+              <a:rPr kumimoji="0" lang="ko-KR" altLang="ko-KR" sz="1800" b="0" i="0" u="none" strike="noStrike" cap="none" normalizeH="0" baseline="0" dirty="0" err="1">
+                <a:ln>
+                  <a:noFill/>
+                </a:ln>
+                <a:solidFill>
+                  <a:schemeClr val="tx1"/>
+                </a:solidFill>
+                <a:effectLst/>
+              </a:rPr>
+              <a:t>OAuth</a:t>
+            </a:r>
+            <a:r>
+              <a:rPr kumimoji="0" lang="ko-KR" altLang="ko-KR" sz="1800" b="0" i="0" u="none" strike="noStrike" cap="none" normalizeH="0" baseline="0" dirty="0">
+                <a:ln>
+                  <a:noFill/>
+                </a:ln>
+                <a:solidFill>
+                  <a:schemeClr val="tx1"/>
+                </a:solidFill>
+                <a:effectLst/>
+              </a:rPr>
+              <a:t> 원리. </a:t>
+            </a:r>
+            <a:endParaRPr lang="en-US" altLang="ko-KR" dirty="0"/>
+          </a:p>
+          <a:p>
+            <a:pPr marL="742950" marR="0" lvl="1" indent="-285750" algn="l" defTabSz="914400" rtl="0" eaLnBrk="0" fontAlgn="base" latinLnBrk="0" hangingPunct="0">
+              <a:lnSpc>
+                <a:spcPct val="100000"/>
+              </a:lnSpc>
+              <a:spcBef>
+                <a:spcPct val="0"/>
+              </a:spcBef>
+              <a:spcAft>
+                <a:spcPct val="0"/>
+              </a:spcAft>
+              <a:buClrTx/>
+              <a:buSzTx/>
+              <a:buFont typeface="Arial" panose="020B0604020202020204" pitchFamily="34" charset="0"/>
+              <a:buChar char="•"/>
+              <a:tabLst/>
+            </a:pPr>
+            <a:endParaRPr kumimoji="0" lang="ko-KR" altLang="ko-KR" sz="1800" b="0" i="0" u="none" strike="noStrike" cap="none" normalizeH="0" baseline="0" dirty="0">
+              <a:ln>
+                <a:noFill/>
+              </a:ln>
+              <a:solidFill>
+                <a:schemeClr val="tx1"/>
+              </a:solidFill>
+              <a:effectLst/>
+            </a:endParaRPr>
+          </a:p>
+          <a:p>
+            <a:pPr marL="285750" marR="0" lvl="0" indent="-285750" algn="l" defTabSz="914400" rtl="0" eaLnBrk="0" fontAlgn="base" latinLnBrk="0" hangingPunct="0">
+              <a:lnSpc>
+                <a:spcPct val="100000"/>
+              </a:lnSpc>
+              <a:spcBef>
+                <a:spcPct val="0"/>
+              </a:spcBef>
+              <a:spcAft>
+                <a:spcPct val="0"/>
+              </a:spcAft>
+              <a:buClrTx/>
+              <a:buSzTx/>
+              <a:buFont typeface="Arial" panose="020B0604020202020204" pitchFamily="34" charset="0"/>
+              <a:buChar char="•"/>
+              <a:tabLst/>
+            </a:pPr>
+            <a:r>
+              <a:rPr kumimoji="0" lang="ko-KR" altLang="ko-KR" sz="1800" b="1" i="0" u="none" strike="noStrike" cap="none" normalizeH="0" baseline="0" dirty="0">
+                <a:ln>
+                  <a:noFill/>
+                </a:ln>
+                <a:solidFill>
+                  <a:schemeClr val="tx1"/>
+                </a:solidFill>
+                <a:effectLst/>
+              </a:rPr>
+              <a:t>4개월 학습 후 </a:t>
+            </a:r>
+            <a:r>
+              <a:rPr kumimoji="0" lang="ko-KR" altLang="ko-KR" sz="1800" b="1" i="0" u="none" strike="noStrike" cap="none" normalizeH="0" baseline="0" dirty="0" err="1">
+                <a:ln>
+                  <a:noFill/>
+                </a:ln>
+                <a:solidFill>
+                  <a:schemeClr val="tx1"/>
+                </a:solidFill>
+                <a:effectLst/>
+              </a:rPr>
+              <a:t>Spring으로</a:t>
+            </a:r>
+            <a:r>
+              <a:rPr kumimoji="0" lang="ko-KR" altLang="ko-KR" sz="1800" b="1" i="0" u="none" strike="noStrike" cap="none" normalizeH="0" baseline="0" dirty="0">
+                <a:ln>
+                  <a:noFill/>
+                </a:ln>
+                <a:solidFill>
+                  <a:schemeClr val="tx1"/>
+                </a:solidFill>
+                <a:effectLst/>
+              </a:rPr>
+              <a:t> 외주 계약 프로젝트 개발, 실제 유저 기반 최종 납품 및 유지 보수 경험 </a:t>
+            </a:r>
+          </a:p>
+        </p:txBody>
+      </p:sp>
+    </p:spTree>
+    <p:extLst>
+      <p:ext uri="{BB962C8B-B14F-4D97-AF65-F5344CB8AC3E}">
+        <p14:creationId xmlns:p14="http://schemas.microsoft.com/office/powerpoint/2010/main" val="3606103774"/>
+      </p:ext>
+    </p:extLst>
+  </p:cSld>
+  <p:clrMapOvr>
+    <a:masterClrMapping/>
+  </p:clrMapOvr>
+</p:sld>
+</file>
+
+<file path=ppt/slides/slide6.xml><?xml version="1.0" encoding="utf-8"?>
+<p:sld xmlns:a="http://schemas.openxmlformats.org/drawingml/2006/main" xmlns:r="http://schemas.openxmlformats.org/officeDocument/2006/relationships" xmlns:p="http://schemas.openxmlformats.org/presentationml/2006/main">
+  <p:cSld>
+    <p:spTree>
+      <p:nvGrpSpPr>
+        <p:cNvPr id="1" name=""/>
+        <p:cNvGrpSpPr/>
+        <p:nvPr/>
+      </p:nvGrpSpPr>
+      <p:grpSpPr>
+        <a:xfrm>
+          <a:off x="0" y="0"/>
+          <a:ext cx="0" cy="0"/>
+          <a:chOff x="0" y="0"/>
+          <a:chExt cx="0" cy="0"/>
+        </a:xfrm>
+      </p:grpSpPr>
+      <p:sp>
+        <p:nvSpPr>
+          <p:cNvPr id="4" name="TextBox 3">
+            <a:extLst>
+              <a:ext uri="{FF2B5EF4-FFF2-40B4-BE49-F238E27FC236}">
+                <a16:creationId xmlns:a16="http://schemas.microsoft.com/office/drawing/2014/main" id="{E85583EC-9572-6A77-98E2-AF69D202F2F6}"/>
+              </a:ext>
+            </a:extLst>
+          </p:cNvPr>
+          <p:cNvSpPr txBox="1"/>
+          <p:nvPr/>
+        </p:nvSpPr>
+        <p:spPr>
+          <a:xfrm>
+            <a:off x="621792" y="564922"/>
+            <a:ext cx="6896608" cy="707886"/>
+          </a:xfrm>
+          <a:prstGeom prst="rect">
+            <a:avLst/>
+          </a:prstGeom>
+          <a:noFill/>
+        </p:spPr>
+        <p:txBody>
+          <a:bodyPr wrap="square" rtlCol="0">
+            <a:spAutoFit/>
+          </a:bodyPr>
+          <a:lstStyle/>
+          <a:p>
+            <a:r>
+              <a:rPr lang="en-US" altLang="ko-KR" sz="4000" b="1" dirty="0">
+                <a:solidFill>
+                  <a:srgbClr val="468260"/>
+                </a:solidFill>
+              </a:rPr>
+              <a:t>Career / </a:t>
+            </a:r>
+            <a:r>
+              <a:rPr lang="ko-KR" altLang="en-US" sz="4000" b="1" dirty="0" err="1">
+                <a:solidFill>
+                  <a:srgbClr val="468260"/>
+                </a:solidFill>
+              </a:rPr>
+              <a:t>윈즈</a:t>
+            </a:r>
+            <a:r>
+              <a:rPr lang="ko-KR" altLang="en-US" sz="4000" b="1" dirty="0">
+                <a:solidFill>
+                  <a:srgbClr val="468260"/>
+                </a:solidFill>
+              </a:rPr>
+              <a:t> 시스템</a:t>
+            </a:r>
+          </a:p>
+        </p:txBody>
+      </p:sp>
+      <p:sp>
+        <p:nvSpPr>
+          <p:cNvPr id="5" name="TextBox 4">
+            <a:extLst>
+              <a:ext uri="{FF2B5EF4-FFF2-40B4-BE49-F238E27FC236}">
+                <a16:creationId xmlns:a16="http://schemas.microsoft.com/office/drawing/2014/main" id="{7E60C94C-FFF3-7EC2-4A8F-397FD50C3C09}"/>
+              </a:ext>
+            </a:extLst>
+          </p:cNvPr>
+          <p:cNvSpPr txBox="1"/>
+          <p:nvPr/>
+        </p:nvSpPr>
+        <p:spPr>
+          <a:xfrm>
+            <a:off x="1146969" y="1272808"/>
+            <a:ext cx="5981700" cy="461665"/>
+          </a:xfrm>
+          <a:prstGeom prst="rect">
+            <a:avLst/>
+          </a:prstGeom>
+          <a:noFill/>
+        </p:spPr>
+        <p:txBody>
+          <a:bodyPr wrap="square" rtlCol="0">
+            <a:spAutoFit/>
+          </a:bodyPr>
+          <a:lstStyle/>
+          <a:p>
+            <a:r>
+              <a:rPr lang="ko-KR" altLang="en-US" sz="2400" b="1" dirty="0"/>
+              <a:t>서비스 사업 본부 연구 개발 </a:t>
+            </a:r>
+            <a:r>
+              <a:rPr lang="en-US" altLang="ko-KR" sz="2400" b="1" dirty="0"/>
+              <a:t>1</a:t>
+            </a:r>
+            <a:r>
+              <a:rPr lang="ko-KR" altLang="en-US" sz="2400" b="1" dirty="0"/>
+              <a:t>팀</a:t>
+            </a:r>
+          </a:p>
+        </p:txBody>
+      </p:sp>
+      <p:sp>
+        <p:nvSpPr>
+          <p:cNvPr id="6" name="TextBox 5">
+            <a:extLst>
+              <a:ext uri="{FF2B5EF4-FFF2-40B4-BE49-F238E27FC236}">
+                <a16:creationId xmlns:a16="http://schemas.microsoft.com/office/drawing/2014/main" id="{926E5754-F934-DC4D-9F64-72EA97F2025E}"/>
+              </a:ext>
+            </a:extLst>
+          </p:cNvPr>
+          <p:cNvSpPr txBox="1"/>
+          <p:nvPr/>
+        </p:nvSpPr>
+        <p:spPr>
+          <a:xfrm>
+            <a:off x="1146968" y="1703646"/>
+            <a:ext cx="9559131" cy="369332"/>
+          </a:xfrm>
+          <a:prstGeom prst="rect">
+            <a:avLst/>
+          </a:prstGeom>
+          <a:noFill/>
+        </p:spPr>
+        <p:txBody>
+          <a:bodyPr wrap="square" rtlCol="0">
+            <a:spAutoFit/>
+          </a:bodyPr>
+          <a:lstStyle/>
+          <a:p>
+            <a:r>
+              <a:rPr lang="ko-KR" altLang="en-US" dirty="0">
+                <a:solidFill>
+                  <a:schemeClr val="bg1">
+                    <a:lumMod val="65000"/>
+                  </a:schemeClr>
+                </a:solidFill>
+                <a:effectLst/>
+              </a:rPr>
+              <a:t>🗓️ </a:t>
+            </a:r>
+            <a:r>
+              <a:rPr lang="en-US" altLang="ko-KR" dirty="0">
+                <a:solidFill>
+                  <a:schemeClr val="bg1">
+                    <a:lumMod val="65000"/>
+                  </a:schemeClr>
+                </a:solidFill>
+                <a:effectLst/>
+              </a:rPr>
+              <a:t>2020.01 ~ 2022.10 (2</a:t>
+            </a:r>
+            <a:r>
+              <a:rPr lang="ko-KR" altLang="en-US" dirty="0">
+                <a:solidFill>
+                  <a:schemeClr val="bg1">
+                    <a:lumMod val="65000"/>
+                  </a:schemeClr>
+                </a:solidFill>
+                <a:effectLst/>
+              </a:rPr>
+              <a:t>년</a:t>
+            </a:r>
+            <a:r>
+              <a:rPr lang="en-US" altLang="ko-KR" dirty="0">
+                <a:solidFill>
+                  <a:schemeClr val="bg1">
+                    <a:lumMod val="65000"/>
+                  </a:schemeClr>
+                </a:solidFill>
+                <a:effectLst/>
+              </a:rPr>
+              <a:t>10</a:t>
+            </a:r>
+            <a:r>
+              <a:rPr lang="ko-KR" altLang="en-US" dirty="0">
+                <a:solidFill>
+                  <a:schemeClr val="bg1">
+                    <a:lumMod val="65000"/>
+                  </a:schemeClr>
+                </a:solidFill>
+                <a:effectLst/>
+              </a:rPr>
+              <a:t>개월</a:t>
+            </a:r>
+            <a:r>
+              <a:rPr lang="en-US" altLang="ko-KR" dirty="0">
+                <a:solidFill>
+                  <a:schemeClr val="bg1">
+                    <a:lumMod val="65000"/>
+                  </a:schemeClr>
+                </a:solidFill>
+                <a:effectLst/>
+              </a:rPr>
+              <a:t>) | </a:t>
+            </a:r>
+            <a:r>
+              <a:rPr lang="ko-KR" altLang="en-US" dirty="0">
+                <a:solidFill>
+                  <a:srgbClr val="0563C1"/>
+                </a:solidFill>
+                <a:effectLst/>
+                <a:hlinkClick r:id="rId2">
+                  <a:extLst>
+                    <a:ext uri="{A12FA001-AC4F-418D-AE19-62706E023703}">
+                      <ahyp:hlinkClr xmlns:ahyp="http://schemas.microsoft.com/office/drawing/2018/hyperlinkcolor" val="tx"/>
+                    </a:ext>
+                  </a:extLst>
+                </a:hlinkClick>
+              </a:rPr>
+              <a:t>🏢</a:t>
+            </a:r>
+            <a:r>
+              <a:rPr lang="ko-KR" altLang="en-US" dirty="0">
+                <a:solidFill>
+                  <a:schemeClr val="bg1">
+                    <a:lumMod val="65000"/>
+                  </a:schemeClr>
+                </a:solidFill>
+                <a:effectLst/>
+                <a:hlinkClick r:id="rId2">
+                  <a:extLst>
+                    <a:ext uri="{A12FA001-AC4F-418D-AE19-62706E023703}">
+                      <ahyp:hlinkClr xmlns:ahyp="http://schemas.microsoft.com/office/drawing/2018/hyperlinkcolor" val="tx"/>
+                    </a:ext>
+                  </a:extLst>
+                </a:hlinkClick>
+              </a:rPr>
+              <a:t> 회사 홈페이지</a:t>
+            </a:r>
+            <a:r>
+              <a:rPr lang="ko-KR" altLang="en-US" dirty="0">
+                <a:solidFill>
+                  <a:schemeClr val="bg1">
+                    <a:lumMod val="65000"/>
+                  </a:schemeClr>
+                </a:solidFill>
+                <a:effectLst/>
+              </a:rPr>
+              <a:t> </a:t>
+            </a:r>
+            <a:r>
+              <a:rPr lang="en-US" altLang="ko-KR" dirty="0">
+                <a:solidFill>
+                  <a:schemeClr val="bg1">
+                    <a:lumMod val="65000"/>
+                  </a:schemeClr>
+                </a:solidFill>
+                <a:effectLst/>
+              </a:rPr>
+              <a:t>| </a:t>
+            </a:r>
+            <a:r>
+              <a:rPr lang="ko-KR" altLang="en-US" dirty="0">
+                <a:solidFill>
+                  <a:schemeClr val="bg1">
+                    <a:lumMod val="65000"/>
+                  </a:schemeClr>
+                </a:solidFill>
+                <a:effectLst/>
+              </a:rPr>
+              <a:t>업력 </a:t>
+            </a:r>
+            <a:r>
+              <a:rPr lang="en-US" altLang="ko-KR" dirty="0">
+                <a:solidFill>
+                  <a:schemeClr val="bg1">
+                    <a:lumMod val="65000"/>
+                  </a:schemeClr>
+                </a:solidFill>
+                <a:effectLst/>
+              </a:rPr>
+              <a:t>25</a:t>
+            </a:r>
+            <a:r>
+              <a:rPr lang="ko-KR" altLang="en-US" dirty="0" err="1">
+                <a:solidFill>
+                  <a:schemeClr val="bg1">
+                    <a:lumMod val="65000"/>
+                  </a:schemeClr>
+                </a:solidFill>
+                <a:effectLst/>
+              </a:rPr>
+              <a:t>년차</a:t>
+            </a:r>
+            <a:r>
+              <a:rPr lang="ko-KR" altLang="en-US" dirty="0">
+                <a:solidFill>
+                  <a:schemeClr val="bg1">
+                    <a:lumMod val="65000"/>
+                  </a:schemeClr>
+                </a:solidFill>
+                <a:effectLst/>
+              </a:rPr>
+              <a:t> 중소기업 </a:t>
+            </a:r>
+            <a:r>
+              <a:rPr lang="en-US" altLang="ko-KR" dirty="0">
+                <a:solidFill>
+                  <a:schemeClr val="bg1">
+                    <a:lumMod val="65000"/>
+                  </a:schemeClr>
+                </a:solidFill>
+                <a:effectLst/>
+              </a:rPr>
+              <a:t>| </a:t>
+            </a:r>
+            <a:r>
+              <a:rPr lang="ko-KR" altLang="en-US" dirty="0">
+                <a:solidFill>
+                  <a:schemeClr val="bg1">
+                    <a:lumMod val="65000"/>
+                  </a:schemeClr>
+                </a:solidFill>
+                <a:effectLst/>
+              </a:rPr>
+              <a:t>사원수 </a:t>
+            </a:r>
+            <a:r>
+              <a:rPr lang="en-US" altLang="ko-KR" dirty="0">
+                <a:solidFill>
+                  <a:schemeClr val="bg1">
+                    <a:lumMod val="65000"/>
+                  </a:schemeClr>
+                </a:solidFill>
+                <a:effectLst/>
+              </a:rPr>
+              <a:t>45</a:t>
+            </a:r>
+            <a:r>
+              <a:rPr lang="ko-KR" altLang="en-US" dirty="0">
+                <a:solidFill>
+                  <a:schemeClr val="bg1">
+                    <a:lumMod val="65000"/>
+                  </a:schemeClr>
+                </a:solidFill>
+                <a:effectLst/>
+              </a:rPr>
+              <a:t>명</a:t>
+            </a:r>
+            <a:endParaRPr lang="ko-KR" altLang="en-US" dirty="0">
+              <a:solidFill>
+                <a:schemeClr val="bg1">
+                  <a:lumMod val="65000"/>
+                </a:schemeClr>
+              </a:solidFill>
+            </a:endParaRPr>
+          </a:p>
+        </p:txBody>
+      </p:sp>
+      <p:sp>
+        <p:nvSpPr>
+          <p:cNvPr id="7" name="TextBox 6">
+            <a:extLst>
+              <a:ext uri="{FF2B5EF4-FFF2-40B4-BE49-F238E27FC236}">
+                <a16:creationId xmlns:a16="http://schemas.microsoft.com/office/drawing/2014/main" id="{C7253DC5-FA28-976E-0527-9B4A17756E15}"/>
+              </a:ext>
+            </a:extLst>
+          </p:cNvPr>
+          <p:cNvSpPr txBox="1"/>
+          <p:nvPr/>
+        </p:nvSpPr>
+        <p:spPr>
+          <a:xfrm>
+            <a:off x="1146968" y="2072978"/>
+            <a:ext cx="10664032" cy="4431983"/>
+          </a:xfrm>
+          <a:prstGeom prst="rect">
+            <a:avLst/>
+          </a:prstGeom>
+          <a:noFill/>
+        </p:spPr>
+        <p:txBody>
+          <a:bodyPr wrap="square" rtlCol="0">
+            <a:spAutoFit/>
+          </a:bodyPr>
+          <a:lstStyle/>
+          <a:p>
+            <a:pPr marL="0" marR="0" lvl="0" indent="0" algn="l" defTabSz="914400" rtl="0" eaLnBrk="0" fontAlgn="base" latinLnBrk="0" hangingPunct="0">
+              <a:lnSpc>
+                <a:spcPct val="100000"/>
+              </a:lnSpc>
+              <a:spcBef>
+                <a:spcPct val="0"/>
+              </a:spcBef>
+              <a:spcAft>
+                <a:spcPct val="0"/>
+              </a:spcAft>
+              <a:buClrTx/>
+              <a:buSzTx/>
+              <a:buFontTx/>
+              <a:buNone/>
+              <a:tabLst/>
+            </a:pPr>
+            <a:r>
+              <a:rPr kumimoji="0" lang="ko-KR" altLang="en-US" sz="2200" b="1" i="0" u="none" strike="noStrike" cap="none" normalizeH="0" baseline="0" dirty="0">
+                <a:ln>
+                  <a:noFill/>
+                </a:ln>
+                <a:solidFill>
+                  <a:schemeClr val="tx1"/>
+                </a:solidFill>
+                <a:effectLst/>
+              </a:rPr>
+              <a:t>자사 안드로이드 앱 개발 및 유지보수</a:t>
+            </a:r>
+            <a:br>
+              <a:rPr kumimoji="0" lang="en-US" altLang="ko-KR" sz="1800" b="0" i="0" u="none" strike="noStrike" cap="none" normalizeH="0" baseline="0" dirty="0">
+                <a:ln>
+                  <a:noFill/>
+                </a:ln>
+                <a:solidFill>
+                  <a:schemeClr val="tx1"/>
+                </a:solidFill>
+                <a:effectLst/>
+              </a:rPr>
+            </a:br>
+            <a:r>
+              <a:rPr lang="en-US" altLang="ko-KR" dirty="0">
+                <a:solidFill>
+                  <a:schemeClr val="bg1">
+                    <a:lumMod val="65000"/>
+                  </a:schemeClr>
+                </a:solidFill>
+                <a:effectLst/>
+                <a:hlinkClick r:id="rId3">
+                  <a:extLst>
+                    <a:ext uri="{A12FA001-AC4F-418D-AE19-62706E023703}">
+                      <ahyp:hlinkClr xmlns:ahyp="http://schemas.microsoft.com/office/drawing/2018/hyperlinkcolor" val="tx"/>
+                    </a:ext>
+                  </a:extLst>
+                </a:hlinkClick>
+              </a:rPr>
+              <a:t>KT </a:t>
+            </a:r>
+            <a:r>
+              <a:rPr lang="ko-KR" altLang="en-US" dirty="0">
+                <a:solidFill>
+                  <a:schemeClr val="bg1">
+                    <a:lumMod val="65000"/>
+                  </a:schemeClr>
+                </a:solidFill>
+                <a:effectLst/>
+                <a:hlinkClick r:id="rId3">
+                  <a:extLst>
+                    <a:ext uri="{A12FA001-AC4F-418D-AE19-62706E023703}">
+                      <ahyp:hlinkClr xmlns:ahyp="http://schemas.microsoft.com/office/drawing/2018/hyperlinkcolor" val="tx"/>
+                    </a:ext>
+                  </a:extLst>
+                </a:hlinkClick>
+              </a:rPr>
+              <a:t>스마트폰 안심 </a:t>
+            </a:r>
+            <a:r>
+              <a:rPr lang="en-US" altLang="ko-KR" dirty="0">
+                <a:solidFill>
+                  <a:schemeClr val="bg1">
+                    <a:lumMod val="65000"/>
+                  </a:schemeClr>
+                </a:solidFill>
+                <a:effectLst/>
+                <a:hlinkClick r:id="rId3">
+                  <a:extLst>
+                    <a:ext uri="{A12FA001-AC4F-418D-AE19-62706E023703}">
+                      <ahyp:hlinkClr xmlns:ahyp="http://schemas.microsoft.com/office/drawing/2018/hyperlinkcolor" val="tx"/>
+                    </a:ext>
+                  </a:extLst>
+                </a:hlinkClick>
+              </a:rPr>
+              <a:t>2.0</a:t>
+            </a:r>
+            <a:r>
+              <a:rPr lang="ko-KR" altLang="en-US" dirty="0">
+                <a:solidFill>
+                  <a:schemeClr val="bg1">
+                    <a:lumMod val="65000"/>
+                  </a:schemeClr>
+                </a:solidFill>
+              </a:rPr>
+              <a:t> </a:t>
+            </a:r>
+            <a:r>
+              <a:rPr lang="en-US" altLang="ko-KR" dirty="0">
+                <a:solidFill>
+                  <a:schemeClr val="bg1">
+                    <a:lumMod val="65000"/>
+                  </a:schemeClr>
+                </a:solidFill>
+              </a:rPr>
+              <a:t>/ </a:t>
+            </a:r>
+            <a:r>
+              <a:rPr lang="ko-KR" altLang="en-US" dirty="0">
+                <a:solidFill>
+                  <a:schemeClr val="bg1">
+                    <a:lumMod val="65000"/>
+                  </a:schemeClr>
+                </a:solidFill>
+                <a:effectLst/>
+                <a:hlinkClick r:id="rId4">
+                  <a:extLst>
+                    <a:ext uri="{A12FA001-AC4F-418D-AE19-62706E023703}">
+                      <ahyp:hlinkClr xmlns:ahyp="http://schemas.microsoft.com/office/drawing/2018/hyperlinkcolor" val="tx"/>
+                    </a:ext>
+                  </a:extLst>
+                </a:hlinkClick>
+              </a:rPr>
+              <a:t>파워백신</a:t>
+            </a:r>
+            <a:r>
+              <a:rPr lang="ko-KR" altLang="en-US" dirty="0">
+                <a:solidFill>
+                  <a:schemeClr val="bg1">
+                    <a:lumMod val="65000"/>
+                  </a:schemeClr>
+                </a:solidFill>
+              </a:rPr>
+              <a:t> </a:t>
+            </a:r>
+            <a:r>
+              <a:rPr lang="en-US" altLang="ko-KR" dirty="0">
+                <a:solidFill>
+                  <a:schemeClr val="bg1">
+                    <a:lumMod val="65000"/>
+                  </a:schemeClr>
+                </a:solidFill>
+              </a:rPr>
+              <a:t>/ </a:t>
+            </a:r>
+            <a:r>
+              <a:rPr lang="ko-KR" altLang="en-US" dirty="0">
+                <a:solidFill>
+                  <a:schemeClr val="bg1">
+                    <a:lumMod val="65000"/>
+                  </a:schemeClr>
+                </a:solidFill>
+              </a:rPr>
+              <a:t>스마트 </a:t>
+            </a:r>
+            <a:r>
+              <a:rPr lang="ko-KR" altLang="en-US" dirty="0" err="1">
+                <a:solidFill>
+                  <a:schemeClr val="bg1">
+                    <a:lumMod val="65000"/>
+                  </a:schemeClr>
+                </a:solidFill>
+              </a:rPr>
+              <a:t>안심케어</a:t>
+            </a:r>
+            <a:r>
+              <a:rPr lang="ko-KR" altLang="en-US" dirty="0">
+                <a:solidFill>
+                  <a:schemeClr val="bg1">
+                    <a:lumMod val="65000"/>
+                  </a:schemeClr>
+                </a:solidFill>
+              </a:rPr>
+              <a:t> 플러스 </a:t>
+            </a:r>
+            <a:r>
+              <a:rPr lang="en-US" altLang="ko-KR" dirty="0">
+                <a:solidFill>
+                  <a:schemeClr val="bg1">
+                    <a:lumMod val="65000"/>
+                  </a:schemeClr>
+                </a:solidFill>
+              </a:rPr>
+              <a:t>/ </a:t>
+            </a:r>
+            <a:r>
+              <a:rPr lang="ko-KR" altLang="en-US" dirty="0" err="1">
+                <a:solidFill>
+                  <a:schemeClr val="bg1">
+                    <a:lumMod val="65000"/>
+                  </a:schemeClr>
+                </a:solidFill>
+              </a:rPr>
+              <a:t>세이퍼</a:t>
+            </a:r>
+            <a:r>
+              <a:rPr lang="ko-KR" altLang="en-US" dirty="0">
+                <a:solidFill>
+                  <a:schemeClr val="bg1">
+                    <a:lumMod val="65000"/>
+                  </a:schemeClr>
+                </a:solidFill>
+              </a:rPr>
+              <a:t> 플러스</a:t>
+            </a:r>
+          </a:p>
+          <a:p>
+            <a:pPr marL="285750" marR="0" lvl="0" indent="-285750" algn="l" defTabSz="914400" rtl="0" eaLnBrk="0" fontAlgn="base" latinLnBrk="0" hangingPunct="0">
+              <a:lnSpc>
+                <a:spcPct val="100000"/>
+              </a:lnSpc>
+              <a:spcBef>
+                <a:spcPct val="0"/>
+              </a:spcBef>
+              <a:spcAft>
+                <a:spcPct val="0"/>
+              </a:spcAft>
+              <a:buClrTx/>
+              <a:buSzTx/>
+              <a:buFont typeface="Arial" panose="020B0604020202020204" pitchFamily="34" charset="0"/>
+              <a:buChar char="•"/>
+              <a:tabLst/>
+            </a:pPr>
+            <a:r>
+              <a:rPr kumimoji="0" lang="en-US" altLang="ko-KR" sz="1800" b="0" i="0" u="none" strike="noStrike" cap="none" normalizeH="0" baseline="0" dirty="0">
+                <a:ln>
+                  <a:noFill/>
+                </a:ln>
+                <a:effectLst/>
+              </a:rPr>
+              <a:t>OS </a:t>
+            </a:r>
+            <a:r>
+              <a:rPr kumimoji="0" lang="ko-KR" altLang="en-US" sz="1800" b="0" i="0" u="none" strike="noStrike" cap="none" normalizeH="0" baseline="0" dirty="0">
+                <a:ln>
+                  <a:noFill/>
+                </a:ln>
+                <a:effectLst/>
+              </a:rPr>
+              <a:t>별 업데이트 사항 확인</a:t>
+            </a:r>
+            <a:r>
+              <a:rPr kumimoji="0" lang="en-US" altLang="ko-KR" sz="1800" b="0" i="0" u="none" strike="noStrike" cap="none" normalizeH="0" baseline="0" dirty="0">
+                <a:ln>
+                  <a:noFill/>
+                </a:ln>
+                <a:effectLst/>
+              </a:rPr>
+              <a:t>.</a:t>
+            </a:r>
+            <a:r>
+              <a:rPr kumimoji="0" lang="ko-KR" altLang="en-US" sz="1800" b="0" i="0" u="none" strike="noStrike" cap="none" normalizeH="0" baseline="0" dirty="0">
+                <a:ln>
+                  <a:noFill/>
+                </a:ln>
+                <a:effectLst/>
+              </a:rPr>
+              <a:t> 사용이 중지되는</a:t>
+            </a:r>
+            <a:r>
+              <a:rPr kumimoji="0" lang="en-US" altLang="ko-KR" sz="1800" b="0" i="0" u="none" strike="noStrike" cap="none" normalizeH="0" baseline="0" dirty="0">
+                <a:ln>
+                  <a:noFill/>
+                </a:ln>
+                <a:effectLst/>
+              </a:rPr>
+              <a:t>(deprecated)</a:t>
+            </a:r>
+            <a:r>
+              <a:rPr lang="ko-KR" altLang="en-US" dirty="0"/>
+              <a:t> 기능들에 대한 영향도 분석</a:t>
+            </a:r>
+            <a:r>
+              <a:rPr lang="en-US" altLang="ko-KR" dirty="0"/>
+              <a:t> </a:t>
+            </a:r>
+            <a:r>
+              <a:rPr lang="ko-KR" altLang="en-US" dirty="0"/>
+              <a:t>및 대응</a:t>
+            </a:r>
+            <a:endParaRPr kumimoji="0" lang="en-US" altLang="ko-KR" sz="1800" b="0" i="0" u="none" strike="noStrike" cap="none" normalizeH="0" baseline="0" dirty="0">
+              <a:ln>
+                <a:noFill/>
+              </a:ln>
+              <a:effectLst/>
+            </a:endParaRPr>
+          </a:p>
+          <a:p>
+            <a:pPr marL="285750" marR="0" lvl="0" indent="-285750" algn="l" defTabSz="914400" rtl="0" eaLnBrk="0" fontAlgn="base" latinLnBrk="0" hangingPunct="0">
+              <a:lnSpc>
+                <a:spcPct val="100000"/>
+              </a:lnSpc>
+              <a:spcBef>
+                <a:spcPct val="0"/>
+              </a:spcBef>
+              <a:spcAft>
+                <a:spcPct val="0"/>
+              </a:spcAft>
+              <a:buClrTx/>
+              <a:buSzTx/>
+              <a:buFont typeface="Arial" panose="020B0604020202020204" pitchFamily="34" charset="0"/>
+              <a:buChar char="•"/>
+              <a:tabLst/>
+            </a:pPr>
+            <a:r>
+              <a:rPr lang="ko-KR" altLang="en-US" dirty="0"/>
+              <a:t>외부 라이브러리를 통해 다른 회사화의 협업 및 앱 서비스 범위 증대</a:t>
+            </a:r>
+            <a:endParaRPr lang="en-US" altLang="ko-KR" dirty="0"/>
+          </a:p>
+          <a:p>
+            <a:pPr marL="285750" marR="0" lvl="0" indent="-285750" algn="l" defTabSz="914400" rtl="0" eaLnBrk="0" fontAlgn="base" latinLnBrk="0" hangingPunct="0">
+              <a:lnSpc>
+                <a:spcPct val="100000"/>
+              </a:lnSpc>
+              <a:spcBef>
+                <a:spcPct val="0"/>
+              </a:spcBef>
+              <a:spcAft>
+                <a:spcPct val="0"/>
+              </a:spcAft>
+              <a:buClrTx/>
+              <a:buSzTx/>
+              <a:buFont typeface="Arial" panose="020B0604020202020204" pitchFamily="34" charset="0"/>
+              <a:buChar char="•"/>
+              <a:tabLst/>
+            </a:pPr>
+            <a:r>
+              <a:rPr lang="ko-KR" altLang="en-US" dirty="0"/>
+              <a:t>기존 기능 고도화 및 신규 기능 개발을 통해 지속적인 서비스 제공 노력</a:t>
+            </a:r>
+            <a:endParaRPr lang="en-US" altLang="ko-KR" dirty="0"/>
+          </a:p>
+          <a:p>
+            <a:pPr marL="285750" marR="0" lvl="0" indent="-285750" algn="l" defTabSz="914400" rtl="0" eaLnBrk="0" fontAlgn="base" latinLnBrk="0" hangingPunct="0">
+              <a:lnSpc>
+                <a:spcPct val="100000"/>
+              </a:lnSpc>
+              <a:spcBef>
+                <a:spcPct val="0"/>
+              </a:spcBef>
+              <a:spcAft>
+                <a:spcPct val="0"/>
+              </a:spcAft>
+              <a:buClrTx/>
+              <a:buSzTx/>
+              <a:buFont typeface="Arial" panose="020B0604020202020204" pitchFamily="34" charset="0"/>
+              <a:buChar char="•"/>
+              <a:tabLst/>
+            </a:pPr>
+            <a:endParaRPr kumimoji="0" lang="en-US" altLang="ko-KR" sz="1800" b="0" i="0" u="none" strike="noStrike" cap="none" normalizeH="0" baseline="0" dirty="0">
+              <a:ln>
+                <a:noFill/>
+              </a:ln>
+              <a:effectLst/>
+            </a:endParaRPr>
+          </a:p>
+          <a:p>
+            <a:pPr marR="0" lvl="0" algn="l" defTabSz="914400" rtl="0" eaLnBrk="0" fontAlgn="base" latinLnBrk="0" hangingPunct="0">
+              <a:lnSpc>
+                <a:spcPct val="100000"/>
+              </a:lnSpc>
+              <a:spcBef>
+                <a:spcPct val="0"/>
+              </a:spcBef>
+              <a:spcAft>
+                <a:spcPct val="0"/>
+              </a:spcAft>
+              <a:buClrTx/>
+              <a:buSzTx/>
+              <a:tabLst/>
+            </a:pPr>
+            <a:r>
+              <a:rPr lang="ko-KR" altLang="en-US" sz="2200" b="1" dirty="0"/>
+              <a:t>서버 이전 작업 진행</a:t>
+            </a:r>
+            <a:endParaRPr lang="en-US" altLang="ko-KR" sz="2200" b="1" dirty="0"/>
+          </a:p>
+          <a:p>
+            <a:pPr marL="285750" marR="0" lvl="0" indent="-285750" algn="l" defTabSz="914400" rtl="0" eaLnBrk="0" fontAlgn="base" latinLnBrk="0" hangingPunct="0">
+              <a:lnSpc>
+                <a:spcPct val="100000"/>
+              </a:lnSpc>
+              <a:spcBef>
+                <a:spcPct val="0"/>
+              </a:spcBef>
+              <a:spcAft>
+                <a:spcPct val="0"/>
+              </a:spcAft>
+              <a:buClrTx/>
+              <a:buSzTx/>
+              <a:buFont typeface="Arial" panose="020B0604020202020204" pitchFamily="34" charset="0"/>
+              <a:buChar char="•"/>
+              <a:tabLst/>
+            </a:pPr>
+            <a:r>
+              <a:rPr kumimoji="0" lang="ko-KR" altLang="en-US" sz="1800" b="0" i="0" u="none" strike="noStrike" cap="none" normalizeH="0" baseline="0" dirty="0">
+                <a:ln>
+                  <a:noFill/>
+                </a:ln>
+                <a:effectLst/>
+              </a:rPr>
+              <a:t>레거시 </a:t>
+            </a:r>
+            <a:r>
+              <a:rPr kumimoji="0" lang="en-US" altLang="ko-KR" sz="1800" b="0" i="0" u="none" strike="noStrike" cap="none" normalizeH="0" baseline="0" dirty="0">
+                <a:ln>
+                  <a:noFill/>
+                </a:ln>
+                <a:effectLst/>
+              </a:rPr>
+              <a:t>-&gt; </a:t>
+            </a:r>
+            <a:r>
+              <a:rPr kumimoji="0" lang="ko-KR" altLang="en-US" sz="1800" b="0" i="0" u="none" strike="noStrike" cap="none" normalizeH="0" baseline="0" dirty="0">
+                <a:ln>
+                  <a:noFill/>
+                </a:ln>
+                <a:effectLst/>
+              </a:rPr>
+              <a:t>클라우드 서버 이전 및 이기종 간 </a:t>
+            </a:r>
+            <a:r>
+              <a:rPr kumimoji="0" lang="en-US" altLang="ko-KR" sz="1800" b="0" i="0" u="none" strike="noStrike" cap="none" normalizeH="0" baseline="0" dirty="0">
+                <a:ln>
+                  <a:noFill/>
+                </a:ln>
+                <a:effectLst/>
+              </a:rPr>
+              <a:t>DB </a:t>
+            </a:r>
+            <a:r>
+              <a:rPr kumimoji="0" lang="ko-KR" altLang="en-US" sz="1800" b="0" i="0" u="none" strike="noStrike" cap="none" normalizeH="0" baseline="0" dirty="0">
+                <a:ln>
+                  <a:noFill/>
+                </a:ln>
+                <a:effectLst/>
+              </a:rPr>
+              <a:t>마이그레이션 진행</a:t>
+            </a:r>
+            <a:endParaRPr kumimoji="0" lang="en-US" altLang="ko-KR" sz="1800" b="0" i="0" u="none" strike="noStrike" cap="none" normalizeH="0" baseline="0" dirty="0">
+              <a:ln>
+                <a:noFill/>
+              </a:ln>
+              <a:effectLst/>
+            </a:endParaRPr>
+          </a:p>
+          <a:p>
+            <a:pPr marL="285750" marR="0" lvl="0" indent="-285750" algn="l" defTabSz="914400" rtl="0" eaLnBrk="0" fontAlgn="base" latinLnBrk="0" hangingPunct="0">
+              <a:lnSpc>
+                <a:spcPct val="100000"/>
+              </a:lnSpc>
+              <a:spcBef>
+                <a:spcPct val="0"/>
+              </a:spcBef>
+              <a:spcAft>
+                <a:spcPct val="0"/>
+              </a:spcAft>
+              <a:buClrTx/>
+              <a:buSzTx/>
+              <a:buFont typeface="Arial" panose="020B0604020202020204" pitchFamily="34" charset="0"/>
+              <a:buChar char="•"/>
+              <a:tabLst/>
+            </a:pPr>
+            <a:r>
+              <a:rPr kumimoji="0" lang="en-US" altLang="ko-KR" sz="1800" b="0" i="0" u="none" strike="noStrike" cap="none" normalizeH="0" baseline="0" dirty="0">
+                <a:ln>
+                  <a:noFill/>
+                </a:ln>
+                <a:effectLst/>
+              </a:rPr>
+              <a:t>W</a:t>
+            </a:r>
+            <a:r>
+              <a:rPr lang="en-US" altLang="ko-KR" dirty="0"/>
+              <a:t>indow Server OS</a:t>
+            </a:r>
+            <a:r>
+              <a:rPr lang="ko-KR" altLang="en-US" dirty="0"/>
+              <a:t>에 </a:t>
+            </a:r>
+            <a:r>
+              <a:rPr lang="en-US" altLang="ko-KR" dirty="0"/>
+              <a:t>IIS</a:t>
+            </a:r>
+            <a:r>
+              <a:rPr lang="ko-KR" altLang="en-US" dirty="0"/>
+              <a:t>를 사용하는 </a:t>
+            </a:r>
+            <a:r>
+              <a:rPr lang="en-US" altLang="ko-KR" dirty="0"/>
+              <a:t>WAS </a:t>
+            </a:r>
+            <a:r>
+              <a:rPr lang="ko-KR" altLang="en-US" dirty="0"/>
+              <a:t>서버 환경 세팅 진행</a:t>
+            </a:r>
+            <a:endParaRPr lang="en-US" altLang="ko-KR" dirty="0"/>
+          </a:p>
+          <a:p>
+            <a:pPr marL="285750" marR="0" lvl="0" indent="-285750" algn="l" defTabSz="914400" rtl="0" eaLnBrk="0" fontAlgn="base" latinLnBrk="0" hangingPunct="0">
+              <a:lnSpc>
+                <a:spcPct val="100000"/>
+              </a:lnSpc>
+              <a:spcBef>
+                <a:spcPct val="0"/>
+              </a:spcBef>
+              <a:spcAft>
+                <a:spcPct val="0"/>
+              </a:spcAft>
+              <a:buClrTx/>
+              <a:buSzTx/>
+              <a:buFont typeface="Arial" panose="020B0604020202020204" pitchFamily="34" charset="0"/>
+              <a:buChar char="•"/>
+              <a:tabLst/>
+            </a:pPr>
+            <a:r>
+              <a:rPr kumimoji="0" lang="en-US" altLang="ko-KR" sz="1800" b="0" i="0" u="none" strike="noStrike" cap="none" normalizeH="0" baseline="0" dirty="0">
+                <a:ln>
+                  <a:noFill/>
+                </a:ln>
+                <a:effectLst/>
+              </a:rPr>
+              <a:t>DBMS </a:t>
+            </a:r>
+            <a:r>
+              <a:rPr kumimoji="0" lang="ko-KR" altLang="en-US" sz="1800" b="0" i="0" u="none" strike="noStrike" cap="none" normalizeH="0" baseline="0" dirty="0">
+                <a:ln>
+                  <a:noFill/>
+                </a:ln>
+                <a:effectLst/>
+              </a:rPr>
+              <a:t>및 테이블 트리거</a:t>
+            </a:r>
+            <a:r>
+              <a:rPr kumimoji="0" lang="en-US" altLang="ko-KR" sz="1800" b="0" i="0" u="none" strike="noStrike" cap="none" normalizeH="0" baseline="0" dirty="0">
+                <a:ln>
+                  <a:noFill/>
+                </a:ln>
+                <a:effectLst/>
+              </a:rPr>
+              <a:t>, </a:t>
+            </a:r>
+            <a:r>
+              <a:rPr kumimoji="0" lang="ko-KR" altLang="en-US" sz="1800" b="0" i="0" u="none" strike="noStrike" cap="none" normalizeH="0" baseline="0" dirty="0">
+                <a:ln>
+                  <a:noFill/>
+                </a:ln>
+                <a:effectLst/>
+              </a:rPr>
+              <a:t>프로시저 및 데이터 이전 작업 </a:t>
+            </a:r>
+            <a:r>
+              <a:rPr lang="ko-KR" altLang="en-US" dirty="0"/>
+              <a:t>진행</a:t>
+            </a:r>
+            <a:endParaRPr lang="en-US" altLang="ko-KR" dirty="0"/>
+          </a:p>
+          <a:p>
+            <a:pPr marL="285750" marR="0" lvl="0" indent="-285750" algn="l" defTabSz="914400" rtl="0" eaLnBrk="0" fontAlgn="base" latinLnBrk="0" hangingPunct="0">
+              <a:lnSpc>
+                <a:spcPct val="100000"/>
+              </a:lnSpc>
+              <a:spcBef>
+                <a:spcPct val="0"/>
+              </a:spcBef>
+              <a:spcAft>
+                <a:spcPct val="0"/>
+              </a:spcAft>
+              <a:buClrTx/>
+              <a:buSzTx/>
+              <a:buFont typeface="Arial" panose="020B0604020202020204" pitchFamily="34" charset="0"/>
+              <a:buChar char="•"/>
+              <a:tabLst/>
+            </a:pPr>
+            <a:endParaRPr lang="en-US" altLang="ko-KR" dirty="0"/>
+          </a:p>
+          <a:p>
+            <a:pPr marR="0" lvl="0" algn="l" defTabSz="914400" rtl="0" eaLnBrk="0" fontAlgn="base" latinLnBrk="0" hangingPunct="0">
+              <a:lnSpc>
+                <a:spcPct val="100000"/>
+              </a:lnSpc>
+              <a:spcBef>
+                <a:spcPct val="0"/>
+              </a:spcBef>
+              <a:spcAft>
+                <a:spcPct val="0"/>
+              </a:spcAft>
+              <a:buClrTx/>
+              <a:buSzTx/>
+              <a:tabLst/>
+            </a:pPr>
+            <a:r>
+              <a:rPr lang="ko-KR" altLang="en-US" sz="2200" b="1" dirty="0"/>
+              <a:t>기타</a:t>
+            </a:r>
+            <a:endParaRPr lang="en-US" altLang="ko-KR" sz="2200" b="1" dirty="0"/>
+          </a:p>
+          <a:p>
+            <a:pPr marL="285750" marR="0" lvl="0" indent="-285750" algn="l" defTabSz="914400" rtl="0" eaLnBrk="0" fontAlgn="base" latinLnBrk="0" hangingPunct="0">
+              <a:lnSpc>
+                <a:spcPct val="100000"/>
+              </a:lnSpc>
+              <a:spcBef>
+                <a:spcPct val="0"/>
+              </a:spcBef>
+              <a:spcAft>
+                <a:spcPct val="0"/>
+              </a:spcAft>
+              <a:buClrTx/>
+              <a:buSzTx/>
+              <a:buFont typeface="Arial" panose="020B0604020202020204" pitchFamily="34" charset="0"/>
+              <a:buChar char="•"/>
+              <a:tabLst/>
+            </a:pPr>
+            <a:r>
+              <a:rPr lang="en-US" altLang="ko-KR" dirty="0"/>
+              <a:t>ASP, ASP.NET</a:t>
+            </a:r>
+            <a:r>
+              <a:rPr lang="ko-KR" altLang="en-US" dirty="0"/>
+              <a:t>로 구성된 웹 서비스 유지보수</a:t>
+            </a:r>
+            <a:endParaRPr lang="en-US" altLang="ko-KR" dirty="0"/>
+          </a:p>
+          <a:p>
+            <a:pPr marL="285750" marR="0" lvl="0" indent="-285750" algn="l" defTabSz="914400" rtl="0" eaLnBrk="0" fontAlgn="base" latinLnBrk="0" hangingPunct="0">
+              <a:lnSpc>
+                <a:spcPct val="100000"/>
+              </a:lnSpc>
+              <a:spcBef>
+                <a:spcPct val="0"/>
+              </a:spcBef>
+              <a:spcAft>
+                <a:spcPct val="0"/>
+              </a:spcAft>
+              <a:buClrTx/>
+              <a:buSzTx/>
+              <a:buFont typeface="Arial" panose="020B0604020202020204" pitchFamily="34" charset="0"/>
+              <a:buChar char="•"/>
+              <a:tabLst/>
+            </a:pPr>
+            <a:r>
+              <a:rPr lang="ko-KR" altLang="en-US" dirty="0"/>
+              <a:t>반기별 시행하는 모의 해킹 및 보안 점검 진행 후 취약점 보완</a:t>
+            </a:r>
+            <a:endParaRPr lang="en-US" altLang="ko-KR" dirty="0"/>
+          </a:p>
+          <a:p>
+            <a:pPr marL="285750" marR="0" lvl="0" indent="-285750" algn="l" defTabSz="914400" rtl="0" eaLnBrk="0" fontAlgn="base" latinLnBrk="0" hangingPunct="0">
+              <a:lnSpc>
+                <a:spcPct val="100000"/>
+              </a:lnSpc>
+              <a:spcBef>
+                <a:spcPct val="0"/>
+              </a:spcBef>
+              <a:spcAft>
+                <a:spcPct val="0"/>
+              </a:spcAft>
+              <a:buClrTx/>
+              <a:buSzTx/>
+              <a:buFont typeface="Arial" panose="020B0604020202020204" pitchFamily="34" charset="0"/>
+              <a:buChar char="•"/>
+              <a:tabLst/>
+            </a:pPr>
+            <a:r>
+              <a:rPr lang="ko-KR" altLang="en-US" dirty="0"/>
+              <a:t>주기적인 모니터링을 통한 이슈 </a:t>
+            </a:r>
+            <a:r>
+              <a:rPr lang="ko-KR" altLang="en-US" dirty="0" err="1"/>
+              <a:t>트래킹</a:t>
+            </a:r>
+            <a:endParaRPr lang="en-US" altLang="ko-KR" dirty="0"/>
+          </a:p>
+        </p:txBody>
+      </p:sp>
+    </p:spTree>
+    <p:extLst>
+      <p:ext uri="{BB962C8B-B14F-4D97-AF65-F5344CB8AC3E}">
+        <p14:creationId xmlns:p14="http://schemas.microsoft.com/office/powerpoint/2010/main" val="2850312093"/>
+      </p:ext>
+    </p:extLst>
+  </p:cSld>
+  <p:clrMapOvr>
+    <a:masterClrMapping/>
+  </p:clrMapOvr>
+</p:sld>
+</file>
+
+<file path=ppt/slides/slide7.xml><?xml version="1.0" encoding="utf-8"?>
+<p:sld xmlns:a="http://schemas.openxmlformats.org/drawingml/2006/main" xmlns:r="http://schemas.openxmlformats.org/officeDocument/2006/relationships" xmlns:p="http://schemas.openxmlformats.org/presentationml/2006/main">
+  <p:cSld>
+    <p:spTree>
+      <p:nvGrpSpPr>
+        <p:cNvPr id="1" name="">
+          <a:extLst>
+            <a:ext uri="{FF2B5EF4-FFF2-40B4-BE49-F238E27FC236}">
+              <a16:creationId xmlns:a16="http://schemas.microsoft.com/office/drawing/2014/main" id="{E11802A3-6543-0A73-AA3C-BAE20E379ECA}"/>
+            </a:ext>
+          </a:extLst>
+        </p:cNvPr>
+        <p:cNvGrpSpPr/>
+        <p:nvPr/>
+      </p:nvGrpSpPr>
+      <p:grpSpPr>
+        <a:xfrm>
+          <a:off x="0" y="0"/>
+          <a:ext cx="0" cy="0"/>
+          <a:chOff x="0" y="0"/>
+          <a:chExt cx="0" cy="0"/>
+        </a:xfrm>
+      </p:grpSpPr>
+      <p:sp>
+        <p:nvSpPr>
+          <p:cNvPr id="4" name="TextBox 3">
+            <a:extLst>
+              <a:ext uri="{FF2B5EF4-FFF2-40B4-BE49-F238E27FC236}">
+                <a16:creationId xmlns:a16="http://schemas.microsoft.com/office/drawing/2014/main" id="{ACA581E9-27A9-D3F5-6351-40729EF8E946}"/>
+              </a:ext>
+            </a:extLst>
+          </p:cNvPr>
+          <p:cNvSpPr txBox="1"/>
+          <p:nvPr/>
+        </p:nvSpPr>
+        <p:spPr>
+          <a:xfrm>
+            <a:off x="621792" y="564922"/>
+            <a:ext cx="6896608" cy="707886"/>
+          </a:xfrm>
+          <a:prstGeom prst="rect">
+            <a:avLst/>
+          </a:prstGeom>
+          <a:noFill/>
+        </p:spPr>
+        <p:txBody>
+          <a:bodyPr wrap="square" rtlCol="0">
+            <a:spAutoFit/>
+          </a:bodyPr>
+          <a:lstStyle/>
+          <a:p>
+            <a:r>
+              <a:rPr lang="en-US" altLang="ko-KR" sz="4000" b="1" dirty="0">
+                <a:solidFill>
+                  <a:srgbClr val="468260"/>
+                </a:solidFill>
+              </a:rPr>
+              <a:t>Projects / </a:t>
+            </a:r>
+            <a:r>
+              <a:rPr lang="ko-KR" altLang="en-US" sz="4000" b="1" dirty="0" err="1">
+                <a:solidFill>
+                  <a:srgbClr val="468260"/>
+                </a:solidFill>
+              </a:rPr>
+              <a:t>윈즈</a:t>
+            </a:r>
+            <a:r>
+              <a:rPr lang="ko-KR" altLang="en-US" sz="4000" b="1" dirty="0">
+                <a:solidFill>
+                  <a:srgbClr val="468260"/>
+                </a:solidFill>
+              </a:rPr>
+              <a:t> 시스템</a:t>
+            </a:r>
+          </a:p>
+        </p:txBody>
+      </p:sp>
+      <p:sp>
+        <p:nvSpPr>
+          <p:cNvPr id="5" name="TextBox 4">
+            <a:extLst>
+              <a:ext uri="{FF2B5EF4-FFF2-40B4-BE49-F238E27FC236}">
+                <a16:creationId xmlns:a16="http://schemas.microsoft.com/office/drawing/2014/main" id="{99F8789B-D60C-B69D-1043-94AB3429D23D}"/>
+              </a:ext>
+            </a:extLst>
+          </p:cNvPr>
+          <p:cNvSpPr txBox="1"/>
+          <p:nvPr/>
+        </p:nvSpPr>
+        <p:spPr>
+          <a:xfrm>
+            <a:off x="1146968" y="1272808"/>
+            <a:ext cx="7019132" cy="461665"/>
+          </a:xfrm>
+          <a:prstGeom prst="rect">
+            <a:avLst/>
+          </a:prstGeom>
+          <a:noFill/>
+        </p:spPr>
+        <p:txBody>
+          <a:bodyPr wrap="square" rtlCol="0">
+            <a:spAutoFit/>
+          </a:bodyPr>
+          <a:lstStyle/>
+          <a:p>
+            <a:r>
+              <a:rPr lang="en-US" altLang="ko-KR" sz="2400" b="1" dirty="0"/>
+              <a:t>1. </a:t>
+            </a:r>
+            <a:r>
+              <a:rPr lang="ko-KR" altLang="en-US" sz="2400" b="1" dirty="0"/>
+              <a:t>안드로이드 </a:t>
+            </a:r>
+            <a:r>
+              <a:rPr lang="en-US" altLang="ko-KR" sz="2400" b="1" dirty="0"/>
+              <a:t>OS </a:t>
+            </a:r>
+            <a:r>
+              <a:rPr lang="ko-KR" altLang="en-US" sz="2400" b="1" dirty="0"/>
+              <a:t>업데이트에 따른 이슈 및 업데이트 대응</a:t>
+            </a:r>
+          </a:p>
+        </p:txBody>
+      </p:sp>
+      <p:sp>
+        <p:nvSpPr>
+          <p:cNvPr id="7" name="TextBox 6">
+            <a:extLst>
+              <a:ext uri="{FF2B5EF4-FFF2-40B4-BE49-F238E27FC236}">
+                <a16:creationId xmlns:a16="http://schemas.microsoft.com/office/drawing/2014/main" id="{85B9D3B6-9799-027C-B9DF-C1F6B196A04F}"/>
+              </a:ext>
+            </a:extLst>
+          </p:cNvPr>
+          <p:cNvSpPr txBox="1"/>
+          <p:nvPr/>
+        </p:nvSpPr>
+        <p:spPr>
+          <a:xfrm>
+            <a:off x="1146968" y="1734473"/>
+            <a:ext cx="11235532" cy="1200329"/>
+          </a:xfrm>
+          <a:prstGeom prst="rect">
+            <a:avLst/>
+          </a:prstGeom>
+          <a:noFill/>
+        </p:spPr>
+        <p:txBody>
+          <a:bodyPr wrap="square" rtlCol="0">
+            <a:spAutoFit/>
+          </a:bodyPr>
+          <a:lstStyle/>
+          <a:p>
+            <a:pPr marL="0" marR="0" lvl="0" indent="0" algn="l" defTabSz="914400" rtl="0" eaLnBrk="0" fontAlgn="base" latinLnBrk="0" hangingPunct="0">
+              <a:lnSpc>
+                <a:spcPct val="100000"/>
+              </a:lnSpc>
+              <a:spcBef>
+                <a:spcPct val="0"/>
+              </a:spcBef>
+              <a:spcAft>
+                <a:spcPct val="0"/>
+              </a:spcAft>
+              <a:buClrTx/>
+              <a:buSzTx/>
+              <a:buFontTx/>
+              <a:buNone/>
+              <a:tabLst/>
+            </a:pPr>
+            <a:r>
+              <a:rPr lang="ko-KR" altLang="en-US" dirty="0"/>
+              <a:t>안드로이드 앱 </a:t>
+            </a:r>
+            <a:r>
+              <a:rPr lang="en-US" altLang="ko-KR" dirty="0"/>
+              <a:t>Google Play </a:t>
+            </a:r>
+            <a:r>
+              <a:rPr lang="ko-KR" altLang="en-US" dirty="0"/>
+              <a:t>신규 업로드 혹은 업데이트 시</a:t>
+            </a:r>
+            <a:r>
+              <a:rPr lang="en-US" altLang="ko-KR" dirty="0"/>
+              <a:t>, </a:t>
+            </a:r>
+            <a:r>
+              <a:rPr lang="ko-KR" altLang="en-US" dirty="0"/>
+              <a:t>구글에서 요청하는 앱 내부의 </a:t>
+            </a:r>
+            <a:r>
+              <a:rPr lang="en-US" altLang="ko-KR" dirty="0"/>
+              <a:t>Android </a:t>
+            </a:r>
+            <a:r>
+              <a:rPr lang="ko-KR" altLang="en-US" dirty="0"/>
+              <a:t>버전을 맞춰야 함</a:t>
+            </a:r>
+            <a:r>
+              <a:rPr lang="en-US" altLang="ko-KR" dirty="0"/>
+              <a:t>. (</a:t>
+            </a:r>
+            <a:r>
+              <a:rPr lang="ko-KR" altLang="en-US" dirty="0">
+                <a:effectLst/>
+                <a:hlinkClick r:id="rId2"/>
+              </a:rPr>
+              <a:t>링크</a:t>
+            </a:r>
+            <a:r>
+              <a:rPr lang="en-US" altLang="ko-KR" dirty="0"/>
+              <a:t>)</a:t>
+            </a:r>
+            <a:br>
+              <a:rPr lang="en-US" altLang="ko-KR" dirty="0"/>
+            </a:br>
+            <a:r>
+              <a:rPr lang="ko-KR" altLang="en-US" dirty="0"/>
+              <a:t>앱 업데이트 시 기존 라이브러리 사용 불가에 따른 코드 수정 및 신규 기능 추가에 대한 개발 필요</a:t>
+            </a:r>
+            <a:r>
+              <a:rPr lang="en-US" altLang="ko-KR" dirty="0"/>
+              <a:t>.</a:t>
+            </a:r>
+            <a:br>
+              <a:rPr lang="en-US" altLang="ko-KR" dirty="0"/>
+            </a:br>
+            <a:r>
+              <a:rPr lang="ko-KR" altLang="en-US" dirty="0"/>
+              <a:t>버전 업데이트 시 안드로이드 </a:t>
+            </a:r>
+            <a:r>
+              <a:rPr lang="en-US" altLang="ko-KR" dirty="0"/>
+              <a:t>SDK </a:t>
+            </a:r>
+            <a:r>
+              <a:rPr lang="ko-KR" altLang="en-US" dirty="0"/>
+              <a:t>버전에 따른 라이브러리 이슈 사항 대응 필요</a:t>
+            </a:r>
+            <a:r>
+              <a:rPr lang="en-US" altLang="ko-KR" dirty="0"/>
+              <a:t>. </a:t>
+            </a:r>
+            <a:br>
+              <a:rPr lang="en-US" altLang="ko-KR" dirty="0"/>
+            </a:br>
+            <a:r>
+              <a:rPr lang="ko-KR" altLang="en-US" dirty="0"/>
+              <a:t>미 업데이트 시 앱 스토어 노출 불가 이슈 발생으로 매 년 변경되는 요구 사항에 맞춰 업데이트를 진행 해야 함</a:t>
+            </a:r>
+            <a:endParaRPr lang="en-US" altLang="ko-KR" dirty="0"/>
+          </a:p>
+        </p:txBody>
+      </p:sp>
+      <p:sp>
+        <p:nvSpPr>
+          <p:cNvPr id="2" name="직사각형 1">
+            <a:extLst>
+              <a:ext uri="{FF2B5EF4-FFF2-40B4-BE49-F238E27FC236}">
+                <a16:creationId xmlns:a16="http://schemas.microsoft.com/office/drawing/2014/main" id="{7FA2D19F-8398-2770-2FB4-C321170BEAD3}"/>
+              </a:ext>
+            </a:extLst>
+          </p:cNvPr>
+          <p:cNvSpPr/>
+          <p:nvPr/>
+        </p:nvSpPr>
+        <p:spPr>
+          <a:xfrm>
+            <a:off x="1140380" y="3007528"/>
+            <a:ext cx="11242120" cy="388939"/>
+          </a:xfrm>
+          <a:prstGeom prst="rect">
+            <a:avLst/>
+          </a:prstGeom>
+          <a:solidFill>
+            <a:srgbClr val="252525">
+              <a:alpha val="10000"/>
+            </a:srgbClr>
+          </a:solidFill>
+          <a:ln>
+            <a:noFill/>
+          </a:ln>
+        </p:spPr>
+        <p:style>
+          <a:lnRef idx="2">
+            <a:schemeClr val="accent1">
+              <a:shade val="15000"/>
+            </a:schemeClr>
+          </a:lnRef>
+          <a:fillRef idx="1">
+            <a:schemeClr val="accent1"/>
+          </a:fillRef>
+          <a:effectRef idx="0">
+            <a:schemeClr val="accent1"/>
+          </a:effectRef>
+          <a:fontRef idx="minor">
+            <a:schemeClr val="lt1"/>
+          </a:fontRef>
+        </p:style>
+        <p:txBody>
+          <a:bodyPr rtlCol="0" anchor="ctr"/>
+          <a:lstStyle/>
+          <a:p>
+            <a:pPr algn="ctr"/>
+            <a:endParaRPr lang="ko-KR" altLang="en-US"/>
+          </a:p>
+        </p:txBody>
+      </p:sp>
+      <p:sp>
+        <p:nvSpPr>
+          <p:cNvPr id="3" name="TextBox 2">
+            <a:extLst>
+              <a:ext uri="{FF2B5EF4-FFF2-40B4-BE49-F238E27FC236}">
+                <a16:creationId xmlns:a16="http://schemas.microsoft.com/office/drawing/2014/main" id="{E40B68F2-4A61-3729-364A-B7388C4C7717}"/>
+              </a:ext>
+            </a:extLst>
+          </p:cNvPr>
+          <p:cNvSpPr txBox="1"/>
+          <p:nvPr/>
+        </p:nvSpPr>
+        <p:spPr>
+          <a:xfrm>
+            <a:off x="1120555" y="3007528"/>
+            <a:ext cx="7413845" cy="369332"/>
+          </a:xfrm>
+          <a:prstGeom prst="rect">
+            <a:avLst/>
+          </a:prstGeom>
+          <a:noFill/>
+        </p:spPr>
+        <p:txBody>
+          <a:bodyPr wrap="square" rtlCol="0">
+            <a:spAutoFit/>
+          </a:bodyPr>
+          <a:lstStyle/>
+          <a:p>
+            <a:r>
+              <a:rPr lang="ko-KR" altLang="en-US" b="1" dirty="0">
+                <a:effectLst/>
+              </a:rPr>
+              <a:t>🛠️ </a:t>
+            </a:r>
+            <a:r>
+              <a:rPr lang="en-US" altLang="ko-KR" b="1" dirty="0">
+                <a:effectLst/>
+              </a:rPr>
+              <a:t>Android Studio, Java, Android</a:t>
+            </a:r>
+            <a:endParaRPr lang="ko-KR" altLang="en-US" b="1" dirty="0"/>
+          </a:p>
+        </p:txBody>
+      </p:sp>
+      <p:sp>
+        <p:nvSpPr>
+          <p:cNvPr id="9" name="TextBox 8">
+            <a:extLst>
+              <a:ext uri="{FF2B5EF4-FFF2-40B4-BE49-F238E27FC236}">
+                <a16:creationId xmlns:a16="http://schemas.microsoft.com/office/drawing/2014/main" id="{2D54C001-9DE5-B853-6B53-4A9F9AD5D2C3}"/>
+              </a:ext>
+            </a:extLst>
+          </p:cNvPr>
+          <p:cNvSpPr txBox="1"/>
+          <p:nvPr/>
+        </p:nvSpPr>
+        <p:spPr>
+          <a:xfrm>
+            <a:off x="1146968" y="3469193"/>
+            <a:ext cx="11235532" cy="3323987"/>
+          </a:xfrm>
+          <a:prstGeom prst="rect">
+            <a:avLst/>
+          </a:prstGeom>
+          <a:noFill/>
+        </p:spPr>
+        <p:txBody>
+          <a:bodyPr wrap="square" rtlCol="0">
+            <a:spAutoFit/>
+          </a:bodyPr>
+          <a:lstStyle/>
+          <a:p>
+            <a:pPr marL="0" marR="0" lvl="0" indent="0" algn="l" defTabSz="914400" rtl="0" eaLnBrk="0" fontAlgn="base" latinLnBrk="0" hangingPunct="0">
+              <a:lnSpc>
+                <a:spcPct val="100000"/>
+              </a:lnSpc>
+              <a:spcBef>
+                <a:spcPct val="0"/>
+              </a:spcBef>
+              <a:spcAft>
+                <a:spcPct val="0"/>
+              </a:spcAft>
+              <a:buClrTx/>
+              <a:buSzTx/>
+              <a:buFontTx/>
+              <a:buNone/>
+              <a:tabLst/>
+            </a:pPr>
+            <a:r>
+              <a:rPr lang="ko-KR" altLang="en-US" sz="2200" b="1" dirty="0"/>
+              <a:t>성과</a:t>
+            </a:r>
+            <a:endParaRPr lang="en-US" altLang="ko-KR" sz="2200" b="1" dirty="0"/>
+          </a:p>
+          <a:p>
+            <a:pPr marL="285750" indent="-285750">
+              <a:buFont typeface="Arial" panose="020B0604020202020204" pitchFamily="34" charset="0"/>
+              <a:buChar char="•"/>
+            </a:pPr>
+            <a:r>
+              <a:rPr lang="ko-KR" altLang="en-US" dirty="0"/>
+              <a:t>지속적인 </a:t>
+            </a:r>
+            <a:r>
+              <a:rPr lang="en-US" altLang="ko-KR" dirty="0"/>
+              <a:t>OS </a:t>
+            </a:r>
+            <a:r>
+              <a:rPr lang="ko-KR" altLang="en-US" dirty="0"/>
+              <a:t>업데이트 대응을 통해 </a:t>
+            </a:r>
+            <a:r>
+              <a:rPr lang="en-US" altLang="ko-KR" dirty="0"/>
+              <a:t>Google Play</a:t>
+            </a:r>
+            <a:r>
+              <a:rPr lang="ko-KR" altLang="en-US" dirty="0"/>
+              <a:t>에서 앱 서비스 진행</a:t>
+            </a:r>
+            <a:r>
+              <a:rPr lang="en-US" altLang="ko-KR" dirty="0"/>
+              <a:t>. </a:t>
+            </a:r>
+            <a:r>
+              <a:rPr lang="ko-KR" altLang="en-US" dirty="0"/>
+              <a:t>이를 통해 사용자 이탈 방지</a:t>
+            </a:r>
+            <a:endParaRPr lang="en-US" altLang="ko-KR" dirty="0"/>
+          </a:p>
+          <a:p>
+            <a:pPr marL="285750" indent="-285750">
+              <a:buFont typeface="Arial" panose="020B0604020202020204" pitchFamily="34" charset="0"/>
+              <a:buChar char="•"/>
+            </a:pPr>
+            <a:r>
+              <a:rPr lang="ko-KR" altLang="en-US" dirty="0"/>
+              <a:t>구글의 모바일 정책 변경에 능동적으로 대응</a:t>
+            </a:r>
+            <a:r>
+              <a:rPr lang="en-US" altLang="ko-KR" dirty="0"/>
+              <a:t>. </a:t>
+            </a:r>
+            <a:r>
+              <a:rPr lang="ko-KR" altLang="en-US" dirty="0"/>
+              <a:t>이를 통해 서비스 운영 경험 및 앱 배포 역량 강화</a:t>
+            </a:r>
+          </a:p>
+          <a:p>
+            <a:pPr marR="0" lvl="0" algn="l" defTabSz="914400" rtl="0" eaLnBrk="0" fontAlgn="base" latinLnBrk="0" hangingPunct="0">
+              <a:lnSpc>
+                <a:spcPct val="100000"/>
+              </a:lnSpc>
+              <a:spcBef>
+                <a:spcPct val="0"/>
+              </a:spcBef>
+              <a:spcAft>
+                <a:spcPct val="0"/>
+              </a:spcAft>
+              <a:buClrTx/>
+              <a:buSzTx/>
+              <a:tabLst/>
+            </a:pPr>
+            <a:endParaRPr lang="en-US" altLang="ko-KR" dirty="0"/>
+          </a:p>
+          <a:p>
+            <a:pPr marR="0" lvl="0" algn="l" defTabSz="914400" rtl="0" eaLnBrk="0" fontAlgn="base" latinLnBrk="0" hangingPunct="0">
+              <a:lnSpc>
+                <a:spcPct val="100000"/>
+              </a:lnSpc>
+              <a:spcBef>
+                <a:spcPct val="0"/>
+              </a:spcBef>
+              <a:spcAft>
+                <a:spcPct val="0"/>
+              </a:spcAft>
+              <a:buClrTx/>
+              <a:buSzTx/>
+              <a:tabLst/>
+            </a:pPr>
+            <a:endParaRPr lang="en-US" altLang="ko-KR" dirty="0"/>
+          </a:p>
+          <a:p>
+            <a:pPr marR="0" lvl="0" algn="l" defTabSz="914400" rtl="0" eaLnBrk="0" fontAlgn="base" latinLnBrk="0" hangingPunct="0">
+              <a:lnSpc>
+                <a:spcPct val="100000"/>
+              </a:lnSpc>
+              <a:spcBef>
+                <a:spcPct val="0"/>
+              </a:spcBef>
+              <a:spcAft>
+                <a:spcPct val="0"/>
+              </a:spcAft>
+              <a:buClrTx/>
+              <a:buSzTx/>
+              <a:tabLst/>
+            </a:pPr>
+            <a:r>
+              <a:rPr lang="ko-KR" altLang="en-US" sz="2200" b="1" dirty="0"/>
+              <a:t>인사이트</a:t>
+            </a:r>
+            <a:endParaRPr lang="en-US" altLang="ko-KR" sz="2200" b="1" dirty="0"/>
+          </a:p>
+          <a:p>
+            <a:pPr marL="285750" indent="-285750">
+              <a:buFont typeface="Arial" panose="020B0604020202020204" pitchFamily="34" charset="0"/>
+              <a:buChar char="•"/>
+            </a:pPr>
+            <a:r>
+              <a:rPr lang="ko-KR" altLang="en-US" dirty="0"/>
+              <a:t>공식 문서를 통해 정보를 취득하는 방법과 역량을 기르고</a:t>
+            </a:r>
+            <a:r>
+              <a:rPr lang="en-US" altLang="ko-KR" dirty="0"/>
+              <a:t>, </a:t>
+            </a:r>
+            <a:r>
+              <a:rPr lang="ko-KR" altLang="en-US" dirty="0"/>
+              <a:t>이를 통해 문제에 대한 대응 및 해결 능력 함양</a:t>
+            </a:r>
+            <a:endParaRPr lang="en-US" altLang="ko-KR" dirty="0"/>
+          </a:p>
+          <a:p>
+            <a:pPr marL="285750" indent="-285750">
+              <a:buFont typeface="Arial" panose="020B0604020202020204" pitchFamily="34" charset="0"/>
+              <a:buChar char="•"/>
+            </a:pPr>
+            <a:r>
+              <a:rPr lang="ko-KR" altLang="en-US" dirty="0"/>
+              <a:t>자사 서비스 앱의 기능들에 대해 어떠한 </a:t>
+            </a:r>
+            <a:r>
+              <a:rPr lang="en-US" altLang="ko-KR" dirty="0"/>
+              <a:t>SDK API</a:t>
+            </a:r>
+            <a:r>
+              <a:rPr lang="ko-KR" altLang="en-US" dirty="0"/>
+              <a:t>를 사용하고</a:t>
+            </a:r>
+            <a:r>
+              <a:rPr lang="en-US" altLang="ko-KR" dirty="0"/>
+              <a:t>, </a:t>
+            </a:r>
+            <a:r>
+              <a:rPr lang="ko-KR" altLang="en-US" dirty="0"/>
+              <a:t>어떠한 로직으로 동작하는지 전반적인 프로세스 파악의 경험 및 추후 발생하는 이슈들에 대해 명확하고 빠른 처리가 가능한 역량 증대</a:t>
+            </a:r>
+          </a:p>
+          <a:p>
+            <a:pPr marR="0" lvl="0" algn="l" defTabSz="914400" rtl="0" eaLnBrk="0" fontAlgn="base" latinLnBrk="0" hangingPunct="0">
+              <a:lnSpc>
+                <a:spcPct val="100000"/>
+              </a:lnSpc>
+              <a:spcBef>
+                <a:spcPct val="0"/>
+              </a:spcBef>
+              <a:spcAft>
+                <a:spcPct val="0"/>
+              </a:spcAft>
+              <a:buClrTx/>
+              <a:buSzTx/>
+              <a:tabLst/>
+            </a:pPr>
+            <a:endParaRPr lang="en-US" altLang="ko-KR" dirty="0"/>
+          </a:p>
+          <a:p>
+            <a:pPr marR="0" lvl="0" algn="l" defTabSz="914400" rtl="0" eaLnBrk="0" fontAlgn="base" latinLnBrk="0" hangingPunct="0">
+              <a:lnSpc>
+                <a:spcPct val="100000"/>
+              </a:lnSpc>
+              <a:spcBef>
+                <a:spcPct val="0"/>
+              </a:spcBef>
+              <a:spcAft>
+                <a:spcPct val="0"/>
+              </a:spcAft>
+              <a:buClrTx/>
+              <a:buSzTx/>
+              <a:tabLst/>
+            </a:pPr>
+            <a:r>
+              <a:rPr lang="ko-KR" altLang="en-US" sz="2200" b="1" dirty="0">
+                <a:hlinkClick r:id="rId3"/>
+              </a:rPr>
+              <a:t>상세 보기</a:t>
+            </a:r>
+            <a:endParaRPr lang="en-US" altLang="ko-KR" sz="2200" b="1" dirty="0"/>
+          </a:p>
+        </p:txBody>
+      </p:sp>
+    </p:spTree>
+    <p:extLst>
+      <p:ext uri="{BB962C8B-B14F-4D97-AF65-F5344CB8AC3E}">
+        <p14:creationId xmlns:p14="http://schemas.microsoft.com/office/powerpoint/2010/main" val="3779721743"/>
+      </p:ext>
+    </p:extLst>
+  </p:cSld>
+  <p:clrMapOvr>
+    <a:masterClrMapping/>
+  </p:clrMapOvr>
+</p:sld>
+</file>
+
+<file path=ppt/slides/slide8.xml><?xml version="1.0" encoding="utf-8"?>
+<p:sld xmlns:a="http://schemas.openxmlformats.org/drawingml/2006/main" xmlns:r="http://schemas.openxmlformats.org/officeDocument/2006/relationships" xmlns:p="http://schemas.openxmlformats.org/presentationml/2006/main">
+  <p:cSld>
+    <p:spTree>
+      <p:nvGrpSpPr>
+        <p:cNvPr id="1" name="">
+          <a:extLst>
+            <a:ext uri="{FF2B5EF4-FFF2-40B4-BE49-F238E27FC236}">
+              <a16:creationId xmlns:a16="http://schemas.microsoft.com/office/drawing/2014/main" id="{3C83EEA4-7402-42B7-6E93-E522FFE4AADC}"/>
+            </a:ext>
+          </a:extLst>
+        </p:cNvPr>
+        <p:cNvGrpSpPr/>
+        <p:nvPr/>
+      </p:nvGrpSpPr>
+      <p:grpSpPr>
+        <a:xfrm>
+          <a:off x="0" y="0"/>
+          <a:ext cx="0" cy="0"/>
+          <a:chOff x="0" y="0"/>
+          <a:chExt cx="0" cy="0"/>
+        </a:xfrm>
+      </p:grpSpPr>
+      <p:sp>
+        <p:nvSpPr>
+          <p:cNvPr id="4" name="TextBox 3">
+            <a:extLst>
+              <a:ext uri="{FF2B5EF4-FFF2-40B4-BE49-F238E27FC236}">
+                <a16:creationId xmlns:a16="http://schemas.microsoft.com/office/drawing/2014/main" id="{07583BA0-5616-B838-810E-A2D91E81C124}"/>
+              </a:ext>
+            </a:extLst>
+          </p:cNvPr>
+          <p:cNvSpPr txBox="1"/>
+          <p:nvPr/>
+        </p:nvSpPr>
+        <p:spPr>
+          <a:xfrm>
+            <a:off x="621792" y="564922"/>
+            <a:ext cx="6896608" cy="707886"/>
+          </a:xfrm>
+          <a:prstGeom prst="rect">
+            <a:avLst/>
+          </a:prstGeom>
+          <a:noFill/>
+        </p:spPr>
+        <p:txBody>
+          <a:bodyPr wrap="square" rtlCol="0">
+            <a:spAutoFit/>
+          </a:bodyPr>
+          <a:lstStyle/>
+          <a:p>
+            <a:r>
+              <a:rPr lang="en-US" altLang="ko-KR" sz="4000" b="1" dirty="0">
+                <a:solidFill>
+                  <a:srgbClr val="468260"/>
+                </a:solidFill>
+              </a:rPr>
+              <a:t>Projects / </a:t>
+            </a:r>
+            <a:r>
+              <a:rPr lang="ko-KR" altLang="en-US" sz="4000" b="1" dirty="0" err="1">
+                <a:solidFill>
+                  <a:srgbClr val="468260"/>
+                </a:solidFill>
+              </a:rPr>
+              <a:t>윈즈</a:t>
+            </a:r>
+            <a:r>
+              <a:rPr lang="ko-KR" altLang="en-US" sz="4000" b="1" dirty="0">
+                <a:solidFill>
+                  <a:srgbClr val="468260"/>
+                </a:solidFill>
+              </a:rPr>
+              <a:t> 시스템</a:t>
+            </a:r>
+          </a:p>
+        </p:txBody>
+      </p:sp>
+      <p:sp>
+        <p:nvSpPr>
+          <p:cNvPr id="5" name="TextBox 4">
+            <a:extLst>
+              <a:ext uri="{FF2B5EF4-FFF2-40B4-BE49-F238E27FC236}">
+                <a16:creationId xmlns:a16="http://schemas.microsoft.com/office/drawing/2014/main" id="{83AD4A63-2BC2-F5D5-1B07-EACEB4C11BE1}"/>
+              </a:ext>
+            </a:extLst>
+          </p:cNvPr>
+          <p:cNvSpPr txBox="1"/>
+          <p:nvPr/>
+        </p:nvSpPr>
+        <p:spPr>
+          <a:xfrm>
+            <a:off x="1146968" y="1272808"/>
+            <a:ext cx="8301832" cy="461665"/>
+          </a:xfrm>
+          <a:prstGeom prst="rect">
+            <a:avLst/>
+          </a:prstGeom>
+          <a:noFill/>
+        </p:spPr>
+        <p:txBody>
+          <a:bodyPr wrap="square" rtlCol="0">
+            <a:spAutoFit/>
+          </a:bodyPr>
+          <a:lstStyle/>
+          <a:p>
+            <a:r>
+              <a:rPr lang="en-US" altLang="ko-KR" sz="2400" b="1" dirty="0"/>
+              <a:t>2. </a:t>
+            </a:r>
+            <a:r>
+              <a:rPr lang="en-US" altLang="ko-KR" sz="2400" b="1" dirty="0" err="1"/>
+              <a:t>Ahnlab</a:t>
+            </a:r>
+            <a:r>
+              <a:rPr lang="ko-KR" altLang="en-US" sz="2400" b="1" dirty="0"/>
+              <a:t>의 </a:t>
+            </a:r>
+            <a:r>
+              <a:rPr lang="ko-KR" altLang="en-US" sz="2400" b="1" dirty="0" err="1"/>
+              <a:t>백신툴을</a:t>
+            </a:r>
+            <a:r>
+              <a:rPr lang="ko-KR" altLang="en-US" sz="2400" b="1" dirty="0"/>
+              <a:t> 이용한 실시간 감시 기능 개발</a:t>
+            </a:r>
+          </a:p>
+        </p:txBody>
+      </p:sp>
+      <p:sp>
+        <p:nvSpPr>
+          <p:cNvPr id="7" name="TextBox 6">
+            <a:extLst>
+              <a:ext uri="{FF2B5EF4-FFF2-40B4-BE49-F238E27FC236}">
+                <a16:creationId xmlns:a16="http://schemas.microsoft.com/office/drawing/2014/main" id="{8B17903C-8651-1C7B-B417-EE759E47D41C}"/>
+              </a:ext>
+            </a:extLst>
+          </p:cNvPr>
+          <p:cNvSpPr txBox="1"/>
+          <p:nvPr/>
+        </p:nvSpPr>
+        <p:spPr>
+          <a:xfrm>
+            <a:off x="1146968" y="1734473"/>
+            <a:ext cx="11235532" cy="1200329"/>
+          </a:xfrm>
+          <a:prstGeom prst="rect">
+            <a:avLst/>
+          </a:prstGeom>
+          <a:noFill/>
+        </p:spPr>
+        <p:txBody>
+          <a:bodyPr wrap="square" rtlCol="0">
+            <a:spAutoFit/>
+          </a:bodyPr>
+          <a:lstStyle/>
+          <a:p>
+            <a:pPr marL="0" marR="0" lvl="0" indent="0" algn="l" defTabSz="914400" rtl="0" eaLnBrk="0" fontAlgn="base" latinLnBrk="0" hangingPunct="0">
+              <a:lnSpc>
+                <a:spcPct val="100000"/>
+              </a:lnSpc>
+              <a:spcBef>
+                <a:spcPct val="0"/>
+              </a:spcBef>
+              <a:spcAft>
+                <a:spcPct val="0"/>
+              </a:spcAft>
+              <a:buClrTx/>
+              <a:buSzTx/>
+              <a:buFontTx/>
+              <a:buNone/>
+              <a:tabLst/>
+            </a:pPr>
+            <a:r>
+              <a:rPr lang="ko-KR" altLang="en-US" dirty="0"/>
+              <a:t>기존 검사 기능 프로세스는 앱에 들어가 검사를 진행 해야만 위협 사항을 발견하는 프로세스로 구성됨</a:t>
+            </a:r>
+            <a:r>
+              <a:rPr lang="en-US" altLang="ko-KR" dirty="0"/>
+              <a:t>. </a:t>
+            </a:r>
+            <a:r>
+              <a:rPr lang="ko-KR" altLang="en-US" dirty="0"/>
+              <a:t>늘어가는 모바일 앱 피해 사태와 비교 해 볼 때</a:t>
+            </a:r>
+            <a:r>
+              <a:rPr lang="en-US" altLang="ko-KR" dirty="0"/>
+              <a:t>, </a:t>
+            </a:r>
+            <a:r>
+              <a:rPr lang="ko-KR" altLang="en-US" dirty="0"/>
+              <a:t>완전한 보안 서비스 제공이 어렵다는 판단이 들어 추가 기능이 필요한 것으로 결론</a:t>
+            </a:r>
+            <a:r>
+              <a:rPr lang="en-US" altLang="ko-KR" dirty="0"/>
+              <a:t>.</a:t>
+            </a:r>
+            <a:br>
+              <a:rPr lang="en-US" altLang="ko-KR" dirty="0"/>
+            </a:br>
+            <a:r>
+              <a:rPr lang="ko-KR" altLang="en-US" dirty="0"/>
+              <a:t>기존 </a:t>
+            </a:r>
+            <a:r>
+              <a:rPr lang="en-US" altLang="ko-KR" dirty="0" err="1"/>
+              <a:t>Ahnlab</a:t>
+            </a:r>
+            <a:r>
+              <a:rPr lang="ko-KR" altLang="en-US" dirty="0"/>
+              <a:t>에서 구매하며 사용하던 라이브러리</a:t>
+            </a:r>
+            <a:r>
+              <a:rPr lang="en-US" altLang="ko-KR" dirty="0"/>
+              <a:t>(MSDK)</a:t>
+            </a:r>
+            <a:r>
+              <a:rPr lang="ko-KR" altLang="en-US" dirty="0"/>
+              <a:t> 확인 결과</a:t>
+            </a:r>
+            <a:r>
+              <a:rPr lang="en-US" altLang="ko-KR" dirty="0"/>
+              <a:t>, </a:t>
+            </a:r>
+            <a:r>
+              <a:rPr lang="ko-KR" altLang="en-US" dirty="0"/>
+              <a:t>시간을 많이 들이지 않더라도 기능을 개발할 수 있음이 확인되어 고도화를 통해 앱 신규 기능 개발을 진행</a:t>
+            </a:r>
+            <a:r>
+              <a:rPr lang="en-US" altLang="ko-KR" dirty="0"/>
+              <a:t>.</a:t>
+            </a:r>
+          </a:p>
+        </p:txBody>
+      </p:sp>
+      <p:sp>
+        <p:nvSpPr>
+          <p:cNvPr id="2" name="직사각형 1">
+            <a:extLst>
+              <a:ext uri="{FF2B5EF4-FFF2-40B4-BE49-F238E27FC236}">
+                <a16:creationId xmlns:a16="http://schemas.microsoft.com/office/drawing/2014/main" id="{C1638BDE-B03B-948D-840A-274508440A12}"/>
+              </a:ext>
+            </a:extLst>
+          </p:cNvPr>
+          <p:cNvSpPr/>
+          <p:nvPr/>
+        </p:nvSpPr>
+        <p:spPr>
+          <a:xfrm>
+            <a:off x="1140380" y="3007528"/>
+            <a:ext cx="11242120" cy="388939"/>
+          </a:xfrm>
+          <a:prstGeom prst="rect">
+            <a:avLst/>
+          </a:prstGeom>
+          <a:solidFill>
+            <a:srgbClr val="252525">
+              <a:alpha val="10000"/>
+            </a:srgbClr>
+          </a:solidFill>
+          <a:ln>
+            <a:noFill/>
+          </a:ln>
+        </p:spPr>
+        <p:style>
+          <a:lnRef idx="2">
+            <a:schemeClr val="accent1">
+              <a:shade val="15000"/>
+            </a:schemeClr>
+          </a:lnRef>
+          <a:fillRef idx="1">
+            <a:schemeClr val="accent1"/>
+          </a:fillRef>
+          <a:effectRef idx="0">
+            <a:schemeClr val="accent1"/>
+          </a:effectRef>
+          <a:fontRef idx="minor">
+            <a:schemeClr val="lt1"/>
+          </a:fontRef>
+        </p:style>
+        <p:txBody>
+          <a:bodyPr rtlCol="0" anchor="ctr"/>
+          <a:lstStyle/>
+          <a:p>
+            <a:pPr algn="ctr"/>
+            <a:endParaRPr lang="ko-KR" altLang="en-US"/>
+          </a:p>
+        </p:txBody>
+      </p:sp>
+      <p:sp>
+        <p:nvSpPr>
+          <p:cNvPr id="3" name="TextBox 2">
+            <a:extLst>
+              <a:ext uri="{FF2B5EF4-FFF2-40B4-BE49-F238E27FC236}">
+                <a16:creationId xmlns:a16="http://schemas.microsoft.com/office/drawing/2014/main" id="{D9167F0B-A09A-9E3B-15C6-EF68E8F013A5}"/>
+              </a:ext>
+            </a:extLst>
+          </p:cNvPr>
+          <p:cNvSpPr txBox="1"/>
+          <p:nvPr/>
+        </p:nvSpPr>
+        <p:spPr>
+          <a:xfrm>
+            <a:off x="1120555" y="3007528"/>
+            <a:ext cx="9255345" cy="369332"/>
+          </a:xfrm>
+          <a:prstGeom prst="rect">
+            <a:avLst/>
+          </a:prstGeom>
+          <a:noFill/>
+        </p:spPr>
+        <p:txBody>
+          <a:bodyPr wrap="square" rtlCol="0">
+            <a:spAutoFit/>
+          </a:bodyPr>
+          <a:lstStyle/>
+          <a:p>
+            <a:r>
+              <a:rPr lang="ko-KR" altLang="en-US" b="1" dirty="0">
+                <a:effectLst/>
+                <a:latin typeface="Apple Color Emoji"/>
+              </a:rPr>
+              <a:t>🛠️</a:t>
+            </a:r>
+            <a:r>
+              <a:rPr lang="ko-KR" altLang="en-US" b="1" dirty="0">
+                <a:effectLst/>
+              </a:rPr>
+              <a:t> </a:t>
+            </a:r>
+            <a:r>
+              <a:rPr lang="en-US" altLang="ko-KR" b="1" dirty="0">
+                <a:effectLst/>
+              </a:rPr>
+              <a:t>Android Studio, Java, Android(Android </a:t>
+            </a:r>
+            <a:r>
+              <a:rPr lang="en-US" altLang="ko-KR" b="1" dirty="0" err="1">
+                <a:effectLst/>
+              </a:rPr>
+              <a:t>BroadCast</a:t>
+            </a:r>
+            <a:r>
+              <a:rPr lang="en-US" altLang="ko-KR" b="1" dirty="0">
+                <a:effectLst/>
+              </a:rPr>
+              <a:t>), MSDK(</a:t>
+            </a:r>
+            <a:r>
+              <a:rPr lang="ko-KR" altLang="en-US" b="1" dirty="0" err="1">
+                <a:effectLst/>
+              </a:rPr>
+              <a:t>안랩</a:t>
+            </a:r>
+            <a:r>
+              <a:rPr lang="ko-KR" altLang="en-US" b="1" dirty="0">
+                <a:effectLst/>
+              </a:rPr>
+              <a:t> </a:t>
+            </a:r>
+            <a:r>
+              <a:rPr lang="en-US" altLang="ko-KR" b="1" dirty="0">
+                <a:effectLst/>
+              </a:rPr>
+              <a:t>Mobile SDK)</a:t>
+            </a:r>
+            <a:endParaRPr lang="ko-KR" altLang="en-US" b="1" dirty="0"/>
+          </a:p>
+        </p:txBody>
+      </p:sp>
+      <p:sp>
+        <p:nvSpPr>
+          <p:cNvPr id="9" name="TextBox 8">
+            <a:extLst>
+              <a:ext uri="{FF2B5EF4-FFF2-40B4-BE49-F238E27FC236}">
+                <a16:creationId xmlns:a16="http://schemas.microsoft.com/office/drawing/2014/main" id="{1615035F-4512-45C9-B716-E85DFA14130B}"/>
+              </a:ext>
+            </a:extLst>
+          </p:cNvPr>
+          <p:cNvSpPr txBox="1"/>
+          <p:nvPr/>
+        </p:nvSpPr>
+        <p:spPr>
+          <a:xfrm>
+            <a:off x="1146968" y="3469193"/>
+            <a:ext cx="11235532" cy="3046988"/>
+          </a:xfrm>
+          <a:prstGeom prst="rect">
+            <a:avLst/>
+          </a:prstGeom>
+          <a:noFill/>
+        </p:spPr>
+        <p:txBody>
+          <a:bodyPr wrap="square" rtlCol="0">
+            <a:spAutoFit/>
+          </a:bodyPr>
+          <a:lstStyle/>
+          <a:p>
+            <a:pPr marL="0" marR="0" lvl="0" indent="0" algn="l" defTabSz="914400" rtl="0" eaLnBrk="0" fontAlgn="base" latinLnBrk="0" hangingPunct="0">
+              <a:lnSpc>
+                <a:spcPct val="100000"/>
+              </a:lnSpc>
+              <a:spcBef>
+                <a:spcPct val="0"/>
+              </a:spcBef>
+              <a:spcAft>
+                <a:spcPct val="0"/>
+              </a:spcAft>
+              <a:buClrTx/>
+              <a:buSzTx/>
+              <a:buFontTx/>
+              <a:buNone/>
+              <a:tabLst/>
+            </a:pPr>
+            <a:r>
+              <a:rPr lang="ko-KR" altLang="en-US" sz="2200" b="1" dirty="0"/>
+              <a:t>성과</a:t>
+            </a:r>
+            <a:endParaRPr lang="en-US" altLang="ko-KR" sz="2200" b="1" dirty="0"/>
+          </a:p>
+          <a:p>
+            <a:pPr marL="285750" indent="-285750">
+              <a:buFont typeface="Arial" panose="020B0604020202020204" pitchFamily="34" charset="0"/>
+              <a:buChar char="•"/>
+            </a:pPr>
+            <a:r>
+              <a:rPr lang="ko-KR" altLang="en-US" dirty="0"/>
+              <a:t>기존의 수동 검사 방식에서 벗어나 실시간으로 앱 설치 시 위협 여부 탐지 기능 제공</a:t>
+            </a:r>
+            <a:r>
+              <a:rPr lang="en-US" altLang="ko-KR" dirty="0"/>
+              <a:t>. </a:t>
+            </a:r>
+            <a:r>
+              <a:rPr lang="ko-KR" altLang="en-US" dirty="0"/>
+              <a:t>사용자의 개입 없이 자동으로 보안 기능이 실행되며 이를 통한 편의성 및 보안성 향상</a:t>
+            </a:r>
+            <a:endParaRPr lang="en-US" altLang="ko-KR" dirty="0"/>
+          </a:p>
+          <a:p>
+            <a:pPr marL="285750" indent="-285750">
+              <a:buFont typeface="Arial" panose="020B0604020202020204" pitchFamily="34" charset="0"/>
+              <a:buChar char="•"/>
+            </a:pPr>
+            <a:r>
+              <a:rPr lang="en-US" altLang="ko-KR" dirty="0"/>
+              <a:t>Google Play </a:t>
+            </a:r>
+            <a:r>
+              <a:rPr lang="ko-KR" altLang="en-US" dirty="0"/>
+              <a:t>에 등록된 앱 뿐만이 아닌 </a:t>
+            </a:r>
+            <a:r>
+              <a:rPr lang="en-US" altLang="ko-KR" dirty="0"/>
+              <a:t>.</a:t>
+            </a:r>
+            <a:r>
+              <a:rPr lang="en-US" altLang="ko-KR" dirty="0" err="1"/>
+              <a:t>apk</a:t>
+            </a:r>
+            <a:r>
+              <a:rPr lang="en-US" altLang="ko-KR" dirty="0"/>
+              <a:t> </a:t>
+            </a:r>
+            <a:r>
+              <a:rPr lang="ko-KR" altLang="en-US" dirty="0"/>
+              <a:t>파일을 통한 앱 설치까지 감지 가능하며 보안 위협 대응력 강화</a:t>
+            </a:r>
+            <a:endParaRPr lang="en-US" altLang="ko-KR" dirty="0"/>
+          </a:p>
+          <a:p>
+            <a:pPr marL="285750" indent="-285750">
+              <a:buFont typeface="Arial" panose="020B0604020202020204" pitchFamily="34" charset="0"/>
+              <a:buChar char="•"/>
+            </a:pPr>
+            <a:endParaRPr lang="en-US" altLang="ko-KR" dirty="0"/>
+          </a:p>
+          <a:p>
+            <a:pPr marR="0" lvl="0" algn="l" defTabSz="914400" rtl="0" eaLnBrk="0" fontAlgn="base" latinLnBrk="0" hangingPunct="0">
+              <a:lnSpc>
+                <a:spcPct val="100000"/>
+              </a:lnSpc>
+              <a:spcBef>
+                <a:spcPct val="0"/>
+              </a:spcBef>
+              <a:spcAft>
+                <a:spcPct val="0"/>
+              </a:spcAft>
+              <a:buClrTx/>
+              <a:buSzTx/>
+              <a:tabLst/>
+            </a:pPr>
+            <a:r>
+              <a:rPr lang="ko-KR" altLang="en-US" sz="2200" b="1" dirty="0"/>
+              <a:t>인사이트</a:t>
+            </a:r>
+            <a:endParaRPr lang="en-US" altLang="ko-KR" sz="2200" b="1" dirty="0"/>
+          </a:p>
+          <a:p>
+            <a:pPr marL="285750" indent="-285750">
+              <a:buFont typeface="Arial" panose="020B0604020202020204" pitchFamily="34" charset="0"/>
+              <a:buChar char="•"/>
+            </a:pPr>
+            <a:r>
+              <a:rPr lang="ko-KR" altLang="en-US" dirty="0"/>
+              <a:t>처음으로 사용자의 입장에서 어떠한 기능이 필요한 지 생각 해 보며</a:t>
+            </a:r>
+            <a:r>
+              <a:rPr lang="en-US" altLang="ko-KR" dirty="0"/>
+              <a:t> </a:t>
+            </a:r>
+            <a:r>
+              <a:rPr lang="ko-KR" altLang="en-US" dirty="0"/>
+              <a:t>이를 통해 어떠한 기능이 가장 효율적이며 사용자에게 필요한지</a:t>
+            </a:r>
+            <a:r>
+              <a:rPr lang="en-US" altLang="ko-KR" dirty="0"/>
+              <a:t>, </a:t>
+            </a:r>
+            <a:r>
+              <a:rPr lang="ko-KR" altLang="en-US" dirty="0"/>
+              <a:t>어떤 개발을 해야 최소한의 시간으로 최대한의 성과를 이룰 수 있는지 고민하며 개발을 진행</a:t>
+            </a:r>
+            <a:endParaRPr lang="en-US" altLang="ko-KR" dirty="0"/>
+          </a:p>
+          <a:p>
+            <a:pPr marL="285750" indent="-285750">
+              <a:buFont typeface="Arial" panose="020B0604020202020204" pitchFamily="34" charset="0"/>
+              <a:buChar char="•"/>
+            </a:pPr>
+            <a:endParaRPr lang="en-US" altLang="ko-KR" dirty="0"/>
+          </a:p>
+          <a:p>
+            <a:pPr marR="0" lvl="0" algn="l" defTabSz="914400" rtl="0" eaLnBrk="0" fontAlgn="base" latinLnBrk="0" hangingPunct="0">
+              <a:lnSpc>
+                <a:spcPct val="100000"/>
+              </a:lnSpc>
+              <a:spcBef>
+                <a:spcPct val="0"/>
+              </a:spcBef>
+              <a:spcAft>
+                <a:spcPct val="0"/>
+              </a:spcAft>
+              <a:buClrTx/>
+              <a:buSzTx/>
+              <a:tabLst/>
+            </a:pPr>
+            <a:r>
+              <a:rPr lang="ko-KR" altLang="en-US" sz="2200" b="1" dirty="0">
+                <a:hlinkClick r:id="rId2"/>
+              </a:rPr>
+              <a:t>상세 보기</a:t>
+            </a:r>
+            <a:endParaRPr lang="en-US" altLang="ko-KR" sz="2200" b="1" dirty="0"/>
+          </a:p>
+        </p:txBody>
+      </p:sp>
+    </p:spTree>
+    <p:extLst>
+      <p:ext uri="{BB962C8B-B14F-4D97-AF65-F5344CB8AC3E}">
+        <p14:creationId xmlns:p14="http://schemas.microsoft.com/office/powerpoint/2010/main" val="1700720363"/>
+      </p:ext>
+    </p:extLst>
+  </p:cSld>
+  <p:clrMapOvr>
+    <a:masterClrMapping/>
+  </p:clrMapOvr>
+</p:sld>
+</file>
+
+<file path=ppt/slides/slide9.xml><?xml version="1.0" encoding="utf-8"?>
+<p:sld xmlns:a="http://schemas.openxmlformats.org/drawingml/2006/main" xmlns:r="http://schemas.openxmlformats.org/officeDocument/2006/relationships" xmlns:p="http://schemas.openxmlformats.org/presentationml/2006/main">
+  <p:cSld>
+    <p:spTree>
+      <p:nvGrpSpPr>
+        <p:cNvPr id="1" name="">
+          <a:extLst>
+            <a:ext uri="{FF2B5EF4-FFF2-40B4-BE49-F238E27FC236}">
+              <a16:creationId xmlns:a16="http://schemas.microsoft.com/office/drawing/2014/main" id="{B99A33C7-B939-E852-7E92-64AC1B3DA295}"/>
+            </a:ext>
+          </a:extLst>
+        </p:cNvPr>
+        <p:cNvGrpSpPr/>
+        <p:nvPr/>
+      </p:nvGrpSpPr>
+      <p:grpSpPr>
+        <a:xfrm>
+          <a:off x="0" y="0"/>
+          <a:ext cx="0" cy="0"/>
+          <a:chOff x="0" y="0"/>
+          <a:chExt cx="0" cy="0"/>
+        </a:xfrm>
+      </p:grpSpPr>
+      <p:sp>
+        <p:nvSpPr>
+          <p:cNvPr id="4" name="TextBox 3">
+            <a:extLst>
+              <a:ext uri="{FF2B5EF4-FFF2-40B4-BE49-F238E27FC236}">
+                <a16:creationId xmlns:a16="http://schemas.microsoft.com/office/drawing/2014/main" id="{93B77123-1149-21F2-28BC-3236CDBFA25C}"/>
+              </a:ext>
+            </a:extLst>
+          </p:cNvPr>
+          <p:cNvSpPr txBox="1"/>
+          <p:nvPr/>
+        </p:nvSpPr>
+        <p:spPr>
+          <a:xfrm>
+            <a:off x="621792" y="564922"/>
+            <a:ext cx="6896608" cy="707886"/>
+          </a:xfrm>
+          <a:prstGeom prst="rect">
+            <a:avLst/>
+          </a:prstGeom>
+          <a:noFill/>
+        </p:spPr>
+        <p:txBody>
+          <a:bodyPr wrap="square" rtlCol="0">
+            <a:spAutoFit/>
+          </a:bodyPr>
+          <a:lstStyle/>
+          <a:p>
+            <a:r>
+              <a:rPr lang="en-US" altLang="ko-KR" sz="4000" b="1" dirty="0">
+                <a:solidFill>
+                  <a:srgbClr val="468260"/>
+                </a:solidFill>
+              </a:rPr>
+              <a:t>Projects / </a:t>
+            </a:r>
+            <a:r>
+              <a:rPr lang="ko-KR" altLang="en-US" sz="4000" b="1" dirty="0" err="1">
+                <a:solidFill>
+                  <a:srgbClr val="468260"/>
+                </a:solidFill>
+              </a:rPr>
+              <a:t>윈즈</a:t>
+            </a:r>
+            <a:r>
+              <a:rPr lang="ko-KR" altLang="en-US" sz="4000" b="1" dirty="0">
+                <a:solidFill>
+                  <a:srgbClr val="468260"/>
+                </a:solidFill>
+              </a:rPr>
+              <a:t> 시스템</a:t>
+            </a:r>
+          </a:p>
+        </p:txBody>
+      </p:sp>
+      <p:sp>
+        <p:nvSpPr>
+          <p:cNvPr id="5" name="TextBox 4">
+            <a:extLst>
+              <a:ext uri="{FF2B5EF4-FFF2-40B4-BE49-F238E27FC236}">
+                <a16:creationId xmlns:a16="http://schemas.microsoft.com/office/drawing/2014/main" id="{9C02A834-9E7E-AF9B-60C7-5B5BCA18EDEE}"/>
+              </a:ext>
+            </a:extLst>
+          </p:cNvPr>
+          <p:cNvSpPr txBox="1"/>
+          <p:nvPr/>
+        </p:nvSpPr>
+        <p:spPr>
+          <a:xfrm>
+            <a:off x="1146968" y="1272808"/>
+            <a:ext cx="10029032" cy="461665"/>
+          </a:xfrm>
+          <a:prstGeom prst="rect">
+            <a:avLst/>
+          </a:prstGeom>
+          <a:noFill/>
+        </p:spPr>
+        <p:txBody>
+          <a:bodyPr wrap="square" rtlCol="0">
+            <a:spAutoFit/>
+          </a:bodyPr>
+          <a:lstStyle/>
+          <a:p>
+            <a:r>
+              <a:rPr lang="en-US" altLang="ko-KR" sz="2400" b="1" dirty="0"/>
+              <a:t>3. </a:t>
+            </a:r>
+            <a:r>
+              <a:rPr lang="ko-KR" altLang="en-US" sz="2400" b="1" dirty="0"/>
+              <a:t>모바일 원격 </a:t>
+            </a:r>
+            <a:r>
+              <a:rPr lang="ko-KR" altLang="en-US" sz="2400" b="1" dirty="0" err="1"/>
+              <a:t>점검툴</a:t>
+            </a:r>
+            <a:r>
+              <a:rPr lang="ko-KR" altLang="en-US" sz="2400" b="1" dirty="0"/>
+              <a:t> 그리기 기능 개발 및 삼성 </a:t>
+            </a:r>
+            <a:r>
+              <a:rPr lang="en-US" altLang="ko-KR" sz="2400" b="1" dirty="0"/>
+              <a:t>KNOX</a:t>
+            </a:r>
+            <a:r>
+              <a:rPr lang="ko-KR" altLang="en-US" sz="2400" b="1" dirty="0"/>
+              <a:t>를 사용한 터치 기능 고도화</a:t>
+            </a:r>
+          </a:p>
+        </p:txBody>
+      </p:sp>
+      <p:sp>
+        <p:nvSpPr>
+          <p:cNvPr id="7" name="TextBox 6">
+            <a:extLst>
+              <a:ext uri="{FF2B5EF4-FFF2-40B4-BE49-F238E27FC236}">
+                <a16:creationId xmlns:a16="http://schemas.microsoft.com/office/drawing/2014/main" id="{DD825C18-D4DE-7A85-0904-A8E94AED404E}"/>
+              </a:ext>
+            </a:extLst>
+          </p:cNvPr>
+          <p:cNvSpPr txBox="1"/>
+          <p:nvPr/>
+        </p:nvSpPr>
+        <p:spPr>
+          <a:xfrm>
+            <a:off x="1146968" y="1734473"/>
+            <a:ext cx="11235532" cy="923330"/>
+          </a:xfrm>
+          <a:prstGeom prst="rect">
+            <a:avLst/>
+          </a:prstGeom>
+          <a:noFill/>
+        </p:spPr>
+        <p:txBody>
+          <a:bodyPr wrap="square" rtlCol="0">
+            <a:spAutoFit/>
+          </a:bodyPr>
+          <a:lstStyle/>
+          <a:p>
+            <a:pPr marL="0" marR="0" lvl="0" indent="0" algn="l" defTabSz="914400" rtl="0" eaLnBrk="0" fontAlgn="base" latinLnBrk="0" hangingPunct="0">
+              <a:lnSpc>
+                <a:spcPct val="100000"/>
+              </a:lnSpc>
+              <a:spcBef>
+                <a:spcPct val="0"/>
+              </a:spcBef>
+              <a:spcAft>
+                <a:spcPct val="0"/>
+              </a:spcAft>
+              <a:buClrTx/>
+              <a:buSzTx/>
+              <a:buFontTx/>
+              <a:buNone/>
+              <a:tabLst/>
+            </a:pPr>
+            <a:r>
+              <a:rPr lang="en-US" altLang="ko-KR" dirty="0"/>
+              <a:t>Google</a:t>
+            </a:r>
+            <a:r>
+              <a:rPr lang="ko-KR" altLang="en-US" dirty="0"/>
+              <a:t>의 안드로이드 </a:t>
+            </a:r>
+            <a:r>
+              <a:rPr lang="en-US" altLang="ko-KR" dirty="0"/>
+              <a:t>OS </a:t>
+            </a:r>
+            <a:r>
+              <a:rPr lang="ko-KR" altLang="en-US" dirty="0"/>
+              <a:t>업데이트 흐름이 하드웨어 제어 </a:t>
+            </a:r>
+            <a:r>
+              <a:rPr lang="en-US" altLang="ko-KR" dirty="0"/>
+              <a:t>API</a:t>
+            </a:r>
+            <a:r>
+              <a:rPr lang="ko-KR" altLang="en-US" dirty="0"/>
+              <a:t>가 제한되는 추세</a:t>
+            </a:r>
+            <a:r>
+              <a:rPr lang="en-US" altLang="ko-KR" dirty="0"/>
+              <a:t>. </a:t>
+            </a:r>
+            <a:r>
+              <a:rPr lang="ko-KR" altLang="en-US" dirty="0"/>
+              <a:t>이에 따라 앱의 기능들이 점점 사용할 수 없게 되어가는 상황에서 서비스 유지를 위해 기능 고도화 필요</a:t>
+            </a:r>
+            <a:r>
+              <a:rPr lang="en-US" altLang="ko-KR" dirty="0"/>
+              <a:t>. Google</a:t>
+            </a:r>
+            <a:r>
+              <a:rPr lang="ko-KR" altLang="en-US" dirty="0"/>
+              <a:t>의 안드로이드 </a:t>
+            </a:r>
+            <a:r>
+              <a:rPr lang="en-US" altLang="ko-KR" dirty="0"/>
+              <a:t>SDK</a:t>
+            </a:r>
+            <a:r>
+              <a:rPr lang="ko-KR" altLang="en-US" dirty="0"/>
+              <a:t>를 넘어선 외부 </a:t>
+            </a:r>
+            <a:r>
+              <a:rPr lang="en-US" altLang="ko-KR" dirty="0"/>
+              <a:t>API</a:t>
+            </a:r>
+            <a:r>
+              <a:rPr lang="ko-KR" altLang="en-US" dirty="0"/>
+              <a:t>를 활용하여 기존 기능의 고도화 및 서비스 유지를 목표로 하는 프로젝트 진행</a:t>
+            </a:r>
+            <a:endParaRPr lang="en-US" altLang="ko-KR" dirty="0"/>
+          </a:p>
+        </p:txBody>
+      </p:sp>
+      <p:sp>
+        <p:nvSpPr>
+          <p:cNvPr id="2" name="직사각형 1">
+            <a:extLst>
+              <a:ext uri="{FF2B5EF4-FFF2-40B4-BE49-F238E27FC236}">
+                <a16:creationId xmlns:a16="http://schemas.microsoft.com/office/drawing/2014/main" id="{00FA6FB4-6603-7602-A99D-2A080CBEACA1}"/>
+              </a:ext>
+            </a:extLst>
+          </p:cNvPr>
+          <p:cNvSpPr/>
+          <p:nvPr/>
+        </p:nvSpPr>
+        <p:spPr>
+          <a:xfrm>
+            <a:off x="1140380" y="3007528"/>
+            <a:ext cx="11242120" cy="388939"/>
+          </a:xfrm>
+          <a:prstGeom prst="rect">
+            <a:avLst/>
+          </a:prstGeom>
+          <a:solidFill>
+            <a:srgbClr val="252525">
+              <a:alpha val="10000"/>
+            </a:srgbClr>
+          </a:solidFill>
+          <a:ln>
+            <a:noFill/>
+          </a:ln>
+        </p:spPr>
+        <p:style>
+          <a:lnRef idx="2">
+            <a:schemeClr val="accent1">
+              <a:shade val="15000"/>
+            </a:schemeClr>
+          </a:lnRef>
+          <a:fillRef idx="1">
+            <a:schemeClr val="accent1"/>
+          </a:fillRef>
+          <a:effectRef idx="0">
+            <a:schemeClr val="accent1"/>
+          </a:effectRef>
+          <a:fontRef idx="minor">
+            <a:schemeClr val="lt1"/>
+          </a:fontRef>
+        </p:style>
+        <p:txBody>
+          <a:bodyPr rtlCol="0" anchor="ctr"/>
+          <a:lstStyle/>
+          <a:p>
+            <a:pPr algn="ctr"/>
+            <a:endParaRPr lang="ko-KR" altLang="en-US"/>
+          </a:p>
+        </p:txBody>
+      </p:sp>
+      <p:sp>
+        <p:nvSpPr>
+          <p:cNvPr id="3" name="TextBox 2">
+            <a:extLst>
+              <a:ext uri="{FF2B5EF4-FFF2-40B4-BE49-F238E27FC236}">
+                <a16:creationId xmlns:a16="http://schemas.microsoft.com/office/drawing/2014/main" id="{F1CD453D-CA35-8208-8295-18A52B65134D}"/>
+              </a:ext>
+            </a:extLst>
+          </p:cNvPr>
+          <p:cNvSpPr txBox="1"/>
+          <p:nvPr/>
+        </p:nvSpPr>
+        <p:spPr>
+          <a:xfrm>
+            <a:off x="1120555" y="3007528"/>
+            <a:ext cx="7413845" cy="369332"/>
+          </a:xfrm>
+          <a:prstGeom prst="rect">
+            <a:avLst/>
+          </a:prstGeom>
+          <a:noFill/>
+        </p:spPr>
+        <p:txBody>
+          <a:bodyPr wrap="square" rtlCol="0">
+            <a:spAutoFit/>
+          </a:bodyPr>
+          <a:lstStyle/>
+          <a:p>
+            <a:r>
+              <a:rPr lang="ko-KR" altLang="en-US" b="1" dirty="0">
+                <a:effectLst/>
+              </a:rPr>
+              <a:t>🛠️ </a:t>
+            </a:r>
+            <a:r>
+              <a:rPr lang="en-US" altLang="ko-KR" b="1" dirty="0">
+                <a:effectLst/>
+              </a:rPr>
+              <a:t>Android Studio, Java, Android</a:t>
+            </a:r>
+            <a:endParaRPr lang="ko-KR" altLang="en-US" b="1" dirty="0"/>
+          </a:p>
+        </p:txBody>
+      </p:sp>
+      <p:sp>
+        <p:nvSpPr>
+          <p:cNvPr id="9" name="TextBox 8">
+            <a:extLst>
+              <a:ext uri="{FF2B5EF4-FFF2-40B4-BE49-F238E27FC236}">
+                <a16:creationId xmlns:a16="http://schemas.microsoft.com/office/drawing/2014/main" id="{473A745E-A442-1B75-0AE2-C7BD4734F127}"/>
+              </a:ext>
+            </a:extLst>
+          </p:cNvPr>
+          <p:cNvSpPr txBox="1"/>
+          <p:nvPr/>
+        </p:nvSpPr>
+        <p:spPr>
+          <a:xfrm>
+            <a:off x="1146968" y="3469193"/>
+            <a:ext cx="11235532" cy="3046988"/>
+          </a:xfrm>
+          <a:prstGeom prst="rect">
+            <a:avLst/>
+          </a:prstGeom>
+          <a:noFill/>
+        </p:spPr>
+        <p:txBody>
+          <a:bodyPr wrap="square" rtlCol="0">
+            <a:spAutoFit/>
+          </a:bodyPr>
+          <a:lstStyle/>
+          <a:p>
+            <a:pPr marL="0" marR="0" lvl="0" indent="0" algn="l" defTabSz="914400" rtl="0" eaLnBrk="0" fontAlgn="base" latinLnBrk="0" hangingPunct="0">
+              <a:lnSpc>
+                <a:spcPct val="100000"/>
+              </a:lnSpc>
+              <a:spcBef>
+                <a:spcPct val="0"/>
+              </a:spcBef>
+              <a:spcAft>
+                <a:spcPct val="0"/>
+              </a:spcAft>
+              <a:buClrTx/>
+              <a:buSzTx/>
+              <a:buFontTx/>
+              <a:buNone/>
+              <a:tabLst/>
+            </a:pPr>
+            <a:r>
+              <a:rPr lang="ko-KR" altLang="en-US" sz="2200" b="1" dirty="0"/>
+              <a:t>성과</a:t>
+            </a:r>
+            <a:endParaRPr lang="en-US" altLang="ko-KR" sz="2200" b="1" dirty="0"/>
+          </a:p>
+          <a:p>
+            <a:pPr marL="285750" indent="-285750">
+              <a:buFont typeface="Arial" panose="020B0604020202020204" pitchFamily="34" charset="0"/>
+              <a:buChar char="•"/>
+            </a:pPr>
+            <a:r>
+              <a:rPr lang="ko-KR" altLang="en-US" dirty="0"/>
+              <a:t>지속적인 </a:t>
+            </a:r>
+            <a:r>
+              <a:rPr lang="en-US" altLang="ko-KR" dirty="0"/>
+              <a:t>OS </a:t>
+            </a:r>
+            <a:r>
+              <a:rPr lang="ko-KR" altLang="en-US" dirty="0"/>
+              <a:t>업데이트 대응을 통해 </a:t>
+            </a:r>
+            <a:r>
+              <a:rPr lang="en-US" altLang="ko-KR" dirty="0"/>
+              <a:t>Google Play</a:t>
+            </a:r>
+            <a:r>
+              <a:rPr lang="ko-KR" altLang="en-US" dirty="0"/>
+              <a:t>에서 앱 서비스 진행</a:t>
+            </a:r>
+            <a:r>
+              <a:rPr lang="en-US" altLang="ko-KR" dirty="0"/>
+              <a:t>. </a:t>
+            </a:r>
+            <a:r>
+              <a:rPr lang="ko-KR" altLang="en-US" dirty="0"/>
+              <a:t>이를 통해 사용자 이탈 방지</a:t>
+            </a:r>
+            <a:endParaRPr lang="en-US" altLang="ko-KR" dirty="0"/>
+          </a:p>
+          <a:p>
+            <a:pPr marL="285750" indent="-285750">
+              <a:buFont typeface="Arial" panose="020B0604020202020204" pitchFamily="34" charset="0"/>
+              <a:buChar char="•"/>
+            </a:pPr>
+            <a:r>
+              <a:rPr lang="ko-KR" altLang="en-US" dirty="0"/>
+              <a:t>구글의 모바일 정책 변경에 능동적으로 대응</a:t>
+            </a:r>
+            <a:r>
+              <a:rPr lang="en-US" altLang="ko-KR" dirty="0"/>
+              <a:t>. </a:t>
+            </a:r>
+            <a:r>
+              <a:rPr lang="ko-KR" altLang="en-US" dirty="0"/>
+              <a:t>이를 통해 서비스 운영 경험 및 앱 배포 역량 강화</a:t>
+            </a:r>
+          </a:p>
+          <a:p>
+            <a:pPr marR="0" lvl="0" algn="l" defTabSz="914400" rtl="0" eaLnBrk="0" fontAlgn="base" latinLnBrk="0" hangingPunct="0">
+              <a:lnSpc>
+                <a:spcPct val="100000"/>
+              </a:lnSpc>
+              <a:spcBef>
+                <a:spcPct val="0"/>
+              </a:spcBef>
+              <a:spcAft>
+                <a:spcPct val="0"/>
+              </a:spcAft>
+              <a:buClrTx/>
+              <a:buSzTx/>
+              <a:tabLst/>
+            </a:pPr>
+            <a:endParaRPr lang="en-US" altLang="ko-KR" dirty="0"/>
+          </a:p>
+          <a:p>
+            <a:pPr marR="0" lvl="0" algn="l" defTabSz="914400" rtl="0" eaLnBrk="0" fontAlgn="base" latinLnBrk="0" hangingPunct="0">
+              <a:lnSpc>
+                <a:spcPct val="100000"/>
+              </a:lnSpc>
+              <a:spcBef>
+                <a:spcPct val="0"/>
+              </a:spcBef>
+              <a:spcAft>
+                <a:spcPct val="0"/>
+              </a:spcAft>
+              <a:buClrTx/>
+              <a:buSzTx/>
+              <a:tabLst/>
+            </a:pPr>
+            <a:r>
+              <a:rPr lang="ko-KR" altLang="en-US" sz="2200" b="1" dirty="0"/>
+              <a:t>인사이트</a:t>
+            </a:r>
+            <a:endParaRPr lang="en-US" altLang="ko-KR" sz="2200" b="1" dirty="0"/>
+          </a:p>
+          <a:p>
+            <a:pPr marL="285750" indent="-285750">
+              <a:buFont typeface="Arial" panose="020B0604020202020204" pitchFamily="34" charset="0"/>
+              <a:buChar char="•"/>
+            </a:pPr>
+            <a:r>
+              <a:rPr lang="ko-KR" altLang="en-US" dirty="0"/>
+              <a:t>공식 문서를 통해 정보를 취득하는 방법과 역량을 기르고</a:t>
+            </a:r>
+            <a:r>
+              <a:rPr lang="en-US" altLang="ko-KR" dirty="0"/>
+              <a:t>, </a:t>
+            </a:r>
+            <a:r>
+              <a:rPr lang="ko-KR" altLang="en-US" dirty="0"/>
+              <a:t>이를 통해 문제에 대한 대응 및 해결 능력 함양</a:t>
+            </a:r>
+            <a:endParaRPr lang="en-US" altLang="ko-KR" dirty="0"/>
+          </a:p>
+          <a:p>
+            <a:pPr marL="285750" indent="-285750">
+              <a:buFont typeface="Arial" panose="020B0604020202020204" pitchFamily="34" charset="0"/>
+              <a:buChar char="•"/>
+            </a:pPr>
+            <a:r>
+              <a:rPr lang="ko-KR" altLang="en-US" dirty="0"/>
+              <a:t>자사 서비스 앱의 기능들에 대해 어떠한 </a:t>
+            </a:r>
+            <a:r>
+              <a:rPr lang="en-US" altLang="ko-KR" dirty="0"/>
+              <a:t>SDK API</a:t>
+            </a:r>
+            <a:r>
+              <a:rPr lang="ko-KR" altLang="en-US" dirty="0"/>
+              <a:t>를 사용하고</a:t>
+            </a:r>
+            <a:r>
+              <a:rPr lang="en-US" altLang="ko-KR" dirty="0"/>
+              <a:t>, </a:t>
+            </a:r>
+            <a:r>
+              <a:rPr lang="ko-KR" altLang="en-US" dirty="0"/>
+              <a:t>어떠한 로직으로 동작하는지 전반적인 프로세스 파악의 경험 및 추후 발생하는 이슈들에 대해 명확하고 빠른 처리가 가능한 역량 증대</a:t>
+            </a:r>
+          </a:p>
+          <a:p>
+            <a:pPr marR="0" lvl="0" algn="l" defTabSz="914400" rtl="0" eaLnBrk="0" fontAlgn="base" latinLnBrk="0" hangingPunct="0">
+              <a:lnSpc>
+                <a:spcPct val="100000"/>
+              </a:lnSpc>
+              <a:spcBef>
+                <a:spcPct val="0"/>
+              </a:spcBef>
+              <a:spcAft>
+                <a:spcPct val="0"/>
+              </a:spcAft>
+              <a:buClrTx/>
+              <a:buSzTx/>
+              <a:tabLst/>
+            </a:pPr>
+            <a:endParaRPr lang="en-US" altLang="ko-KR" dirty="0"/>
+          </a:p>
+          <a:p>
+            <a:pPr marR="0" lvl="0" algn="l" defTabSz="914400" rtl="0" eaLnBrk="0" fontAlgn="base" latinLnBrk="0" hangingPunct="0">
+              <a:lnSpc>
+                <a:spcPct val="100000"/>
+              </a:lnSpc>
+              <a:spcBef>
+                <a:spcPct val="0"/>
+              </a:spcBef>
+              <a:spcAft>
+                <a:spcPct val="0"/>
+              </a:spcAft>
+              <a:buClrTx/>
+              <a:buSzTx/>
+              <a:tabLst/>
+            </a:pPr>
+            <a:r>
+              <a:rPr lang="ko-KR" altLang="en-US" sz="2200" b="1" dirty="0">
+                <a:hlinkClick r:id="rId2"/>
+              </a:rPr>
+              <a:t>상세 보기</a:t>
+            </a:r>
+            <a:endParaRPr lang="en-US" altLang="ko-KR" sz="2200" b="1" dirty="0"/>
+          </a:p>
+        </p:txBody>
+      </p:sp>
+    </p:spTree>
+    <p:extLst>
+      <p:ext uri="{BB962C8B-B14F-4D97-AF65-F5344CB8AC3E}">
+        <p14:creationId xmlns:p14="http://schemas.microsoft.com/office/powerpoint/2010/main" val="3024926048"/>
       </p:ext>
     </p:extLst>
   </p:cSld>

--- a/문대진_포트폴리오용.pptx
+++ b/문대진_포트폴리오용.pptx
@@ -5,10 +5,10 @@
     <p:sldMasterId id="2147483708" r:id="rId1"/>
   </p:sldMasterIdLst>
   <p:notesMasterIdLst>
-    <p:notesMasterId r:id="rId12"/>
+    <p:notesMasterId r:id="rId13"/>
   </p:notesMasterIdLst>
   <p:handoutMasterIdLst>
-    <p:handoutMasterId r:id="rId13"/>
+    <p:handoutMasterId r:id="rId14"/>
   </p:handoutMasterIdLst>
   <p:sldIdLst>
     <p:sldId id="256" r:id="rId2"/>
@@ -19,8 +19,9 @@
     <p:sldId id="261" r:id="rId7"/>
     <p:sldId id="262" r:id="rId8"/>
     <p:sldId id="263" r:id="rId9"/>
-    <p:sldId id="264" r:id="rId10"/>
-    <p:sldId id="265" r:id="rId11"/>
+    <p:sldId id="266" r:id="rId10"/>
+    <p:sldId id="264" r:id="rId11"/>
+    <p:sldId id="267" r:id="rId12"/>
   </p:sldIdLst>
   <p:sldSz cx="14257338" cy="8020050"/>
   <p:notesSz cx="6858000" cy="9144000"/>
@@ -224,7 +225,7 @@
           <a:p>
             <a:fld id="{14BE6AFD-91E3-45AD-A05A-572BFF058F8E}" type="datetimeFigureOut">
               <a:rPr lang="ko-KR" altLang="en-US" smtClean="0"/>
-              <a:t>2025-05-06</a:t>
+              <a:t>05-07(Wed)</a:t>
             </a:fld>
             <a:endParaRPr lang="ko-KR" altLang="en-US"/>
           </a:p>
@@ -401,7 +402,7 @@
           <a:p>
             <a:fld id="{B10E417E-C2EC-425C-B420-CF724443A5AE}" type="datetimeFigureOut">
               <a:rPr lang="ko-KR" altLang="en-US" smtClean="0"/>
-              <a:t>2025-05-06</a:t>
+              <a:t>05-07(Wed)</a:t>
             </a:fld>
             <a:endParaRPr lang="ko-KR" altLang="en-US"/>
           </a:p>
@@ -883,7 +884,7 @@
           <a:p>
             <a:fld id="{C6A72A79-3CD5-45FF-B4A2-CB727F17E6E3}" type="datetimeFigureOut">
               <a:rPr lang="ko-KR" altLang="en-US" smtClean="0"/>
-              <a:t>2025-05-06</a:t>
+              <a:t>05-07(Wed)</a:t>
             </a:fld>
             <a:endParaRPr lang="ko-KR" altLang="en-US"/>
           </a:p>
@@ -1053,7 +1054,7 @@
           <a:p>
             <a:fld id="{C6A72A79-3CD5-45FF-B4A2-CB727F17E6E3}" type="datetimeFigureOut">
               <a:rPr lang="ko-KR" altLang="en-US" smtClean="0"/>
-              <a:t>2025-05-06</a:t>
+              <a:t>05-07(Wed)</a:t>
             </a:fld>
             <a:endParaRPr lang="ko-KR" altLang="en-US"/>
           </a:p>
@@ -1233,7 +1234,7 @@
           <a:p>
             <a:fld id="{C6A72A79-3CD5-45FF-B4A2-CB727F17E6E3}" type="datetimeFigureOut">
               <a:rPr lang="ko-KR" altLang="en-US" smtClean="0"/>
-              <a:t>2025-05-06</a:t>
+              <a:t>05-07(Wed)</a:t>
             </a:fld>
             <a:endParaRPr lang="ko-KR" altLang="en-US"/>
           </a:p>
@@ -1403,7 +1404,7 @@
           <a:p>
             <a:fld id="{C6A72A79-3CD5-45FF-B4A2-CB727F17E6E3}" type="datetimeFigureOut">
               <a:rPr lang="ko-KR" altLang="en-US" smtClean="0"/>
-              <a:t>2025-05-06</a:t>
+              <a:t>05-07(Wed)</a:t>
             </a:fld>
             <a:endParaRPr lang="ko-KR" altLang="en-US"/>
           </a:p>
@@ -1649,7 +1650,7 @@
           <a:p>
             <a:fld id="{C6A72A79-3CD5-45FF-B4A2-CB727F17E6E3}" type="datetimeFigureOut">
               <a:rPr lang="ko-KR" altLang="en-US" smtClean="0"/>
-              <a:t>2025-05-06</a:t>
+              <a:t>05-07(Wed)</a:t>
             </a:fld>
             <a:endParaRPr lang="ko-KR" altLang="en-US"/>
           </a:p>
@@ -1881,7 +1882,7 @@
           <a:p>
             <a:fld id="{C6A72A79-3CD5-45FF-B4A2-CB727F17E6E3}" type="datetimeFigureOut">
               <a:rPr lang="ko-KR" altLang="en-US" smtClean="0"/>
-              <a:t>2025-05-06</a:t>
+              <a:t>05-07(Wed)</a:t>
             </a:fld>
             <a:endParaRPr lang="ko-KR" altLang="en-US"/>
           </a:p>
@@ -2248,7 +2249,7 @@
           <a:p>
             <a:fld id="{C6A72A79-3CD5-45FF-B4A2-CB727F17E6E3}" type="datetimeFigureOut">
               <a:rPr lang="ko-KR" altLang="en-US" smtClean="0"/>
-              <a:t>2025-05-06</a:t>
+              <a:t>05-07(Wed)</a:t>
             </a:fld>
             <a:endParaRPr lang="ko-KR" altLang="en-US"/>
           </a:p>
@@ -2366,7 +2367,7 @@
           <a:p>
             <a:fld id="{C6A72A79-3CD5-45FF-B4A2-CB727F17E6E3}" type="datetimeFigureOut">
               <a:rPr lang="ko-KR" altLang="en-US" smtClean="0"/>
-              <a:t>2025-05-06</a:t>
+              <a:t>05-07(Wed)</a:t>
             </a:fld>
             <a:endParaRPr lang="ko-KR" altLang="en-US"/>
           </a:p>
@@ -2461,7 +2462,7 @@
           <a:p>
             <a:fld id="{C6A72A79-3CD5-45FF-B4A2-CB727F17E6E3}" type="datetimeFigureOut">
               <a:rPr lang="ko-KR" altLang="en-US" smtClean="0"/>
-              <a:t>2025-05-06</a:t>
+              <a:t>05-07(Wed)</a:t>
             </a:fld>
             <a:endParaRPr lang="ko-KR" altLang="en-US"/>
           </a:p>
@@ -2738,7 +2739,7 @@
           <a:p>
             <a:fld id="{C6A72A79-3CD5-45FF-B4A2-CB727F17E6E3}" type="datetimeFigureOut">
               <a:rPr lang="ko-KR" altLang="en-US" smtClean="0"/>
-              <a:t>2025-05-06</a:t>
+              <a:t>05-07(Wed)</a:t>
             </a:fld>
             <a:endParaRPr lang="ko-KR" altLang="en-US"/>
           </a:p>
@@ -2995,7 +2996,7 @@
           <a:p>
             <a:fld id="{C6A72A79-3CD5-45FF-B4A2-CB727F17E6E3}" type="datetimeFigureOut">
               <a:rPr lang="ko-KR" altLang="en-US" smtClean="0"/>
-              <a:t>2025-05-06</a:t>
+              <a:t>05-07(Wed)</a:t>
             </a:fld>
             <a:endParaRPr lang="ko-KR" altLang="en-US"/>
           </a:p>
@@ -3208,7 +3209,7 @@
           <a:p>
             <a:fld id="{C6A72A79-3CD5-45FF-B4A2-CB727F17E6E3}" type="datetimeFigureOut">
               <a:rPr lang="ko-KR" altLang="en-US" smtClean="0"/>
-              <a:t>2025-05-06</a:t>
+              <a:t>05-07(Wed)</a:t>
             </a:fld>
             <a:endParaRPr lang="ko-KR" altLang="en-US"/>
           </a:p>
@@ -3737,7 +3738,7 @@
             <a:r>
               <a:rPr lang="ko-KR" altLang="en-US" sz="4000" b="1" dirty="0">
                 <a:solidFill>
-                  <a:srgbClr val="468260"/>
+                  <a:srgbClr val="508D4E"/>
                 </a:solidFill>
               </a:rPr>
               <a:t>문대진 </a:t>
@@ -3745,14 +3746,14 @@
             <a:r>
               <a:rPr lang="en-US" altLang="ko-KR" sz="4000" b="1" dirty="0">
                 <a:solidFill>
-                  <a:srgbClr val="468260"/>
+                  <a:srgbClr val="508D4E"/>
                 </a:solidFill>
               </a:rPr>
               <a:t>Portfolio</a:t>
             </a:r>
             <a:endParaRPr lang="ko-KR" altLang="en-US" sz="4000" b="1" dirty="0">
               <a:solidFill>
-                <a:srgbClr val="468260"/>
+                <a:srgbClr val="508D4E"/>
               </a:solidFill>
             </a:endParaRPr>
           </a:p>
@@ -3787,13 +3788,17 @@
           <a:lstStyle/>
           <a:p>
             <a:r>
-              <a:rPr lang="ko-KR" altLang="en-US" sz="2300" b="1" dirty="0"/>
+              <a:rPr lang="ko-KR" altLang="en-US" sz="2300" b="1" dirty="0">
+                <a:solidFill>
+                  <a:srgbClr val="508D4E"/>
+                </a:solidFill>
+              </a:rPr>
               <a:t>💡 </a:t>
             </a:r>
             <a:r>
               <a:rPr lang="ko-KR" altLang="en-US" sz="2400" b="1" dirty="0">
                 <a:solidFill>
-                  <a:srgbClr val="468260"/>
+                  <a:srgbClr val="508D4E"/>
                 </a:solidFill>
               </a:rPr>
               <a:t>다양한 경험</a:t>
@@ -3805,7 +3810,7 @@
             <a:r>
               <a:rPr lang="ko-KR" altLang="en-US" sz="2400" b="1" dirty="0">
                 <a:solidFill>
-                  <a:srgbClr val="468260"/>
+                  <a:srgbClr val="508D4E"/>
                 </a:solidFill>
               </a:rPr>
               <a:t>사용자의 만족감을 고민</a:t>
@@ -3991,7 +3996,7 @@
             </a:pPr>
             <a:r>
               <a:rPr lang="en-US" altLang="ko-KR" dirty="0"/>
-              <a:t>010-5555-6666</a:t>
+              <a:t>010-5021-6864</a:t>
             </a:r>
           </a:p>
           <a:p>
@@ -4350,6 +4355,339 @@
           </a:p>
         </p:txBody>
       </p:sp>
+      <p:sp>
+        <p:nvSpPr>
+          <p:cNvPr id="2" name="직사각형 1">
+            <a:extLst>
+              <a:ext uri="{FF2B5EF4-FFF2-40B4-BE49-F238E27FC236}">
+                <a16:creationId xmlns:a16="http://schemas.microsoft.com/office/drawing/2014/main" id="{6F6316B8-2391-DC25-7B47-C800C6579980}"/>
+              </a:ext>
+            </a:extLst>
+          </p:cNvPr>
+          <p:cNvSpPr/>
+          <p:nvPr/>
+        </p:nvSpPr>
+        <p:spPr>
+          <a:xfrm>
+            <a:off x="6869113" y="-495300"/>
+            <a:ext cx="3327400" cy="889653"/>
+          </a:xfrm>
+          <a:prstGeom prst="rect">
+            <a:avLst/>
+          </a:prstGeom>
+          <a:solidFill>
+            <a:srgbClr val="80AF81"/>
+          </a:solidFill>
+          <a:ln>
+            <a:noFill/>
+          </a:ln>
+        </p:spPr>
+        <p:style>
+          <a:lnRef idx="2">
+            <a:schemeClr val="accent1">
+              <a:shade val="15000"/>
+            </a:schemeClr>
+          </a:lnRef>
+          <a:fillRef idx="1">
+            <a:schemeClr val="accent1"/>
+          </a:fillRef>
+          <a:effectRef idx="0">
+            <a:schemeClr val="accent1"/>
+          </a:effectRef>
+          <a:fontRef idx="minor">
+            <a:schemeClr val="lt1"/>
+          </a:fontRef>
+        </p:style>
+        <p:txBody>
+          <a:bodyPr rtlCol="0" anchor="ctr"/>
+          <a:lstStyle/>
+          <a:p>
+            <a:pPr algn="ctr"/>
+            <a:endParaRPr lang="ko-KR" altLang="en-US" dirty="0"/>
+          </a:p>
+        </p:txBody>
+      </p:sp>
+      <p:sp>
+        <p:nvSpPr>
+          <p:cNvPr id="4" name="직사각형 3">
+            <a:extLst>
+              <a:ext uri="{FF2B5EF4-FFF2-40B4-BE49-F238E27FC236}">
+                <a16:creationId xmlns:a16="http://schemas.microsoft.com/office/drawing/2014/main" id="{C2BFB84B-41B0-CFCD-ACF3-0D052C455072}"/>
+              </a:ext>
+            </a:extLst>
+          </p:cNvPr>
+          <p:cNvSpPr/>
+          <p:nvPr/>
+        </p:nvSpPr>
+        <p:spPr>
+          <a:xfrm>
+            <a:off x="9034245" y="-495300"/>
+            <a:ext cx="3327400" cy="889653"/>
+          </a:xfrm>
+          <a:prstGeom prst="rect">
+            <a:avLst/>
+          </a:prstGeom>
+          <a:solidFill>
+            <a:srgbClr val="508D4E"/>
+          </a:solidFill>
+          <a:ln>
+            <a:noFill/>
+          </a:ln>
+        </p:spPr>
+        <p:style>
+          <a:lnRef idx="2">
+            <a:schemeClr val="accent1">
+              <a:shade val="15000"/>
+            </a:schemeClr>
+          </a:lnRef>
+          <a:fillRef idx="1">
+            <a:schemeClr val="accent1"/>
+          </a:fillRef>
+          <a:effectRef idx="0">
+            <a:schemeClr val="accent1"/>
+          </a:effectRef>
+          <a:fontRef idx="minor">
+            <a:schemeClr val="lt1"/>
+          </a:fontRef>
+        </p:style>
+        <p:txBody>
+          <a:bodyPr rtlCol="0" anchor="ctr"/>
+          <a:lstStyle/>
+          <a:p>
+            <a:pPr algn="ctr"/>
+            <a:endParaRPr lang="ko-KR" altLang="en-US"/>
+          </a:p>
+        </p:txBody>
+      </p:sp>
+      <p:sp>
+        <p:nvSpPr>
+          <p:cNvPr id="5" name="직사각형 4">
+            <a:extLst>
+              <a:ext uri="{FF2B5EF4-FFF2-40B4-BE49-F238E27FC236}">
+                <a16:creationId xmlns:a16="http://schemas.microsoft.com/office/drawing/2014/main" id="{79E213ED-D956-3143-796E-55E89CEE88A5}"/>
+              </a:ext>
+            </a:extLst>
+          </p:cNvPr>
+          <p:cNvSpPr/>
+          <p:nvPr/>
+        </p:nvSpPr>
+        <p:spPr>
+          <a:xfrm>
+            <a:off x="11589844" y="-495300"/>
+            <a:ext cx="3327400" cy="889653"/>
+          </a:xfrm>
+          <a:prstGeom prst="rect">
+            <a:avLst/>
+          </a:prstGeom>
+          <a:solidFill>
+            <a:srgbClr val="1A5319"/>
+          </a:solidFill>
+          <a:ln>
+            <a:noFill/>
+          </a:ln>
+        </p:spPr>
+        <p:style>
+          <a:lnRef idx="2">
+            <a:schemeClr val="accent1">
+              <a:shade val="15000"/>
+            </a:schemeClr>
+          </a:lnRef>
+          <a:fillRef idx="1">
+            <a:schemeClr val="accent1"/>
+          </a:fillRef>
+          <a:effectRef idx="0">
+            <a:schemeClr val="accent1"/>
+          </a:effectRef>
+          <a:fontRef idx="minor">
+            <a:schemeClr val="lt1"/>
+          </a:fontRef>
+        </p:style>
+        <p:txBody>
+          <a:bodyPr rtlCol="0" anchor="ctr"/>
+          <a:lstStyle/>
+          <a:p>
+            <a:pPr algn="ctr"/>
+            <a:endParaRPr lang="ko-KR" altLang="en-US"/>
+          </a:p>
+        </p:txBody>
+      </p:sp>
+      <p:grpSp>
+        <p:nvGrpSpPr>
+          <p:cNvPr id="10" name="그룹 9">
+            <a:extLst>
+              <a:ext uri="{FF2B5EF4-FFF2-40B4-BE49-F238E27FC236}">
+                <a16:creationId xmlns:a16="http://schemas.microsoft.com/office/drawing/2014/main" id="{DE362E9B-0BD6-29EA-7A2A-8187524C69CF}"/>
+              </a:ext>
+            </a:extLst>
+          </p:cNvPr>
+          <p:cNvGrpSpPr/>
+          <p:nvPr/>
+        </p:nvGrpSpPr>
+        <p:grpSpPr>
+          <a:xfrm rot="10800000">
+            <a:off x="-738187" y="7575223"/>
+            <a:ext cx="8048131" cy="889653"/>
+            <a:chOff x="-496887" y="7180870"/>
+            <a:chExt cx="8048131" cy="889653"/>
+          </a:xfrm>
+        </p:grpSpPr>
+        <p:sp>
+          <p:nvSpPr>
+            <p:cNvPr id="6" name="직사각형 5">
+              <a:extLst>
+                <a:ext uri="{FF2B5EF4-FFF2-40B4-BE49-F238E27FC236}">
+                  <a16:creationId xmlns:a16="http://schemas.microsoft.com/office/drawing/2014/main" id="{100274BA-C7D7-D4DA-8084-45FC3C7E098B}"/>
+                </a:ext>
+              </a:extLst>
+            </p:cNvPr>
+            <p:cNvSpPr/>
+            <p:nvPr/>
+          </p:nvSpPr>
+          <p:spPr>
+            <a:xfrm>
+              <a:off x="-496887" y="7180870"/>
+              <a:ext cx="3327400" cy="889653"/>
+            </a:xfrm>
+            <a:prstGeom prst="rect">
+              <a:avLst/>
+            </a:prstGeom>
+            <a:solidFill>
+              <a:srgbClr val="80AF81"/>
+            </a:solidFill>
+            <a:ln>
+              <a:noFill/>
+            </a:ln>
+          </p:spPr>
+          <p:style>
+            <a:lnRef idx="2">
+              <a:schemeClr val="accent1">
+                <a:shade val="15000"/>
+              </a:schemeClr>
+            </a:lnRef>
+            <a:fillRef idx="1">
+              <a:schemeClr val="accent1"/>
+            </a:fillRef>
+            <a:effectRef idx="0">
+              <a:schemeClr val="accent1"/>
+            </a:effectRef>
+            <a:fontRef idx="minor">
+              <a:schemeClr val="lt1"/>
+            </a:fontRef>
+          </p:style>
+          <p:txBody>
+            <a:bodyPr rtlCol="0" anchor="ctr"/>
+            <a:lstStyle/>
+            <a:p>
+              <a:pPr algn="ctr"/>
+              <a:endParaRPr lang="ko-KR" altLang="en-US" dirty="0"/>
+            </a:p>
+          </p:txBody>
+        </p:sp>
+        <p:sp>
+          <p:nvSpPr>
+            <p:cNvPr id="8" name="직사각형 7">
+              <a:extLst>
+                <a:ext uri="{FF2B5EF4-FFF2-40B4-BE49-F238E27FC236}">
+                  <a16:creationId xmlns:a16="http://schemas.microsoft.com/office/drawing/2014/main" id="{F705C2AC-1259-5300-2731-2ACA21D7284F}"/>
+                </a:ext>
+              </a:extLst>
+            </p:cNvPr>
+            <p:cNvSpPr/>
+            <p:nvPr/>
+          </p:nvSpPr>
+          <p:spPr>
+            <a:xfrm>
+              <a:off x="1668245" y="7180870"/>
+              <a:ext cx="3327400" cy="889653"/>
+            </a:xfrm>
+            <a:prstGeom prst="rect">
+              <a:avLst/>
+            </a:prstGeom>
+            <a:solidFill>
+              <a:srgbClr val="508D4E"/>
+            </a:solidFill>
+            <a:ln>
+              <a:noFill/>
+            </a:ln>
+          </p:spPr>
+          <p:style>
+            <a:lnRef idx="2">
+              <a:schemeClr val="accent1">
+                <a:shade val="15000"/>
+              </a:schemeClr>
+            </a:lnRef>
+            <a:fillRef idx="1">
+              <a:schemeClr val="accent1"/>
+            </a:fillRef>
+            <a:effectRef idx="0">
+              <a:schemeClr val="accent1"/>
+            </a:effectRef>
+            <a:fontRef idx="minor">
+              <a:schemeClr val="lt1"/>
+            </a:fontRef>
+          </p:style>
+          <p:txBody>
+            <a:bodyPr rtlCol="0" anchor="ctr"/>
+            <a:lstStyle/>
+            <a:p>
+              <a:pPr algn="ctr"/>
+              <a:endParaRPr lang="ko-KR" altLang="en-US"/>
+            </a:p>
+          </p:txBody>
+        </p:sp>
+        <p:sp>
+          <p:nvSpPr>
+            <p:cNvPr id="9" name="직사각형 8">
+              <a:extLst>
+                <a:ext uri="{FF2B5EF4-FFF2-40B4-BE49-F238E27FC236}">
+                  <a16:creationId xmlns:a16="http://schemas.microsoft.com/office/drawing/2014/main" id="{9A250AE2-9F62-5B89-D726-5C6755FFF93F}"/>
+                </a:ext>
+              </a:extLst>
+            </p:cNvPr>
+            <p:cNvSpPr/>
+            <p:nvPr/>
+          </p:nvSpPr>
+          <p:spPr>
+            <a:xfrm>
+              <a:off x="4223844" y="7180870"/>
+              <a:ext cx="3327400" cy="889653"/>
+            </a:xfrm>
+            <a:prstGeom prst="rect">
+              <a:avLst/>
+            </a:prstGeom>
+            <a:solidFill>
+              <a:srgbClr val="1A5319"/>
+            </a:solidFill>
+            <a:ln>
+              <a:noFill/>
+            </a:ln>
+          </p:spPr>
+          <p:style>
+            <a:lnRef idx="2">
+              <a:schemeClr val="accent1">
+                <a:shade val="15000"/>
+              </a:schemeClr>
+            </a:lnRef>
+            <a:fillRef idx="1">
+              <a:schemeClr val="accent1"/>
+            </a:fillRef>
+            <a:effectRef idx="0">
+              <a:schemeClr val="accent1"/>
+            </a:effectRef>
+            <a:fontRef idx="minor">
+              <a:schemeClr val="lt1"/>
+            </a:fontRef>
+          </p:style>
+          <p:txBody>
+            <a:bodyPr rtlCol="0" anchor="ctr"/>
+            <a:lstStyle/>
+            <a:p>
+              <a:pPr algn="ctr"/>
+              <a:endParaRPr lang="ko-KR" altLang="en-US"/>
+            </a:p>
+          </p:txBody>
+        </p:sp>
+      </p:grpSp>
     </p:spTree>
     <p:extLst>
       <p:ext uri="{BB962C8B-B14F-4D97-AF65-F5344CB8AC3E}">
@@ -4371,7 +4709,7 @@
         <p:cNvPr id="1" name="">
           <a:extLst>
             <a:ext uri="{FF2B5EF4-FFF2-40B4-BE49-F238E27FC236}">
-              <a16:creationId xmlns:a16="http://schemas.microsoft.com/office/drawing/2014/main" id="{3225DB12-3830-F6FF-CD97-775087BE0000}"/>
+              <a16:creationId xmlns:a16="http://schemas.microsoft.com/office/drawing/2014/main" id="{B99A33C7-B939-E852-7E92-64AC1B3DA295}"/>
             </a:ext>
           </a:extLst>
         </p:cNvPr>
@@ -4391,7 +4729,7 @@
           <p:cNvPr id="4" name="TextBox 3">
             <a:extLst>
               <a:ext uri="{FF2B5EF4-FFF2-40B4-BE49-F238E27FC236}">
-                <a16:creationId xmlns:a16="http://schemas.microsoft.com/office/drawing/2014/main" id="{C33E4FD2-4CED-BA58-365F-05C3927E40C5}"/>
+                <a16:creationId xmlns:a16="http://schemas.microsoft.com/office/drawing/2014/main" id="{93B77123-1149-21F2-28BC-3236CDBFA25C}"/>
               </a:ext>
             </a:extLst>
           </p:cNvPr>
@@ -4417,7 +4755,7 @@
             <a:r>
               <a:rPr lang="en-US" altLang="ko-KR" sz="4000" b="1" dirty="0">
                 <a:solidFill>
-                  <a:srgbClr val="468260"/>
+                  <a:srgbClr val="508D4E"/>
                 </a:solidFill>
               </a:rPr>
               <a:t>Projects / </a:t>
@@ -4425,7 +4763,7 @@
             <a:r>
               <a:rPr lang="ko-KR" altLang="en-US" sz="4000" b="1" dirty="0" err="1">
                 <a:solidFill>
-                  <a:srgbClr val="468260"/>
+                  <a:srgbClr val="508D4E"/>
                 </a:solidFill>
               </a:rPr>
               <a:t>윈즈</a:t>
@@ -4433,7 +4771,7 @@
             <a:r>
               <a:rPr lang="ko-KR" altLang="en-US" sz="4000" b="1" dirty="0">
                 <a:solidFill>
-                  <a:srgbClr val="468260"/>
+                  <a:srgbClr val="508D4E"/>
                 </a:solidFill>
               </a:rPr>
               <a:t> 시스템</a:t>
@@ -4446,7 +4784,7 @@
           <p:cNvPr id="5" name="TextBox 4">
             <a:extLst>
               <a:ext uri="{FF2B5EF4-FFF2-40B4-BE49-F238E27FC236}">
-                <a16:creationId xmlns:a16="http://schemas.microsoft.com/office/drawing/2014/main" id="{B7EC7464-7C15-E7AE-AAAD-6F2B68556ACD}"/>
+                <a16:creationId xmlns:a16="http://schemas.microsoft.com/office/drawing/2014/main" id="{9C02A834-9E7E-AF9B-60C7-5B5BCA18EDEE}"/>
               </a:ext>
             </a:extLst>
           </p:cNvPr>
@@ -4456,7 +4794,7 @@
         <p:spPr>
           <a:xfrm>
             <a:off x="1146968" y="1272808"/>
-            <a:ext cx="7019132" cy="461665"/>
+            <a:ext cx="10029032" cy="461665"/>
           </a:xfrm>
           <a:prstGeom prst="rect">
             <a:avLst/>
@@ -4471,19 +4809,27 @@
           <a:p>
             <a:r>
               <a:rPr lang="en-US" altLang="ko-KR" sz="2400" b="1" dirty="0"/>
-              <a:t>1. </a:t>
+              <a:t>4. Legacy &gt; Cloud </a:t>
             </a:r>
             <a:r>
               <a:rPr lang="ko-KR" altLang="en-US" sz="2400" b="1" dirty="0"/>
-              <a:t>안드로이드 </a:t>
+              <a:t>서버 이전 및 </a:t>
             </a:r>
             <a:r>
               <a:rPr lang="en-US" altLang="ko-KR" sz="2400" b="1" dirty="0"/>
-              <a:t>OS </a:t>
+              <a:t>DB </a:t>
             </a:r>
             <a:r>
               <a:rPr lang="ko-KR" altLang="en-US" sz="2400" b="1" dirty="0"/>
-              <a:t>업데이트에 따른 이슈 및 업데이트 대응</a:t>
+              <a:t>이기종간 </a:t>
+            </a:r>
+            <a:r>
+              <a:rPr lang="en-US" altLang="ko-KR" sz="2400" b="1" dirty="0"/>
+              <a:t>Migration </a:t>
+            </a:r>
+            <a:r>
+              <a:rPr lang="ko-KR" altLang="en-US" sz="2400" b="1" dirty="0"/>
+              <a:t>진행</a:t>
             </a:r>
           </a:p>
         </p:txBody>
@@ -4493,7 +4839,7 @@
           <p:cNvPr id="7" name="TextBox 6">
             <a:extLst>
               <a:ext uri="{FF2B5EF4-FFF2-40B4-BE49-F238E27FC236}">
-                <a16:creationId xmlns:a16="http://schemas.microsoft.com/office/drawing/2014/main" id="{71109F05-0D68-CFA6-0C88-31D145230F9C}"/>
+                <a16:creationId xmlns:a16="http://schemas.microsoft.com/office/drawing/2014/main" id="{DD825C18-D4DE-7A85-0904-A8E94AED404E}"/>
               </a:ext>
             </a:extLst>
           </p:cNvPr>
@@ -4534,85 +4880,119 @@
             </a:pPr>
             <a:r>
               <a:rPr lang="ko-KR" altLang="en-US" dirty="0"/>
-              <a:t>안드로이드 앱 </a:t>
-            </a:r>
-            <a:r>
-              <a:rPr lang="en-US" altLang="ko-KR" dirty="0"/>
-              <a:t>Google Play </a:t>
-            </a:r>
-            <a:r>
-              <a:rPr lang="ko-KR" altLang="en-US" dirty="0"/>
-              <a:t>신규 업로드 혹은 업데이트 시</a:t>
-            </a:r>
-            <a:r>
-              <a:rPr lang="en-US" altLang="ko-KR" dirty="0"/>
-              <a:t>, </a:t>
-            </a:r>
-            <a:r>
-              <a:rPr lang="ko-KR" altLang="en-US" dirty="0"/>
-              <a:t>구글에서 요청하는 앱 내부의 </a:t>
-            </a:r>
-            <a:r>
-              <a:rPr lang="en-US" altLang="ko-KR" dirty="0"/>
-              <a:t>Android </a:t>
-            </a:r>
-            <a:r>
-              <a:rPr lang="ko-KR" altLang="en-US" dirty="0"/>
-              <a:t>버전을 맞춰야 함</a:t>
-            </a:r>
-            <a:r>
-              <a:rPr lang="en-US" altLang="ko-KR" dirty="0"/>
-              <a:t>. (</a:t>
-            </a:r>
-            <a:r>
-              <a:rPr lang="ko-KR" altLang="en-US" dirty="0">
-                <a:effectLst/>
-                <a:hlinkClick r:id="rId2"/>
-              </a:rPr>
-              <a:t>링크</a:t>
-            </a:r>
-            <a:r>
-              <a:rPr lang="en-US" altLang="ko-KR" dirty="0"/>
-              <a:t>)</a:t>
+              <a:t>노후화 된 </a:t>
+            </a:r>
+            <a:r>
+              <a:rPr lang="en-US" altLang="ko-KR" dirty="0"/>
+              <a:t>Legacy </a:t>
+            </a:r>
+            <a:r>
+              <a:rPr lang="ko-KR" altLang="en-US" dirty="0"/>
+              <a:t>서버 장비의 폐기를 위한 </a:t>
+            </a:r>
+            <a:r>
+              <a:rPr lang="ko-KR" altLang="en-US" dirty="0" err="1"/>
+              <a:t>원청</a:t>
+            </a:r>
+            <a:r>
+              <a:rPr lang="ko-KR" altLang="en-US" dirty="0"/>
+              <a:t> 업체의 요청으로 서버 이전 작업 진행이 필요</a:t>
+            </a:r>
+            <a:r>
+              <a:rPr lang="en-US" altLang="ko-KR" dirty="0"/>
+              <a:t>.</a:t>
             </a:r>
             <a:br>
               <a:rPr lang="en-US" altLang="ko-KR" dirty="0"/>
             </a:br>
             <a:r>
               <a:rPr lang="ko-KR" altLang="en-US" dirty="0"/>
-              <a:t>앱 업데이트 시 기존 라이브러리 사용 불가에 따른 코드 수정 및 신규 기능 추가에 대한 개발 필요</a:t>
-            </a:r>
-            <a:r>
-              <a:rPr lang="en-US" altLang="ko-KR" dirty="0"/>
-              <a:t>. </a:t>
-            </a:r>
-            <a:br>
-              <a:rPr lang="en-US" altLang="ko-KR" dirty="0"/>
-            </a:br>
-            <a:r>
-              <a:rPr lang="ko-KR" altLang="en-US" dirty="0"/>
-              <a:t>버전 업데이트 시</a:t>
-            </a:r>
-            <a:r>
-              <a:rPr lang="en-US" altLang="ko-KR" dirty="0"/>
-              <a:t>SDK </a:t>
-            </a:r>
-            <a:r>
-              <a:rPr lang="ko-KR" altLang="en-US" dirty="0"/>
-              <a:t>버전에 따른 라이브러리 이슈 사항 대응 필요</a:t>
-            </a:r>
-            <a:r>
-              <a:rPr lang="en-US" altLang="ko-KR" dirty="0"/>
-              <a:t>. </a:t>
-            </a:r>
-            <a:br>
-              <a:rPr lang="en-US" altLang="ko-KR" dirty="0"/>
-            </a:br>
-            <a:r>
-              <a:rPr lang="ko-KR" altLang="en-US" dirty="0"/>
-              <a:t>미 업데이트 시 앱 스토어 노출 불가 이슈 발생으로 매 년 변경되는 요구 사항에 맞춰 업데이트를 진행 해야 함</a:t>
-            </a:r>
-            <a:endParaRPr lang="en-US" altLang="ko-KR" dirty="0"/>
+              <a:t>일반 서버 환경에서 </a:t>
+            </a:r>
+            <a:r>
+              <a:rPr lang="en-US" altLang="ko-KR" dirty="0"/>
+              <a:t>Cloud </a:t>
+            </a:r>
+            <a:r>
+              <a:rPr lang="ko-KR" altLang="en-US" dirty="0"/>
+              <a:t>서버 환경으로의 웹 및 파일 서버 이전 진행</a:t>
+            </a:r>
+            <a:r>
+              <a:rPr lang="en-US" altLang="ko-KR" dirty="0"/>
+              <a:t>. Cloud </a:t>
+            </a:r>
+            <a:r>
+              <a:rPr lang="ko-KR" altLang="en-US" dirty="0"/>
+              <a:t>서버의 경우 </a:t>
+            </a:r>
+            <a:r>
+              <a:rPr lang="ko-KR" altLang="en-US" dirty="0" err="1"/>
+              <a:t>원청</a:t>
+            </a:r>
+            <a:r>
+              <a:rPr lang="ko-KR" altLang="en-US" dirty="0"/>
+              <a:t> 업체에서 운영하는 </a:t>
+            </a:r>
+            <a:r>
+              <a:rPr lang="en-US" altLang="ko-KR" dirty="0"/>
+              <a:t>Cloud </a:t>
+            </a:r>
+            <a:r>
+              <a:rPr lang="ko-KR" altLang="en-US" dirty="0"/>
+              <a:t>서비스인 </a:t>
+            </a:r>
+            <a:r>
+              <a:rPr lang="en-US" altLang="ko-KR" dirty="0"/>
+              <a:t>IaaS </a:t>
+            </a:r>
+            <a:r>
+              <a:rPr lang="ko-KR" altLang="en-US" dirty="0"/>
+              <a:t>환경으로 전입</a:t>
+            </a:r>
+            <a:r>
+              <a:rPr lang="en-US" altLang="ko-KR" dirty="0"/>
+              <a:t>. DB</a:t>
+            </a:r>
+            <a:r>
+              <a:rPr lang="ko-KR" altLang="en-US" dirty="0"/>
+              <a:t>의 경우 </a:t>
+            </a:r>
+            <a:r>
+              <a:rPr lang="ko-KR" altLang="en-US" dirty="0" err="1"/>
+              <a:t>원청</a:t>
+            </a:r>
+            <a:r>
+              <a:rPr lang="ko-KR" altLang="en-US" dirty="0"/>
+              <a:t> 업체의 라이선스 만기 이슈로 인해 </a:t>
+            </a:r>
+            <a:r>
+              <a:rPr lang="en-US" altLang="ko-KR" dirty="0"/>
+              <a:t>SQL Server(MSSQL) </a:t>
+            </a:r>
+            <a:r>
+              <a:rPr lang="ko-KR" altLang="en-US" dirty="0"/>
+              <a:t>에서 </a:t>
+            </a:r>
+            <a:r>
+              <a:rPr lang="en-US" altLang="ko-KR" dirty="0"/>
+              <a:t>Oracle</a:t>
+            </a:r>
+            <a:r>
+              <a:rPr lang="ko-KR" altLang="en-US" dirty="0"/>
+              <a:t>로의 </a:t>
+            </a:r>
+            <a:r>
+              <a:rPr lang="en-US" altLang="ko-KR" dirty="0"/>
+              <a:t>Migration </a:t>
+            </a:r>
+            <a:r>
+              <a:rPr lang="ko-KR" altLang="en-US" dirty="0"/>
+              <a:t>진행 필요</a:t>
+            </a:r>
+            <a:r>
+              <a:rPr lang="en-US" altLang="ko-KR" dirty="0"/>
+              <a:t>.</a:t>
+            </a:r>
           </a:p>
         </p:txBody>
       </p:sp>
@@ -4621,7 +5001,7 @@
           <p:cNvPr id="2" name="직사각형 1">
             <a:extLst>
               <a:ext uri="{FF2B5EF4-FFF2-40B4-BE49-F238E27FC236}">
-                <a16:creationId xmlns:a16="http://schemas.microsoft.com/office/drawing/2014/main" id="{19A7620E-9F10-315F-2602-92BDFFC78BE6}"/>
+                <a16:creationId xmlns:a16="http://schemas.microsoft.com/office/drawing/2014/main" id="{00FA6FB4-6603-7602-A99D-2A080CBEACA1}"/>
               </a:ext>
             </a:extLst>
           </p:cNvPr>
@@ -4675,7 +5055,7 @@
           <p:cNvPr id="3" name="TextBox 2">
             <a:extLst>
               <a:ext uri="{FF2B5EF4-FFF2-40B4-BE49-F238E27FC236}">
-                <a16:creationId xmlns:a16="http://schemas.microsoft.com/office/drawing/2014/main" id="{948D2131-0028-CBB1-13BD-368E26844660}"/>
+                <a16:creationId xmlns:a16="http://schemas.microsoft.com/office/drawing/2014/main" id="{F1CD453D-CA35-8208-8295-18A52B65134D}"/>
               </a:ext>
             </a:extLst>
           </p:cNvPr>
@@ -4685,7 +5065,7 @@
         <p:spPr>
           <a:xfrm>
             <a:off x="1120555" y="3007528"/>
-            <a:ext cx="7413845" cy="369332"/>
+            <a:ext cx="10029032" cy="369332"/>
           </a:xfrm>
           <a:prstGeom prst="rect">
             <a:avLst/>
@@ -4708,7 +5088,19 @@
               <a:rPr lang="en-US" altLang="ko-KR" b="1" dirty="0">
                 <a:effectLst/>
               </a:rPr>
-              <a:t>Android Studio, Java, Android</a:t>
+              <a:t>ASP, ASP.NET, C#, </a:t>
+            </a:r>
+            <a:r>
+              <a:rPr lang="en-US" altLang="ko-KR" b="1" dirty="0" err="1">
+                <a:effectLst/>
+              </a:rPr>
+              <a:t>Javascript</a:t>
+            </a:r>
+            <a:r>
+              <a:rPr lang="en-US" altLang="ko-KR" b="1" dirty="0">
+                <a:effectLst/>
+              </a:rPr>
+              <a:t>, html, SQL Server, Oracle, Window Server, IIS</a:t>
             </a:r>
             <a:endParaRPr lang="ko-KR" altLang="en-US" b="1" dirty="0"/>
           </a:p>
@@ -4719,7 +5111,7 @@
           <p:cNvPr id="9" name="TextBox 8">
             <a:extLst>
               <a:ext uri="{FF2B5EF4-FFF2-40B4-BE49-F238E27FC236}">
-                <a16:creationId xmlns:a16="http://schemas.microsoft.com/office/drawing/2014/main" id="{1269DE8F-1603-DF89-1710-02E4D57B2D6B}"/>
+                <a16:creationId xmlns:a16="http://schemas.microsoft.com/office/drawing/2014/main" id="{473A745E-A442-1B75-0AE2-C7BD4734F127}"/>
               </a:ext>
             </a:extLst>
           </p:cNvPr>
@@ -4729,7 +5121,7 @@
         <p:spPr>
           <a:xfrm>
             <a:off x="1146968" y="3469193"/>
-            <a:ext cx="11235532" cy="3046988"/>
+            <a:ext cx="11235532" cy="3600986"/>
           </a:xfrm>
           <a:prstGeom prst="rect">
             <a:avLst/>
@@ -4765,39 +5157,118 @@
             <a:endParaRPr lang="en-US" altLang="ko-KR" sz="2200" b="1" dirty="0"/>
           </a:p>
           <a:p>
+            <a:pPr marL="285750" marR="0" lvl="0" indent="-285750" algn="l" defTabSz="914400" rtl="0" eaLnBrk="0" fontAlgn="base" latinLnBrk="0" hangingPunct="0">
+              <a:lnSpc>
+                <a:spcPct val="100000"/>
+              </a:lnSpc>
+              <a:spcBef>
+                <a:spcPct val="0"/>
+              </a:spcBef>
+              <a:spcAft>
+                <a:spcPct val="0"/>
+              </a:spcAft>
+              <a:buClrTx/>
+              <a:buSzTx/>
+              <a:buFont typeface="Arial" panose="020B0604020202020204" pitchFamily="34" charset="0"/>
+              <a:buChar char="•"/>
+              <a:tabLst/>
+            </a:pPr>
+            <a:r>
+              <a:rPr lang="ko-KR" altLang="en-US" dirty="0"/>
+              <a:t>서버 </a:t>
+            </a:r>
+            <a:r>
+              <a:rPr lang="en-US" altLang="ko-KR" dirty="0"/>
+              <a:t>OS </a:t>
+            </a:r>
+            <a:r>
+              <a:rPr lang="ko-KR" altLang="en-US" dirty="0"/>
+              <a:t>업데이트를 통해 기존 </a:t>
+            </a:r>
+            <a:r>
+              <a:rPr lang="en-US" altLang="ko-KR" dirty="0"/>
+              <a:t>Legacy </a:t>
+            </a:r>
+            <a:r>
+              <a:rPr lang="ko-KR" altLang="en-US" dirty="0"/>
+              <a:t>서버의 보안 이슈 사항 해결 및 사용자 데이터가 </a:t>
+            </a:r>
+            <a:r>
+              <a:rPr lang="en-US" altLang="ko-KR" dirty="0"/>
+              <a:t>DMZ</a:t>
+            </a:r>
+            <a:r>
+              <a:rPr lang="ko-KR" altLang="en-US" dirty="0"/>
+              <a:t>존으로 이관 되며 데이터 보호 수준 향상</a:t>
+            </a:r>
+            <a:r>
+              <a:rPr lang="en-US" altLang="ko-KR" dirty="0"/>
+              <a:t>. </a:t>
+            </a:r>
+            <a:r>
+              <a:rPr lang="ko-KR" altLang="en-US" dirty="0"/>
+              <a:t>전반적인 서비스 보안 강화</a:t>
+            </a:r>
+            <a:endParaRPr lang="en-US" altLang="ko-KR" dirty="0"/>
+          </a:p>
+          <a:p>
+            <a:pPr marL="285750" marR="0" lvl="0" indent="-285750" algn="l" defTabSz="914400" rtl="0" eaLnBrk="0" fontAlgn="base" latinLnBrk="0" hangingPunct="0">
+              <a:lnSpc>
+                <a:spcPct val="100000"/>
+              </a:lnSpc>
+              <a:spcBef>
+                <a:spcPct val="0"/>
+              </a:spcBef>
+              <a:spcAft>
+                <a:spcPct val="0"/>
+              </a:spcAft>
+              <a:buClrTx/>
+              <a:buSzTx/>
+              <a:buFont typeface="Arial" panose="020B0604020202020204" pitchFamily="34" charset="0"/>
+              <a:buChar char="•"/>
+              <a:tabLst/>
+            </a:pPr>
+            <a:r>
+              <a:rPr lang="ko-KR" altLang="en-US" dirty="0"/>
+              <a:t>서버의 상태를 </a:t>
+            </a:r>
+            <a:r>
+              <a:rPr lang="en-US" altLang="ko-KR" dirty="0"/>
+              <a:t>Cloud </a:t>
+            </a:r>
+            <a:r>
+              <a:rPr lang="ko-KR" altLang="en-US" dirty="0"/>
+              <a:t>관제 팀에서 주시하기 때문에 리소스 이슈 발생 시 민감한 확인 및 빠른 대처 가능</a:t>
+            </a:r>
+            <a:endParaRPr lang="en-US" altLang="ko-KR" dirty="0"/>
+          </a:p>
+          <a:p>
             <a:pPr marL="285750" indent="-285750">
               <a:buFont typeface="Arial" panose="020B0604020202020204" pitchFamily="34" charset="0"/>
               <a:buChar char="•"/>
             </a:pPr>
-            <a:r>
-              <a:rPr lang="ko-KR" altLang="en-US" dirty="0"/>
-              <a:t>지속적인 </a:t>
-            </a:r>
-            <a:r>
-              <a:rPr lang="en-US" altLang="ko-KR" dirty="0"/>
-              <a:t>OS </a:t>
-            </a:r>
-            <a:r>
-              <a:rPr lang="ko-KR" altLang="en-US" dirty="0"/>
-              <a:t>업데이트 대응을 통해 </a:t>
-            </a:r>
-            <a:r>
-              <a:rPr lang="en-US" altLang="ko-KR" dirty="0"/>
-              <a:t>Google Play</a:t>
-            </a:r>
-            <a:r>
-              <a:rPr lang="ko-KR" altLang="en-US" dirty="0"/>
-              <a:t>에서 앱 서비스 진행</a:t>
-            </a:r>
-            <a:r>
-              <a:rPr lang="en-US" altLang="ko-KR" dirty="0"/>
-              <a:t>. </a:t>
-            </a:r>
-            <a:r>
-              <a:rPr lang="ko-KR" altLang="en-US" dirty="0"/>
-              <a:t>이를 통해 사용자 이탈 방지</a:t>
-            </a:r>
             <a:endParaRPr lang="en-US" altLang="ko-KR" dirty="0"/>
+          </a:p>
+          <a:p>
+            <a:pPr marR="0" lvl="0" algn="l" defTabSz="914400" rtl="0" eaLnBrk="0" fontAlgn="base" latinLnBrk="0" hangingPunct="0">
+              <a:lnSpc>
+                <a:spcPct val="100000"/>
+              </a:lnSpc>
+              <a:spcBef>
+                <a:spcPct val="0"/>
+              </a:spcBef>
+              <a:spcAft>
+                <a:spcPct val="0"/>
+              </a:spcAft>
+              <a:buClrTx/>
+              <a:buSzTx/>
+              <a:tabLst/>
+            </a:pPr>
+            <a:r>
+              <a:rPr lang="ko-KR" altLang="en-US" sz="2200" b="1" dirty="0"/>
+              <a:t>인사이트</a:t>
+            </a:r>
+            <a:endParaRPr lang="en-US" altLang="ko-KR" sz="2200" b="1" dirty="0"/>
           </a:p>
           <a:p>
             <a:pPr marL="285750" indent="-285750">
@@ -4806,15 +5277,34 @@
             </a:pPr>
             <a:r>
               <a:rPr lang="ko-KR" altLang="en-US" dirty="0"/>
-              <a:t>구글의 모바일 정책 변경에 능동적으로 대응</a:t>
-            </a:r>
-            <a:r>
-              <a:rPr lang="en-US" altLang="ko-KR" dirty="0"/>
-              <a:t>. </a:t>
-            </a:r>
-            <a:r>
-              <a:rPr lang="ko-KR" altLang="en-US" dirty="0"/>
-              <a:t>이를 통해 서비스 운영 경험 및 앱 배포 역량 강화</a:t>
+              <a:t>입사 후 담당한 첫 대규모 프로젝트로</a:t>
+            </a:r>
+            <a:r>
+              <a:rPr lang="en-US" altLang="ko-KR" dirty="0"/>
+              <a:t>, </a:t>
+            </a:r>
+            <a:r>
+              <a:rPr lang="ko-KR" altLang="en-US" dirty="0"/>
+              <a:t>이를 통해 운영되는 서비스의 흐름을 파악하고 어떠한 서비스들이 운영되고 있는 지 확인하는 시간이 되었음</a:t>
+            </a:r>
+            <a:endParaRPr lang="en-US" altLang="ko-KR" dirty="0"/>
+          </a:p>
+          <a:p>
+            <a:pPr marL="285750" indent="-285750">
+              <a:buFont typeface="Arial" panose="020B0604020202020204" pitchFamily="34" charset="0"/>
+              <a:buChar char="•"/>
+            </a:pPr>
+            <a:r>
+              <a:rPr lang="ko-KR" altLang="en-US" dirty="0"/>
+              <a:t>비즈니스 로직이 어느 부분에 어떻게 구현 되어 있고</a:t>
+            </a:r>
+            <a:r>
+              <a:rPr lang="en-US" altLang="ko-KR" dirty="0"/>
+              <a:t>, </a:t>
+            </a:r>
+            <a:r>
+              <a:rPr lang="ko-KR" altLang="en-US" dirty="0"/>
+              <a:t>어떠한 방식으로 동작하는 지 큰 흐름들을 파악할 수 있게 되어 추후 유지보수 업무 진행에 큰 도움을 받음</a:t>
             </a:r>
           </a:p>
           <a:p>
@@ -4850,8 +5340,597 @@
               <a:tabLst/>
             </a:pPr>
             <a:r>
+              <a:rPr lang="ko-KR" altLang="en-US" sz="2200" b="1" dirty="0">
+                <a:solidFill>
+                  <a:srgbClr val="508D4E"/>
+                </a:solidFill>
+                <a:hlinkClick r:id="rId2">
+                  <a:extLst>
+                    <a:ext uri="{A12FA001-AC4F-418D-AE19-62706E023703}">
+                      <ahyp:hlinkClr xmlns:ahyp="http://schemas.microsoft.com/office/drawing/2018/hyperlinkcolor" val="tx"/>
+                    </a:ext>
+                  </a:extLst>
+                </a:hlinkClick>
+              </a:rPr>
+              <a:t>상세 보기</a:t>
+            </a:r>
+            <a:endParaRPr lang="en-US" altLang="ko-KR" sz="2200" b="1" dirty="0">
+              <a:solidFill>
+                <a:srgbClr val="508D4E"/>
+              </a:solidFill>
+            </a:endParaRPr>
+          </a:p>
+        </p:txBody>
+      </p:sp>
+      <p:sp>
+        <p:nvSpPr>
+          <p:cNvPr id="6" name="직사각형 5">
+            <a:extLst>
+              <a:ext uri="{FF2B5EF4-FFF2-40B4-BE49-F238E27FC236}">
+                <a16:creationId xmlns:a16="http://schemas.microsoft.com/office/drawing/2014/main" id="{A37365B2-8CFF-9990-5C4E-6812009154EB}"/>
+              </a:ext>
+            </a:extLst>
+          </p:cNvPr>
+          <p:cNvSpPr/>
+          <p:nvPr/>
+        </p:nvSpPr>
+        <p:spPr>
+          <a:xfrm>
+            <a:off x="6869113" y="-495300"/>
+            <a:ext cx="3327400" cy="889653"/>
+          </a:xfrm>
+          <a:prstGeom prst="rect">
+            <a:avLst/>
+          </a:prstGeom>
+          <a:solidFill>
+            <a:srgbClr val="80AF81"/>
+          </a:solidFill>
+          <a:ln>
+            <a:noFill/>
+          </a:ln>
+        </p:spPr>
+        <p:style>
+          <a:lnRef idx="2">
+            <a:schemeClr val="accent1">
+              <a:shade val="15000"/>
+            </a:schemeClr>
+          </a:lnRef>
+          <a:fillRef idx="1">
+            <a:schemeClr val="accent1"/>
+          </a:fillRef>
+          <a:effectRef idx="0">
+            <a:schemeClr val="accent1"/>
+          </a:effectRef>
+          <a:fontRef idx="minor">
+            <a:schemeClr val="lt1"/>
+          </a:fontRef>
+        </p:style>
+        <p:txBody>
+          <a:bodyPr rtlCol="0" anchor="ctr"/>
+          <a:lstStyle/>
+          <a:p>
+            <a:pPr algn="ctr"/>
+            <a:endParaRPr lang="ko-KR" altLang="en-US" dirty="0"/>
+          </a:p>
+        </p:txBody>
+      </p:sp>
+      <p:sp>
+        <p:nvSpPr>
+          <p:cNvPr id="8" name="직사각형 7">
+            <a:extLst>
+              <a:ext uri="{FF2B5EF4-FFF2-40B4-BE49-F238E27FC236}">
+                <a16:creationId xmlns:a16="http://schemas.microsoft.com/office/drawing/2014/main" id="{EFEFDC22-5B44-44CF-C2FC-DE0820C9711D}"/>
+              </a:ext>
+            </a:extLst>
+          </p:cNvPr>
+          <p:cNvSpPr/>
+          <p:nvPr/>
+        </p:nvSpPr>
+        <p:spPr>
+          <a:xfrm>
+            <a:off x="9034245" y="-495300"/>
+            <a:ext cx="3327400" cy="889653"/>
+          </a:xfrm>
+          <a:prstGeom prst="rect">
+            <a:avLst/>
+          </a:prstGeom>
+          <a:solidFill>
+            <a:srgbClr val="508D4E"/>
+          </a:solidFill>
+          <a:ln>
+            <a:noFill/>
+          </a:ln>
+        </p:spPr>
+        <p:style>
+          <a:lnRef idx="2">
+            <a:schemeClr val="accent1">
+              <a:shade val="15000"/>
+            </a:schemeClr>
+          </a:lnRef>
+          <a:fillRef idx="1">
+            <a:schemeClr val="accent1"/>
+          </a:fillRef>
+          <a:effectRef idx="0">
+            <a:schemeClr val="accent1"/>
+          </a:effectRef>
+          <a:fontRef idx="minor">
+            <a:schemeClr val="lt1"/>
+          </a:fontRef>
+        </p:style>
+        <p:txBody>
+          <a:bodyPr rtlCol="0" anchor="ctr"/>
+          <a:lstStyle/>
+          <a:p>
+            <a:pPr algn="ctr"/>
+            <a:endParaRPr lang="ko-KR" altLang="en-US"/>
+          </a:p>
+        </p:txBody>
+      </p:sp>
+      <p:sp>
+        <p:nvSpPr>
+          <p:cNvPr id="10" name="직사각형 9">
+            <a:extLst>
+              <a:ext uri="{FF2B5EF4-FFF2-40B4-BE49-F238E27FC236}">
+                <a16:creationId xmlns:a16="http://schemas.microsoft.com/office/drawing/2014/main" id="{720FDCEF-4D6B-EC98-07D4-8D5E980FADCB}"/>
+              </a:ext>
+            </a:extLst>
+          </p:cNvPr>
+          <p:cNvSpPr/>
+          <p:nvPr/>
+        </p:nvSpPr>
+        <p:spPr>
+          <a:xfrm>
+            <a:off x="11589844" y="-495300"/>
+            <a:ext cx="3327400" cy="889653"/>
+          </a:xfrm>
+          <a:prstGeom prst="rect">
+            <a:avLst/>
+          </a:prstGeom>
+          <a:solidFill>
+            <a:srgbClr val="1A5319"/>
+          </a:solidFill>
+          <a:ln>
+            <a:noFill/>
+          </a:ln>
+        </p:spPr>
+        <p:style>
+          <a:lnRef idx="2">
+            <a:schemeClr val="accent1">
+              <a:shade val="15000"/>
+            </a:schemeClr>
+          </a:lnRef>
+          <a:fillRef idx="1">
+            <a:schemeClr val="accent1"/>
+          </a:fillRef>
+          <a:effectRef idx="0">
+            <a:schemeClr val="accent1"/>
+          </a:effectRef>
+          <a:fontRef idx="minor">
+            <a:schemeClr val="lt1"/>
+          </a:fontRef>
+        </p:style>
+        <p:txBody>
+          <a:bodyPr rtlCol="0" anchor="ctr"/>
+          <a:lstStyle/>
+          <a:p>
+            <a:pPr algn="ctr"/>
+            <a:endParaRPr lang="ko-KR" altLang="en-US"/>
+          </a:p>
+        </p:txBody>
+      </p:sp>
+    </p:spTree>
+    <p:extLst>
+      <p:ext uri="{BB962C8B-B14F-4D97-AF65-F5344CB8AC3E}">
+        <p14:creationId xmlns:p14="http://schemas.microsoft.com/office/powerpoint/2010/main" val="3024926048"/>
+      </p:ext>
+    </p:extLst>
+  </p:cSld>
+  <p:clrMapOvr>
+    <a:masterClrMapping/>
+  </p:clrMapOvr>
+</p:sld>
+</file>
+
+<file path=ppt/slides/slide11.xml><?xml version="1.0" encoding="utf-8"?>
+<p:sld xmlns:a="http://schemas.openxmlformats.org/drawingml/2006/main" xmlns:r="http://schemas.openxmlformats.org/officeDocument/2006/relationships" xmlns:p="http://schemas.openxmlformats.org/presentationml/2006/main">
+  <p:cSld>
+    <p:spTree>
+      <p:nvGrpSpPr>
+        <p:cNvPr id="1" name="">
+          <a:extLst>
+            <a:ext uri="{FF2B5EF4-FFF2-40B4-BE49-F238E27FC236}">
+              <a16:creationId xmlns:a16="http://schemas.microsoft.com/office/drawing/2014/main" id="{A8BBC331-B298-F93C-8CDC-03F71DB0BA6B}"/>
+            </a:ext>
+          </a:extLst>
+        </p:cNvPr>
+        <p:cNvGrpSpPr/>
+        <p:nvPr/>
+      </p:nvGrpSpPr>
+      <p:grpSpPr>
+        <a:xfrm>
+          <a:off x="0" y="0"/>
+          <a:ext cx="0" cy="0"/>
+          <a:chOff x="0" y="0"/>
+          <a:chExt cx="0" cy="0"/>
+        </a:xfrm>
+      </p:grpSpPr>
+      <p:sp>
+        <p:nvSpPr>
+          <p:cNvPr id="4" name="TextBox 3">
+            <a:extLst>
+              <a:ext uri="{FF2B5EF4-FFF2-40B4-BE49-F238E27FC236}">
+                <a16:creationId xmlns:a16="http://schemas.microsoft.com/office/drawing/2014/main" id="{E009C13C-9534-D543-3ECF-66E106952DED}"/>
+              </a:ext>
+            </a:extLst>
+          </p:cNvPr>
+          <p:cNvSpPr txBox="1"/>
+          <p:nvPr/>
+        </p:nvSpPr>
+        <p:spPr>
+          <a:xfrm>
+            <a:off x="621792" y="564922"/>
+            <a:ext cx="6896608" cy="707886"/>
+          </a:xfrm>
+          <a:prstGeom prst="rect">
+            <a:avLst/>
+          </a:prstGeom>
+          <a:noFill/>
+        </p:spPr>
+        <p:txBody>
+          <a:bodyPr wrap="square" rtlCol="0">
+            <a:spAutoFit/>
+          </a:bodyPr>
+          <a:lstStyle/>
+          <a:p>
+            <a:r>
+              <a:rPr lang="ko-KR" altLang="en-US" sz="4000" b="1" dirty="0">
+                <a:solidFill>
+                  <a:srgbClr val="508D4E"/>
+                </a:solidFill>
+              </a:rPr>
+              <a:t>기타 </a:t>
+            </a:r>
+            <a:r>
+              <a:rPr lang="en-US" altLang="ko-KR" sz="4000" b="1" dirty="0">
+                <a:solidFill>
+                  <a:srgbClr val="508D4E"/>
+                </a:solidFill>
+              </a:rPr>
+              <a:t>/ </a:t>
+            </a:r>
+            <a:r>
+              <a:rPr lang="ko-KR" altLang="en-US" sz="4000" b="1" dirty="0">
+                <a:solidFill>
+                  <a:srgbClr val="508D4E"/>
+                </a:solidFill>
+              </a:rPr>
+              <a:t>외주 </a:t>
+            </a:r>
+            <a:r>
+              <a:rPr lang="en-US" altLang="ko-KR" sz="4000" b="1" dirty="0">
+                <a:solidFill>
+                  <a:srgbClr val="508D4E"/>
+                </a:solidFill>
+              </a:rPr>
+              <a:t>- ALYES</a:t>
+            </a:r>
+            <a:endParaRPr lang="ko-KR" altLang="en-US" sz="4000" b="1" dirty="0">
+              <a:solidFill>
+                <a:srgbClr val="508D4E"/>
+              </a:solidFill>
+            </a:endParaRPr>
+          </a:p>
+        </p:txBody>
+      </p:sp>
+      <p:sp>
+        <p:nvSpPr>
+          <p:cNvPr id="5" name="TextBox 4">
+            <a:extLst>
+              <a:ext uri="{FF2B5EF4-FFF2-40B4-BE49-F238E27FC236}">
+                <a16:creationId xmlns:a16="http://schemas.microsoft.com/office/drawing/2014/main" id="{8B1B8473-9543-5D36-F00E-616F4178A878}"/>
+              </a:ext>
+            </a:extLst>
+          </p:cNvPr>
+          <p:cNvSpPr txBox="1"/>
+          <p:nvPr/>
+        </p:nvSpPr>
+        <p:spPr>
+          <a:xfrm>
+            <a:off x="1146968" y="1272808"/>
+            <a:ext cx="10029032" cy="461665"/>
+          </a:xfrm>
+          <a:prstGeom prst="rect">
+            <a:avLst/>
+          </a:prstGeom>
+          <a:noFill/>
+        </p:spPr>
+        <p:txBody>
+          <a:bodyPr wrap="square" rtlCol="0">
+            <a:spAutoFit/>
+          </a:bodyPr>
+          <a:lstStyle/>
+          <a:p>
+            <a:r>
+              <a:rPr lang="en-US" altLang="ko-KR" sz="2400" b="1" dirty="0"/>
+              <a:t>OnePass </a:t>
+            </a:r>
+            <a:r>
+              <a:rPr lang="ko-KR" altLang="en-US" sz="2400" b="1" dirty="0"/>
+              <a:t>프로젝트 개발</a:t>
+            </a:r>
+          </a:p>
+        </p:txBody>
+      </p:sp>
+      <p:sp>
+        <p:nvSpPr>
+          <p:cNvPr id="7" name="TextBox 6">
+            <a:extLst>
+              <a:ext uri="{FF2B5EF4-FFF2-40B4-BE49-F238E27FC236}">
+                <a16:creationId xmlns:a16="http://schemas.microsoft.com/office/drawing/2014/main" id="{97FE9CB7-DBB3-4991-8120-C2521A30A32F}"/>
+              </a:ext>
+            </a:extLst>
+          </p:cNvPr>
+          <p:cNvSpPr txBox="1"/>
+          <p:nvPr/>
+        </p:nvSpPr>
+        <p:spPr>
+          <a:xfrm>
+            <a:off x="1146968" y="1734473"/>
+            <a:ext cx="11235532" cy="1200329"/>
+          </a:xfrm>
+          <a:prstGeom prst="rect">
+            <a:avLst/>
+          </a:prstGeom>
+          <a:noFill/>
+        </p:spPr>
+        <p:txBody>
+          <a:bodyPr wrap="square" rtlCol="0">
+            <a:spAutoFit/>
+          </a:bodyPr>
+          <a:lstStyle/>
+          <a:p>
+            <a:pPr marL="0" marR="0" lvl="0" indent="0" algn="l" defTabSz="914400" rtl="0" eaLnBrk="0" fontAlgn="base" latinLnBrk="0" hangingPunct="0">
+              <a:lnSpc>
+                <a:spcPct val="100000"/>
+              </a:lnSpc>
+              <a:spcBef>
+                <a:spcPct val="0"/>
+              </a:spcBef>
+              <a:spcAft>
+                <a:spcPct val="0"/>
+              </a:spcAft>
+              <a:buClrTx/>
+              <a:buSzTx/>
+              <a:buFontTx/>
+              <a:buNone/>
+              <a:tabLst/>
+            </a:pPr>
+            <a:r>
+              <a:rPr lang="ko-KR" altLang="en-US" dirty="0"/>
+              <a:t>유소년 스포츠 클럽 출결 및 셔틀</a:t>
+            </a:r>
+            <a:r>
+              <a:rPr lang="en-US" altLang="ko-KR" dirty="0"/>
+              <a:t>, </a:t>
+            </a:r>
+            <a:r>
+              <a:rPr lang="ko-KR" altLang="en-US" dirty="0"/>
+              <a:t>회비 납부 여부 관리를 위한 프로젝트 외주 진행</a:t>
+            </a:r>
+            <a:r>
+              <a:rPr lang="en-US" altLang="ko-KR" dirty="0"/>
+              <a:t>. </a:t>
+            </a:r>
+            <a:r>
+              <a:rPr lang="ko-KR" altLang="en-US" dirty="0"/>
+              <a:t>세월이 흘러도 몇몇 학원 및 스포츠 클럽 들은 학생들의 출결과 셔틀 탑승 여부</a:t>
+            </a:r>
+            <a:r>
+              <a:rPr lang="en-US" altLang="ko-KR" dirty="0"/>
+              <a:t>, </a:t>
+            </a:r>
+            <a:r>
+              <a:rPr lang="ko-KR" altLang="en-US" dirty="0"/>
+              <a:t>회비 관리 등을 일일이 직접 관리 하는 불편함이 있음을 확인</a:t>
+            </a:r>
+            <a:r>
+              <a:rPr lang="en-US" altLang="ko-KR" dirty="0"/>
+              <a:t>. </a:t>
+            </a:r>
+            <a:r>
+              <a:rPr lang="ko-KR" altLang="en-US" dirty="0"/>
+              <a:t>이에 외주 요청 담당자가 아이디어를 얻어 해당 업무 프로그램들을 하나로 쉽게 관리하고</a:t>
+            </a:r>
+            <a:r>
+              <a:rPr lang="en-US" altLang="ko-KR" dirty="0"/>
+              <a:t>, </a:t>
+            </a:r>
+            <a:r>
+              <a:rPr lang="ko-KR" altLang="en-US" dirty="0"/>
+              <a:t>프로그램의 구독료를 통한 수익 창출 모델을 만드는 프로젝트 외주 개발을 요청</a:t>
+            </a:r>
+            <a:r>
+              <a:rPr lang="en-US" altLang="ko-KR" dirty="0"/>
+              <a:t>.</a:t>
+            </a:r>
+          </a:p>
+        </p:txBody>
+      </p:sp>
+      <p:sp>
+        <p:nvSpPr>
+          <p:cNvPr id="2" name="직사각형 1">
+            <a:extLst>
+              <a:ext uri="{FF2B5EF4-FFF2-40B4-BE49-F238E27FC236}">
+                <a16:creationId xmlns:a16="http://schemas.microsoft.com/office/drawing/2014/main" id="{3F68FD64-4438-CACB-7765-4503FE5898F0}"/>
+              </a:ext>
+            </a:extLst>
+          </p:cNvPr>
+          <p:cNvSpPr/>
+          <p:nvPr/>
+        </p:nvSpPr>
+        <p:spPr>
+          <a:xfrm>
+            <a:off x="1140380" y="3007528"/>
+            <a:ext cx="11242120" cy="388939"/>
+          </a:xfrm>
+          <a:prstGeom prst="rect">
+            <a:avLst/>
+          </a:prstGeom>
+          <a:solidFill>
+            <a:srgbClr val="252525">
+              <a:alpha val="10000"/>
+            </a:srgbClr>
+          </a:solidFill>
+          <a:ln>
+            <a:noFill/>
+          </a:ln>
+        </p:spPr>
+        <p:style>
+          <a:lnRef idx="2">
+            <a:schemeClr val="accent1">
+              <a:shade val="15000"/>
+            </a:schemeClr>
+          </a:lnRef>
+          <a:fillRef idx="1">
+            <a:schemeClr val="accent1"/>
+          </a:fillRef>
+          <a:effectRef idx="0">
+            <a:schemeClr val="accent1"/>
+          </a:effectRef>
+          <a:fontRef idx="minor">
+            <a:schemeClr val="lt1"/>
+          </a:fontRef>
+        </p:style>
+        <p:txBody>
+          <a:bodyPr rtlCol="0" anchor="ctr"/>
+          <a:lstStyle/>
+          <a:p>
+            <a:pPr algn="ctr"/>
+            <a:endParaRPr lang="ko-KR" altLang="en-US"/>
+          </a:p>
+        </p:txBody>
+      </p:sp>
+      <p:sp>
+        <p:nvSpPr>
+          <p:cNvPr id="3" name="TextBox 2">
+            <a:extLst>
+              <a:ext uri="{FF2B5EF4-FFF2-40B4-BE49-F238E27FC236}">
+                <a16:creationId xmlns:a16="http://schemas.microsoft.com/office/drawing/2014/main" id="{5B596AC0-19DD-1374-AE24-9E518C229B56}"/>
+              </a:ext>
+            </a:extLst>
+          </p:cNvPr>
+          <p:cNvSpPr txBox="1"/>
+          <p:nvPr/>
+        </p:nvSpPr>
+        <p:spPr>
+          <a:xfrm>
+            <a:off x="1120554" y="3007528"/>
+            <a:ext cx="11871545" cy="369332"/>
+          </a:xfrm>
+          <a:prstGeom prst="rect">
+            <a:avLst/>
+          </a:prstGeom>
+          <a:noFill/>
+        </p:spPr>
+        <p:txBody>
+          <a:bodyPr wrap="square" rtlCol="0">
+            <a:spAutoFit/>
+          </a:bodyPr>
+          <a:lstStyle/>
+          <a:p>
+            <a:r>
+              <a:rPr lang="ko-KR" altLang="en-US" b="1" dirty="0">
+                <a:effectLst/>
+              </a:rPr>
+              <a:t>🛠️ </a:t>
+            </a:r>
+            <a:r>
+              <a:rPr lang="en-US" altLang="ko-KR" b="1" dirty="0">
+                <a:effectLst/>
+              </a:rPr>
+              <a:t>Java, Spring Boot (Spring Data JPA, Spring Security), AWS EC2, RDS, </a:t>
+            </a:r>
+            <a:r>
+              <a:rPr lang="en-US" altLang="ko-KR" b="1" dirty="0" err="1">
+                <a:effectLst/>
+              </a:rPr>
+              <a:t>Github</a:t>
+            </a:r>
+            <a:r>
+              <a:rPr lang="en-US" altLang="ko-KR" b="1" dirty="0">
+                <a:effectLst/>
+              </a:rPr>
+              <a:t> Action, </a:t>
+            </a:r>
+            <a:r>
+              <a:rPr lang="en-US" altLang="ko-KR" b="1" dirty="0" err="1">
+                <a:effectLst/>
+              </a:rPr>
+              <a:t>MySql</a:t>
+            </a:r>
+            <a:r>
+              <a:rPr lang="en-US" altLang="ko-KR" b="1" dirty="0">
+                <a:effectLst/>
+              </a:rPr>
+              <a:t> </a:t>
+            </a:r>
+            <a:r>
+              <a:rPr lang="ko-KR" altLang="en-US" b="1" dirty="0">
+                <a:effectLst/>
+              </a:rPr>
+              <a:t>등</a:t>
+            </a:r>
+            <a:endParaRPr lang="ko-KR" altLang="en-US" b="1" dirty="0"/>
+          </a:p>
+        </p:txBody>
+      </p:sp>
+      <p:sp>
+        <p:nvSpPr>
+          <p:cNvPr id="9" name="TextBox 8">
+            <a:extLst>
+              <a:ext uri="{FF2B5EF4-FFF2-40B4-BE49-F238E27FC236}">
+                <a16:creationId xmlns:a16="http://schemas.microsoft.com/office/drawing/2014/main" id="{D6D8F7BE-E6DD-CE2A-4284-F638D0C9B9E6}"/>
+              </a:ext>
+            </a:extLst>
+          </p:cNvPr>
+          <p:cNvSpPr txBox="1"/>
+          <p:nvPr/>
+        </p:nvSpPr>
+        <p:spPr>
+          <a:xfrm>
+            <a:off x="1146968" y="3469193"/>
+            <a:ext cx="11235532" cy="3600986"/>
+          </a:xfrm>
+          <a:prstGeom prst="rect">
+            <a:avLst/>
+          </a:prstGeom>
+          <a:noFill/>
+        </p:spPr>
+        <p:txBody>
+          <a:bodyPr wrap="square" rtlCol="0">
+            <a:spAutoFit/>
+          </a:bodyPr>
+          <a:lstStyle/>
+          <a:p>
+            <a:pPr marL="0" marR="0" lvl="0" indent="0" algn="l" defTabSz="914400" rtl="0" eaLnBrk="0" fontAlgn="base" latinLnBrk="0" hangingPunct="0">
+              <a:lnSpc>
+                <a:spcPct val="100000"/>
+              </a:lnSpc>
+              <a:spcBef>
+                <a:spcPct val="0"/>
+              </a:spcBef>
+              <a:spcAft>
+                <a:spcPct val="0"/>
+              </a:spcAft>
+              <a:buClrTx/>
+              <a:buSzTx/>
+              <a:buFontTx/>
+              <a:buNone/>
+              <a:tabLst/>
+            </a:pPr>
+            <a:r>
               <a:rPr lang="ko-KR" altLang="en-US" sz="2200" b="1" dirty="0"/>
-              <a:t>인사이트</a:t>
+              <a:t>성과</a:t>
             </a:r>
             <a:endParaRPr lang="en-US" altLang="ko-KR" sz="2200" b="1" dirty="0"/>
           </a:p>
@@ -4862,7 +5941,23 @@
             </a:pPr>
             <a:r>
               <a:rPr lang="ko-KR" altLang="en-US" dirty="0"/>
-              <a:t>공식 문서를 통해 정보를 취득하는 방법과 역량을 기르고</a:t>
+              <a:t>확정되지 않은 비즈니스 로직과 잦은 기획안 변경으로 </a:t>
+            </a:r>
+            <a:r>
+              <a:rPr lang="en-US" altLang="ko-KR" dirty="0"/>
+              <a:t>Agile </a:t>
+            </a:r>
+            <a:r>
+              <a:rPr lang="ko-KR" altLang="en-US" dirty="0"/>
+              <a:t>방법론을 적용하여 개발 진행</a:t>
+            </a:r>
+            <a:r>
+              <a:rPr lang="en-US" altLang="ko-KR" dirty="0"/>
+              <a:t>. </a:t>
+            </a:r>
+            <a:r>
+              <a:rPr lang="ko-KR" altLang="en-US" dirty="0"/>
+              <a:t>이를 통해 실무에 가까운 프로젝트 환경을 경험하였으며</a:t>
             </a:r>
             <a:r>
               <a:rPr lang="en-US" altLang="ko-KR" dirty="0"/>
@@ -4870,7 +5965,15 @@
             </a:r>
             <a:r>
               <a:rPr lang="ko-KR" altLang="en-US" dirty="0"/>
-              <a:t>이를 통해 문제에 대한 대응 및 해결 능력 함양</a:t>
+              <a:t>실 유저가 발생한 경험을 통해 외주 담당자와 직접적으로 소통하며 </a:t>
+            </a:r>
+            <a:r>
+              <a:rPr lang="en-US" altLang="ko-KR" dirty="0"/>
+              <a:t>QA</a:t>
+            </a:r>
+            <a:r>
+              <a:rPr lang="ko-KR" altLang="en-US" dirty="0"/>
+              <a:t>를 진행</a:t>
             </a:r>
             <a:endParaRPr lang="en-US" altLang="ko-KR" dirty="0"/>
           </a:p>
@@ -4880,16 +5983,12 @@
               <a:buChar char="•"/>
             </a:pPr>
             <a:r>
-              <a:rPr lang="ko-KR" altLang="en-US" dirty="0"/>
-              <a:t>자사 서비스 앱의 기능들에 대해 어떠한 </a:t>
-            </a:r>
-            <a:r>
-              <a:rPr lang="en-US" altLang="ko-KR" dirty="0"/>
-              <a:t>SDK API</a:t>
-            </a:r>
-            <a:r>
-              <a:rPr lang="ko-KR" altLang="en-US" dirty="0"/>
-              <a:t>를 사용하고</a:t>
+              <a:rPr lang="en-US" altLang="ko-KR" dirty="0"/>
+              <a:t>2</a:t>
+            </a:r>
+            <a:r>
+              <a:rPr lang="ko-KR" altLang="en-US" dirty="0"/>
+              <a:t>개의 팀이 경쟁 하는 구도로 진행 하였으며</a:t>
             </a:r>
             <a:r>
               <a:rPr lang="en-US" altLang="ko-KR" dirty="0"/>
@@ -4897,8 +5996,33 @@
             </a:r>
             <a:r>
               <a:rPr lang="ko-KR" altLang="en-US" dirty="0"/>
-              <a:t>어떠한 로직으로 동작하는지 전반적인 프로세스 파악의 경험 및 추후 발생하는 이슈들에 대해 명확하고 빠른 처리가 가능한 역량 증대</a:t>
-            </a:r>
+              <a:t>결과 평과 지표인 디자인</a:t>
+            </a:r>
+            <a:r>
+              <a:rPr lang="en-US" altLang="ko-KR" dirty="0"/>
+              <a:t>, </a:t>
+            </a:r>
+            <a:r>
+              <a:rPr lang="ko-KR" altLang="en-US" dirty="0"/>
+              <a:t>성능</a:t>
+            </a:r>
+            <a:r>
+              <a:rPr lang="en-US" altLang="ko-KR" dirty="0"/>
+              <a:t>, </a:t>
+            </a:r>
+            <a:r>
+              <a:rPr lang="ko-KR" altLang="en-US" dirty="0"/>
+              <a:t>기능 모두 </a:t>
+            </a:r>
+            <a:r>
+              <a:rPr lang="ko-KR" altLang="en-US" dirty="0" err="1"/>
+              <a:t>경쟁팀</a:t>
+            </a:r>
+            <a:r>
+              <a:rPr lang="ko-KR" altLang="en-US" dirty="0"/>
+              <a:t> 보다 우위를 점해 프로토 타입 배포 및 실제 서비스 런칭 진행 경험</a:t>
+            </a:r>
+            <a:endParaRPr lang="en-US" altLang="ko-KR" dirty="0"/>
           </a:p>
           <a:p>
             <a:pPr marR="0" lvl="0" algn="l" defTabSz="914400" rtl="0" eaLnBrk="0" fontAlgn="base" latinLnBrk="0" hangingPunct="0">
@@ -4915,6 +6039,96 @@
               <a:buSzTx/>
               <a:tabLst/>
             </a:pPr>
+            <a:r>
+              <a:rPr lang="ko-KR" altLang="en-US" sz="2200" b="1" dirty="0"/>
+              <a:t>인사이트</a:t>
+            </a:r>
+            <a:endParaRPr lang="en-US" altLang="ko-KR" sz="2200" b="1" dirty="0"/>
+          </a:p>
+          <a:p>
+            <a:pPr marL="285750" indent="-285750">
+              <a:buFont typeface="Arial" panose="020B0604020202020204" pitchFamily="34" charset="0"/>
+              <a:buChar char="•"/>
+            </a:pPr>
+            <a:r>
+              <a:rPr lang="ko-KR" altLang="en-US" dirty="0"/>
+              <a:t>퇴사 후 실무에 가까운 프로젝트를 진행하며 잃었던 업무 적응력을 되찾을 수 있는 좋은 기회가 되었으며</a:t>
+            </a:r>
+            <a:r>
+              <a:rPr lang="en-US" altLang="ko-KR" dirty="0"/>
+              <a:t>, </a:t>
+            </a:r>
+            <a:r>
+              <a:rPr lang="ko-KR" altLang="en-US" dirty="0"/>
+              <a:t>개발자의 자존감 성립 및 상태 진단을 통해 부족한 점과 필요한 것이 무엇인지 진단 해 볼 좋은 기회가 됨</a:t>
+            </a:r>
+            <a:endParaRPr lang="en-US" altLang="ko-KR" dirty="0"/>
+          </a:p>
+          <a:p>
+            <a:pPr marL="285750" indent="-285750">
+              <a:buFont typeface="Arial" panose="020B0604020202020204" pitchFamily="34" charset="0"/>
+              <a:buChar char="•"/>
+            </a:pPr>
+            <a:r>
+              <a:rPr lang="ko-KR" altLang="en-US" dirty="0"/>
+              <a:t>특히 </a:t>
+            </a:r>
+            <a:r>
+              <a:rPr lang="en-US" altLang="ko-KR" dirty="0"/>
+              <a:t>ERD </a:t>
+            </a:r>
+            <a:r>
+              <a:rPr lang="ko-KR" altLang="en-US" dirty="0"/>
+              <a:t>설계를 진행할 때</a:t>
+            </a:r>
+            <a:r>
+              <a:rPr lang="en-US" altLang="ko-KR" dirty="0"/>
+              <a:t>, </a:t>
+            </a:r>
+            <a:r>
+              <a:rPr lang="ko-KR" altLang="en-US" dirty="0"/>
+              <a:t>열심히 고민해서 </a:t>
+            </a:r>
+            <a:r>
+              <a:rPr lang="en-US" altLang="ko-KR" dirty="0"/>
+              <a:t>ERD</a:t>
+            </a:r>
+            <a:r>
+              <a:rPr lang="ko-KR" altLang="en-US" dirty="0"/>
+              <a:t>를 설계하고</a:t>
+            </a:r>
+            <a:r>
+              <a:rPr lang="en-US" altLang="ko-KR" dirty="0"/>
+              <a:t>, </a:t>
+            </a:r>
+            <a:r>
+              <a:rPr lang="ko-KR" altLang="en-US" dirty="0"/>
+              <a:t>추후 프로젝트 개발을 완료한 뒤 내가 고심하며 계획했던 내용들이 구현될 때는 정말 좋은 느낌을 얻었음</a:t>
+            </a:r>
+            <a:r>
+              <a:rPr lang="en-US" altLang="ko-KR" dirty="0"/>
+              <a:t>. </a:t>
+            </a:r>
+            <a:r>
+              <a:rPr lang="ko-KR" altLang="en-US" dirty="0"/>
+              <a:t>이를 통해 확실하지 않은 기획을 받아 개발할 경우 유연성과 확장성을 고려한 </a:t>
+            </a:r>
+            <a:r>
+              <a:rPr lang="en-US" altLang="ko-KR" dirty="0"/>
+              <a:t>ERD </a:t>
+            </a:r>
+            <a:r>
+              <a:rPr lang="ko-KR" altLang="en-US" dirty="0"/>
+              <a:t>설계를 통해 사이드 이펙트를 최소화할 수 있었던 점을</a:t>
+            </a:r>
+            <a:r>
+              <a:rPr lang="en-US" altLang="ko-KR" dirty="0"/>
+              <a:t> </a:t>
+            </a:r>
+            <a:r>
+              <a:rPr lang="ko-KR" altLang="en-US" dirty="0"/>
+              <a:t>정말 뿌듯하게 느낌</a:t>
+            </a:r>
             <a:endParaRPr lang="en-US" altLang="ko-KR" dirty="0"/>
           </a:p>
           <a:p>
@@ -4934,18 +6148,187 @@
             </a:pPr>
             <a:r>
               <a:rPr lang="ko-KR" altLang="en-US" sz="2200" b="1" dirty="0">
-                <a:hlinkClick r:id="rId3"/>
+                <a:solidFill>
+                  <a:srgbClr val="508D4E"/>
+                </a:solidFill>
+                <a:hlinkClick r:id="rId2">
+                  <a:extLst>
+                    <a:ext uri="{A12FA001-AC4F-418D-AE19-62706E023703}">
+                      <ahyp:hlinkClr xmlns:ahyp="http://schemas.microsoft.com/office/drawing/2018/hyperlinkcolor" val="tx"/>
+                    </a:ext>
+                  </a:extLst>
+                </a:hlinkClick>
               </a:rPr>
               <a:t>상세 보기</a:t>
             </a:r>
-            <a:endParaRPr lang="en-US" altLang="ko-KR" sz="2200" b="1" dirty="0"/>
+            <a:endParaRPr lang="en-US" altLang="ko-KR" sz="2200" b="1" dirty="0">
+              <a:solidFill>
+                <a:srgbClr val="508D4E"/>
+              </a:solidFill>
+            </a:endParaRPr>
+          </a:p>
+        </p:txBody>
+      </p:sp>
+      <p:sp>
+        <p:nvSpPr>
+          <p:cNvPr id="6" name="직사각형 5">
+            <a:extLst>
+              <a:ext uri="{FF2B5EF4-FFF2-40B4-BE49-F238E27FC236}">
+                <a16:creationId xmlns:a16="http://schemas.microsoft.com/office/drawing/2014/main" id="{B76D2366-7B79-85DD-7229-A89D9F7DAB9C}"/>
+              </a:ext>
+            </a:extLst>
+          </p:cNvPr>
+          <p:cNvSpPr/>
+          <p:nvPr/>
+        </p:nvSpPr>
+        <p:spPr>
+          <a:xfrm>
+            <a:off x="6869113" y="-495300"/>
+            <a:ext cx="3327400" cy="889653"/>
+          </a:xfrm>
+          <a:prstGeom prst="rect">
+            <a:avLst/>
+          </a:prstGeom>
+          <a:solidFill>
+            <a:srgbClr val="80AF81"/>
+          </a:solidFill>
+          <a:ln>
+            <a:noFill/>
+          </a:ln>
+        </p:spPr>
+        <p:style>
+          <a:lnRef idx="2">
+            <a:schemeClr val="accent1">
+              <a:shade val="15000"/>
+            </a:schemeClr>
+          </a:lnRef>
+          <a:fillRef idx="1">
+            <a:schemeClr val="accent1"/>
+          </a:fillRef>
+          <a:effectRef idx="0">
+            <a:schemeClr val="accent1"/>
+          </a:effectRef>
+          <a:fontRef idx="minor">
+            <a:schemeClr val="lt1"/>
+          </a:fontRef>
+        </p:style>
+        <p:txBody>
+          <a:bodyPr rtlCol="0" anchor="ctr"/>
+          <a:lstStyle/>
+          <a:p>
+            <a:pPr algn="ctr"/>
+            <a:endParaRPr lang="ko-KR" altLang="en-US" dirty="0"/>
+          </a:p>
+        </p:txBody>
+      </p:sp>
+      <p:sp>
+        <p:nvSpPr>
+          <p:cNvPr id="8" name="직사각형 7">
+            <a:extLst>
+              <a:ext uri="{FF2B5EF4-FFF2-40B4-BE49-F238E27FC236}">
+                <a16:creationId xmlns:a16="http://schemas.microsoft.com/office/drawing/2014/main" id="{64A054CD-74A6-B978-2E65-42612E29CE73}"/>
+              </a:ext>
+            </a:extLst>
+          </p:cNvPr>
+          <p:cNvSpPr/>
+          <p:nvPr/>
+        </p:nvSpPr>
+        <p:spPr>
+          <a:xfrm>
+            <a:off x="9034245" y="-495300"/>
+            <a:ext cx="3327400" cy="889653"/>
+          </a:xfrm>
+          <a:prstGeom prst="rect">
+            <a:avLst/>
+          </a:prstGeom>
+          <a:solidFill>
+            <a:srgbClr val="508D4E"/>
+          </a:solidFill>
+          <a:ln>
+            <a:noFill/>
+          </a:ln>
+        </p:spPr>
+        <p:style>
+          <a:lnRef idx="2">
+            <a:schemeClr val="accent1">
+              <a:shade val="15000"/>
+            </a:schemeClr>
+          </a:lnRef>
+          <a:fillRef idx="1">
+            <a:schemeClr val="accent1"/>
+          </a:fillRef>
+          <a:effectRef idx="0">
+            <a:schemeClr val="accent1"/>
+          </a:effectRef>
+          <a:fontRef idx="minor">
+            <a:schemeClr val="lt1"/>
+          </a:fontRef>
+        </p:style>
+        <p:txBody>
+          <a:bodyPr rtlCol="0" anchor="ctr"/>
+          <a:lstStyle/>
+          <a:p>
+            <a:pPr algn="ctr"/>
+            <a:endParaRPr lang="ko-KR" altLang="en-US"/>
+          </a:p>
+        </p:txBody>
+      </p:sp>
+      <p:sp>
+        <p:nvSpPr>
+          <p:cNvPr id="10" name="직사각형 9">
+            <a:extLst>
+              <a:ext uri="{FF2B5EF4-FFF2-40B4-BE49-F238E27FC236}">
+                <a16:creationId xmlns:a16="http://schemas.microsoft.com/office/drawing/2014/main" id="{00A1D8EB-049F-A7A6-7FB9-4F4D193ADF33}"/>
+              </a:ext>
+            </a:extLst>
+          </p:cNvPr>
+          <p:cNvSpPr/>
+          <p:nvPr/>
+        </p:nvSpPr>
+        <p:spPr>
+          <a:xfrm>
+            <a:off x="11589844" y="-495300"/>
+            <a:ext cx="3327400" cy="889653"/>
+          </a:xfrm>
+          <a:prstGeom prst="rect">
+            <a:avLst/>
+          </a:prstGeom>
+          <a:solidFill>
+            <a:srgbClr val="1A5319"/>
+          </a:solidFill>
+          <a:ln>
+            <a:noFill/>
+          </a:ln>
+        </p:spPr>
+        <p:style>
+          <a:lnRef idx="2">
+            <a:schemeClr val="accent1">
+              <a:shade val="15000"/>
+            </a:schemeClr>
+          </a:lnRef>
+          <a:fillRef idx="1">
+            <a:schemeClr val="accent1"/>
+          </a:fillRef>
+          <a:effectRef idx="0">
+            <a:schemeClr val="accent1"/>
+          </a:effectRef>
+          <a:fontRef idx="minor">
+            <a:schemeClr val="lt1"/>
+          </a:fontRef>
+        </p:style>
+        <p:txBody>
+          <a:bodyPr rtlCol="0" anchor="ctr"/>
+          <a:lstStyle/>
+          <a:p>
+            <a:pPr algn="ctr"/>
+            <a:endParaRPr lang="ko-KR" altLang="en-US"/>
           </a:p>
         </p:txBody>
       </p:sp>
     </p:spTree>
     <p:extLst>
       <p:ext uri="{BB962C8B-B14F-4D97-AF65-F5344CB8AC3E}">
-        <p14:creationId xmlns:p14="http://schemas.microsoft.com/office/powerpoint/2010/main" val="685160049"/>
+        <p14:creationId xmlns:p14="http://schemas.microsoft.com/office/powerpoint/2010/main" val="3127891094"/>
       </p:ext>
     </p:extLst>
   </p:cSld>
@@ -5028,10 +6411,10 @@
       </p:sp>
       <p:grpSp>
         <p:nvGrpSpPr>
-          <p:cNvPr id="22" name="그룹 21">
+          <p:cNvPr id="3" name="그룹 2">
             <a:extLst>
               <a:ext uri="{FF2B5EF4-FFF2-40B4-BE49-F238E27FC236}">
-                <a16:creationId xmlns:a16="http://schemas.microsoft.com/office/drawing/2014/main" id="{B5CAD46A-5D4B-B6A5-52D7-E1DDC3031ED0}"/>
+                <a16:creationId xmlns:a16="http://schemas.microsoft.com/office/drawing/2014/main" id="{55EB93E4-7584-D6BA-27BF-DC9B77BD8018}"/>
               </a:ext>
             </a:extLst>
           </p:cNvPr>
@@ -5040,46 +6423,64 @@
         </p:nvGrpSpPr>
         <p:grpSpPr>
           <a:xfrm>
-            <a:off x="11153488" y="2234046"/>
-            <a:ext cx="2173026" cy="1143120"/>
-            <a:chOff x="11153488" y="2234046"/>
-            <a:chExt cx="2173026" cy="1143120"/>
+            <a:off x="11435465" y="1978022"/>
+            <a:ext cx="1440000" cy="1440000"/>
+            <a:chOff x="11430113" y="1567466"/>
+            <a:chExt cx="1440000" cy="1440000"/>
           </a:xfrm>
         </p:grpSpPr>
-        <p:pic>
-          <p:nvPicPr>
-            <p:cNvPr id="21" name="그림 20">
+        <p:sp>
+          <p:nvSpPr>
+            <p:cNvPr id="2" name="타원 1">
               <a:extLst>
                 <a:ext uri="{FF2B5EF4-FFF2-40B4-BE49-F238E27FC236}">
-                  <a16:creationId xmlns:a16="http://schemas.microsoft.com/office/drawing/2014/main" id="{A01ED0A2-259A-616C-5459-B0F021F5DFA1}"/>
+                  <a16:creationId xmlns:a16="http://schemas.microsoft.com/office/drawing/2014/main" id="{E4F976B7-4E4A-8910-CD36-A7DC5D30C4C3}"/>
                 </a:ext>
               </a:extLst>
             </p:cNvPr>
-            <p:cNvPicPr>
-              <a:picLocks noChangeAspect="1"/>
-            </p:cNvPicPr>
+            <p:cNvSpPr/>
             <p:nvPr/>
-          </p:nvPicPr>
-          <p:blipFill>
-            <a:blip r:embed="rId3"/>
-            <a:srcRect b="17335"/>
-            <a:stretch/>
-          </p:blipFill>
+          </p:nvSpPr>
           <p:spPr>
             <a:xfrm>
-              <a:off x="11153488" y="2234046"/>
-              <a:ext cx="2173026" cy="1143120"/>
+              <a:off x="11430113" y="1567466"/>
+              <a:ext cx="1440000" cy="1440000"/>
             </a:xfrm>
-            <a:prstGeom prst="rect">
+            <a:prstGeom prst="ellipse">
               <a:avLst/>
             </a:prstGeom>
+            <a:solidFill>
+              <a:srgbClr val="3A75B0"/>
+            </a:solidFill>
             <a:ln>
-              <a:solidFill>
-                <a:srgbClr val="3A75B0"/>
-              </a:solidFill>
+              <a:noFill/>
             </a:ln>
           </p:spPr>
-        </p:pic>
+          <p:style>
+            <a:lnRef idx="2">
+              <a:schemeClr val="accent1">
+                <a:shade val="15000"/>
+              </a:schemeClr>
+            </a:lnRef>
+            <a:fillRef idx="1">
+              <a:schemeClr val="accent1"/>
+            </a:fillRef>
+            <a:effectRef idx="0">
+              <a:schemeClr val="accent1"/>
+            </a:effectRef>
+            <a:fontRef idx="minor">
+              <a:schemeClr val="lt1"/>
+            </a:fontRef>
+          </p:style>
+          <p:txBody>
+            <a:bodyPr rtlCol="0" anchor="ctr"/>
+            <a:lstStyle/>
+            <a:p>
+              <a:pPr algn="ctr"/>
+              <a:endParaRPr lang="ko-KR" altLang="en-US" dirty="0"/>
+            </a:p>
+          </p:txBody>
+        </p:sp>
         <p:pic>
           <p:nvPicPr>
             <p:cNvPr id="19" name="그래픽 18">
@@ -5095,21 +6496,20 @@
             <p:nvPr/>
           </p:nvPicPr>
           <p:blipFill>
-            <a:blip r:embed="rId4">
+            <a:blip r:embed="rId3">
               <a:extLst>
                 <a:ext uri="{96DAC541-7B7A-43D3-8B79-37D633B846F1}">
-                  <asvg:svgBlip xmlns:asvg="http://schemas.microsoft.com/office/drawing/2016/SVG/main" r:embed="rId5"/>
+                  <asvg:svgBlip xmlns:asvg="http://schemas.microsoft.com/office/drawing/2016/SVG/main" r:embed="rId4"/>
                 </a:ext>
               </a:extLst>
             </a:blip>
-            <a:stretch>
-              <a:fillRect/>
-            </a:stretch>
+            <a:srcRect r="59224"/>
+            <a:stretch/>
           </p:blipFill>
           <p:spPr>
             <a:xfrm>
-              <a:off x="11153488" y="2265657"/>
-              <a:ext cx="2173026" cy="1086513"/>
+              <a:off x="11772022" y="1818289"/>
+              <a:ext cx="765260" cy="938356"/>
             </a:xfrm>
             <a:prstGeom prst="rect">
               <a:avLst/>
@@ -5117,50 +6517,6 @@
           </p:spPr>
         </p:pic>
       </p:grpSp>
-      <p:sp>
-        <p:nvSpPr>
-          <p:cNvPr id="4" name="TextBox 3">
-            <a:extLst>
-              <a:ext uri="{FF2B5EF4-FFF2-40B4-BE49-F238E27FC236}">
-                <a16:creationId xmlns:a16="http://schemas.microsoft.com/office/drawing/2014/main" id="{DD49EA6C-B69A-A383-FD01-ED66D1D9E368}"/>
-              </a:ext>
-            </a:extLst>
-          </p:cNvPr>
-          <p:cNvSpPr txBox="1"/>
-          <p:nvPr/>
-        </p:nvSpPr>
-        <p:spPr>
-          <a:xfrm>
-            <a:off x="621792" y="564922"/>
-            <a:ext cx="12088368" cy="707886"/>
-          </a:xfrm>
-          <a:prstGeom prst="rect">
-            <a:avLst/>
-          </a:prstGeom>
-          <a:noFill/>
-        </p:spPr>
-        <p:txBody>
-          <a:bodyPr wrap="square" rtlCol="0">
-            <a:spAutoFit/>
-          </a:bodyPr>
-          <a:lstStyle/>
-          <a:p>
-            <a:r>
-              <a:rPr lang="en-US" altLang="ko-KR" sz="4000" b="1" dirty="0">
-                <a:solidFill>
-                  <a:srgbClr val="468260"/>
-                </a:solidFill>
-              </a:rPr>
-              <a:t>Skills / Language &amp; Frameworks</a:t>
-            </a:r>
-            <a:endParaRPr lang="ko-KR" altLang="en-US" sz="4000" b="1" dirty="0">
-              <a:solidFill>
-                <a:srgbClr val="468260"/>
-              </a:solidFill>
-            </a:endParaRPr>
-          </a:p>
-        </p:txBody>
-      </p:sp>
       <p:sp>
         <p:nvSpPr>
           <p:cNvPr id="5" name="TextBox 4">
@@ -5732,10 +7088,10 @@
           <p:nvPr/>
         </p:nvPicPr>
         <p:blipFill>
-          <a:blip r:embed="rId6">
+          <a:blip r:embed="rId5">
             <a:extLst>
               <a:ext uri="{96DAC541-7B7A-43D3-8B79-37D633B846F1}">
-                <asvg:svgBlip xmlns:asvg="http://schemas.microsoft.com/office/drawing/2016/SVG/main" r:embed="rId7"/>
+                <asvg:svgBlip xmlns:asvg="http://schemas.microsoft.com/office/drawing/2016/SVG/main" r:embed="rId6"/>
               </a:ext>
             </a:extLst>
           </a:blip>
@@ -5745,8 +7101,8 @@
         </p:blipFill>
         <p:spPr>
           <a:xfrm>
-            <a:off x="12155465" y="3126129"/>
-            <a:ext cx="1504950" cy="1352550"/>
+            <a:off x="12155465" y="3205508"/>
+            <a:ext cx="1602254" cy="1440000"/>
           </a:xfrm>
           <a:prstGeom prst="rect">
             <a:avLst/>
@@ -5768,10 +7124,10 @@
           <p:nvPr/>
         </p:nvPicPr>
         <p:blipFill>
-          <a:blip r:embed="rId8">
+          <a:blip r:embed="rId7">
             <a:extLst>
               <a:ext uri="{96DAC541-7B7A-43D3-8B79-37D633B846F1}">
-                <asvg:svgBlip xmlns:asvg="http://schemas.microsoft.com/office/drawing/2016/SVG/main" r:embed="rId9"/>
+                <asvg:svgBlip xmlns:asvg="http://schemas.microsoft.com/office/drawing/2016/SVG/main" r:embed="rId8"/>
               </a:ext>
             </a:extLst>
           </a:blip>
@@ -5781,8 +7137,8 @@
         </p:blipFill>
         <p:spPr>
           <a:xfrm>
-            <a:off x="11062462" y="4088729"/>
-            <a:ext cx="1504950" cy="1504950"/>
+            <a:off x="11355600" y="4239376"/>
+            <a:ext cx="1440000" cy="1440000"/>
           </a:xfrm>
           <a:prstGeom prst="rect">
             <a:avLst/>
@@ -5804,7 +7160,7 @@
           <p:nvPr/>
         </p:nvPicPr>
         <p:blipFill>
-          <a:blip r:embed="rId10">
+          <a:blip r:embed="rId9">
             <a:extLst>
               <a:ext uri="{28A0092B-C50C-407E-A947-70E740481C1C}">
                 <a14:useLocalDpi xmlns:a14="http://schemas.microsoft.com/office/drawing/2010/main" val="0"/>
@@ -5817,10 +7173,10 @@
         </p:blipFill>
         <p:spPr>
           <a:xfrm>
-            <a:off x="12240001" y="5172407"/>
-            <a:ext cx="1219200" cy="1219200"/>
+            <a:off x="12244111" y="5322028"/>
+            <a:ext cx="1440000" cy="1440000"/>
           </a:xfrm>
-          <a:prstGeom prst="rect">
+          <a:prstGeom prst="ellipse">
             <a:avLst/>
           </a:prstGeom>
         </p:spPr>
@@ -5839,8 +7195,8 @@
         </p:nvSpPr>
         <p:spPr>
           <a:xfrm>
-            <a:off x="10941269" y="1978022"/>
-            <a:ext cx="2816772" cy="4780130"/>
+            <a:off x="11134248" y="1826116"/>
+            <a:ext cx="2816772" cy="5078313"/>
           </a:xfrm>
           <a:prstGeom prst="rect">
             <a:avLst/>
@@ -5849,6 +7205,215 @@
             <a:schemeClr val="bg1">
               <a:alpha val="51000"/>
             </a:schemeClr>
+          </a:solidFill>
+          <a:ln>
+            <a:noFill/>
+          </a:ln>
+        </p:spPr>
+        <p:style>
+          <a:lnRef idx="2">
+            <a:schemeClr val="accent1">
+              <a:shade val="15000"/>
+            </a:schemeClr>
+          </a:lnRef>
+          <a:fillRef idx="1">
+            <a:schemeClr val="accent1"/>
+          </a:fillRef>
+          <a:effectRef idx="0">
+            <a:schemeClr val="accent1"/>
+          </a:effectRef>
+          <a:fontRef idx="minor">
+            <a:schemeClr val="lt1"/>
+          </a:fontRef>
+        </p:style>
+        <p:txBody>
+          <a:bodyPr rtlCol="0" anchor="ctr"/>
+          <a:lstStyle/>
+          <a:p>
+            <a:pPr algn="ctr"/>
+            <a:endParaRPr lang="ko-KR" altLang="en-US" dirty="0"/>
+          </a:p>
+        </p:txBody>
+      </p:sp>
+      <p:sp>
+        <p:nvSpPr>
+          <p:cNvPr id="6" name="TextBox 5">
+            <a:extLst>
+              <a:ext uri="{FF2B5EF4-FFF2-40B4-BE49-F238E27FC236}">
+                <a16:creationId xmlns:a16="http://schemas.microsoft.com/office/drawing/2014/main" id="{AA4A1537-5224-26C4-5153-3D10B46B4D08}"/>
+              </a:ext>
+            </a:extLst>
+          </p:cNvPr>
+          <p:cNvSpPr txBox="1"/>
+          <p:nvPr/>
+        </p:nvSpPr>
+        <p:spPr>
+          <a:xfrm>
+            <a:off x="621792" y="564922"/>
+            <a:ext cx="12088368" cy="707886"/>
+          </a:xfrm>
+          <a:prstGeom prst="rect">
+            <a:avLst/>
+          </a:prstGeom>
+          <a:noFill/>
+        </p:spPr>
+        <p:txBody>
+          <a:bodyPr wrap="square" rtlCol="0">
+            <a:spAutoFit/>
+          </a:bodyPr>
+          <a:lstStyle/>
+          <a:p>
+            <a:r>
+              <a:rPr lang="en-US" altLang="ko-KR" sz="4000" b="1" dirty="0">
+                <a:solidFill>
+                  <a:srgbClr val="508D4E"/>
+                </a:solidFill>
+              </a:rPr>
+              <a:t>Skills / </a:t>
+            </a:r>
+            <a:r>
+              <a:rPr lang="en-US" altLang="ko-KR" sz="4000" b="1" dirty="0">
+                <a:solidFill>
+                  <a:srgbClr val="508D4E"/>
+                </a:solidFill>
+                <a:effectLst/>
+              </a:rPr>
+              <a:t>Language &amp; Frameworks</a:t>
+            </a:r>
+            <a:endParaRPr lang="ko-KR" altLang="en-US" sz="4000" b="1" dirty="0">
+              <a:solidFill>
+                <a:srgbClr val="508D4E"/>
+              </a:solidFill>
+            </a:endParaRPr>
+          </a:p>
+        </p:txBody>
+      </p:sp>
+      <p:sp>
+        <p:nvSpPr>
+          <p:cNvPr id="8" name="직사각형 7">
+            <a:extLst>
+              <a:ext uri="{FF2B5EF4-FFF2-40B4-BE49-F238E27FC236}">
+                <a16:creationId xmlns:a16="http://schemas.microsoft.com/office/drawing/2014/main" id="{C0AB7B82-C758-1272-A194-0AF609BAD0BD}"/>
+              </a:ext>
+            </a:extLst>
+          </p:cNvPr>
+          <p:cNvSpPr/>
+          <p:nvPr/>
+        </p:nvSpPr>
+        <p:spPr>
+          <a:xfrm>
+            <a:off x="6869113" y="-495300"/>
+            <a:ext cx="3327400" cy="889653"/>
+          </a:xfrm>
+          <a:prstGeom prst="rect">
+            <a:avLst/>
+          </a:prstGeom>
+          <a:solidFill>
+            <a:srgbClr val="80AF81"/>
+          </a:solidFill>
+          <a:ln>
+            <a:noFill/>
+          </a:ln>
+        </p:spPr>
+        <p:style>
+          <a:lnRef idx="2">
+            <a:schemeClr val="accent1">
+              <a:shade val="15000"/>
+            </a:schemeClr>
+          </a:lnRef>
+          <a:fillRef idx="1">
+            <a:schemeClr val="accent1"/>
+          </a:fillRef>
+          <a:effectRef idx="0">
+            <a:schemeClr val="accent1"/>
+          </a:effectRef>
+          <a:fontRef idx="minor">
+            <a:schemeClr val="lt1"/>
+          </a:fontRef>
+        </p:style>
+        <p:txBody>
+          <a:bodyPr rtlCol="0" anchor="ctr"/>
+          <a:lstStyle/>
+          <a:p>
+            <a:pPr algn="ctr"/>
+            <a:endParaRPr lang="ko-KR" altLang="en-US" dirty="0"/>
+          </a:p>
+        </p:txBody>
+      </p:sp>
+      <p:sp>
+        <p:nvSpPr>
+          <p:cNvPr id="10" name="직사각형 9">
+            <a:extLst>
+              <a:ext uri="{FF2B5EF4-FFF2-40B4-BE49-F238E27FC236}">
+                <a16:creationId xmlns:a16="http://schemas.microsoft.com/office/drawing/2014/main" id="{2311A068-1DAE-89FD-951E-E06DD2E11356}"/>
+              </a:ext>
+            </a:extLst>
+          </p:cNvPr>
+          <p:cNvSpPr/>
+          <p:nvPr/>
+        </p:nvSpPr>
+        <p:spPr>
+          <a:xfrm>
+            <a:off x="9034245" y="-495300"/>
+            <a:ext cx="3327400" cy="889653"/>
+          </a:xfrm>
+          <a:prstGeom prst="rect">
+            <a:avLst/>
+          </a:prstGeom>
+          <a:solidFill>
+            <a:srgbClr val="508D4E"/>
+          </a:solidFill>
+          <a:ln>
+            <a:noFill/>
+          </a:ln>
+        </p:spPr>
+        <p:style>
+          <a:lnRef idx="2">
+            <a:schemeClr val="accent1">
+              <a:shade val="15000"/>
+            </a:schemeClr>
+          </a:lnRef>
+          <a:fillRef idx="1">
+            <a:schemeClr val="accent1"/>
+          </a:fillRef>
+          <a:effectRef idx="0">
+            <a:schemeClr val="accent1"/>
+          </a:effectRef>
+          <a:fontRef idx="minor">
+            <a:schemeClr val="lt1"/>
+          </a:fontRef>
+        </p:style>
+        <p:txBody>
+          <a:bodyPr rtlCol="0" anchor="ctr"/>
+          <a:lstStyle/>
+          <a:p>
+            <a:pPr algn="ctr"/>
+            <a:endParaRPr lang="ko-KR" altLang="en-US"/>
+          </a:p>
+        </p:txBody>
+      </p:sp>
+      <p:sp>
+        <p:nvSpPr>
+          <p:cNvPr id="11" name="직사각형 10">
+            <a:extLst>
+              <a:ext uri="{FF2B5EF4-FFF2-40B4-BE49-F238E27FC236}">
+                <a16:creationId xmlns:a16="http://schemas.microsoft.com/office/drawing/2014/main" id="{9F69AAB6-3F5E-4174-C1C4-18B013E57CC6}"/>
+              </a:ext>
+            </a:extLst>
+          </p:cNvPr>
+          <p:cNvSpPr/>
+          <p:nvPr/>
+        </p:nvSpPr>
+        <p:spPr>
+          <a:xfrm>
+            <a:off x="11589844" y="-495300"/>
+            <a:ext cx="3327400" cy="889653"/>
+          </a:xfrm>
+          <a:prstGeom prst="rect">
+            <a:avLst/>
+          </a:prstGeom>
+          <a:solidFill>
+            <a:srgbClr val="1A5319"/>
           </a:solidFill>
           <a:ln>
             <a:noFill/>
@@ -5969,97 +7534,6 @@
           </a:p>
         </p:txBody>
       </p:sp>
-      <p:grpSp>
-        <p:nvGrpSpPr>
-          <p:cNvPr id="22" name="그룹 21">
-            <a:extLst>
-              <a:ext uri="{FF2B5EF4-FFF2-40B4-BE49-F238E27FC236}">
-                <a16:creationId xmlns:a16="http://schemas.microsoft.com/office/drawing/2014/main" id="{4BB0D444-C711-DEBB-E738-212A97E9950A}"/>
-              </a:ext>
-            </a:extLst>
-          </p:cNvPr>
-          <p:cNvGrpSpPr/>
-          <p:nvPr/>
-        </p:nvGrpSpPr>
-        <p:grpSpPr>
-          <a:xfrm>
-            <a:off x="11153488" y="2234046"/>
-            <a:ext cx="2173026" cy="1143120"/>
-            <a:chOff x="11153488" y="2234046"/>
-            <a:chExt cx="2173026" cy="1143120"/>
-          </a:xfrm>
-        </p:grpSpPr>
-        <p:pic>
-          <p:nvPicPr>
-            <p:cNvPr id="21" name="그림 20">
-              <a:extLst>
-                <a:ext uri="{FF2B5EF4-FFF2-40B4-BE49-F238E27FC236}">
-                  <a16:creationId xmlns:a16="http://schemas.microsoft.com/office/drawing/2014/main" id="{0AB387F6-E520-0891-8075-77283101906F}"/>
-                </a:ext>
-              </a:extLst>
-            </p:cNvPr>
-            <p:cNvPicPr>
-              <a:picLocks noChangeAspect="1"/>
-            </p:cNvPicPr>
-            <p:nvPr/>
-          </p:nvPicPr>
-          <p:blipFill>
-            <a:blip r:embed="rId2"/>
-            <a:srcRect b="17335"/>
-            <a:stretch/>
-          </p:blipFill>
-          <p:spPr>
-            <a:xfrm>
-              <a:off x="11153488" y="2234046"/>
-              <a:ext cx="2173026" cy="1143120"/>
-            </a:xfrm>
-            <a:prstGeom prst="rect">
-              <a:avLst/>
-            </a:prstGeom>
-            <a:ln>
-              <a:solidFill>
-                <a:srgbClr val="3A75B0"/>
-              </a:solidFill>
-            </a:ln>
-          </p:spPr>
-        </p:pic>
-        <p:pic>
-          <p:nvPicPr>
-            <p:cNvPr id="19" name="그래픽 18">
-              <a:extLst>
-                <a:ext uri="{FF2B5EF4-FFF2-40B4-BE49-F238E27FC236}">
-                  <a16:creationId xmlns:a16="http://schemas.microsoft.com/office/drawing/2014/main" id="{E8786870-3F00-B977-41DB-A32ACBFF8351}"/>
-                </a:ext>
-              </a:extLst>
-            </p:cNvPr>
-            <p:cNvPicPr>
-              <a:picLocks noChangeAspect="1"/>
-            </p:cNvPicPr>
-            <p:nvPr/>
-          </p:nvPicPr>
-          <p:blipFill>
-            <a:blip r:embed="rId3">
-              <a:extLst>
-                <a:ext uri="{96DAC541-7B7A-43D3-8B79-37D633B846F1}">
-                  <asvg:svgBlip xmlns:asvg="http://schemas.microsoft.com/office/drawing/2016/SVG/main" r:embed="rId4"/>
-                </a:ext>
-              </a:extLst>
-            </a:blip>
-            <a:stretch>
-              <a:fillRect/>
-            </a:stretch>
-          </p:blipFill>
-          <p:spPr>
-            <a:xfrm>
-              <a:off x="11153488" y="2265657"/>
-              <a:ext cx="2173026" cy="1086513"/>
-            </a:xfrm>
-            <a:prstGeom prst="rect">
-              <a:avLst/>
-            </a:prstGeom>
-          </p:spPr>
-        </p:pic>
-      </p:grpSp>
       <p:sp>
         <p:nvSpPr>
           <p:cNvPr id="4" name="TextBox 3">
@@ -6091,7 +7565,7 @@
             <a:r>
               <a:rPr lang="en-US" altLang="ko-KR" sz="4000" b="1" dirty="0">
                 <a:solidFill>
-                  <a:srgbClr val="468260"/>
+                  <a:srgbClr val="508D4E"/>
                 </a:solidFill>
               </a:rPr>
               <a:t>Skills / </a:t>
@@ -6099,7 +7573,7 @@
             <a:r>
               <a:rPr lang="en-US" altLang="ko-KR" sz="4000" b="1" dirty="0">
                 <a:solidFill>
-                  <a:srgbClr val="468260"/>
+                  <a:srgbClr val="508D4E"/>
                 </a:solidFill>
                 <a:effectLst/>
               </a:rPr>
@@ -6107,7 +7581,7 @@
             </a:r>
             <a:endParaRPr lang="ko-KR" altLang="en-US" sz="4000" b="1" dirty="0">
               <a:solidFill>
-                <a:srgbClr val="468260"/>
+                <a:srgbClr val="508D4E"/>
               </a:solidFill>
             </a:endParaRPr>
           </a:p>
@@ -6488,120 +7962,12 @@
           </a:p>
         </p:txBody>
       </p:sp>
-      <p:pic>
-        <p:nvPicPr>
-          <p:cNvPr id="9" name="그래픽 8">
+      <p:sp>
+        <p:nvSpPr>
+          <p:cNvPr id="2" name="직사각형 1">
             <a:extLst>
               <a:ext uri="{FF2B5EF4-FFF2-40B4-BE49-F238E27FC236}">
-                <a16:creationId xmlns:a16="http://schemas.microsoft.com/office/drawing/2014/main" id="{BA903D5A-445A-A020-A487-EA94B039C30D}"/>
-              </a:ext>
-            </a:extLst>
-          </p:cNvPr>
-          <p:cNvPicPr>
-            <a:picLocks noChangeAspect="1"/>
-          </p:cNvPicPr>
-          <p:nvPr/>
-        </p:nvPicPr>
-        <p:blipFill>
-          <a:blip r:embed="rId5">
-            <a:extLst>
-              <a:ext uri="{96DAC541-7B7A-43D3-8B79-37D633B846F1}">
-                <asvg:svgBlip xmlns:asvg="http://schemas.microsoft.com/office/drawing/2016/SVG/main" r:embed="rId6"/>
-              </a:ext>
-            </a:extLst>
-          </a:blip>
-          <a:stretch>
-            <a:fillRect/>
-          </a:stretch>
-        </p:blipFill>
-        <p:spPr>
-          <a:xfrm>
-            <a:off x="12155465" y="3126129"/>
-            <a:ext cx="1504950" cy="1352550"/>
-          </a:xfrm>
-          <a:prstGeom prst="rect">
-            <a:avLst/>
-          </a:prstGeom>
-        </p:spPr>
-      </p:pic>
-      <p:pic>
-        <p:nvPicPr>
-          <p:cNvPr id="15" name="그래픽 14">
-            <a:extLst>
-              <a:ext uri="{FF2B5EF4-FFF2-40B4-BE49-F238E27FC236}">
-                <a16:creationId xmlns:a16="http://schemas.microsoft.com/office/drawing/2014/main" id="{8DE821AF-FB9B-B8EC-1DB2-65B55CD43087}"/>
-              </a:ext>
-            </a:extLst>
-          </p:cNvPr>
-          <p:cNvPicPr>
-            <a:picLocks noChangeAspect="1"/>
-          </p:cNvPicPr>
-          <p:nvPr/>
-        </p:nvPicPr>
-        <p:blipFill>
-          <a:blip r:embed="rId7">
-            <a:extLst>
-              <a:ext uri="{96DAC541-7B7A-43D3-8B79-37D633B846F1}">
-                <asvg:svgBlip xmlns:asvg="http://schemas.microsoft.com/office/drawing/2016/SVG/main" r:embed="rId8"/>
-              </a:ext>
-            </a:extLst>
-          </a:blip>
-          <a:stretch>
-            <a:fillRect/>
-          </a:stretch>
-        </p:blipFill>
-        <p:spPr>
-          <a:xfrm>
-            <a:off x="11062462" y="4088729"/>
-            <a:ext cx="1504950" cy="1504950"/>
-          </a:xfrm>
-          <a:prstGeom prst="rect">
-            <a:avLst/>
-          </a:prstGeom>
-        </p:spPr>
-      </p:pic>
-      <p:pic>
-        <p:nvPicPr>
-          <p:cNvPr id="17" name="그림 16">
-            <a:extLst>
-              <a:ext uri="{FF2B5EF4-FFF2-40B4-BE49-F238E27FC236}">
-                <a16:creationId xmlns:a16="http://schemas.microsoft.com/office/drawing/2014/main" id="{885EAE2F-710E-5F01-C759-C702E48990FA}"/>
-              </a:ext>
-            </a:extLst>
-          </p:cNvPr>
-          <p:cNvPicPr>
-            <a:picLocks noChangeAspect="1"/>
-          </p:cNvPicPr>
-          <p:nvPr/>
-        </p:nvPicPr>
-        <p:blipFill>
-          <a:blip r:embed="rId9">
-            <a:extLst>
-              <a:ext uri="{28A0092B-C50C-407E-A947-70E740481C1C}">
-                <a14:useLocalDpi xmlns:a14="http://schemas.microsoft.com/office/drawing/2010/main" val="0"/>
-              </a:ext>
-            </a:extLst>
-          </a:blip>
-          <a:stretch>
-            <a:fillRect/>
-          </a:stretch>
-        </p:blipFill>
-        <p:spPr>
-          <a:xfrm>
-            <a:off x="12240001" y="5172407"/>
-            <a:ext cx="1219200" cy="1219200"/>
-          </a:xfrm>
-          <a:prstGeom prst="rect">
-            <a:avLst/>
-          </a:prstGeom>
-        </p:spPr>
-      </p:pic>
-      <p:sp>
-        <p:nvSpPr>
-          <p:cNvPr id="23" name="직사각형 22">
-            <a:extLst>
-              <a:ext uri="{FF2B5EF4-FFF2-40B4-BE49-F238E27FC236}">
-                <a16:creationId xmlns:a16="http://schemas.microsoft.com/office/drawing/2014/main" id="{65B1D6D8-5D6F-08D8-3C27-F3D4C1EB62E9}"/>
+                <a16:creationId xmlns:a16="http://schemas.microsoft.com/office/drawing/2014/main" id="{D6D00FE6-FD15-46B6-DF1C-9C6AC81AF5BD}"/>
               </a:ext>
             </a:extLst>
           </p:cNvPr>
@@ -6610,16 +7976,118 @@
         </p:nvSpPr>
         <p:spPr>
           <a:xfrm>
-            <a:off x="10941269" y="1978022"/>
-            <a:ext cx="2816772" cy="4780130"/>
+            <a:off x="6869113" y="-495300"/>
+            <a:ext cx="3327400" cy="889653"/>
           </a:xfrm>
           <a:prstGeom prst="rect">
             <a:avLst/>
           </a:prstGeom>
           <a:solidFill>
-            <a:schemeClr val="bg1">
-              <a:alpha val="51000"/>
+            <a:srgbClr val="80AF81"/>
+          </a:solidFill>
+          <a:ln>
+            <a:noFill/>
+          </a:ln>
+        </p:spPr>
+        <p:style>
+          <a:lnRef idx="2">
+            <a:schemeClr val="accent1">
+              <a:shade val="15000"/>
             </a:schemeClr>
+          </a:lnRef>
+          <a:fillRef idx="1">
+            <a:schemeClr val="accent1"/>
+          </a:fillRef>
+          <a:effectRef idx="0">
+            <a:schemeClr val="accent1"/>
+          </a:effectRef>
+          <a:fontRef idx="minor">
+            <a:schemeClr val="lt1"/>
+          </a:fontRef>
+        </p:style>
+        <p:txBody>
+          <a:bodyPr rtlCol="0" anchor="ctr"/>
+          <a:lstStyle/>
+          <a:p>
+            <a:pPr algn="ctr"/>
+            <a:endParaRPr lang="ko-KR" altLang="en-US" dirty="0"/>
+          </a:p>
+        </p:txBody>
+      </p:sp>
+      <p:sp>
+        <p:nvSpPr>
+          <p:cNvPr id="3" name="직사각형 2">
+            <a:extLst>
+              <a:ext uri="{FF2B5EF4-FFF2-40B4-BE49-F238E27FC236}">
+                <a16:creationId xmlns:a16="http://schemas.microsoft.com/office/drawing/2014/main" id="{7CDFA16A-4A7B-1078-05BC-137712355066}"/>
+              </a:ext>
+            </a:extLst>
+          </p:cNvPr>
+          <p:cNvSpPr/>
+          <p:nvPr/>
+        </p:nvSpPr>
+        <p:spPr>
+          <a:xfrm>
+            <a:off x="9034245" y="-495300"/>
+            <a:ext cx="3327400" cy="889653"/>
+          </a:xfrm>
+          <a:prstGeom prst="rect">
+            <a:avLst/>
+          </a:prstGeom>
+          <a:solidFill>
+            <a:srgbClr val="508D4E"/>
+          </a:solidFill>
+          <a:ln>
+            <a:noFill/>
+          </a:ln>
+        </p:spPr>
+        <p:style>
+          <a:lnRef idx="2">
+            <a:schemeClr val="accent1">
+              <a:shade val="15000"/>
+            </a:schemeClr>
+          </a:lnRef>
+          <a:fillRef idx="1">
+            <a:schemeClr val="accent1"/>
+          </a:fillRef>
+          <a:effectRef idx="0">
+            <a:schemeClr val="accent1"/>
+          </a:effectRef>
+          <a:fontRef idx="minor">
+            <a:schemeClr val="lt1"/>
+          </a:fontRef>
+        </p:style>
+        <p:txBody>
+          <a:bodyPr rtlCol="0" anchor="ctr"/>
+          <a:lstStyle/>
+          <a:p>
+            <a:pPr algn="ctr"/>
+            <a:endParaRPr lang="ko-KR" altLang="en-US"/>
+          </a:p>
+        </p:txBody>
+      </p:sp>
+      <p:sp>
+        <p:nvSpPr>
+          <p:cNvPr id="8" name="직사각형 7">
+            <a:extLst>
+              <a:ext uri="{FF2B5EF4-FFF2-40B4-BE49-F238E27FC236}">
+                <a16:creationId xmlns:a16="http://schemas.microsoft.com/office/drawing/2014/main" id="{F7E2D490-7F2E-130E-B5F2-D235E2BE85E9}"/>
+              </a:ext>
+            </a:extLst>
+          </p:cNvPr>
+          <p:cNvSpPr/>
+          <p:nvPr/>
+        </p:nvSpPr>
+        <p:spPr>
+          <a:xfrm>
+            <a:off x="11589844" y="-495300"/>
+            <a:ext cx="3327400" cy="889653"/>
+          </a:xfrm>
+          <a:prstGeom prst="rect">
+            <a:avLst/>
+          </a:prstGeom>
+          <a:solidFill>
+            <a:srgbClr val="1A5319"/>
           </a:solidFill>
           <a:ln>
             <a:noFill/>
@@ -6740,97 +8208,6 @@
           </a:p>
         </p:txBody>
       </p:sp>
-      <p:grpSp>
-        <p:nvGrpSpPr>
-          <p:cNvPr id="22" name="그룹 21">
-            <a:extLst>
-              <a:ext uri="{FF2B5EF4-FFF2-40B4-BE49-F238E27FC236}">
-                <a16:creationId xmlns:a16="http://schemas.microsoft.com/office/drawing/2014/main" id="{C399AFEC-4B42-CE11-74AC-A559613914C7}"/>
-              </a:ext>
-            </a:extLst>
-          </p:cNvPr>
-          <p:cNvGrpSpPr/>
-          <p:nvPr/>
-        </p:nvGrpSpPr>
-        <p:grpSpPr>
-          <a:xfrm>
-            <a:off x="11153488" y="2234046"/>
-            <a:ext cx="2173026" cy="1143120"/>
-            <a:chOff x="11153488" y="2234046"/>
-            <a:chExt cx="2173026" cy="1143120"/>
-          </a:xfrm>
-        </p:grpSpPr>
-        <p:pic>
-          <p:nvPicPr>
-            <p:cNvPr id="21" name="그림 20">
-              <a:extLst>
-                <a:ext uri="{FF2B5EF4-FFF2-40B4-BE49-F238E27FC236}">
-                  <a16:creationId xmlns:a16="http://schemas.microsoft.com/office/drawing/2014/main" id="{14CEA7FE-1B8C-6FB9-ABEB-8E9D53E39323}"/>
-                </a:ext>
-              </a:extLst>
-            </p:cNvPr>
-            <p:cNvPicPr>
-              <a:picLocks noChangeAspect="1"/>
-            </p:cNvPicPr>
-            <p:nvPr/>
-          </p:nvPicPr>
-          <p:blipFill>
-            <a:blip r:embed="rId2"/>
-            <a:srcRect b="17335"/>
-            <a:stretch/>
-          </p:blipFill>
-          <p:spPr>
-            <a:xfrm>
-              <a:off x="11153488" y="2234046"/>
-              <a:ext cx="2173026" cy="1143120"/>
-            </a:xfrm>
-            <a:prstGeom prst="rect">
-              <a:avLst/>
-            </a:prstGeom>
-            <a:ln>
-              <a:solidFill>
-                <a:srgbClr val="3A75B0"/>
-              </a:solidFill>
-            </a:ln>
-          </p:spPr>
-        </p:pic>
-        <p:pic>
-          <p:nvPicPr>
-            <p:cNvPr id="19" name="그래픽 18">
-              <a:extLst>
-                <a:ext uri="{FF2B5EF4-FFF2-40B4-BE49-F238E27FC236}">
-                  <a16:creationId xmlns:a16="http://schemas.microsoft.com/office/drawing/2014/main" id="{7BD50618-B8C6-97E7-BAA7-750FCB04298A}"/>
-                </a:ext>
-              </a:extLst>
-            </p:cNvPr>
-            <p:cNvPicPr>
-              <a:picLocks noChangeAspect="1"/>
-            </p:cNvPicPr>
-            <p:nvPr/>
-          </p:nvPicPr>
-          <p:blipFill>
-            <a:blip r:embed="rId3">
-              <a:extLst>
-                <a:ext uri="{96DAC541-7B7A-43D3-8B79-37D633B846F1}">
-                  <asvg:svgBlip xmlns:asvg="http://schemas.microsoft.com/office/drawing/2016/SVG/main" r:embed="rId4"/>
-                </a:ext>
-              </a:extLst>
-            </a:blip>
-            <a:stretch>
-              <a:fillRect/>
-            </a:stretch>
-          </p:blipFill>
-          <p:spPr>
-            <a:xfrm>
-              <a:off x="11153488" y="2265657"/>
-              <a:ext cx="2173026" cy="1086513"/>
-            </a:xfrm>
-            <a:prstGeom prst="rect">
-              <a:avLst/>
-            </a:prstGeom>
-          </p:spPr>
-        </p:pic>
-      </p:grpSp>
       <p:sp>
         <p:nvSpPr>
           <p:cNvPr id="4" name="TextBox 3">
@@ -6862,7 +8239,7 @@
             <a:r>
               <a:rPr lang="en-US" altLang="ko-KR" sz="4000" b="1" dirty="0">
                 <a:solidFill>
-                  <a:srgbClr val="468260"/>
+                  <a:srgbClr val="508D4E"/>
                 </a:solidFill>
               </a:rPr>
               <a:t>Skills / Databases </a:t>
@@ -6870,7 +8247,7 @@
             <a:r>
               <a:rPr lang="ko-KR" altLang="en-US" sz="4000" b="1" dirty="0">
                 <a:solidFill>
-                  <a:srgbClr val="468260"/>
+                  <a:srgbClr val="508D4E"/>
                 </a:solidFill>
               </a:rPr>
               <a:t>및 기타</a:t>
@@ -7293,120 +8670,12 @@
           </a:p>
         </p:txBody>
       </p:sp>
-      <p:pic>
-        <p:nvPicPr>
-          <p:cNvPr id="9" name="그래픽 8">
+      <p:sp>
+        <p:nvSpPr>
+          <p:cNvPr id="2" name="직사각형 1">
             <a:extLst>
               <a:ext uri="{FF2B5EF4-FFF2-40B4-BE49-F238E27FC236}">
-                <a16:creationId xmlns:a16="http://schemas.microsoft.com/office/drawing/2014/main" id="{B69B50FF-F99A-0EA4-527D-E60227D6FEF4}"/>
-              </a:ext>
-            </a:extLst>
-          </p:cNvPr>
-          <p:cNvPicPr>
-            <a:picLocks noChangeAspect="1"/>
-          </p:cNvPicPr>
-          <p:nvPr/>
-        </p:nvPicPr>
-        <p:blipFill>
-          <a:blip r:embed="rId5">
-            <a:extLst>
-              <a:ext uri="{96DAC541-7B7A-43D3-8B79-37D633B846F1}">
-                <asvg:svgBlip xmlns:asvg="http://schemas.microsoft.com/office/drawing/2016/SVG/main" r:embed="rId6"/>
-              </a:ext>
-            </a:extLst>
-          </a:blip>
-          <a:stretch>
-            <a:fillRect/>
-          </a:stretch>
-        </p:blipFill>
-        <p:spPr>
-          <a:xfrm>
-            <a:off x="12155465" y="3126129"/>
-            <a:ext cx="1504950" cy="1352550"/>
-          </a:xfrm>
-          <a:prstGeom prst="rect">
-            <a:avLst/>
-          </a:prstGeom>
-        </p:spPr>
-      </p:pic>
-      <p:pic>
-        <p:nvPicPr>
-          <p:cNvPr id="15" name="그래픽 14">
-            <a:extLst>
-              <a:ext uri="{FF2B5EF4-FFF2-40B4-BE49-F238E27FC236}">
-                <a16:creationId xmlns:a16="http://schemas.microsoft.com/office/drawing/2014/main" id="{705CFF36-9176-7781-4251-C3F180699636}"/>
-              </a:ext>
-            </a:extLst>
-          </p:cNvPr>
-          <p:cNvPicPr>
-            <a:picLocks noChangeAspect="1"/>
-          </p:cNvPicPr>
-          <p:nvPr/>
-        </p:nvPicPr>
-        <p:blipFill>
-          <a:blip r:embed="rId7">
-            <a:extLst>
-              <a:ext uri="{96DAC541-7B7A-43D3-8B79-37D633B846F1}">
-                <asvg:svgBlip xmlns:asvg="http://schemas.microsoft.com/office/drawing/2016/SVG/main" r:embed="rId8"/>
-              </a:ext>
-            </a:extLst>
-          </a:blip>
-          <a:stretch>
-            <a:fillRect/>
-          </a:stretch>
-        </p:blipFill>
-        <p:spPr>
-          <a:xfrm>
-            <a:off x="11062462" y="4088729"/>
-            <a:ext cx="1504950" cy="1504950"/>
-          </a:xfrm>
-          <a:prstGeom prst="rect">
-            <a:avLst/>
-          </a:prstGeom>
-        </p:spPr>
-      </p:pic>
-      <p:pic>
-        <p:nvPicPr>
-          <p:cNvPr id="17" name="그림 16">
-            <a:extLst>
-              <a:ext uri="{FF2B5EF4-FFF2-40B4-BE49-F238E27FC236}">
-                <a16:creationId xmlns:a16="http://schemas.microsoft.com/office/drawing/2014/main" id="{7C906498-96E9-F608-D99A-3A38332C5C0A}"/>
-              </a:ext>
-            </a:extLst>
-          </p:cNvPr>
-          <p:cNvPicPr>
-            <a:picLocks noChangeAspect="1"/>
-          </p:cNvPicPr>
-          <p:nvPr/>
-        </p:nvPicPr>
-        <p:blipFill>
-          <a:blip r:embed="rId9">
-            <a:extLst>
-              <a:ext uri="{28A0092B-C50C-407E-A947-70E740481C1C}">
-                <a14:useLocalDpi xmlns:a14="http://schemas.microsoft.com/office/drawing/2010/main" val="0"/>
-              </a:ext>
-            </a:extLst>
-          </a:blip>
-          <a:stretch>
-            <a:fillRect/>
-          </a:stretch>
-        </p:blipFill>
-        <p:spPr>
-          <a:xfrm>
-            <a:off x="12240001" y="5172407"/>
-            <a:ext cx="1219200" cy="1219200"/>
-          </a:xfrm>
-          <a:prstGeom prst="rect">
-            <a:avLst/>
-          </a:prstGeom>
-        </p:spPr>
-      </p:pic>
-      <p:sp>
-        <p:nvSpPr>
-          <p:cNvPr id="23" name="직사각형 22">
-            <a:extLst>
-              <a:ext uri="{FF2B5EF4-FFF2-40B4-BE49-F238E27FC236}">
-                <a16:creationId xmlns:a16="http://schemas.microsoft.com/office/drawing/2014/main" id="{3D37EC2E-C2B3-EE75-9E00-8FB00E3542A8}"/>
+                <a16:creationId xmlns:a16="http://schemas.microsoft.com/office/drawing/2014/main" id="{04BE22A4-22A1-1765-6271-A57AEA15175B}"/>
               </a:ext>
             </a:extLst>
           </p:cNvPr>
@@ -7415,16 +8684,118 @@
         </p:nvSpPr>
         <p:spPr>
           <a:xfrm>
-            <a:off x="10941269" y="1978022"/>
-            <a:ext cx="2816772" cy="4780130"/>
+            <a:off x="6869113" y="-495300"/>
+            <a:ext cx="3327400" cy="889653"/>
           </a:xfrm>
           <a:prstGeom prst="rect">
             <a:avLst/>
           </a:prstGeom>
           <a:solidFill>
-            <a:schemeClr val="bg1">
-              <a:alpha val="51000"/>
+            <a:srgbClr val="80AF81"/>
+          </a:solidFill>
+          <a:ln>
+            <a:noFill/>
+          </a:ln>
+        </p:spPr>
+        <p:style>
+          <a:lnRef idx="2">
+            <a:schemeClr val="accent1">
+              <a:shade val="15000"/>
             </a:schemeClr>
+          </a:lnRef>
+          <a:fillRef idx="1">
+            <a:schemeClr val="accent1"/>
+          </a:fillRef>
+          <a:effectRef idx="0">
+            <a:schemeClr val="accent1"/>
+          </a:effectRef>
+          <a:fontRef idx="minor">
+            <a:schemeClr val="lt1"/>
+          </a:fontRef>
+        </p:style>
+        <p:txBody>
+          <a:bodyPr rtlCol="0" anchor="ctr"/>
+          <a:lstStyle/>
+          <a:p>
+            <a:pPr algn="ctr"/>
+            <a:endParaRPr lang="ko-KR" altLang="en-US" dirty="0"/>
+          </a:p>
+        </p:txBody>
+      </p:sp>
+      <p:sp>
+        <p:nvSpPr>
+          <p:cNvPr id="6" name="직사각형 5">
+            <a:extLst>
+              <a:ext uri="{FF2B5EF4-FFF2-40B4-BE49-F238E27FC236}">
+                <a16:creationId xmlns:a16="http://schemas.microsoft.com/office/drawing/2014/main" id="{85C47515-FFC4-CB46-8FEB-31EF34D5E521}"/>
+              </a:ext>
+            </a:extLst>
+          </p:cNvPr>
+          <p:cNvSpPr/>
+          <p:nvPr/>
+        </p:nvSpPr>
+        <p:spPr>
+          <a:xfrm>
+            <a:off x="9034245" y="-495300"/>
+            <a:ext cx="3327400" cy="889653"/>
+          </a:xfrm>
+          <a:prstGeom prst="rect">
+            <a:avLst/>
+          </a:prstGeom>
+          <a:solidFill>
+            <a:srgbClr val="508D4E"/>
+          </a:solidFill>
+          <a:ln>
+            <a:noFill/>
+          </a:ln>
+        </p:spPr>
+        <p:style>
+          <a:lnRef idx="2">
+            <a:schemeClr val="accent1">
+              <a:shade val="15000"/>
+            </a:schemeClr>
+          </a:lnRef>
+          <a:fillRef idx="1">
+            <a:schemeClr val="accent1"/>
+          </a:fillRef>
+          <a:effectRef idx="0">
+            <a:schemeClr val="accent1"/>
+          </a:effectRef>
+          <a:fontRef idx="minor">
+            <a:schemeClr val="lt1"/>
+          </a:fontRef>
+        </p:style>
+        <p:txBody>
+          <a:bodyPr rtlCol="0" anchor="ctr"/>
+          <a:lstStyle/>
+          <a:p>
+            <a:pPr algn="ctr"/>
+            <a:endParaRPr lang="ko-KR" altLang="en-US"/>
+          </a:p>
+        </p:txBody>
+      </p:sp>
+      <p:sp>
+        <p:nvSpPr>
+          <p:cNvPr id="8" name="직사각형 7">
+            <a:extLst>
+              <a:ext uri="{FF2B5EF4-FFF2-40B4-BE49-F238E27FC236}">
+                <a16:creationId xmlns:a16="http://schemas.microsoft.com/office/drawing/2014/main" id="{302617D8-CBFC-F3C5-B01A-448AAE21F30E}"/>
+              </a:ext>
+            </a:extLst>
+          </p:cNvPr>
+          <p:cNvSpPr/>
+          <p:nvPr/>
+        </p:nvSpPr>
+        <p:spPr>
+          <a:xfrm>
+            <a:off x="11589844" y="-495300"/>
+            <a:ext cx="3327400" cy="889653"/>
+          </a:xfrm>
+          <a:prstGeom prst="rect">
+            <a:avLst/>
+          </a:prstGeom>
+          <a:solidFill>
+            <a:srgbClr val="1A5319"/>
           </a:solidFill>
           <a:ln>
             <a:noFill/>
@@ -7516,14 +8887,14 @@
             <a:r>
               <a:rPr lang="en-US" altLang="ko-KR" sz="4000" b="1" dirty="0">
                 <a:solidFill>
-                  <a:srgbClr val="468260"/>
+                  <a:srgbClr val="508D4E"/>
                 </a:solidFill>
               </a:rPr>
               <a:t>Bootcamps</a:t>
             </a:r>
             <a:endParaRPr lang="ko-KR" altLang="en-US" sz="4000" b="1" dirty="0">
               <a:solidFill>
-                <a:srgbClr val="468260"/>
+                <a:srgbClr val="508D4E"/>
               </a:solidFill>
             </a:endParaRPr>
           </a:p>
@@ -9084,6 +10455,162 @@
               </a:rPr>
               <a:t> 외주 계약 프로젝트 개발, 실제 유저 기반 최종 납품 및 유지 보수 경험 </a:t>
             </a:r>
+          </a:p>
+        </p:txBody>
+      </p:sp>
+      <p:sp>
+        <p:nvSpPr>
+          <p:cNvPr id="2" name="직사각형 1">
+            <a:extLst>
+              <a:ext uri="{FF2B5EF4-FFF2-40B4-BE49-F238E27FC236}">
+                <a16:creationId xmlns:a16="http://schemas.microsoft.com/office/drawing/2014/main" id="{CCFA1288-41D5-75E9-409D-BDA1B776050D}"/>
+              </a:ext>
+            </a:extLst>
+          </p:cNvPr>
+          <p:cNvSpPr/>
+          <p:nvPr/>
+        </p:nvSpPr>
+        <p:spPr>
+          <a:xfrm>
+            <a:off x="6869113" y="-495300"/>
+            <a:ext cx="3327400" cy="889653"/>
+          </a:xfrm>
+          <a:prstGeom prst="rect">
+            <a:avLst/>
+          </a:prstGeom>
+          <a:solidFill>
+            <a:srgbClr val="80AF81"/>
+          </a:solidFill>
+          <a:ln>
+            <a:noFill/>
+          </a:ln>
+        </p:spPr>
+        <p:style>
+          <a:lnRef idx="2">
+            <a:schemeClr val="accent1">
+              <a:shade val="15000"/>
+            </a:schemeClr>
+          </a:lnRef>
+          <a:fillRef idx="1">
+            <a:schemeClr val="accent1"/>
+          </a:fillRef>
+          <a:effectRef idx="0">
+            <a:schemeClr val="accent1"/>
+          </a:effectRef>
+          <a:fontRef idx="minor">
+            <a:schemeClr val="lt1"/>
+          </a:fontRef>
+        </p:style>
+        <p:txBody>
+          <a:bodyPr rtlCol="0" anchor="ctr"/>
+          <a:lstStyle/>
+          <a:p>
+            <a:pPr algn="ctr"/>
+            <a:endParaRPr lang="ko-KR" altLang="en-US" dirty="0"/>
+          </a:p>
+        </p:txBody>
+      </p:sp>
+      <p:sp>
+        <p:nvSpPr>
+          <p:cNvPr id="3" name="직사각형 2">
+            <a:extLst>
+              <a:ext uri="{FF2B5EF4-FFF2-40B4-BE49-F238E27FC236}">
+                <a16:creationId xmlns:a16="http://schemas.microsoft.com/office/drawing/2014/main" id="{B0DCBA0F-D25E-D4FB-01D8-AA133876E337}"/>
+              </a:ext>
+            </a:extLst>
+          </p:cNvPr>
+          <p:cNvSpPr/>
+          <p:nvPr/>
+        </p:nvSpPr>
+        <p:spPr>
+          <a:xfrm>
+            <a:off x="9034245" y="-495300"/>
+            <a:ext cx="3327400" cy="889653"/>
+          </a:xfrm>
+          <a:prstGeom prst="rect">
+            <a:avLst/>
+          </a:prstGeom>
+          <a:solidFill>
+            <a:srgbClr val="508D4E"/>
+          </a:solidFill>
+          <a:ln>
+            <a:noFill/>
+          </a:ln>
+        </p:spPr>
+        <p:style>
+          <a:lnRef idx="2">
+            <a:schemeClr val="accent1">
+              <a:shade val="15000"/>
+            </a:schemeClr>
+          </a:lnRef>
+          <a:fillRef idx="1">
+            <a:schemeClr val="accent1"/>
+          </a:fillRef>
+          <a:effectRef idx="0">
+            <a:schemeClr val="accent1"/>
+          </a:effectRef>
+          <a:fontRef idx="minor">
+            <a:schemeClr val="lt1"/>
+          </a:fontRef>
+        </p:style>
+        <p:txBody>
+          <a:bodyPr rtlCol="0" anchor="ctr"/>
+          <a:lstStyle/>
+          <a:p>
+            <a:pPr algn="ctr"/>
+            <a:endParaRPr lang="ko-KR" altLang="en-US"/>
+          </a:p>
+        </p:txBody>
+      </p:sp>
+      <p:sp>
+        <p:nvSpPr>
+          <p:cNvPr id="5" name="직사각형 4">
+            <a:extLst>
+              <a:ext uri="{FF2B5EF4-FFF2-40B4-BE49-F238E27FC236}">
+                <a16:creationId xmlns:a16="http://schemas.microsoft.com/office/drawing/2014/main" id="{6323CE68-F2F8-ED0F-27DA-8083C367CF7D}"/>
+              </a:ext>
+            </a:extLst>
+          </p:cNvPr>
+          <p:cNvSpPr/>
+          <p:nvPr/>
+        </p:nvSpPr>
+        <p:spPr>
+          <a:xfrm>
+            <a:off x="11589844" y="-495300"/>
+            <a:ext cx="3327400" cy="889653"/>
+          </a:xfrm>
+          <a:prstGeom prst="rect">
+            <a:avLst/>
+          </a:prstGeom>
+          <a:solidFill>
+            <a:srgbClr val="1A5319"/>
+          </a:solidFill>
+          <a:ln>
+            <a:noFill/>
+          </a:ln>
+        </p:spPr>
+        <p:style>
+          <a:lnRef idx="2">
+            <a:schemeClr val="accent1">
+              <a:shade val="15000"/>
+            </a:schemeClr>
+          </a:lnRef>
+          <a:fillRef idx="1">
+            <a:schemeClr val="accent1"/>
+          </a:fillRef>
+          <a:effectRef idx="0">
+            <a:schemeClr val="accent1"/>
+          </a:effectRef>
+          <a:fontRef idx="minor">
+            <a:schemeClr val="lt1"/>
+          </a:fontRef>
+        </p:style>
+        <p:txBody>
+          <a:bodyPr rtlCol="0" anchor="ctr"/>
+          <a:lstStyle/>
+          <a:p>
+            <a:pPr algn="ctr"/>
+            <a:endParaRPr lang="ko-KR" altLang="en-US"/>
           </a:p>
         </p:txBody>
       </p:sp>
@@ -9148,7 +10675,7 @@
             <a:r>
               <a:rPr lang="en-US" altLang="ko-KR" sz="4000" b="1" dirty="0">
                 <a:solidFill>
-                  <a:srgbClr val="468260"/>
+                  <a:srgbClr val="508D4E"/>
                 </a:solidFill>
               </a:rPr>
               <a:t>Career / </a:t>
@@ -9156,7 +10683,7 @@
             <a:r>
               <a:rPr lang="ko-KR" altLang="en-US" sz="4000" b="1" dirty="0" err="1">
                 <a:solidFill>
-                  <a:srgbClr val="468260"/>
+                  <a:srgbClr val="508D4E"/>
                 </a:solidFill>
               </a:rPr>
               <a:t>윈즈</a:t>
@@ -9164,7 +10691,7 @@
             <a:r>
               <a:rPr lang="ko-KR" altLang="en-US" sz="4000" b="1" dirty="0">
                 <a:solidFill>
-                  <a:srgbClr val="468260"/>
+                  <a:srgbClr val="508D4E"/>
                 </a:solidFill>
               </a:rPr>
               <a:t> 시스템</a:t>
@@ -10171,6 +11698,162 @@
               <a:t>트래킹</a:t>
             </a:r>
             <a:endParaRPr lang="en-US" altLang="ko-KR" dirty="0"/>
+          </a:p>
+        </p:txBody>
+      </p:sp>
+      <p:sp>
+        <p:nvSpPr>
+          <p:cNvPr id="2" name="직사각형 1">
+            <a:extLst>
+              <a:ext uri="{FF2B5EF4-FFF2-40B4-BE49-F238E27FC236}">
+                <a16:creationId xmlns:a16="http://schemas.microsoft.com/office/drawing/2014/main" id="{94F9071C-A4E1-2D2A-3513-E4D229C62135}"/>
+              </a:ext>
+            </a:extLst>
+          </p:cNvPr>
+          <p:cNvSpPr/>
+          <p:nvPr/>
+        </p:nvSpPr>
+        <p:spPr>
+          <a:xfrm>
+            <a:off x="6869113" y="-495300"/>
+            <a:ext cx="3327400" cy="889653"/>
+          </a:xfrm>
+          <a:prstGeom prst="rect">
+            <a:avLst/>
+          </a:prstGeom>
+          <a:solidFill>
+            <a:srgbClr val="80AF81"/>
+          </a:solidFill>
+          <a:ln>
+            <a:noFill/>
+          </a:ln>
+        </p:spPr>
+        <p:style>
+          <a:lnRef idx="2">
+            <a:schemeClr val="accent1">
+              <a:shade val="15000"/>
+            </a:schemeClr>
+          </a:lnRef>
+          <a:fillRef idx="1">
+            <a:schemeClr val="accent1"/>
+          </a:fillRef>
+          <a:effectRef idx="0">
+            <a:schemeClr val="accent1"/>
+          </a:effectRef>
+          <a:fontRef idx="minor">
+            <a:schemeClr val="lt1"/>
+          </a:fontRef>
+        </p:style>
+        <p:txBody>
+          <a:bodyPr rtlCol="0" anchor="ctr"/>
+          <a:lstStyle/>
+          <a:p>
+            <a:pPr algn="ctr"/>
+            <a:endParaRPr lang="ko-KR" altLang="en-US" dirty="0"/>
+          </a:p>
+        </p:txBody>
+      </p:sp>
+      <p:sp>
+        <p:nvSpPr>
+          <p:cNvPr id="3" name="직사각형 2">
+            <a:extLst>
+              <a:ext uri="{FF2B5EF4-FFF2-40B4-BE49-F238E27FC236}">
+                <a16:creationId xmlns:a16="http://schemas.microsoft.com/office/drawing/2014/main" id="{9C82BDA6-CC24-5864-912C-BC6F532B4E4B}"/>
+              </a:ext>
+            </a:extLst>
+          </p:cNvPr>
+          <p:cNvSpPr/>
+          <p:nvPr/>
+        </p:nvSpPr>
+        <p:spPr>
+          <a:xfrm>
+            <a:off x="9034245" y="-495300"/>
+            <a:ext cx="3327400" cy="889653"/>
+          </a:xfrm>
+          <a:prstGeom prst="rect">
+            <a:avLst/>
+          </a:prstGeom>
+          <a:solidFill>
+            <a:srgbClr val="508D4E"/>
+          </a:solidFill>
+          <a:ln>
+            <a:noFill/>
+          </a:ln>
+        </p:spPr>
+        <p:style>
+          <a:lnRef idx="2">
+            <a:schemeClr val="accent1">
+              <a:shade val="15000"/>
+            </a:schemeClr>
+          </a:lnRef>
+          <a:fillRef idx="1">
+            <a:schemeClr val="accent1"/>
+          </a:fillRef>
+          <a:effectRef idx="0">
+            <a:schemeClr val="accent1"/>
+          </a:effectRef>
+          <a:fontRef idx="minor">
+            <a:schemeClr val="lt1"/>
+          </a:fontRef>
+        </p:style>
+        <p:txBody>
+          <a:bodyPr rtlCol="0" anchor="ctr"/>
+          <a:lstStyle/>
+          <a:p>
+            <a:pPr algn="ctr"/>
+            <a:endParaRPr lang="ko-KR" altLang="en-US"/>
+          </a:p>
+        </p:txBody>
+      </p:sp>
+      <p:sp>
+        <p:nvSpPr>
+          <p:cNvPr id="8" name="직사각형 7">
+            <a:extLst>
+              <a:ext uri="{FF2B5EF4-FFF2-40B4-BE49-F238E27FC236}">
+                <a16:creationId xmlns:a16="http://schemas.microsoft.com/office/drawing/2014/main" id="{EB2CECEA-90D3-2CA3-48AA-ED92D1CEF9F9}"/>
+              </a:ext>
+            </a:extLst>
+          </p:cNvPr>
+          <p:cNvSpPr/>
+          <p:nvPr/>
+        </p:nvSpPr>
+        <p:spPr>
+          <a:xfrm>
+            <a:off x="11589844" y="-495300"/>
+            <a:ext cx="3327400" cy="889653"/>
+          </a:xfrm>
+          <a:prstGeom prst="rect">
+            <a:avLst/>
+          </a:prstGeom>
+          <a:solidFill>
+            <a:srgbClr val="1A5319"/>
+          </a:solidFill>
+          <a:ln>
+            <a:noFill/>
+          </a:ln>
+        </p:spPr>
+        <p:style>
+          <a:lnRef idx="2">
+            <a:schemeClr val="accent1">
+              <a:shade val="15000"/>
+            </a:schemeClr>
+          </a:lnRef>
+          <a:fillRef idx="1">
+            <a:schemeClr val="accent1"/>
+          </a:fillRef>
+          <a:effectRef idx="0">
+            <a:schemeClr val="accent1"/>
+          </a:effectRef>
+          <a:fontRef idx="minor">
+            <a:schemeClr val="lt1"/>
+          </a:fontRef>
+        </p:style>
+        <p:txBody>
+          <a:bodyPr rtlCol="0" anchor="ctr"/>
+          <a:lstStyle/>
+          <a:p>
+            <a:pPr algn="ctr"/>
+            <a:endParaRPr lang="ko-KR" altLang="en-US"/>
           </a:p>
         </p:txBody>
       </p:sp>
@@ -10241,7 +11924,7 @@
             <a:r>
               <a:rPr lang="en-US" altLang="ko-KR" sz="4000" b="1" dirty="0">
                 <a:solidFill>
-                  <a:srgbClr val="468260"/>
+                  <a:srgbClr val="508D4E"/>
                 </a:solidFill>
               </a:rPr>
               <a:t>Projects / </a:t>
@@ -10249,7 +11932,7 @@
             <a:r>
               <a:rPr lang="ko-KR" altLang="en-US" sz="4000" b="1" dirty="0" err="1">
                 <a:solidFill>
-                  <a:srgbClr val="468260"/>
+                  <a:srgbClr val="508D4E"/>
                 </a:solidFill>
               </a:rPr>
               <a:t>윈즈</a:t>
@@ -10257,7 +11940,7 @@
             <a:r>
               <a:rPr lang="ko-KR" altLang="en-US" sz="4000" b="1" dirty="0">
                 <a:solidFill>
-                  <a:srgbClr val="468260"/>
+                  <a:srgbClr val="508D4E"/>
                 </a:solidFill>
               </a:rPr>
               <a:t> 시스템</a:t>
@@ -10553,7 +12236,7 @@
         <p:spPr>
           <a:xfrm>
             <a:off x="1146968" y="3469193"/>
-            <a:ext cx="11235532" cy="3323987"/>
+            <a:ext cx="11235532" cy="3600986"/>
           </a:xfrm>
           <a:prstGeom prst="rect">
             <a:avLst/>
@@ -10740,6 +12423,14 @@
               <a:rPr lang="ko-KR" altLang="en-US" dirty="0"/>
               <a:t>어떠한 로직으로 동작하는지 전반적인 프로세스 파악의 경험 및 추후 발생하는 이슈들에 대해 명확하고 빠른 처리가 가능한 역량 증대</a:t>
             </a:r>
+            <a:endParaRPr lang="en-US" altLang="ko-KR" dirty="0"/>
+          </a:p>
+          <a:p>
+            <a:pPr marL="285750" indent="-285750">
+              <a:buFont typeface="Arial" panose="020B0604020202020204" pitchFamily="34" charset="0"/>
+              <a:buChar char="•"/>
+            </a:pPr>
+            <a:endParaRPr lang="ko-KR" altLang="en-US" dirty="0"/>
           </a:p>
           <a:p>
             <a:pPr marR="0" lvl="0" algn="l" defTabSz="914400" rtl="0" eaLnBrk="0" fontAlgn="base" latinLnBrk="0" hangingPunct="0">
@@ -10775,11 +12466,180 @@
             </a:pPr>
             <a:r>
               <a:rPr lang="ko-KR" altLang="en-US" sz="2200" b="1" dirty="0">
-                <a:hlinkClick r:id="rId3"/>
+                <a:solidFill>
+                  <a:srgbClr val="508D4E"/>
+                </a:solidFill>
+                <a:hlinkClick r:id="rId3">
+                  <a:extLst>
+                    <a:ext uri="{A12FA001-AC4F-418D-AE19-62706E023703}">
+                      <ahyp:hlinkClr xmlns:ahyp="http://schemas.microsoft.com/office/drawing/2018/hyperlinkcolor" val="tx"/>
+                    </a:ext>
+                  </a:extLst>
+                </a:hlinkClick>
               </a:rPr>
               <a:t>상세 보기</a:t>
             </a:r>
-            <a:endParaRPr lang="en-US" altLang="ko-KR" sz="2200" b="1" dirty="0"/>
+            <a:endParaRPr lang="en-US" altLang="ko-KR" sz="2200" b="1" dirty="0">
+              <a:solidFill>
+                <a:srgbClr val="508D4E"/>
+              </a:solidFill>
+            </a:endParaRPr>
+          </a:p>
+        </p:txBody>
+      </p:sp>
+      <p:sp>
+        <p:nvSpPr>
+          <p:cNvPr id="6" name="직사각형 5">
+            <a:extLst>
+              <a:ext uri="{FF2B5EF4-FFF2-40B4-BE49-F238E27FC236}">
+                <a16:creationId xmlns:a16="http://schemas.microsoft.com/office/drawing/2014/main" id="{204FD3C1-80D9-733A-AE46-3E47ADCEBACD}"/>
+              </a:ext>
+            </a:extLst>
+          </p:cNvPr>
+          <p:cNvSpPr/>
+          <p:nvPr/>
+        </p:nvSpPr>
+        <p:spPr>
+          <a:xfrm>
+            <a:off x="6869113" y="-495300"/>
+            <a:ext cx="3327400" cy="889653"/>
+          </a:xfrm>
+          <a:prstGeom prst="rect">
+            <a:avLst/>
+          </a:prstGeom>
+          <a:solidFill>
+            <a:srgbClr val="80AF81"/>
+          </a:solidFill>
+          <a:ln>
+            <a:noFill/>
+          </a:ln>
+        </p:spPr>
+        <p:style>
+          <a:lnRef idx="2">
+            <a:schemeClr val="accent1">
+              <a:shade val="15000"/>
+            </a:schemeClr>
+          </a:lnRef>
+          <a:fillRef idx="1">
+            <a:schemeClr val="accent1"/>
+          </a:fillRef>
+          <a:effectRef idx="0">
+            <a:schemeClr val="accent1"/>
+          </a:effectRef>
+          <a:fontRef idx="minor">
+            <a:schemeClr val="lt1"/>
+          </a:fontRef>
+        </p:style>
+        <p:txBody>
+          <a:bodyPr rtlCol="0" anchor="ctr"/>
+          <a:lstStyle/>
+          <a:p>
+            <a:pPr algn="ctr"/>
+            <a:endParaRPr lang="ko-KR" altLang="en-US" dirty="0"/>
+          </a:p>
+        </p:txBody>
+      </p:sp>
+      <p:sp>
+        <p:nvSpPr>
+          <p:cNvPr id="8" name="직사각형 7">
+            <a:extLst>
+              <a:ext uri="{FF2B5EF4-FFF2-40B4-BE49-F238E27FC236}">
+                <a16:creationId xmlns:a16="http://schemas.microsoft.com/office/drawing/2014/main" id="{B302C9B0-EAE9-1752-32A3-3E4D727B5D05}"/>
+              </a:ext>
+            </a:extLst>
+          </p:cNvPr>
+          <p:cNvSpPr/>
+          <p:nvPr/>
+        </p:nvSpPr>
+        <p:spPr>
+          <a:xfrm>
+            <a:off x="9034245" y="-495300"/>
+            <a:ext cx="3327400" cy="889653"/>
+          </a:xfrm>
+          <a:prstGeom prst="rect">
+            <a:avLst/>
+          </a:prstGeom>
+          <a:solidFill>
+            <a:srgbClr val="508D4E"/>
+          </a:solidFill>
+          <a:ln>
+            <a:noFill/>
+          </a:ln>
+        </p:spPr>
+        <p:style>
+          <a:lnRef idx="2">
+            <a:schemeClr val="accent1">
+              <a:shade val="15000"/>
+            </a:schemeClr>
+          </a:lnRef>
+          <a:fillRef idx="1">
+            <a:schemeClr val="accent1"/>
+          </a:fillRef>
+          <a:effectRef idx="0">
+            <a:schemeClr val="accent1"/>
+          </a:effectRef>
+          <a:fontRef idx="minor">
+            <a:schemeClr val="lt1"/>
+          </a:fontRef>
+        </p:style>
+        <p:txBody>
+          <a:bodyPr rtlCol="0" anchor="ctr"/>
+          <a:lstStyle/>
+          <a:p>
+            <a:pPr algn="ctr"/>
+            <a:endParaRPr lang="ko-KR" altLang="en-US"/>
+          </a:p>
+        </p:txBody>
+      </p:sp>
+      <p:sp>
+        <p:nvSpPr>
+          <p:cNvPr id="10" name="직사각형 9">
+            <a:extLst>
+              <a:ext uri="{FF2B5EF4-FFF2-40B4-BE49-F238E27FC236}">
+                <a16:creationId xmlns:a16="http://schemas.microsoft.com/office/drawing/2014/main" id="{31CFA638-B6C3-E12D-53FA-D7193BAE7D1C}"/>
+              </a:ext>
+            </a:extLst>
+          </p:cNvPr>
+          <p:cNvSpPr/>
+          <p:nvPr/>
+        </p:nvSpPr>
+        <p:spPr>
+          <a:xfrm>
+            <a:off x="11589844" y="-495300"/>
+            <a:ext cx="3327400" cy="889653"/>
+          </a:xfrm>
+          <a:prstGeom prst="rect">
+            <a:avLst/>
+          </a:prstGeom>
+          <a:solidFill>
+            <a:srgbClr val="1A5319"/>
+          </a:solidFill>
+          <a:ln>
+            <a:noFill/>
+          </a:ln>
+        </p:spPr>
+        <p:style>
+          <a:lnRef idx="2">
+            <a:schemeClr val="accent1">
+              <a:shade val="15000"/>
+            </a:schemeClr>
+          </a:lnRef>
+          <a:fillRef idx="1">
+            <a:schemeClr val="accent1"/>
+          </a:fillRef>
+          <a:effectRef idx="0">
+            <a:schemeClr val="accent1"/>
+          </a:effectRef>
+          <a:fontRef idx="minor">
+            <a:schemeClr val="lt1"/>
+          </a:fontRef>
+        </p:style>
+        <p:txBody>
+          <a:bodyPr rtlCol="0" anchor="ctr"/>
+          <a:lstStyle/>
+          <a:p>
+            <a:pPr algn="ctr"/>
+            <a:endParaRPr lang="ko-KR" altLang="en-US"/>
           </a:p>
         </p:txBody>
       </p:sp>
@@ -10850,7 +12710,7 @@
             <a:r>
               <a:rPr lang="en-US" altLang="ko-KR" sz="4000" b="1" dirty="0">
                 <a:solidFill>
-                  <a:srgbClr val="468260"/>
+                  <a:srgbClr val="508D4E"/>
                 </a:solidFill>
               </a:rPr>
               <a:t>Projects / </a:t>
@@ -10858,7 +12718,7 @@
             <a:r>
               <a:rPr lang="ko-KR" altLang="en-US" sz="4000" b="1" dirty="0" err="1">
                 <a:solidFill>
-                  <a:srgbClr val="468260"/>
+                  <a:srgbClr val="508D4E"/>
                 </a:solidFill>
               </a:rPr>
               <a:t>윈즈</a:t>
@@ -10866,7 +12726,7 @@
             <a:r>
               <a:rPr lang="ko-KR" altLang="en-US" sz="4000" b="1" dirty="0">
                 <a:solidFill>
-                  <a:srgbClr val="468260"/>
+                  <a:srgbClr val="508D4E"/>
                 </a:solidFill>
               </a:rPr>
               <a:t> 시스템</a:t>
@@ -11181,7 +13041,7 @@
         <p:spPr>
           <a:xfrm>
             <a:off x="1146968" y="3469193"/>
-            <a:ext cx="11235532" cy="3046988"/>
+            <a:ext cx="11235532" cy="3600986"/>
           </a:xfrm>
           <a:prstGeom prst="rect">
             <a:avLst/>
@@ -11329,6 +13189,20 @@
             <a:endParaRPr lang="en-US" altLang="ko-KR" dirty="0"/>
           </a:p>
           <a:p>
+            <a:pPr marL="285750" indent="-285750">
+              <a:buFont typeface="Arial" panose="020B0604020202020204" pitchFamily="34" charset="0"/>
+              <a:buChar char="•"/>
+            </a:pPr>
+            <a:endParaRPr lang="en-US" altLang="ko-KR" dirty="0"/>
+          </a:p>
+          <a:p>
+            <a:pPr marL="285750" indent="-285750">
+              <a:buFont typeface="Arial" panose="020B0604020202020204" pitchFamily="34" charset="0"/>
+              <a:buChar char="•"/>
+            </a:pPr>
+            <a:endParaRPr lang="en-US" altLang="ko-KR" dirty="0"/>
+          </a:p>
+          <a:p>
             <a:pPr marR="0" lvl="0" algn="l" defTabSz="914400" rtl="0" eaLnBrk="0" fontAlgn="base" latinLnBrk="0" hangingPunct="0">
               <a:lnSpc>
                 <a:spcPct val="100000"/>
@@ -11345,11 +13219,180 @@
             </a:pPr>
             <a:r>
               <a:rPr lang="ko-KR" altLang="en-US" sz="2200" b="1" dirty="0">
-                <a:hlinkClick r:id="rId2"/>
+                <a:solidFill>
+                  <a:srgbClr val="508D4E"/>
+                </a:solidFill>
+                <a:hlinkClick r:id="rId2">
+                  <a:extLst>
+                    <a:ext uri="{A12FA001-AC4F-418D-AE19-62706E023703}">
+                      <ahyp:hlinkClr xmlns:ahyp="http://schemas.microsoft.com/office/drawing/2018/hyperlinkcolor" val="tx"/>
+                    </a:ext>
+                  </a:extLst>
+                </a:hlinkClick>
               </a:rPr>
               <a:t>상세 보기</a:t>
             </a:r>
-            <a:endParaRPr lang="en-US" altLang="ko-KR" sz="2200" b="1" dirty="0"/>
+            <a:endParaRPr lang="en-US" altLang="ko-KR" sz="2200" b="1" dirty="0">
+              <a:solidFill>
+                <a:srgbClr val="508D4E"/>
+              </a:solidFill>
+            </a:endParaRPr>
+          </a:p>
+        </p:txBody>
+      </p:sp>
+      <p:sp>
+        <p:nvSpPr>
+          <p:cNvPr id="6" name="직사각형 5">
+            <a:extLst>
+              <a:ext uri="{FF2B5EF4-FFF2-40B4-BE49-F238E27FC236}">
+                <a16:creationId xmlns:a16="http://schemas.microsoft.com/office/drawing/2014/main" id="{3F12E9FB-909D-13F3-D27D-0603B450898F}"/>
+              </a:ext>
+            </a:extLst>
+          </p:cNvPr>
+          <p:cNvSpPr/>
+          <p:nvPr/>
+        </p:nvSpPr>
+        <p:spPr>
+          <a:xfrm>
+            <a:off x="6869113" y="-495300"/>
+            <a:ext cx="3327400" cy="889653"/>
+          </a:xfrm>
+          <a:prstGeom prst="rect">
+            <a:avLst/>
+          </a:prstGeom>
+          <a:solidFill>
+            <a:srgbClr val="80AF81"/>
+          </a:solidFill>
+          <a:ln>
+            <a:noFill/>
+          </a:ln>
+        </p:spPr>
+        <p:style>
+          <a:lnRef idx="2">
+            <a:schemeClr val="accent1">
+              <a:shade val="15000"/>
+            </a:schemeClr>
+          </a:lnRef>
+          <a:fillRef idx="1">
+            <a:schemeClr val="accent1"/>
+          </a:fillRef>
+          <a:effectRef idx="0">
+            <a:schemeClr val="accent1"/>
+          </a:effectRef>
+          <a:fontRef idx="minor">
+            <a:schemeClr val="lt1"/>
+          </a:fontRef>
+        </p:style>
+        <p:txBody>
+          <a:bodyPr rtlCol="0" anchor="ctr"/>
+          <a:lstStyle/>
+          <a:p>
+            <a:pPr algn="ctr"/>
+            <a:endParaRPr lang="ko-KR" altLang="en-US" dirty="0"/>
+          </a:p>
+        </p:txBody>
+      </p:sp>
+      <p:sp>
+        <p:nvSpPr>
+          <p:cNvPr id="8" name="직사각형 7">
+            <a:extLst>
+              <a:ext uri="{FF2B5EF4-FFF2-40B4-BE49-F238E27FC236}">
+                <a16:creationId xmlns:a16="http://schemas.microsoft.com/office/drawing/2014/main" id="{EDE3B61D-92B8-F41E-7900-757E87B7F0D7}"/>
+              </a:ext>
+            </a:extLst>
+          </p:cNvPr>
+          <p:cNvSpPr/>
+          <p:nvPr/>
+        </p:nvSpPr>
+        <p:spPr>
+          <a:xfrm>
+            <a:off x="9034245" y="-495300"/>
+            <a:ext cx="3327400" cy="889653"/>
+          </a:xfrm>
+          <a:prstGeom prst="rect">
+            <a:avLst/>
+          </a:prstGeom>
+          <a:solidFill>
+            <a:srgbClr val="508D4E"/>
+          </a:solidFill>
+          <a:ln>
+            <a:noFill/>
+          </a:ln>
+        </p:spPr>
+        <p:style>
+          <a:lnRef idx="2">
+            <a:schemeClr val="accent1">
+              <a:shade val="15000"/>
+            </a:schemeClr>
+          </a:lnRef>
+          <a:fillRef idx="1">
+            <a:schemeClr val="accent1"/>
+          </a:fillRef>
+          <a:effectRef idx="0">
+            <a:schemeClr val="accent1"/>
+          </a:effectRef>
+          <a:fontRef idx="minor">
+            <a:schemeClr val="lt1"/>
+          </a:fontRef>
+        </p:style>
+        <p:txBody>
+          <a:bodyPr rtlCol="0" anchor="ctr"/>
+          <a:lstStyle/>
+          <a:p>
+            <a:pPr algn="ctr"/>
+            <a:endParaRPr lang="ko-KR" altLang="en-US"/>
+          </a:p>
+        </p:txBody>
+      </p:sp>
+      <p:sp>
+        <p:nvSpPr>
+          <p:cNvPr id="10" name="직사각형 9">
+            <a:extLst>
+              <a:ext uri="{FF2B5EF4-FFF2-40B4-BE49-F238E27FC236}">
+                <a16:creationId xmlns:a16="http://schemas.microsoft.com/office/drawing/2014/main" id="{FD581D6F-9A71-28FB-04A5-7ED6EC6BC50E}"/>
+              </a:ext>
+            </a:extLst>
+          </p:cNvPr>
+          <p:cNvSpPr/>
+          <p:nvPr/>
+        </p:nvSpPr>
+        <p:spPr>
+          <a:xfrm>
+            <a:off x="11589844" y="-495300"/>
+            <a:ext cx="3327400" cy="889653"/>
+          </a:xfrm>
+          <a:prstGeom prst="rect">
+            <a:avLst/>
+          </a:prstGeom>
+          <a:solidFill>
+            <a:srgbClr val="1A5319"/>
+          </a:solidFill>
+          <a:ln>
+            <a:noFill/>
+          </a:ln>
+        </p:spPr>
+        <p:style>
+          <a:lnRef idx="2">
+            <a:schemeClr val="accent1">
+              <a:shade val="15000"/>
+            </a:schemeClr>
+          </a:lnRef>
+          <a:fillRef idx="1">
+            <a:schemeClr val="accent1"/>
+          </a:fillRef>
+          <a:effectRef idx="0">
+            <a:schemeClr val="accent1"/>
+          </a:effectRef>
+          <a:fontRef idx="minor">
+            <a:schemeClr val="lt1"/>
+          </a:fontRef>
+        </p:style>
+        <p:txBody>
+          <a:bodyPr rtlCol="0" anchor="ctr"/>
+          <a:lstStyle/>
+          <a:p>
+            <a:pPr algn="ctr"/>
+            <a:endParaRPr lang="ko-KR" altLang="en-US"/>
           </a:p>
         </p:txBody>
       </p:sp>
@@ -11417,27 +13460,71 @@
           </a:bodyPr>
           <a:lstStyle/>
           <a:p>
-            <a:r>
-              <a:rPr lang="en-US" altLang="ko-KR" sz="4000" b="1" dirty="0">
-                <a:solidFill>
-                  <a:srgbClr val="468260"/>
-                </a:solidFill>
+            <a:pPr marL="0" marR="0" lvl="0" indent="0" algn="l" defTabSz="457200" rtl="0" eaLnBrk="1" fontAlgn="auto" latinLnBrk="0" hangingPunct="1">
+              <a:lnSpc>
+                <a:spcPct val="100000"/>
+              </a:lnSpc>
+              <a:spcBef>
+                <a:spcPts val="0"/>
+              </a:spcBef>
+              <a:spcAft>
+                <a:spcPts val="0"/>
+              </a:spcAft>
+              <a:buClrTx/>
+              <a:buSzTx/>
+              <a:buFontTx/>
+              <a:buNone/>
+              <a:tabLst/>
+              <a:defRPr/>
+            </a:pPr>
+            <a:r>
+              <a:rPr kumimoji="0" lang="en-US" altLang="ko-KR" sz="4000" b="1" i="0" u="none" strike="noStrike" kern="1200" cap="none" spc="0" normalizeH="0" baseline="0" noProof="0" dirty="0">
+                <a:ln>
+                  <a:noFill/>
+                </a:ln>
+                <a:solidFill>
+                  <a:srgbClr val="508D4E"/>
+                </a:solidFill>
+                <a:effectLst/>
+                <a:uLnTx/>
+                <a:uFillTx/>
+                <a:latin typeface="SUIT Variable"/>
+                <a:ea typeface="SUIT Variable"/>
+                <a:cs typeface="+mn-cs"/>
               </a:rPr>
               <a:t>Projects / </a:t>
             </a:r>
             <a:r>
-              <a:rPr lang="ko-KR" altLang="en-US" sz="4000" b="1" dirty="0" err="1">
-                <a:solidFill>
-                  <a:srgbClr val="468260"/>
-                </a:solidFill>
+              <a:rPr kumimoji="0" lang="ko-KR" altLang="en-US" sz="4000" b="1" i="0" u="none" strike="noStrike" kern="1200" cap="none" spc="0" normalizeH="0" baseline="0" noProof="0" dirty="0" err="1">
+                <a:ln>
+                  <a:noFill/>
+                </a:ln>
+                <a:solidFill>
+                  <a:srgbClr val="508D4E"/>
+                </a:solidFill>
+                <a:effectLst/>
+                <a:uLnTx/>
+                <a:uFillTx/>
+                <a:latin typeface="SUIT Variable"/>
+                <a:ea typeface="SUIT Variable"/>
+                <a:cs typeface="+mn-cs"/>
               </a:rPr>
               <a:t>윈즈</a:t>
             </a:r>
             <a:r>
-              <a:rPr lang="ko-KR" altLang="en-US" sz="4000" b="1" dirty="0">
-                <a:solidFill>
-                  <a:srgbClr val="468260"/>
-                </a:solidFill>
+              <a:rPr kumimoji="0" lang="ko-KR" altLang="en-US" sz="4000" b="1" i="0" u="none" strike="noStrike" kern="1200" cap="none" spc="0" normalizeH="0" baseline="0" noProof="0" dirty="0">
+                <a:ln>
+                  <a:noFill/>
+                </a:ln>
+                <a:solidFill>
+                  <a:srgbClr val="508D4E"/>
+                </a:solidFill>
+                <a:effectLst/>
+                <a:uLnTx/>
+                <a:uFillTx/>
+                <a:latin typeface="SUIT Variable"/>
+                <a:ea typeface="SUIT Variable"/>
+                <a:cs typeface="+mn-cs"/>
               </a:rPr>
               <a:t> 시스템</a:t>
             </a:r>
@@ -11472,28 +13559,123 @@
           </a:bodyPr>
           <a:lstStyle/>
           <a:p>
-            <a:r>
-              <a:rPr lang="en-US" altLang="ko-KR" sz="2400" b="1" dirty="0"/>
+            <a:pPr marL="0" marR="0" lvl="0" indent="0" algn="l" defTabSz="457200" rtl="0" eaLnBrk="1" fontAlgn="auto" latinLnBrk="0" hangingPunct="1">
+              <a:lnSpc>
+                <a:spcPct val="100000"/>
+              </a:lnSpc>
+              <a:spcBef>
+                <a:spcPts val="0"/>
+              </a:spcBef>
+              <a:spcAft>
+                <a:spcPts val="0"/>
+              </a:spcAft>
+              <a:buClrTx/>
+              <a:buSzTx/>
+              <a:buFontTx/>
+              <a:buNone/>
+              <a:tabLst/>
+              <a:defRPr/>
+            </a:pPr>
+            <a:r>
+              <a:rPr kumimoji="0" lang="en-US" altLang="ko-KR" sz="2400" b="1" i="0" u="none" strike="noStrike" kern="1200" cap="none" spc="0" normalizeH="0" baseline="0" noProof="0" dirty="0">
+                <a:ln>
+                  <a:noFill/>
+                </a:ln>
+                <a:solidFill>
+                  <a:prstClr val="black"/>
+                </a:solidFill>
+                <a:effectLst/>
+                <a:uLnTx/>
+                <a:uFillTx/>
+                <a:latin typeface="SUIT Variable"/>
+                <a:ea typeface="SUIT Variable"/>
+                <a:cs typeface="+mn-cs"/>
+              </a:rPr>
               <a:t>3. </a:t>
             </a:r>
             <a:r>
-              <a:rPr lang="ko-KR" altLang="en-US" sz="2400" b="1" dirty="0"/>
+              <a:rPr kumimoji="0" lang="ko-KR" altLang="en-US" sz="2400" b="1" i="0" u="none" strike="noStrike" kern="1200" cap="none" spc="0" normalizeH="0" baseline="0" noProof="0" dirty="0">
+                <a:ln>
+                  <a:noFill/>
+                </a:ln>
+                <a:solidFill>
+                  <a:prstClr val="black"/>
+                </a:solidFill>
+                <a:effectLst/>
+                <a:uLnTx/>
+                <a:uFillTx/>
+                <a:latin typeface="SUIT Variable"/>
+                <a:ea typeface="SUIT Variable"/>
+                <a:cs typeface="+mn-cs"/>
+              </a:rPr>
               <a:t>모바일 원격 </a:t>
             </a:r>
             <a:r>
-              <a:rPr lang="ko-KR" altLang="en-US" sz="2400" b="1" dirty="0" err="1"/>
+              <a:rPr kumimoji="0" lang="ko-KR" altLang="en-US" sz="2400" b="1" i="0" u="none" strike="noStrike" kern="1200" cap="none" spc="0" normalizeH="0" baseline="0" noProof="0" dirty="0" err="1">
+                <a:ln>
+                  <a:noFill/>
+                </a:ln>
+                <a:solidFill>
+                  <a:prstClr val="black"/>
+                </a:solidFill>
+                <a:effectLst/>
+                <a:uLnTx/>
+                <a:uFillTx/>
+                <a:latin typeface="SUIT Variable"/>
+                <a:ea typeface="SUIT Variable"/>
+                <a:cs typeface="+mn-cs"/>
+              </a:rPr>
               <a:t>점검툴</a:t>
             </a:r>
             <a:r>
-              <a:rPr lang="ko-KR" altLang="en-US" sz="2400" b="1" dirty="0"/>
+              <a:rPr kumimoji="0" lang="ko-KR" altLang="en-US" sz="2400" b="1" i="0" u="none" strike="noStrike" kern="1200" cap="none" spc="0" normalizeH="0" baseline="0" noProof="0" dirty="0">
+                <a:ln>
+                  <a:noFill/>
+                </a:ln>
+                <a:solidFill>
+                  <a:prstClr val="black"/>
+                </a:solidFill>
+                <a:effectLst/>
+                <a:uLnTx/>
+                <a:uFillTx/>
+                <a:latin typeface="SUIT Variable"/>
+                <a:ea typeface="SUIT Variable"/>
+                <a:cs typeface="+mn-cs"/>
+              </a:rPr>
               <a:t> 그리기 기능 개발 및 삼성 </a:t>
             </a:r>
             <a:r>
-              <a:rPr lang="en-US" altLang="ko-KR" sz="2400" b="1" dirty="0"/>
+              <a:rPr kumimoji="0" lang="en-US" altLang="ko-KR" sz="2400" b="1" i="0" u="none" strike="noStrike" kern="1200" cap="none" spc="0" normalizeH="0" baseline="0" noProof="0" dirty="0">
+                <a:ln>
+                  <a:noFill/>
+                </a:ln>
+                <a:solidFill>
+                  <a:prstClr val="black"/>
+                </a:solidFill>
+                <a:effectLst/>
+                <a:uLnTx/>
+                <a:uFillTx/>
+                <a:latin typeface="SUIT Variable"/>
+                <a:ea typeface="SUIT Variable"/>
+                <a:cs typeface="+mn-cs"/>
+              </a:rPr>
               <a:t>KNOX</a:t>
             </a:r>
             <a:r>
-              <a:rPr lang="ko-KR" altLang="en-US" sz="2400" b="1" dirty="0"/>
+              <a:rPr kumimoji="0" lang="ko-KR" altLang="en-US" sz="2400" b="1" i="0" u="none" strike="noStrike" kern="1200" cap="none" spc="0" normalizeH="0" baseline="0" noProof="0" dirty="0">
+                <a:ln>
+                  <a:noFill/>
+                </a:ln>
+                <a:solidFill>
+                  <a:prstClr val="black"/>
+                </a:solidFill>
+                <a:effectLst/>
+                <a:uLnTx/>
+                <a:uFillTx/>
+                <a:latin typeface="SUIT Variable"/>
+                <a:ea typeface="SUIT Variable"/>
+                <a:cs typeface="+mn-cs"/>
+              </a:rPr>
               <a:t>를 사용한 터치 기능 고도화</a:t>
             </a:r>
           </a:p>
@@ -11542,64 +13724,315 @@
               <a:buFontTx/>
               <a:buNone/>
               <a:tabLst/>
+              <a:defRPr/>
             </a:pPr>
             <a:r>
-              <a:rPr lang="en-US" altLang="ko-KR" dirty="0"/>
+              <a:rPr kumimoji="0" lang="en-US" altLang="ko-KR" sz="1800" b="0" i="0" u="none" strike="noStrike" kern="1200" cap="none" spc="0" normalizeH="0" baseline="0" noProof="0" dirty="0">
+                <a:ln>
+                  <a:noFill/>
+                </a:ln>
+                <a:solidFill>
+                  <a:prstClr val="black"/>
+                </a:solidFill>
+                <a:effectLst/>
+                <a:uLnTx/>
+                <a:uFillTx/>
+                <a:latin typeface="SUIT Variable"/>
+                <a:ea typeface="SUIT Variable"/>
+                <a:cs typeface="+mn-cs"/>
+              </a:rPr>
               <a:t>Google</a:t>
             </a:r>
             <a:r>
-              <a:rPr lang="ko-KR" altLang="en-US" dirty="0"/>
+              <a:rPr kumimoji="0" lang="ko-KR" altLang="en-US" sz="1800" b="0" i="0" u="none" strike="noStrike" kern="1200" cap="none" spc="0" normalizeH="0" baseline="0" noProof="0" dirty="0">
+                <a:ln>
+                  <a:noFill/>
+                </a:ln>
+                <a:solidFill>
+                  <a:prstClr val="black"/>
+                </a:solidFill>
+                <a:effectLst/>
+                <a:uLnTx/>
+                <a:uFillTx/>
+                <a:latin typeface="SUIT Variable"/>
+                <a:ea typeface="SUIT Variable"/>
+                <a:cs typeface="+mn-cs"/>
+              </a:rPr>
               <a:t>의 안드로이드 </a:t>
             </a:r>
             <a:r>
-              <a:rPr lang="en-US" altLang="ko-KR" dirty="0"/>
+              <a:rPr kumimoji="0" lang="en-US" altLang="ko-KR" sz="1800" b="0" i="0" u="none" strike="noStrike" kern="1200" cap="none" spc="0" normalizeH="0" baseline="0" noProof="0" dirty="0">
+                <a:ln>
+                  <a:noFill/>
+                </a:ln>
+                <a:solidFill>
+                  <a:prstClr val="black"/>
+                </a:solidFill>
+                <a:effectLst/>
+                <a:uLnTx/>
+                <a:uFillTx/>
+                <a:latin typeface="SUIT Variable"/>
+                <a:ea typeface="SUIT Variable"/>
+                <a:cs typeface="+mn-cs"/>
+              </a:rPr>
               <a:t>OS </a:t>
             </a:r>
             <a:r>
-              <a:rPr lang="ko-KR" altLang="en-US" dirty="0"/>
+              <a:rPr kumimoji="0" lang="ko-KR" altLang="en-US" sz="1800" b="0" i="0" u="none" strike="noStrike" kern="1200" cap="none" spc="0" normalizeH="0" baseline="0" noProof="0" dirty="0">
+                <a:ln>
+                  <a:noFill/>
+                </a:ln>
+                <a:solidFill>
+                  <a:prstClr val="black"/>
+                </a:solidFill>
+                <a:effectLst/>
+                <a:uLnTx/>
+                <a:uFillTx/>
+                <a:latin typeface="SUIT Variable"/>
+                <a:ea typeface="SUIT Variable"/>
+                <a:cs typeface="+mn-cs"/>
+              </a:rPr>
               <a:t>업데이트 흐름이 하드웨어 제어 </a:t>
             </a:r>
             <a:r>
-              <a:rPr lang="en-US" altLang="ko-KR" dirty="0"/>
+              <a:rPr kumimoji="0" lang="en-US" altLang="ko-KR" sz="1800" b="0" i="0" u="none" strike="noStrike" kern="1200" cap="none" spc="0" normalizeH="0" baseline="0" noProof="0" dirty="0">
+                <a:ln>
+                  <a:noFill/>
+                </a:ln>
+                <a:solidFill>
+                  <a:prstClr val="black"/>
+                </a:solidFill>
+                <a:effectLst/>
+                <a:uLnTx/>
+                <a:uFillTx/>
+                <a:latin typeface="SUIT Variable"/>
+                <a:ea typeface="SUIT Variable"/>
+                <a:cs typeface="+mn-cs"/>
+              </a:rPr>
               <a:t>API</a:t>
             </a:r>
             <a:r>
-              <a:rPr lang="ko-KR" altLang="en-US" dirty="0"/>
+              <a:rPr kumimoji="0" lang="ko-KR" altLang="en-US" sz="1800" b="0" i="0" u="none" strike="noStrike" kern="1200" cap="none" spc="0" normalizeH="0" baseline="0" noProof="0" dirty="0">
+                <a:ln>
+                  <a:noFill/>
+                </a:ln>
+                <a:solidFill>
+                  <a:prstClr val="black"/>
+                </a:solidFill>
+                <a:effectLst/>
+                <a:uLnTx/>
+                <a:uFillTx/>
+                <a:latin typeface="SUIT Variable"/>
+                <a:ea typeface="SUIT Variable"/>
+                <a:cs typeface="+mn-cs"/>
+              </a:rPr>
               <a:t>가 제한되는 추세</a:t>
             </a:r>
             <a:r>
-              <a:rPr lang="en-US" altLang="ko-KR" dirty="0"/>
-              <a:t>. </a:t>
-            </a:r>
-            <a:r>
-              <a:rPr lang="ko-KR" altLang="en-US" dirty="0"/>
+              <a:rPr kumimoji="0" lang="en-US" altLang="ko-KR" sz="1800" b="0" i="0" u="none" strike="noStrike" kern="1200" cap="none" spc="0" normalizeH="0" baseline="0" noProof="0" dirty="0">
+                <a:ln>
+                  <a:noFill/>
+                </a:ln>
+                <a:solidFill>
+                  <a:prstClr val="black"/>
+                </a:solidFill>
+                <a:effectLst/>
+                <a:uLnTx/>
+                <a:uFillTx/>
+                <a:latin typeface="SUIT Variable"/>
+                <a:ea typeface="SUIT Variable"/>
+                <a:cs typeface="+mn-cs"/>
+              </a:rPr>
+              <a:t>.</a:t>
+            </a:r>
+          </a:p>
+          <a:p>
+            <a:pPr marL="0" marR="0" lvl="0" indent="0" algn="l" defTabSz="914400" rtl="0" eaLnBrk="0" fontAlgn="base" latinLnBrk="0" hangingPunct="0">
+              <a:lnSpc>
+                <a:spcPct val="100000"/>
+              </a:lnSpc>
+              <a:spcBef>
+                <a:spcPct val="0"/>
+              </a:spcBef>
+              <a:spcAft>
+                <a:spcPct val="0"/>
+              </a:spcAft>
+              <a:buClrTx/>
+              <a:buSzTx/>
+              <a:buFontTx/>
+              <a:buNone/>
+              <a:tabLst/>
+              <a:defRPr/>
+            </a:pPr>
+            <a:r>
+              <a:rPr kumimoji="0" lang="ko-KR" altLang="en-US" sz="1800" b="0" i="0" u="none" strike="noStrike" kern="1200" cap="none" spc="0" normalizeH="0" baseline="0" noProof="0" dirty="0">
+                <a:ln>
+                  <a:noFill/>
+                </a:ln>
+                <a:solidFill>
+                  <a:prstClr val="black"/>
+                </a:solidFill>
+                <a:effectLst/>
+                <a:uLnTx/>
+                <a:uFillTx/>
+                <a:latin typeface="SUIT Variable"/>
+                <a:ea typeface="SUIT Variable"/>
+                <a:cs typeface="+mn-cs"/>
+              </a:rPr>
               <a:t>이에 따라 앱의 기능들이 점점 사용할 수 없게 되어가는 상황에서 서비스 유지를 위해 기능 고도화 필요</a:t>
             </a:r>
             <a:r>
-              <a:rPr lang="en-US" altLang="ko-KR" dirty="0"/>
-              <a:t>. Google</a:t>
-            </a:r>
-            <a:r>
-              <a:rPr lang="ko-KR" altLang="en-US" dirty="0"/>
+              <a:rPr kumimoji="0" lang="en-US" altLang="ko-KR" sz="1800" b="0" i="0" u="none" strike="noStrike" kern="1200" cap="none" spc="0" normalizeH="0" baseline="0" noProof="0" dirty="0">
+                <a:ln>
+                  <a:noFill/>
+                </a:ln>
+                <a:solidFill>
+                  <a:prstClr val="black"/>
+                </a:solidFill>
+                <a:effectLst/>
+                <a:uLnTx/>
+                <a:uFillTx/>
+                <a:latin typeface="SUIT Variable"/>
+                <a:ea typeface="SUIT Variable"/>
+                <a:cs typeface="+mn-cs"/>
+              </a:rPr>
+              <a:t>.</a:t>
+            </a:r>
+          </a:p>
+          <a:p>
+            <a:pPr marL="0" marR="0" lvl="0" indent="0" algn="l" defTabSz="914400" rtl="0" eaLnBrk="0" fontAlgn="base" latinLnBrk="0" hangingPunct="0">
+              <a:lnSpc>
+                <a:spcPct val="100000"/>
+              </a:lnSpc>
+              <a:spcBef>
+                <a:spcPct val="0"/>
+              </a:spcBef>
+              <a:spcAft>
+                <a:spcPct val="0"/>
+              </a:spcAft>
+              <a:buClrTx/>
+              <a:buSzTx/>
+              <a:buFontTx/>
+              <a:buNone/>
+              <a:tabLst/>
+              <a:defRPr/>
+            </a:pPr>
+            <a:r>
+              <a:rPr kumimoji="0" lang="en-US" altLang="ko-KR" sz="1800" b="0" i="0" u="none" strike="noStrike" kern="1200" cap="none" spc="0" normalizeH="0" baseline="0" noProof="0" dirty="0">
+                <a:ln>
+                  <a:noFill/>
+                </a:ln>
+                <a:solidFill>
+                  <a:prstClr val="black"/>
+                </a:solidFill>
+                <a:effectLst/>
+                <a:uLnTx/>
+                <a:uFillTx/>
+                <a:latin typeface="SUIT Variable"/>
+                <a:ea typeface="SUIT Variable"/>
+                <a:cs typeface="+mn-cs"/>
+              </a:rPr>
+              <a:t>Google</a:t>
+            </a:r>
+            <a:r>
+              <a:rPr kumimoji="0" lang="ko-KR" altLang="en-US" sz="1800" b="0" i="0" u="none" strike="noStrike" kern="1200" cap="none" spc="0" normalizeH="0" baseline="0" noProof="0" dirty="0">
+                <a:ln>
+                  <a:noFill/>
+                </a:ln>
+                <a:solidFill>
+                  <a:prstClr val="black"/>
+                </a:solidFill>
+                <a:effectLst/>
+                <a:uLnTx/>
+                <a:uFillTx/>
+                <a:latin typeface="SUIT Variable"/>
+                <a:ea typeface="SUIT Variable"/>
+                <a:cs typeface="+mn-cs"/>
+              </a:rPr>
               <a:t>의 안드로이드 </a:t>
             </a:r>
             <a:r>
-              <a:rPr lang="en-US" altLang="ko-KR" dirty="0"/>
+              <a:rPr kumimoji="0" lang="en-US" altLang="ko-KR" sz="1800" b="0" i="0" u="none" strike="noStrike" kern="1200" cap="none" spc="0" normalizeH="0" baseline="0" noProof="0" dirty="0">
+                <a:ln>
+                  <a:noFill/>
+                </a:ln>
+                <a:solidFill>
+                  <a:prstClr val="black"/>
+                </a:solidFill>
+                <a:effectLst/>
+                <a:uLnTx/>
+                <a:uFillTx/>
+                <a:latin typeface="SUIT Variable"/>
+                <a:ea typeface="SUIT Variable"/>
+                <a:cs typeface="+mn-cs"/>
+              </a:rPr>
               <a:t>SDK</a:t>
             </a:r>
             <a:r>
-              <a:rPr lang="ko-KR" altLang="en-US" dirty="0"/>
+              <a:rPr kumimoji="0" lang="ko-KR" altLang="en-US" sz="1800" b="0" i="0" u="none" strike="noStrike" kern="1200" cap="none" spc="0" normalizeH="0" baseline="0" noProof="0" dirty="0">
+                <a:ln>
+                  <a:noFill/>
+                </a:ln>
+                <a:solidFill>
+                  <a:prstClr val="black"/>
+                </a:solidFill>
+                <a:effectLst/>
+                <a:uLnTx/>
+                <a:uFillTx/>
+                <a:latin typeface="SUIT Variable"/>
+                <a:ea typeface="SUIT Variable"/>
+                <a:cs typeface="+mn-cs"/>
+              </a:rPr>
               <a:t>를 넘어선 외부 </a:t>
             </a:r>
             <a:r>
-              <a:rPr lang="en-US" altLang="ko-KR" dirty="0"/>
+              <a:rPr kumimoji="0" lang="en-US" altLang="ko-KR" sz="1800" b="0" i="0" u="none" strike="noStrike" kern="1200" cap="none" spc="0" normalizeH="0" baseline="0" noProof="0" dirty="0">
+                <a:ln>
+                  <a:noFill/>
+                </a:ln>
+                <a:solidFill>
+                  <a:prstClr val="black"/>
+                </a:solidFill>
+                <a:effectLst/>
+                <a:uLnTx/>
+                <a:uFillTx/>
+                <a:latin typeface="SUIT Variable"/>
+                <a:ea typeface="SUIT Variable"/>
+                <a:cs typeface="+mn-cs"/>
+              </a:rPr>
               <a:t>API</a:t>
             </a:r>
             <a:r>
-              <a:rPr lang="ko-KR" altLang="en-US" dirty="0"/>
+              <a:rPr kumimoji="0" lang="ko-KR" altLang="en-US" sz="1800" b="0" i="0" u="none" strike="noStrike" kern="1200" cap="none" spc="0" normalizeH="0" baseline="0" noProof="0" dirty="0">
+                <a:ln>
+                  <a:noFill/>
+                </a:ln>
+                <a:solidFill>
+                  <a:prstClr val="black"/>
+                </a:solidFill>
+                <a:effectLst/>
+                <a:uLnTx/>
+                <a:uFillTx/>
+                <a:latin typeface="SUIT Variable"/>
+                <a:ea typeface="SUIT Variable"/>
+                <a:cs typeface="+mn-cs"/>
+              </a:rPr>
               <a:t>를 활용하여 기존 기능의 고도화 및 서비스 유지를 목표로 하는 프로젝트 진행</a:t>
             </a:r>
-            <a:endParaRPr lang="en-US" altLang="ko-KR" dirty="0"/>
+            <a:endParaRPr kumimoji="0" lang="en-US" altLang="ko-KR" sz="1800" b="0" i="0" u="none" strike="noStrike" kern="1200" cap="none" spc="0" normalizeH="0" baseline="0" noProof="0" dirty="0">
+              <a:ln>
+                <a:noFill/>
+              </a:ln>
+              <a:solidFill>
+                <a:prstClr val="black"/>
+              </a:solidFill>
+              <a:effectLst/>
+              <a:uLnTx/>
+              <a:uFillTx/>
+              <a:latin typeface="SUIT Variable"/>
+              <a:ea typeface="SUIT Variable"/>
+              <a:cs typeface="+mn-cs"/>
+            </a:endParaRPr>
           </a:p>
         </p:txBody>
       </p:sp>
@@ -11652,8 +14085,37 @@
           <a:bodyPr rtlCol="0" anchor="ctr"/>
           <a:lstStyle/>
           <a:p>
-            <a:pPr algn="ctr"/>
-            <a:endParaRPr lang="ko-KR" altLang="en-US"/>
+            <a:pPr marL="0" marR="0" lvl="0" indent="0" algn="ctr" defTabSz="457200" rtl="0" eaLnBrk="1" fontAlgn="auto" latinLnBrk="0" hangingPunct="1">
+              <a:lnSpc>
+                <a:spcPct val="100000"/>
+              </a:lnSpc>
+              <a:spcBef>
+                <a:spcPts val="0"/>
+              </a:spcBef>
+              <a:spcAft>
+                <a:spcPts val="0"/>
+              </a:spcAft>
+              <a:buClrTx/>
+              <a:buSzTx/>
+              <a:buFontTx/>
+              <a:buNone/>
+              <a:tabLst/>
+              <a:defRPr/>
+            </a:pPr>
+            <a:endParaRPr kumimoji="0" lang="ko-KR" altLang="en-US" sz="1800" b="0" i="0" u="none" strike="noStrike" kern="1200" cap="none" spc="0" normalizeH="0" baseline="0" noProof="0">
+              <a:ln>
+                <a:noFill/>
+              </a:ln>
+              <a:solidFill>
+                <a:prstClr val="white"/>
+              </a:solidFill>
+              <a:effectLst/>
+              <a:uLnTx/>
+              <a:uFillTx/>
+              <a:latin typeface="SUIT Variable"/>
+              <a:ea typeface="SUIT Variable"/>
+              <a:cs typeface="+mn-cs"/>
+            </a:endParaRPr>
           </a:p>
         </p:txBody>
       </p:sp>
@@ -11685,19 +14147,71 @@
           </a:bodyPr>
           <a:lstStyle/>
           <a:p>
-            <a:r>
-              <a:rPr lang="ko-KR" altLang="en-US" b="1" dirty="0">
-                <a:effectLst/>
+            <a:pPr marL="0" marR="0" lvl="0" indent="0" algn="l" defTabSz="457200" rtl="0" eaLnBrk="1" fontAlgn="auto" latinLnBrk="0" hangingPunct="1">
+              <a:lnSpc>
+                <a:spcPct val="100000"/>
+              </a:lnSpc>
+              <a:spcBef>
+                <a:spcPts val="0"/>
+              </a:spcBef>
+              <a:spcAft>
+                <a:spcPts val="0"/>
+              </a:spcAft>
+              <a:buClrTx/>
+              <a:buSzTx/>
+              <a:buFontTx/>
+              <a:buNone/>
+              <a:tabLst/>
+              <a:defRPr/>
+            </a:pPr>
+            <a:r>
+              <a:rPr kumimoji="0" lang="ko-KR" altLang="en-US" sz="1800" b="1" i="0" u="none" strike="noStrike" kern="1200" cap="none" spc="0" normalizeH="0" baseline="0" noProof="0" dirty="0">
+                <a:ln>
+                  <a:noFill/>
+                </a:ln>
+                <a:solidFill>
+                  <a:prstClr val="black"/>
+                </a:solidFill>
+                <a:effectLst/>
+                <a:uLnTx/>
+                <a:uFillTx/>
+                <a:latin typeface="SUIT Variable"/>
+                <a:ea typeface="SUIT Variable"/>
+                <a:cs typeface="+mn-cs"/>
               </a:rPr>
               <a:t>🛠️ </a:t>
             </a:r>
             <a:r>
-              <a:rPr lang="en-US" altLang="ko-KR" b="1" dirty="0">
-                <a:effectLst/>
+              <a:rPr kumimoji="0" lang="en-US" altLang="ko-KR" sz="1800" b="1" i="0" u="none" strike="noStrike" kern="1200" cap="none" spc="0" normalizeH="0" baseline="0" noProof="0" dirty="0">
+                <a:ln>
+                  <a:noFill/>
+                </a:ln>
+                <a:solidFill>
+                  <a:prstClr val="black"/>
+                </a:solidFill>
+                <a:effectLst/>
+                <a:uLnTx/>
+                <a:uFillTx/>
+                <a:latin typeface="SUIT Variable"/>
+                <a:ea typeface="SUIT Variable"/>
+                <a:cs typeface="+mn-cs"/>
               </a:rPr>
               <a:t>Android Studio, Java, Android</a:t>
             </a:r>
-            <a:endParaRPr lang="ko-KR" altLang="en-US" b="1" dirty="0"/>
+            <a:endParaRPr kumimoji="0" lang="ko-KR" altLang="en-US" sz="1800" b="1" i="0" u="none" strike="noStrike" kern="1200" cap="none" spc="0" normalizeH="0" baseline="0" noProof="0" dirty="0">
+              <a:ln>
+                <a:noFill/>
+              </a:ln>
+              <a:solidFill>
+                <a:prstClr val="black"/>
+              </a:solidFill>
+              <a:effectLst/>
+              <a:uLnTx/>
+              <a:uFillTx/>
+              <a:latin typeface="SUIT Variable"/>
+              <a:ea typeface="SUIT Variable"/>
+              <a:cs typeface="+mn-cs"/>
+            </a:endParaRPr>
           </a:p>
         </p:txBody>
       </p:sp>
@@ -11716,7 +14230,7 @@
         <p:spPr>
           <a:xfrm>
             <a:off x="1146968" y="3469193"/>
-            <a:ext cx="11235532" cy="3046988"/>
+            <a:ext cx="11235532" cy="3600986"/>
           </a:xfrm>
           <a:prstGeom prst="rect">
             <a:avLst/>
@@ -11744,12 +14258,39 @@
               <a:buFontTx/>
               <a:buNone/>
               <a:tabLst/>
+              <a:defRPr/>
             </a:pPr>
             <a:r>
-              <a:rPr lang="ko-KR" altLang="en-US" sz="2200" b="1" dirty="0"/>
+              <a:rPr kumimoji="0" lang="ko-KR" altLang="en-US" sz="2200" b="1" i="0" u="none" strike="noStrike" kern="1200" cap="none" spc="0" normalizeH="0" baseline="0" noProof="0" dirty="0">
+                <a:ln>
+                  <a:noFill/>
+                </a:ln>
+                <a:solidFill>
+                  <a:prstClr val="black"/>
+                </a:solidFill>
+                <a:effectLst/>
+                <a:uLnTx/>
+                <a:uFillTx/>
+                <a:latin typeface="SUIT Variable"/>
+                <a:ea typeface="SUIT Variable"/>
+                <a:cs typeface="+mn-cs"/>
+              </a:rPr>
               <a:t>성과</a:t>
             </a:r>
-            <a:endParaRPr lang="en-US" altLang="ko-KR" sz="2200" b="1" dirty="0"/>
+            <a:endParaRPr kumimoji="0" lang="en-US" altLang="ko-KR" sz="2200" b="1" i="0" u="none" strike="noStrike" kern="1200" cap="none" spc="0" normalizeH="0" baseline="0" noProof="0" dirty="0">
+              <a:ln>
+                <a:noFill/>
+              </a:ln>
+              <a:solidFill>
+                <a:prstClr val="black"/>
+              </a:solidFill>
+              <a:effectLst/>
+              <a:uLnTx/>
+              <a:uFillTx/>
+              <a:latin typeface="SUIT Variable"/>
+              <a:ea typeface="SUIT Variable"/>
+              <a:cs typeface="+mn-cs"/>
+            </a:endParaRPr>
           </a:p>
           <a:p>
             <a:pPr marL="285750" indent="-285750">
@@ -11758,31 +14299,7 @@
             </a:pPr>
             <a:r>
               <a:rPr lang="ko-KR" altLang="en-US" dirty="0"/>
-              <a:t>지속적인 </a:t>
-            </a:r>
-            <a:r>
-              <a:rPr lang="en-US" altLang="ko-KR" dirty="0"/>
-              <a:t>OS </a:t>
-            </a:r>
-            <a:r>
-              <a:rPr lang="ko-KR" altLang="en-US" dirty="0"/>
-              <a:t>업데이트 대응을 통해 </a:t>
-            </a:r>
-            <a:r>
-              <a:rPr lang="en-US" altLang="ko-KR" dirty="0"/>
-              <a:t>Google Play</a:t>
-            </a:r>
-            <a:r>
-              <a:rPr lang="ko-KR" altLang="en-US" dirty="0"/>
-              <a:t>에서 앱 서비스 진행</a:t>
-            </a:r>
-            <a:r>
-              <a:rPr lang="en-US" altLang="ko-KR" dirty="0"/>
-              <a:t>. </a:t>
-            </a:r>
-            <a:r>
-              <a:rPr lang="ko-KR" altLang="en-US" dirty="0"/>
-              <a:t>이를 통해 사용자 이탈 방지</a:t>
+              <a:t>미리 입력 해 놓은 터치 이벤트만 실행하는 기존의 제한적인 기능에서 상담사의 터치 이벤트를 완벽 구현하도록 개발</a:t>
             </a:r>
             <a:endParaRPr lang="en-US" altLang="ko-KR" dirty="0"/>
           </a:p>
@@ -11792,8 +14309,12 @@
               <a:buChar char="•"/>
             </a:pPr>
             <a:r>
-              <a:rPr lang="ko-KR" altLang="en-US" dirty="0"/>
-              <a:t>구글의 모바일 정책 변경에 능동적으로 대응</a:t>
+              <a:rPr lang="en-US" altLang="ko-KR" dirty="0"/>
+              <a:t>Android SDK</a:t>
+            </a:r>
+            <a:r>
+              <a:rPr lang="ko-KR" altLang="en-US" dirty="0"/>
+              <a:t>만으로는 불가능한 기능을 외부 플랫폼 활용으로 극복</a:t>
             </a:r>
             <a:r>
               <a:rPr lang="en-US" altLang="ko-KR" dirty="0"/>
@@ -11801,11 +14322,27 @@
             </a:r>
             <a:r>
               <a:rPr lang="ko-KR" altLang="en-US" dirty="0"/>
-              <a:t>이를 통해 서비스 운영 경험 및 앱 배포 역량 강화</a:t>
-            </a:r>
-          </a:p>
-          <a:p>
-            <a:pPr marR="0" lvl="0" algn="l" defTabSz="914400" rtl="0" eaLnBrk="0" fontAlgn="base" latinLnBrk="0" hangingPunct="0">
+              <a:t>삼성 단말 대상 기능을 고도화 하여 국내 점유율이 높은 갤럭시 기반 앱 기능성을 강화</a:t>
+            </a:r>
+            <a:r>
+              <a:rPr lang="en-US" altLang="ko-KR" dirty="0"/>
+              <a:t>. </a:t>
+            </a:r>
+            <a:r>
+              <a:rPr lang="ko-KR" altLang="en-US" dirty="0"/>
+              <a:t>또한 해당 </a:t>
+            </a:r>
+            <a:r>
+              <a:rPr lang="en-US" altLang="ko-KR" dirty="0"/>
+              <a:t>API</a:t>
+            </a:r>
+            <a:r>
+              <a:rPr lang="ko-KR" altLang="en-US" dirty="0"/>
+              <a:t> 향후 활용을 위한 기반 확보</a:t>
+            </a:r>
+          </a:p>
+          <a:p>
+            <a:pPr marL="0" marR="0" lvl="0" indent="0" algn="l" defTabSz="914400" rtl="0" eaLnBrk="0" fontAlgn="base" latinLnBrk="0" hangingPunct="0">
               <a:lnSpc>
                 <a:spcPct val="100000"/>
               </a:lnSpc>
@@ -11817,12 +14354,28 @@
               </a:spcAft>
               <a:buClrTx/>
               <a:buSzTx/>
+              <a:buFontTx/>
+              <a:buNone/>
               <a:tabLst/>
+              <a:defRPr/>
             </a:pPr>
-            <a:endParaRPr lang="en-US" altLang="ko-KR" dirty="0"/>
-          </a:p>
-          <a:p>
-            <a:pPr marR="0" lvl="0" algn="l" defTabSz="914400" rtl="0" eaLnBrk="0" fontAlgn="base" latinLnBrk="0" hangingPunct="0">
+            <a:endParaRPr kumimoji="0" lang="en-US" altLang="ko-KR" sz="1800" b="0" i="0" u="none" strike="noStrike" kern="1200" cap="none" spc="0" normalizeH="0" baseline="0" noProof="0" dirty="0">
+              <a:ln>
+                <a:noFill/>
+              </a:ln>
+              <a:solidFill>
+                <a:prstClr val="black"/>
+              </a:solidFill>
+              <a:effectLst/>
+              <a:uLnTx/>
+              <a:uFillTx/>
+              <a:latin typeface="SUIT Variable"/>
+              <a:ea typeface="SUIT Variable"/>
+              <a:cs typeface="+mn-cs"/>
+            </a:endParaRPr>
+          </a:p>
+          <a:p>
+            <a:pPr marL="0" marR="0" lvl="0" indent="0" algn="l" defTabSz="914400" rtl="0" eaLnBrk="0" fontAlgn="base" latinLnBrk="0" hangingPunct="0">
               <a:lnSpc>
                 <a:spcPct val="100000"/>
               </a:lnSpc>
@@ -11834,13 +14387,42 @@
               </a:spcAft>
               <a:buClrTx/>
               <a:buSzTx/>
+              <a:buFontTx/>
+              <a:buNone/>
               <a:tabLst/>
+              <a:defRPr/>
             </a:pPr>
             <a:r>
-              <a:rPr lang="ko-KR" altLang="en-US" sz="2200" b="1" dirty="0"/>
+              <a:rPr kumimoji="0" lang="ko-KR" altLang="en-US" sz="2200" b="1" i="0" u="none" strike="noStrike" kern="1200" cap="none" spc="0" normalizeH="0" baseline="0" noProof="0" dirty="0">
+                <a:ln>
+                  <a:noFill/>
+                </a:ln>
+                <a:solidFill>
+                  <a:prstClr val="black"/>
+                </a:solidFill>
+                <a:effectLst/>
+                <a:uLnTx/>
+                <a:uFillTx/>
+                <a:latin typeface="SUIT Variable"/>
+                <a:ea typeface="SUIT Variable"/>
+                <a:cs typeface="+mn-cs"/>
+              </a:rPr>
               <a:t>인사이트</a:t>
             </a:r>
-            <a:endParaRPr lang="en-US" altLang="ko-KR" sz="2200" b="1" dirty="0"/>
+            <a:endParaRPr kumimoji="0" lang="en-US" altLang="ko-KR" sz="2200" b="1" i="0" u="none" strike="noStrike" kern="1200" cap="none" spc="0" normalizeH="0" baseline="0" noProof="0" dirty="0">
+              <a:ln>
+                <a:noFill/>
+              </a:ln>
+              <a:solidFill>
+                <a:prstClr val="black"/>
+              </a:solidFill>
+              <a:effectLst/>
+              <a:uLnTx/>
+              <a:uFillTx/>
+              <a:latin typeface="SUIT Variable"/>
+              <a:ea typeface="SUIT Variable"/>
+              <a:cs typeface="+mn-cs"/>
+            </a:endParaRPr>
           </a:p>
           <a:p>
             <a:pPr marL="285750" indent="-285750">
@@ -11849,7 +14431,15 @@
             </a:pPr>
             <a:r>
               <a:rPr lang="ko-KR" altLang="en-US" dirty="0"/>
-              <a:t>공식 문서를 통해 정보를 취득하는 방법과 역량을 기르고</a:t>
+              <a:t>대기업에서 만든 라이브러리 사용 및 공식 문서를 통해 어떻게 개발을 진행해야 하는지에 대한 경험</a:t>
+            </a:r>
+            <a:r>
+              <a:rPr lang="en-US" altLang="ko-KR" dirty="0"/>
+              <a:t>. </a:t>
+            </a:r>
+            <a:r>
+              <a:rPr lang="ko-KR" altLang="en-US" dirty="0"/>
+              <a:t>막연한 두려움 보다</a:t>
             </a:r>
             <a:r>
               <a:rPr lang="en-US" altLang="ko-KR" dirty="0"/>
@@ -11857,7 +14447,7 @@
             </a:r>
             <a:r>
               <a:rPr lang="ko-KR" altLang="en-US" dirty="0"/>
-              <a:t>이를 통해 문제에 대한 대응 및 해결 능력 함양</a:t>
+              <a:t>자료조사 → 분석 → 구현을 통한 체계적인 개발 진행</a:t>
             </a:r>
             <a:endParaRPr lang="en-US" altLang="ko-KR" dirty="0"/>
           </a:p>
@@ -11868,15 +14458,15 @@
             </a:pPr>
             <a:r>
               <a:rPr lang="ko-KR" altLang="en-US" dirty="0"/>
-              <a:t>자사 서비스 앱의 기능들에 대해 어떠한 </a:t>
-            </a:r>
-            <a:r>
-              <a:rPr lang="en-US" altLang="ko-KR" dirty="0"/>
-              <a:t>SDK API</a:t>
-            </a:r>
-            <a:r>
-              <a:rPr lang="ko-KR" altLang="en-US" dirty="0"/>
-              <a:t>를 사용하고</a:t>
+              <a:t>다른 사람이 할 수 있으면 나도 할 수 있다는 자신감을 함양</a:t>
+            </a:r>
+            <a:r>
+              <a:rPr lang="en-US" altLang="ko-KR" dirty="0"/>
+              <a:t>. </a:t>
+            </a:r>
+            <a:r>
+              <a:rPr lang="ko-KR" altLang="en-US" dirty="0"/>
+              <a:t>기술적 제약 환경에서도 문제 해결을 위한 다양한 접근 방식을 습득하고</a:t>
             </a:r>
             <a:r>
               <a:rPr lang="en-US" altLang="ko-KR" dirty="0"/>
@@ -11884,11 +14474,11 @@
             </a:r>
             <a:r>
               <a:rPr lang="ko-KR" altLang="en-US" dirty="0"/>
-              <a:t>어떠한 로직으로 동작하는지 전반적인 프로세스 파악의 경험 및 추후 발생하는 이슈들에 대해 명확하고 빠른 처리가 가능한 역량 증대</a:t>
-            </a:r>
-          </a:p>
-          <a:p>
-            <a:pPr marR="0" lvl="0" algn="l" defTabSz="914400" rtl="0" eaLnBrk="0" fontAlgn="base" latinLnBrk="0" hangingPunct="0">
+              <a:t>안된다는 불안감 보단 구현 가능을 생각하며 조사하는 자세를 통해 개발 역량 증대</a:t>
+            </a:r>
+          </a:p>
+          <a:p>
+            <a:pPr marL="0" marR="0" lvl="0" indent="0" algn="l" defTabSz="914400" rtl="0" eaLnBrk="0" fontAlgn="base" latinLnBrk="0" hangingPunct="0">
               <a:lnSpc>
                 <a:spcPct val="100000"/>
               </a:lnSpc>
@@ -11900,12 +14490,28 @@
               </a:spcAft>
               <a:buClrTx/>
               <a:buSzTx/>
+              <a:buFontTx/>
+              <a:buNone/>
               <a:tabLst/>
+              <a:defRPr/>
             </a:pPr>
-            <a:endParaRPr lang="en-US" altLang="ko-KR" dirty="0"/>
-          </a:p>
-          <a:p>
-            <a:pPr marR="0" lvl="0" algn="l" defTabSz="914400" rtl="0" eaLnBrk="0" fontAlgn="base" latinLnBrk="0" hangingPunct="0">
+            <a:endParaRPr kumimoji="0" lang="en-US" altLang="ko-KR" sz="1800" b="0" i="0" u="none" strike="noStrike" kern="1200" cap="none" spc="0" normalizeH="0" baseline="0" noProof="0" dirty="0">
+              <a:ln>
+                <a:noFill/>
+              </a:ln>
+              <a:solidFill>
+                <a:prstClr val="black"/>
+              </a:solidFill>
+              <a:effectLst/>
+              <a:uLnTx/>
+              <a:uFillTx/>
+              <a:latin typeface="SUIT Variable"/>
+              <a:ea typeface="SUIT Variable"/>
+              <a:cs typeface="+mn-cs"/>
+            </a:endParaRPr>
+          </a:p>
+          <a:p>
+            <a:pPr marL="0" marR="0" lvl="0" indent="0" algn="l" defTabSz="914400" rtl="0" eaLnBrk="0" fontAlgn="base" latinLnBrk="0" hangingPunct="0">
               <a:lnSpc>
                 <a:spcPct val="100000"/>
               </a:lnSpc>
@@ -11917,22 +14523,212 @@
               </a:spcAft>
               <a:buClrTx/>
               <a:buSzTx/>
+              <a:buFontTx/>
+              <a:buNone/>
               <a:tabLst/>
+              <a:defRPr/>
             </a:pPr>
             <a:r>
-              <a:rPr lang="ko-KR" altLang="en-US" sz="2200" b="1" dirty="0">
-                <a:hlinkClick r:id="rId2"/>
+              <a:rPr kumimoji="0" lang="ko-KR" altLang="en-US" sz="2200" b="1" i="0" u="none" strike="noStrike" kern="1200" cap="none" spc="0" normalizeH="0" baseline="0" noProof="0" dirty="0">
+                <a:ln>
+                  <a:noFill/>
+                </a:ln>
+                <a:solidFill>
+                  <a:srgbClr val="508D4E"/>
+                </a:solidFill>
+                <a:effectLst/>
+                <a:uLnTx/>
+                <a:uFillTx/>
+                <a:latin typeface="SUIT Variable"/>
+                <a:ea typeface="SUIT Variable"/>
+                <a:cs typeface="+mn-cs"/>
+                <a:hlinkClick r:id="rId2">
+                  <a:extLst>
+                    <a:ext uri="{A12FA001-AC4F-418D-AE19-62706E023703}">
+                      <ahyp:hlinkClr xmlns:ahyp="http://schemas.microsoft.com/office/drawing/2018/hyperlinkcolor" val="tx"/>
+                    </a:ext>
+                  </a:extLst>
+                </a:hlinkClick>
               </a:rPr>
               <a:t>상세 보기</a:t>
             </a:r>
-            <a:endParaRPr lang="en-US" altLang="ko-KR" sz="2200" b="1" dirty="0"/>
+            <a:endParaRPr kumimoji="0" lang="en-US" altLang="ko-KR" sz="2200" b="1" i="0" u="none" strike="noStrike" kern="1200" cap="none" spc="0" normalizeH="0" baseline="0" noProof="0" dirty="0">
+              <a:ln>
+                <a:noFill/>
+              </a:ln>
+              <a:solidFill>
+                <a:srgbClr val="508D4E"/>
+              </a:solidFill>
+              <a:effectLst/>
+              <a:uLnTx/>
+              <a:uFillTx/>
+              <a:latin typeface="SUIT Variable"/>
+              <a:ea typeface="SUIT Variable"/>
+              <a:cs typeface="+mn-cs"/>
+            </a:endParaRPr>
+          </a:p>
+        </p:txBody>
+      </p:sp>
+      <p:sp>
+        <p:nvSpPr>
+          <p:cNvPr id="6" name="직사각형 5">
+            <a:extLst>
+              <a:ext uri="{FF2B5EF4-FFF2-40B4-BE49-F238E27FC236}">
+                <a16:creationId xmlns:a16="http://schemas.microsoft.com/office/drawing/2014/main" id="{45281449-081E-0BAD-7E4E-3C52BDAB9BEF}"/>
+              </a:ext>
+            </a:extLst>
+          </p:cNvPr>
+          <p:cNvSpPr/>
+          <p:nvPr/>
+        </p:nvSpPr>
+        <p:spPr>
+          <a:xfrm>
+            <a:off x="6869113" y="-495300"/>
+            <a:ext cx="3327400" cy="889653"/>
+          </a:xfrm>
+          <a:prstGeom prst="rect">
+            <a:avLst/>
+          </a:prstGeom>
+          <a:solidFill>
+            <a:srgbClr val="80AF81"/>
+          </a:solidFill>
+          <a:ln>
+            <a:noFill/>
+          </a:ln>
+        </p:spPr>
+        <p:style>
+          <a:lnRef idx="2">
+            <a:schemeClr val="accent1">
+              <a:shade val="15000"/>
+            </a:schemeClr>
+          </a:lnRef>
+          <a:fillRef idx="1">
+            <a:schemeClr val="accent1"/>
+          </a:fillRef>
+          <a:effectRef idx="0">
+            <a:schemeClr val="accent1"/>
+          </a:effectRef>
+          <a:fontRef idx="minor">
+            <a:schemeClr val="lt1"/>
+          </a:fontRef>
+        </p:style>
+        <p:txBody>
+          <a:bodyPr rtlCol="0" anchor="ctr"/>
+          <a:lstStyle/>
+          <a:p>
+            <a:pPr algn="ctr"/>
+            <a:endParaRPr lang="ko-KR" altLang="en-US" dirty="0"/>
+          </a:p>
+        </p:txBody>
+      </p:sp>
+      <p:sp>
+        <p:nvSpPr>
+          <p:cNvPr id="8" name="직사각형 7">
+            <a:extLst>
+              <a:ext uri="{FF2B5EF4-FFF2-40B4-BE49-F238E27FC236}">
+                <a16:creationId xmlns:a16="http://schemas.microsoft.com/office/drawing/2014/main" id="{54E0BDBA-3415-FD76-F0BD-4BE95D4C1562}"/>
+              </a:ext>
+            </a:extLst>
+          </p:cNvPr>
+          <p:cNvSpPr/>
+          <p:nvPr/>
+        </p:nvSpPr>
+        <p:spPr>
+          <a:xfrm>
+            <a:off x="9034245" y="-495300"/>
+            <a:ext cx="3327400" cy="889653"/>
+          </a:xfrm>
+          <a:prstGeom prst="rect">
+            <a:avLst/>
+          </a:prstGeom>
+          <a:solidFill>
+            <a:srgbClr val="508D4E"/>
+          </a:solidFill>
+          <a:ln>
+            <a:noFill/>
+          </a:ln>
+        </p:spPr>
+        <p:style>
+          <a:lnRef idx="2">
+            <a:schemeClr val="accent1">
+              <a:shade val="15000"/>
+            </a:schemeClr>
+          </a:lnRef>
+          <a:fillRef idx="1">
+            <a:schemeClr val="accent1"/>
+          </a:fillRef>
+          <a:effectRef idx="0">
+            <a:schemeClr val="accent1"/>
+          </a:effectRef>
+          <a:fontRef idx="minor">
+            <a:schemeClr val="lt1"/>
+          </a:fontRef>
+        </p:style>
+        <p:txBody>
+          <a:bodyPr rtlCol="0" anchor="ctr"/>
+          <a:lstStyle/>
+          <a:p>
+            <a:pPr algn="ctr"/>
+            <a:endParaRPr lang="ko-KR" altLang="en-US"/>
+          </a:p>
+        </p:txBody>
+      </p:sp>
+      <p:sp>
+        <p:nvSpPr>
+          <p:cNvPr id="10" name="직사각형 9">
+            <a:extLst>
+              <a:ext uri="{FF2B5EF4-FFF2-40B4-BE49-F238E27FC236}">
+                <a16:creationId xmlns:a16="http://schemas.microsoft.com/office/drawing/2014/main" id="{CC5A836E-214F-958C-B8DB-1811E632B5EC}"/>
+              </a:ext>
+            </a:extLst>
+          </p:cNvPr>
+          <p:cNvSpPr/>
+          <p:nvPr/>
+        </p:nvSpPr>
+        <p:spPr>
+          <a:xfrm>
+            <a:off x="11589844" y="-495300"/>
+            <a:ext cx="3327400" cy="889653"/>
+          </a:xfrm>
+          <a:prstGeom prst="rect">
+            <a:avLst/>
+          </a:prstGeom>
+          <a:solidFill>
+            <a:srgbClr val="1A5319"/>
+          </a:solidFill>
+          <a:ln>
+            <a:noFill/>
+          </a:ln>
+        </p:spPr>
+        <p:style>
+          <a:lnRef idx="2">
+            <a:schemeClr val="accent1">
+              <a:shade val="15000"/>
+            </a:schemeClr>
+          </a:lnRef>
+          <a:fillRef idx="1">
+            <a:schemeClr val="accent1"/>
+          </a:fillRef>
+          <a:effectRef idx="0">
+            <a:schemeClr val="accent1"/>
+          </a:effectRef>
+          <a:fontRef idx="minor">
+            <a:schemeClr val="lt1"/>
+          </a:fontRef>
+        </p:style>
+        <p:txBody>
+          <a:bodyPr rtlCol="0" anchor="ctr"/>
+          <a:lstStyle/>
+          <a:p>
+            <a:pPr algn="ctr"/>
+            <a:endParaRPr lang="ko-KR" altLang="en-US"/>
           </a:p>
         </p:txBody>
       </p:sp>
     </p:spTree>
     <p:extLst>
       <p:ext uri="{BB962C8B-B14F-4D97-AF65-F5344CB8AC3E}">
-        <p14:creationId xmlns:p14="http://schemas.microsoft.com/office/powerpoint/2010/main" val="3024926048"/>
+        <p14:creationId xmlns:p14="http://schemas.microsoft.com/office/powerpoint/2010/main" val="3834249452"/>
       </p:ext>
     </p:extLst>
   </p:cSld>
